--- a/docs/competition/AgentForge-赛道B.pptx
+++ b/docs/competition/AgentForge-赛道B.pptx
@@ -13,6 +13,7 @@
     <p:sldId id="261" r:id="rId12"/>
     <p:sldId id="262" r:id="rId13"/>
     <p:sldId id="263" r:id="rId14"/>
+    <p:sldId id="264" r:id="rId15"/>
   </p:sldIdLst>
   <p:sldSz cx="12191695" cy="6858000" type="screen4x3"/>
   <p:notesSz cx="6858000" cy="9144000"/>
@@ -4137,7 +4138,7 @@
                 </a:solidFill>
                 <a:latin typeface="Microsoft YaHei"/>
               </a:rPr>
-              <a:t>2 / 8</a:t>
+              <a:t>2 / 9</a:t>
             </a:r>
           </a:p>
         </p:txBody>
@@ -4247,7 +4248,7 @@
                 </a:solidFill>
                 <a:latin typeface="Microsoft YaHei"/>
               </a:rPr>
-              <a:t>根因</a:t>
+              <a:t>实跑产物</a:t>
             </a:r>
           </a:p>
         </p:txBody>
@@ -4295,7 +4296,7 @@
                 </a:solidFill>
                 <a:latin typeface="Microsoft YaHei"/>
               </a:rPr>
-              <a:t>不是模型不行，是系统在让角色「盲写」</a:t>
+              <a:t>先看东西：一个 AI 写出来、真的能跑的系统</a:t>
             </a:r>
           </a:p>
         </p:txBody>
@@ -4343,7 +4344,7 @@
                 </a:solidFill>
                 <a:latin typeface="Microsoft YaHei"/>
               </a:rPr>
-              <a:t>30 次调用、113 万 token，而每次调用的输入恒定在 10.6k</a:t>
+              <a:t>demo/coffeebreak/ · 20 个 TypeScript 源文件 · 零第三方依赖（不装任何包就能启动）</a:t>
             </a:r>
           </a:p>
         </p:txBody>
@@ -4383,96 +4384,103 @@
           </a:fontRef>
         </p:style>
       </p:cxnSp>
-      <p:cxnSp>
-        <p:nvCxnSpPr>
-          <p:cNvPr id="7" name="Connector 6"/>
-          <p:cNvCxnSpPr/>
-          <p:nvPr/>
-        </p:nvCxnSpPr>
-        <p:spPr>
-          <a:xfrm>
-            <a:off x="685800" y="3657599"/>
-            <a:ext cx="5577840" cy="0"/>
-          </a:xfrm>
-          <a:prstGeom prst="line">
-            <a:avLst/>
-          </a:prstGeom>
-          <a:ln>
+      <p:pic>
+        <p:nvPicPr>
+          <p:cNvPr id="7" name="Picture 6" descr="cb-6-ui-home.png"/>
+          <p:cNvPicPr>
+            <a:picLocks noChangeAspect="1"/>
+          </p:cNvPicPr>
+          <p:nvPr/>
+        </p:nvPicPr>
+        <p:blipFill>
+          <a:blip r:embed="rId2"/>
+          <a:stretch>
+            <a:fillRect/>
+          </a:stretch>
+        </p:blipFill>
+        <p:spPr>
+          <a:xfrm>
+            <a:off x="640080" y="1810512"/>
+            <a:ext cx="6446520" cy="4029075"/>
+          </a:xfrm>
+          <a:prstGeom prst="rect">
+            <a:avLst/>
+          </a:prstGeom>
+        </p:spPr>
+      </p:pic>
+      <p:sp>
+        <p:nvSpPr>
+          <p:cNvPr id="8" name="TextBox 7"/>
+          <p:cNvSpPr txBox="1"/>
+          <p:nvPr/>
+        </p:nvSpPr>
+        <p:spPr>
+          <a:xfrm>
+            <a:off x="640080" y="5912739"/>
+            <a:ext cx="6446520" cy="274320"/>
+          </a:xfrm>
+          <a:prstGeom prst="rect">
+            <a:avLst/>
+          </a:prstGeom>
+          <a:noFill/>
+        </p:spPr>
+        <p:txBody>
+          <a:bodyPr wrap="square" lIns="0" rIns="0" tIns="0" bIns="0">
+            <a:spAutoFit/>
+          </a:bodyPr>
+          <a:lstStyle/>
+          <a:p>
+            <a:pPr algn="l">
+              <a:spcBef>
+                <a:spcPts val="0"/>
+              </a:spcBef>
+            </a:pPr>
+            <a:r>
+              <a:rPr sz="1000" b="0">
+                <a:solidFill>
+                  <a:srgbClr val="9AA7B4"/>
+                </a:solidFill>
+                <a:latin typeface="Microsoft YaHei"/>
+              </a:rPr>
+              <a:t/>
+            </a:r>
+            <a:r>
+              <a:rPr sz="1000" b="0">
+                <a:solidFill>
+                  <a:srgbClr val="9AA7B4"/>
+                </a:solidFill>
+                <a:latin typeface="Microsoft YaHei"/>
+              </a:rPr>
+              <a:t>真实界面截图（headless 浏览器，1440×900）· 用 admin / admin123 登录后可见全部功能</a:t>
+            </a:r>
+          </a:p>
+        </p:txBody>
+      </p:sp>
+      <p:sp>
+        <p:nvSpPr>
+          <p:cNvPr id="9" name="Rounded Rectangle 8"/>
+          <p:cNvSpPr/>
+          <p:nvPr/>
+        </p:nvSpPr>
+        <p:spPr>
+          <a:xfrm>
+            <a:off x="7360920" y="1783080"/>
+            <a:ext cx="4187952" cy="1298448"/>
+          </a:xfrm>
+          <a:prstGeom prst="roundRect">
+            <a:avLst>
+              <a:gd name="adj" fmla="val 6000"/>
+            </a:avLst>
+          </a:prstGeom>
+          <a:solidFill>
+            <a:srgbClr val="182028"/>
+          </a:solidFill>
+          <a:ln w="12700">
             <a:solidFill>
-              <a:srgbClr val="2B3642"/>
+              <a:srgbClr val="35C48F"/>
             </a:solidFill>
           </a:ln>
-        </p:spPr>
-        <p:style>
-          <a:lnRef idx="2">
-            <a:schemeClr val="accent1"/>
-          </a:lnRef>
-          <a:fillRef idx="0">
-            <a:schemeClr val="accent1"/>
-          </a:fillRef>
-          <a:effectRef idx="1">
-            <a:schemeClr val="accent1"/>
-          </a:effectRef>
-          <a:fontRef idx="minor">
-            <a:schemeClr val="tx1"/>
-          </a:fontRef>
-        </p:style>
-      </p:cxnSp>
-      <p:cxnSp>
-        <p:nvCxnSpPr>
-          <p:cNvPr id="8" name="Connector 7"/>
-          <p:cNvCxnSpPr/>
-          <p:nvPr/>
-        </p:nvCxnSpPr>
-        <p:spPr>
-          <a:xfrm>
-            <a:off x="685800" y="1874519"/>
-            <a:ext cx="0" cy="1783080"/>
-          </a:xfrm>
-          <a:prstGeom prst="line">
-            <a:avLst/>
-          </a:prstGeom>
-          <a:ln>
-            <a:solidFill>
-              <a:srgbClr val="2B3642"/>
-            </a:solidFill>
-          </a:ln>
-        </p:spPr>
-        <p:style>
-          <a:lnRef idx="2">
-            <a:schemeClr val="accent1"/>
-          </a:lnRef>
-          <a:fillRef idx="0">
-            <a:schemeClr val="accent1"/>
-          </a:fillRef>
-          <a:effectRef idx="1">
-            <a:schemeClr val="accent1"/>
-          </a:effectRef>
-          <a:fontRef idx="minor">
-            <a:schemeClr val="tx1"/>
-          </a:fontRef>
-        </p:style>
-      </p:cxnSp>
-      <p:sp>
-        <p:nvSpPr>
-          <p:cNvPr id="9" name="Oval 8"/>
-          <p:cNvSpPr/>
-          <p:nvPr/>
-        </p:nvSpPr>
-        <p:spPr>
-          <a:xfrm>
-            <a:off x="920877" y="2634184"/>
-            <a:ext cx="87630" cy="87630"/>
-          </a:xfrm>
-          <a:prstGeom prst="ellipse">
-            <a:avLst/>
-          </a:prstGeom>
-          <a:solidFill>
-            <a:srgbClr val="E86A5C"/>
-          </a:solidFill>
-          <a:ln>
-            <a:noFill/>
-          </a:ln>
+          <a:effectLst/>
         </p:spPr>
         <p:style>
           <a:lnRef idx="1">
@@ -4489,539 +4497,84 @@
           </a:fontRef>
         </p:style>
         <p:txBody>
-          <a:bodyPr rtlCol="0" anchor="ctr"/>
-          <a:lstStyle/>
-          <a:p>
-            <a:pPr algn="ctr"/>
-          </a:p>
-        </p:txBody>
-      </p:sp>
-      <p:sp>
-        <p:nvSpPr>
-          <p:cNvPr id="10" name="Oval 9"/>
+          <a:bodyPr rtlCol="0" anchor="ctr" wrap="square" lIns="137160" tIns="91440"/>
+          <a:lstStyle/>
+          <a:p>
+            <a:pPr algn="l">
+              <a:spcBef>
+                <a:spcPts val="0"/>
+              </a:spcBef>
+            </a:pPr>
+            <a:r>
+              <a:rPr sz="1200" b="1">
+                <a:solidFill>
+                  <a:srgbClr val="35C48F"/>
+                </a:solidFill>
+                <a:latin typeface="Microsoft YaHei"/>
+              </a:rPr>
+              <a:t>可复核的验收结果</a:t>
+            </a:r>
+          </a:p>
+          <a:p>
+            <a:pPr algn="l">
+              <a:spcBef>
+                <a:spcPts val="800"/>
+              </a:spcBef>
+            </a:pPr>
+            <a:r>
+              <a:rPr sz="1400" b="1">
+                <a:solidFill>
+                  <a:srgbClr val="EAF0F6"/>
+                </a:solidFill>
+                <a:latin typeface="Microsoft YaHei"/>
+              </a:rPr>
+              <a:t>22 / 22   单元 + 集成测试</a:t>
+            </a:r>
+          </a:p>
+          <a:p>
+            <a:pPr algn="l">
+              <a:spcBef>
+                <a:spcPts val="400"/>
+              </a:spcBef>
+            </a:pPr>
+            <a:r>
+              <a:rPr sz="1400" b="1">
+                <a:solidFill>
+                  <a:srgbClr val="EAF0F6"/>
+                </a:solidFill>
+                <a:latin typeface="Microsoft YaHei"/>
+              </a:rPr>
+              <a:t>33 / 33   真实 HTTP 端到端验收</a:t>
+            </a:r>
+          </a:p>
+          <a:p>
+            <a:pPr algn="l">
+              <a:spcBef>
+                <a:spcPts val="400"/>
+              </a:spcBef>
+            </a:pPr>
+            <a:r>
+              <a:rPr sz="1200" b="0">
+                <a:solidFill>
+                  <a:srgbClr val="EAF0F6"/>
+                </a:solidFill>
+                <a:latin typeface="Microsoft YaHei"/>
+              </a:rPr>
+              <a:t>18 / 18   任务书要求的论文属性（建→读回）</a:t>
+            </a:r>
+          </a:p>
+        </p:txBody>
+      </p:sp>
+      <p:sp>
+        <p:nvSpPr>
+          <p:cNvPr id="10" name="Rounded Rectangle 9"/>
           <p:cNvSpPr/>
           <p:nvPr/>
         </p:nvSpPr>
         <p:spPr>
           <a:xfrm>
-            <a:off x="1701774" y="2572561"/>
-            <a:ext cx="87630" cy="87630"/>
-          </a:xfrm>
-          <a:prstGeom prst="ellipse">
-            <a:avLst/>
-          </a:prstGeom>
-          <a:solidFill>
-            <a:srgbClr val="E86A5C"/>
-          </a:solidFill>
-          <a:ln>
-            <a:noFill/>
-          </a:ln>
-        </p:spPr>
-        <p:style>
-          <a:lnRef idx="1">
-            <a:schemeClr val="accent1"/>
-          </a:lnRef>
-          <a:fillRef idx="3">
-            <a:schemeClr val="accent1"/>
-          </a:fillRef>
-          <a:effectRef idx="2">
-            <a:schemeClr val="accent1"/>
-          </a:effectRef>
-          <a:fontRef idx="minor">
-            <a:schemeClr val="lt1"/>
-          </a:fontRef>
-        </p:style>
-        <p:txBody>
-          <a:bodyPr rtlCol="0" anchor="ctr"/>
-          <a:lstStyle/>
-          <a:p>
-            <a:pPr algn="ctr"/>
-          </a:p>
-        </p:txBody>
-      </p:sp>
-      <p:cxnSp>
-        <p:nvCxnSpPr>
-          <p:cNvPr id="11" name="Connector 10"/>
-          <p:cNvCxnSpPr/>
-          <p:nvPr/>
-        </p:nvCxnSpPr>
-        <p:spPr>
-          <a:xfrm flipV="1">
-            <a:off x="964692" y="2616376"/>
-            <a:ext cx="780897" cy="61623"/>
-          </a:xfrm>
-          <a:prstGeom prst="line">
-            <a:avLst/>
-          </a:prstGeom>
-          <a:ln w="15875">
-            <a:solidFill>
-              <a:srgbClr val="E86A5C"/>
-            </a:solidFill>
-          </a:ln>
-        </p:spPr>
-        <p:style>
-          <a:lnRef idx="2">
-            <a:schemeClr val="accent1"/>
-          </a:lnRef>
-          <a:fillRef idx="0">
-            <a:schemeClr val="accent1"/>
-          </a:fillRef>
-          <a:effectRef idx="1">
-            <a:schemeClr val="accent1"/>
-          </a:effectRef>
-          <a:fontRef idx="minor">
-            <a:schemeClr val="tx1"/>
-          </a:fontRef>
-        </p:style>
-      </p:cxnSp>
-      <p:sp>
-        <p:nvSpPr>
-          <p:cNvPr id="12" name="Oval 11"/>
-          <p:cNvSpPr/>
-          <p:nvPr/>
-        </p:nvSpPr>
-        <p:spPr>
-          <a:xfrm>
-            <a:off x="2482672" y="2424667"/>
-            <a:ext cx="87630" cy="87630"/>
-          </a:xfrm>
-          <a:prstGeom prst="ellipse">
-            <a:avLst/>
-          </a:prstGeom>
-          <a:solidFill>
-            <a:srgbClr val="E86A5C"/>
-          </a:solidFill>
-          <a:ln>
-            <a:noFill/>
-          </a:ln>
-        </p:spPr>
-        <p:style>
-          <a:lnRef idx="1">
-            <a:schemeClr val="accent1"/>
-          </a:lnRef>
-          <a:fillRef idx="3">
-            <a:schemeClr val="accent1"/>
-          </a:fillRef>
-          <a:effectRef idx="2">
-            <a:schemeClr val="accent1"/>
-          </a:effectRef>
-          <a:fontRef idx="minor">
-            <a:schemeClr val="lt1"/>
-          </a:fontRef>
-        </p:style>
-        <p:txBody>
-          <a:bodyPr rtlCol="0" anchor="ctr"/>
-          <a:lstStyle/>
-          <a:p>
-            <a:pPr algn="ctr"/>
-          </a:p>
-        </p:txBody>
-      </p:sp>
-      <p:cxnSp>
-        <p:nvCxnSpPr>
-          <p:cNvPr id="13" name="Connector 12"/>
-          <p:cNvCxnSpPr/>
-          <p:nvPr/>
-        </p:nvCxnSpPr>
-        <p:spPr>
-          <a:xfrm flipV="1">
-            <a:off x="1745589" y="2468482"/>
-            <a:ext cx="780898" cy="147894"/>
-          </a:xfrm>
-          <a:prstGeom prst="line">
-            <a:avLst/>
-          </a:prstGeom>
-          <a:ln w="15875">
-            <a:solidFill>
-              <a:srgbClr val="E86A5C"/>
-            </a:solidFill>
-          </a:ln>
-        </p:spPr>
-        <p:style>
-          <a:lnRef idx="2">
-            <a:schemeClr val="accent1"/>
-          </a:lnRef>
-          <a:fillRef idx="0">
-            <a:schemeClr val="accent1"/>
-          </a:fillRef>
-          <a:effectRef idx="1">
-            <a:schemeClr val="accent1"/>
-          </a:effectRef>
-          <a:fontRef idx="minor">
-            <a:schemeClr val="tx1"/>
-          </a:fontRef>
-        </p:style>
-      </p:cxnSp>
-      <p:sp>
-        <p:nvSpPr>
-          <p:cNvPr id="14" name="Oval 13"/>
-          <p:cNvSpPr/>
-          <p:nvPr/>
-        </p:nvSpPr>
-        <p:spPr>
-          <a:xfrm>
-            <a:off x="3263569" y="2671157"/>
-            <a:ext cx="87630" cy="87630"/>
-          </a:xfrm>
-          <a:prstGeom prst="ellipse">
-            <a:avLst/>
-          </a:prstGeom>
-          <a:solidFill>
-            <a:srgbClr val="E86A5C"/>
-          </a:solidFill>
-          <a:ln>
-            <a:noFill/>
-          </a:ln>
-        </p:spPr>
-        <p:style>
-          <a:lnRef idx="1">
-            <a:schemeClr val="accent1"/>
-          </a:lnRef>
-          <a:fillRef idx="3">
-            <a:schemeClr val="accent1"/>
-          </a:fillRef>
-          <a:effectRef idx="2">
-            <a:schemeClr val="accent1"/>
-          </a:effectRef>
-          <a:fontRef idx="minor">
-            <a:schemeClr val="lt1"/>
-          </a:fontRef>
-        </p:style>
-        <p:txBody>
-          <a:bodyPr rtlCol="0" anchor="ctr"/>
-          <a:lstStyle/>
-          <a:p>
-            <a:pPr algn="ctr"/>
-          </a:p>
-        </p:txBody>
-      </p:sp>
-      <p:cxnSp>
-        <p:nvCxnSpPr>
-          <p:cNvPr id="15" name="Connector 14"/>
-          <p:cNvCxnSpPr/>
-          <p:nvPr/>
-        </p:nvCxnSpPr>
-        <p:spPr>
-          <a:xfrm>
-            <a:off x="2526487" y="2468482"/>
-            <a:ext cx="780897" cy="246490"/>
-          </a:xfrm>
-          <a:prstGeom prst="line">
-            <a:avLst/>
-          </a:prstGeom>
-          <a:ln w="15875">
-            <a:solidFill>
-              <a:srgbClr val="E86A5C"/>
-            </a:solidFill>
-          </a:ln>
-        </p:spPr>
-        <p:style>
-          <a:lnRef idx="2">
-            <a:schemeClr val="accent1"/>
-          </a:lnRef>
-          <a:fillRef idx="0">
-            <a:schemeClr val="accent1"/>
-          </a:fillRef>
-          <a:effectRef idx="1">
-            <a:schemeClr val="accent1"/>
-          </a:effectRef>
-          <a:fontRef idx="minor">
-            <a:schemeClr val="tx1"/>
-          </a:fontRef>
-        </p:style>
-      </p:cxnSp>
-      <p:sp>
-        <p:nvSpPr>
-          <p:cNvPr id="16" name="Oval 15"/>
-          <p:cNvSpPr/>
-          <p:nvPr/>
-        </p:nvSpPr>
-        <p:spPr>
-          <a:xfrm>
-            <a:off x="4044467" y="2658833"/>
-            <a:ext cx="87630" cy="87630"/>
-          </a:xfrm>
-          <a:prstGeom prst="ellipse">
-            <a:avLst/>
-          </a:prstGeom>
-          <a:solidFill>
-            <a:srgbClr val="E86A5C"/>
-          </a:solidFill>
-          <a:ln>
-            <a:noFill/>
-          </a:ln>
-        </p:spPr>
-        <p:style>
-          <a:lnRef idx="1">
-            <a:schemeClr val="accent1"/>
-          </a:lnRef>
-          <a:fillRef idx="3">
-            <a:schemeClr val="accent1"/>
-          </a:fillRef>
-          <a:effectRef idx="2">
-            <a:schemeClr val="accent1"/>
-          </a:effectRef>
-          <a:fontRef idx="minor">
-            <a:schemeClr val="lt1"/>
-          </a:fontRef>
-        </p:style>
-        <p:txBody>
-          <a:bodyPr rtlCol="0" anchor="ctr"/>
-          <a:lstStyle/>
-          <a:p>
-            <a:pPr algn="ctr"/>
-          </a:p>
-        </p:txBody>
-      </p:sp>
-      <p:cxnSp>
-        <p:nvCxnSpPr>
-          <p:cNvPr id="17" name="Connector 16"/>
-          <p:cNvCxnSpPr/>
-          <p:nvPr/>
-        </p:nvCxnSpPr>
-        <p:spPr>
-          <a:xfrm flipV="1">
-            <a:off x="3307384" y="2702648"/>
-            <a:ext cx="780898" cy="12324"/>
-          </a:xfrm>
-          <a:prstGeom prst="line">
-            <a:avLst/>
-          </a:prstGeom>
-          <a:ln w="15875">
-            <a:solidFill>
-              <a:srgbClr val="E86A5C"/>
-            </a:solidFill>
-          </a:ln>
-        </p:spPr>
-        <p:style>
-          <a:lnRef idx="2">
-            <a:schemeClr val="accent1"/>
-          </a:lnRef>
-          <a:fillRef idx="0">
-            <a:schemeClr val="accent1"/>
-          </a:fillRef>
-          <a:effectRef idx="1">
-            <a:schemeClr val="accent1"/>
-          </a:effectRef>
-          <a:fontRef idx="minor">
-            <a:schemeClr val="tx1"/>
-          </a:fontRef>
-        </p:style>
-      </p:cxnSp>
-      <p:sp>
-        <p:nvSpPr>
-          <p:cNvPr id="18" name="Oval 17"/>
-          <p:cNvSpPr/>
-          <p:nvPr/>
-        </p:nvSpPr>
-        <p:spPr>
-          <a:xfrm>
-            <a:off x="4825365" y="2695806"/>
-            <a:ext cx="87630" cy="87630"/>
-          </a:xfrm>
-          <a:prstGeom prst="ellipse">
-            <a:avLst/>
-          </a:prstGeom>
-          <a:solidFill>
-            <a:srgbClr val="E86A5C"/>
-          </a:solidFill>
-          <a:ln>
-            <a:noFill/>
-          </a:ln>
-        </p:spPr>
-        <p:style>
-          <a:lnRef idx="1">
-            <a:schemeClr val="accent1"/>
-          </a:lnRef>
-          <a:fillRef idx="3">
-            <a:schemeClr val="accent1"/>
-          </a:fillRef>
-          <a:effectRef idx="2">
-            <a:schemeClr val="accent1"/>
-          </a:effectRef>
-          <a:fontRef idx="minor">
-            <a:schemeClr val="lt1"/>
-          </a:fontRef>
-        </p:style>
-        <p:txBody>
-          <a:bodyPr rtlCol="0" anchor="ctr"/>
-          <a:lstStyle/>
-          <a:p>
-            <a:pPr algn="ctr"/>
-          </a:p>
-        </p:txBody>
-      </p:sp>
-      <p:cxnSp>
-        <p:nvCxnSpPr>
-          <p:cNvPr id="19" name="Connector 18"/>
-          <p:cNvCxnSpPr/>
-          <p:nvPr/>
-        </p:nvCxnSpPr>
-        <p:spPr>
-          <a:xfrm>
-            <a:off x="4088282" y="2702648"/>
-            <a:ext cx="780898" cy="36973"/>
-          </a:xfrm>
-          <a:prstGeom prst="line">
-            <a:avLst/>
-          </a:prstGeom>
-          <a:ln w="15875">
-            <a:solidFill>
-              <a:srgbClr val="E86A5C"/>
-            </a:solidFill>
-          </a:ln>
-        </p:spPr>
-        <p:style>
-          <a:lnRef idx="2">
-            <a:schemeClr val="accent1"/>
-          </a:lnRef>
-          <a:fillRef idx="0">
-            <a:schemeClr val="accent1"/>
-          </a:fillRef>
-          <a:effectRef idx="1">
-            <a:schemeClr val="accent1"/>
-          </a:effectRef>
-          <a:fontRef idx="minor">
-            <a:schemeClr val="tx1"/>
-          </a:fontRef>
-        </p:style>
-      </p:cxnSp>
-      <p:sp>
-        <p:nvSpPr>
-          <p:cNvPr id="20" name="Oval 19"/>
-          <p:cNvSpPr/>
-          <p:nvPr/>
-        </p:nvSpPr>
-        <p:spPr>
-          <a:xfrm>
-            <a:off x="5662041" y="2178176"/>
-            <a:ext cx="87630" cy="87630"/>
-          </a:xfrm>
-          <a:prstGeom prst="ellipse">
-            <a:avLst/>
-          </a:prstGeom>
-          <a:solidFill>
-            <a:srgbClr val="E86A5C"/>
-          </a:solidFill>
-          <a:ln>
-            <a:noFill/>
-          </a:ln>
-        </p:spPr>
-        <p:style>
-          <a:lnRef idx="1">
-            <a:schemeClr val="accent1"/>
-          </a:lnRef>
-          <a:fillRef idx="3">
-            <a:schemeClr val="accent1"/>
-          </a:fillRef>
-          <a:effectRef idx="2">
-            <a:schemeClr val="accent1"/>
-          </a:effectRef>
-          <a:fontRef idx="minor">
-            <a:schemeClr val="lt1"/>
-          </a:fontRef>
-        </p:style>
-        <p:txBody>
-          <a:bodyPr rtlCol="0" anchor="ctr"/>
-          <a:lstStyle/>
-          <a:p>
-            <a:pPr algn="ctr"/>
-          </a:p>
-        </p:txBody>
-      </p:sp>
-      <p:cxnSp>
-        <p:nvCxnSpPr>
-          <p:cNvPr id="21" name="Connector 20"/>
-          <p:cNvCxnSpPr/>
-          <p:nvPr/>
-        </p:nvCxnSpPr>
-        <p:spPr>
-          <a:xfrm flipV="1">
-            <a:off x="4869180" y="2221991"/>
-            <a:ext cx="836676" cy="517630"/>
-          </a:xfrm>
-          <a:prstGeom prst="line">
-            <a:avLst/>
-          </a:prstGeom>
-          <a:ln w="15875">
-            <a:solidFill>
-              <a:srgbClr val="E86A5C"/>
-            </a:solidFill>
-          </a:ln>
-        </p:spPr>
-        <p:style>
-          <a:lnRef idx="2">
-            <a:schemeClr val="accent1"/>
-          </a:lnRef>
-          <a:fillRef idx="0">
-            <a:schemeClr val="accent1"/>
-          </a:fillRef>
-          <a:effectRef idx="1">
-            <a:schemeClr val="accent1"/>
-          </a:effectRef>
-          <a:fontRef idx="minor">
-            <a:schemeClr val="tx1"/>
-          </a:fontRef>
-        </p:style>
-      </p:cxnSp>
-      <p:sp>
-        <p:nvSpPr>
-          <p:cNvPr id="22" name="TextBox 21"/>
-          <p:cNvSpPr txBox="1"/>
-          <p:nvPr/>
-        </p:nvSpPr>
-        <p:spPr>
-          <a:xfrm>
-            <a:off x="685800" y="3785615"/>
-            <a:ext cx="5486400" cy="274320"/>
-          </a:xfrm>
-          <a:prstGeom prst="rect">
-            <a:avLst/>
-          </a:prstGeom>
-          <a:noFill/>
-        </p:spPr>
-        <p:txBody>
-          <a:bodyPr wrap="square" lIns="0" rIns="0" tIns="0" bIns="0">
-            <a:spAutoFit/>
-          </a:bodyPr>
-          <a:lstStyle/>
-          <a:p>
-            <a:pPr algn="l">
-              <a:spcBef>
-                <a:spcPts val="0"/>
-              </a:spcBef>
-            </a:pPr>
-            <a:r>
-              <a:rPr sz="1100" b="0">
-                <a:solidFill>
-                  <a:srgbClr val="9AA7B4"/>
-                </a:solidFill>
-                <a:latin typeface="Microsoft YaHei"/>
-              </a:rPr>
-              <a:t/>
-            </a:r>
-            <a:r>
-              <a:rPr sz="1100" b="0">
-                <a:solidFill>
-                  <a:srgbClr val="9AA7B4"/>
-                </a:solidFill>
-                <a:latin typeface="Microsoft YaHei"/>
-              </a:rPr>
-              <a:t>横轴：项目规模 0 → 4,443 行   ｜   纵轴：输入 token ≈ 10.6k（几乎不动）</a:t>
-            </a:r>
-          </a:p>
-        </p:txBody>
-      </p:sp>
-      <p:sp>
-        <p:nvSpPr>
-          <p:cNvPr id="23" name="Rounded Rectangle 22"/>
-          <p:cNvSpPr/>
-          <p:nvPr/>
-        </p:nvSpPr>
-        <p:spPr>
-          <a:xfrm>
-            <a:off x="6446520" y="1874519"/>
-            <a:ext cx="5102352" cy="713232"/>
+            <a:off x="7360920" y="3172968"/>
+            <a:ext cx="4187952" cy="2011680"/>
           </a:xfrm>
           <a:prstGeom prst="roundRect">
             <a:avLst>
@@ -5053,33 +4606,7 @@
           </a:fontRef>
         </p:style>
         <p:txBody>
-          <a:bodyPr rtlCol="0" anchor="ctr"/>
-          <a:lstStyle/>
-          <a:p>
-            <a:pPr algn="ctr"/>
-          </a:p>
-        </p:txBody>
-      </p:sp>
-      <p:sp>
-        <p:nvSpPr>
-          <p:cNvPr id="24" name="TextBox 23"/>
-          <p:cNvSpPr txBox="1"/>
-          <p:nvPr/>
-        </p:nvSpPr>
-        <p:spPr>
-          <a:xfrm>
-            <a:off x="6629400" y="1965959"/>
-            <a:ext cx="1234440" cy="502920"/>
-          </a:xfrm>
-          <a:prstGeom prst="rect">
-            <a:avLst/>
-          </a:prstGeom>
-          <a:noFill/>
-        </p:spPr>
-        <p:txBody>
-          <a:bodyPr wrap="square" lIns="0" rIns="0" tIns="0" bIns="0">
-            <a:spAutoFit/>
-          </a:bodyPr>
+          <a:bodyPr rtlCol="0" anchor="ctr" wrap="square" lIns="137160" tIns="91440"/>
           <a:lstStyle/>
           <a:p>
             <a:pPr algn="l">
@@ -5088,51 +4615,19 @@
               </a:spcBef>
             </a:pPr>
             <a:r>
-              <a:rPr sz="2400" b="1">
-                <a:solidFill>
-                  <a:srgbClr val="E86A5C"/>
-                </a:solidFill>
-                <a:latin typeface="Microsoft YaHei"/>
-              </a:rPr>
-              <a:t/>
-            </a:r>
-            <a:r>
-              <a:rPr sz="2400" b="1">
-                <a:solidFill>
-                  <a:srgbClr val="E86A5C"/>
-                </a:solidFill>
-                <a:latin typeface="Microsoft YaHei"/>
-              </a:rPr>
-              <a:t>95%</a:t>
-            </a:r>
-          </a:p>
-        </p:txBody>
-      </p:sp>
-      <p:sp>
-        <p:nvSpPr>
-          <p:cNvPr id="25" name="TextBox 24"/>
-          <p:cNvSpPr txBox="1"/>
-          <p:nvPr/>
-        </p:nvSpPr>
-        <p:spPr>
-          <a:xfrm>
-            <a:off x="7882127" y="2029967"/>
-            <a:ext cx="3520440" cy="502920"/>
-          </a:xfrm>
-          <a:prstGeom prst="rect">
-            <a:avLst/>
-          </a:prstGeom>
-          <a:noFill/>
-        </p:spPr>
-        <p:txBody>
-          <a:bodyPr wrap="square" lIns="0" rIns="0" tIns="0" bIns="0">
-            <a:spAutoFit/>
-          </a:bodyPr>
-          <a:lstStyle/>
-          <a:p>
-            <a:pPr algn="l">
-              <a:spcBef>
-                <a:spcPts val="0"/>
+              <a:rPr sz="1200" b="1">
+                <a:solidFill>
+                  <a:srgbClr val="35C48F"/>
+                </a:solidFill>
+                <a:latin typeface="Microsoft YaHei"/>
+              </a:rPr>
+              <a:t>演示动线（3 分钟够走完）</a:t>
+            </a:r>
+          </a:p>
+          <a:p>
+            <a:pPr algn="l">
+              <a:spcBef>
+                <a:spcPts val="800"/>
               </a:spcBef>
             </a:pPr>
             <a:r>
@@ -5142,8 +4637,15 @@
                 </a:solidFill>
                 <a:latin typeface="Microsoft YaHei"/>
               </a:rPr>
-              <a:t/>
-            </a:r>
+              <a:t>① 注册 → 登录（Bearer 会话）</a:t>
+            </a:r>
+          </a:p>
+          <a:p>
+            <a:pPr algn="l">
+              <a:spcBef>
+                <a:spcPts val="400"/>
+              </a:spcBef>
+            </a:pPr>
             <a:r>
               <a:rPr sz="1100" b="0">
                 <a:solidFill>
@@ -5151,21 +4653,69 @@
                 </a:solidFill>
                 <a:latin typeface="Microsoft YaHei"/>
               </a:rPr>
-              <a:t>24,000 字符的上下文被「需求 + PRD + 任务图」吃掉</a:t>
-            </a:r>
-          </a:p>
-        </p:txBody>
-      </p:sp>
-      <p:sp>
-        <p:nvSpPr>
-          <p:cNvPr id="26" name="Rounded Rectangle 25"/>
+              <a:t>② 管理员建论文，18 项属性逐项落库</a:t>
+            </a:r>
+          </a:p>
+          <a:p>
+            <a:pPr algn="l">
+              <a:spcBef>
+                <a:spcPts val="400"/>
+              </a:spcBef>
+            </a:pPr>
+            <a:r>
+              <a:rPr sz="1100" b="0">
+                <a:solidFill>
+                  <a:srgbClr val="EAF0F6"/>
+                </a:solidFill>
+                <a:latin typeface="Microsoft YaHei"/>
+              </a:rPr>
+              <a:t>③ 评论 + 对评论的回复（父子结构）</a:t>
+            </a:r>
+          </a:p>
+          <a:p>
+            <a:pPr algn="l">
+              <a:spcBef>
+                <a:spcPts val="400"/>
+              </a:spcBef>
+            </a:pPr>
+            <a:r>
+              <a:rPr sz="1100" b="0">
+                <a:solidFill>
+                  <a:srgbClr val="EAF0F6"/>
+                </a:solidFill>
+                <a:latin typeface="Microsoft YaHei"/>
+              </a:rPr>
+              <a:t>④ 加好友 / 关注 / 设兴趣 → 推荐重排</a:t>
+            </a:r>
+          </a:p>
+          <a:p>
+            <a:pPr algn="l">
+              <a:spcBef>
+                <a:spcPts val="400"/>
+              </a:spcBef>
+            </a:pPr>
+            <a:r>
+              <a:rPr sz="1100" b="0">
+                <a:solidFill>
+                  <a:srgbClr val="EAF0F6"/>
+                </a:solidFill>
+                <a:latin typeface="Microsoft YaHei"/>
+              </a:rPr>
+              <a:t>⑤ 普通用户删论文 → 403（权限边界）</a:t>
+            </a:r>
+          </a:p>
+        </p:txBody>
+      </p:sp>
+      <p:sp>
+        <p:nvSpPr>
+          <p:cNvPr id="11" name="Rounded Rectangle 10"/>
           <p:cNvSpPr/>
           <p:nvPr/>
         </p:nvSpPr>
         <p:spPr>
           <a:xfrm>
-            <a:off x="6446520" y="2697479"/>
-            <a:ext cx="5102352" cy="713232"/>
+            <a:off x="7360920" y="5285232"/>
+            <a:ext cx="4187952" cy="960120"/>
           </a:xfrm>
           <a:prstGeom prst="roundRect">
             <a:avLst>
@@ -5197,23 +4747,52 @@
           </a:fontRef>
         </p:style>
         <p:txBody>
-          <a:bodyPr rtlCol="0" anchor="ctr"/>
-          <a:lstStyle/>
-          <a:p>
-            <a:pPr algn="ctr"/>
-          </a:p>
-        </p:txBody>
-      </p:sp>
-      <p:sp>
-        <p:nvSpPr>
-          <p:cNvPr id="27" name="TextBox 26"/>
+          <a:bodyPr rtlCol="0" anchor="ctr" wrap="square" lIns="137160"/>
+          <a:lstStyle/>
+          <a:p>
+            <a:pPr algn="l">
+              <a:spcBef>
+                <a:spcPts val="0"/>
+              </a:spcBef>
+            </a:pPr>
+            <a:r>
+              <a:rPr sz="1100" b="1">
+                <a:solidFill>
+                  <a:srgbClr val="35C48F"/>
+                </a:solidFill>
+                <a:latin typeface="Microsoft YaHei"/>
+              </a:rPr>
+              <a:t>生成成本</a:t>
+            </a:r>
+          </a:p>
+          <a:p>
+            <a:pPr algn="l">
+              <a:spcBef>
+                <a:spcPts val="300"/>
+              </a:spcBef>
+            </a:pPr>
+            <a:r>
+              <a:rPr sz="1000" b="0">
+                <a:solidFill>
+                  <a:srgbClr val="9AA7B4"/>
+                </a:solidFill>
+                <a:latin typeface="Microsoft YaHei"/>
+              </a:rPr>
+              <a:t>40–75 分钟 · 约 100 万 token · ≈ $1–2（吞吐 ~200 tok/s）</a:t>
+            </a:r>
+          </a:p>
+        </p:txBody>
+      </p:sp>
+      <p:sp>
+        <p:nvSpPr>
+          <p:cNvPr id="12" name="TextBox 11"/>
           <p:cNvSpPr txBox="1"/>
           <p:nvPr/>
         </p:nvSpPr>
         <p:spPr>
           <a:xfrm>
-            <a:off x="6629400" y="2788919"/>
-            <a:ext cx="1234440" cy="502920"/>
+            <a:off x="640080" y="6355080"/>
+            <a:ext cx="7315200" cy="274320"/>
           </a:xfrm>
           <a:prstGeom prst="rect">
             <a:avLst/>
@@ -5232,36 +4811,36 @@
               </a:spcBef>
             </a:pPr>
             <a:r>
-              <a:rPr sz="2400" b="1">
-                <a:solidFill>
-                  <a:srgbClr val="E86A5C"/>
+              <a:rPr sz="1000" b="0">
+                <a:solidFill>
+                  <a:srgbClr val="9AA7B4"/>
                 </a:solidFill>
                 <a:latin typeface="Microsoft YaHei"/>
               </a:rPr>
               <a:t/>
             </a:r>
             <a:r>
-              <a:rPr sz="2400" b="1">
-                <a:solidFill>
-                  <a:srgbClr val="E86A5C"/>
-                </a:solidFill>
-                <a:latin typeface="Microsoft YaHei"/>
-              </a:rPr>
-              <a:t>4.2%</a:t>
-            </a:r>
-          </a:p>
-        </p:txBody>
-      </p:sp>
-      <p:sp>
-        <p:nvSpPr>
-          <p:cNvPr id="28" name="TextBox 27"/>
+              <a:rPr sz="1000" b="0">
+                <a:solidFill>
+                  <a:srgbClr val="9AA7B4"/>
+                </a:solidFill>
+                <a:latin typeface="Microsoft YaHei"/>
+              </a:rPr>
+              <a:t>AgentForge · 多角色 AI 研发引擎 · 赛道 B</a:t>
+            </a:r>
+          </a:p>
+        </p:txBody>
+      </p:sp>
+      <p:sp>
+        <p:nvSpPr>
+          <p:cNvPr id="13" name="TextBox 12"/>
           <p:cNvSpPr txBox="1"/>
           <p:nvPr/>
         </p:nvSpPr>
         <p:spPr>
           <a:xfrm>
-            <a:off x="7882127" y="2852927"/>
-            <a:ext cx="3520440" cy="502920"/>
+            <a:off x="10607040" y="6355080"/>
+            <a:ext cx="914400" cy="274320"/>
           </a:xfrm>
           <a:prstGeom prst="rect">
             <a:avLst/>
@@ -5280,339 +4859,22 @@
               </a:spcBef>
             </a:pPr>
             <a:r>
-              <a:rPr sz="1100" b="0">
-                <a:solidFill>
-                  <a:srgbClr val="EAF0F6"/>
+              <a:rPr sz="1000" b="0">
+                <a:solidFill>
+                  <a:srgbClr val="9AA7B4"/>
                 </a:solidFill>
                 <a:latin typeface="Microsoft YaHei"/>
               </a:rPr>
               <a:t/>
             </a:r>
             <a:r>
-              <a:rPr sz="1100" b="0">
-                <a:solidFill>
-                  <a:srgbClr val="EAF0F6"/>
-                </a:solidFill>
-                <a:latin typeface="Microsoft YaHei"/>
-              </a:rPr>
-              <a:t>54 万字符的工件里，真正送达模型的只有这么多</a:t>
-            </a:r>
-          </a:p>
-        </p:txBody>
-      </p:sp>
-      <p:sp>
-        <p:nvSpPr>
-          <p:cNvPr id="29" name="Rounded Rectangle 28"/>
-          <p:cNvSpPr/>
-          <p:nvPr/>
-        </p:nvSpPr>
-        <p:spPr>
-          <a:xfrm>
-            <a:off x="6446520" y="3520439"/>
-            <a:ext cx="5102352" cy="713232"/>
-          </a:xfrm>
-          <a:prstGeom prst="roundRect">
-            <a:avLst>
-              <a:gd name="adj" fmla="val 6000"/>
-            </a:avLst>
-          </a:prstGeom>
-          <a:solidFill>
-            <a:srgbClr val="182028"/>
-          </a:solidFill>
-          <a:ln w="12700">
-            <a:solidFill>
-              <a:srgbClr val="2B3642"/>
-            </a:solidFill>
-          </a:ln>
-          <a:effectLst/>
-        </p:spPr>
-        <p:style>
-          <a:lnRef idx="1">
-            <a:schemeClr val="accent1"/>
-          </a:lnRef>
-          <a:fillRef idx="3">
-            <a:schemeClr val="accent1"/>
-          </a:fillRef>
-          <a:effectRef idx="2">
-            <a:schemeClr val="accent1"/>
-          </a:effectRef>
-          <a:fontRef idx="minor">
-            <a:schemeClr val="lt1"/>
-          </a:fontRef>
-        </p:style>
-        <p:txBody>
-          <a:bodyPr rtlCol="0" anchor="ctr"/>
-          <a:lstStyle/>
-          <a:p>
-            <a:pPr algn="ctr"/>
-          </a:p>
-        </p:txBody>
-      </p:sp>
-      <p:sp>
-        <p:nvSpPr>
-          <p:cNvPr id="30" name="TextBox 29"/>
-          <p:cNvSpPr txBox="1"/>
-          <p:nvPr/>
-        </p:nvSpPr>
-        <p:spPr>
-          <a:xfrm>
-            <a:off x="6629400" y="3611879"/>
-            <a:ext cx="1234440" cy="502920"/>
-          </a:xfrm>
-          <a:prstGeom prst="rect">
-            <a:avLst/>
-          </a:prstGeom>
-          <a:noFill/>
-        </p:spPr>
-        <p:txBody>
-          <a:bodyPr wrap="square" lIns="0" rIns="0" tIns="0" bIns="0">
-            <a:spAutoFit/>
-          </a:bodyPr>
-          <a:lstStyle/>
-          <a:p>
-            <a:pPr algn="l">
-              <a:spcBef>
-                <a:spcPts val="0"/>
-              </a:spcBef>
-            </a:pPr>
-            <a:r>
-              <a:rPr sz="2400" b="1">
-                <a:solidFill>
-                  <a:srgbClr val="F2B544"/>
-                </a:solidFill>
-                <a:latin typeface="Microsoft YaHei"/>
-              </a:rPr>
-              <a:t/>
-            </a:r>
-            <a:r>
-              <a:rPr sz="2400" b="1">
-                <a:solidFill>
-                  <a:srgbClr val="F2B544"/>
-                </a:solidFill>
-                <a:latin typeface="Microsoft YaHei"/>
-              </a:rPr>
-              <a:t>2.2 : 1</a:t>
-            </a:r>
-          </a:p>
-        </p:txBody>
-      </p:sp>
-      <p:sp>
-        <p:nvSpPr>
-          <p:cNvPr id="31" name="TextBox 30"/>
-          <p:cNvSpPr txBox="1"/>
-          <p:nvPr/>
-        </p:nvSpPr>
-        <p:spPr>
-          <a:xfrm>
-            <a:off x="7882127" y="3675887"/>
-            <a:ext cx="3520440" cy="502920"/>
-          </a:xfrm>
-          <a:prstGeom prst="rect">
-            <a:avLst/>
-          </a:prstGeom>
-          <a:noFill/>
-        </p:spPr>
-        <p:txBody>
-          <a:bodyPr wrap="square" lIns="0" rIns="0" tIns="0" bIns="0">
-            <a:spAutoFit/>
-          </a:bodyPr>
-          <a:lstStyle/>
-          <a:p>
-            <a:pPr algn="l">
-              <a:spcBef>
-                <a:spcPts val="0"/>
-              </a:spcBef>
-            </a:pPr>
-            <a:r>
-              <a:rPr sz="1100" b="0">
-                <a:solidFill>
-                  <a:srgbClr val="EAF0F6"/>
-                </a:solidFill>
-                <a:latin typeface="Microsoft YaHei"/>
-              </a:rPr>
-              <a:t/>
-            </a:r>
-            <a:r>
-              <a:rPr sz="1100" b="0">
-                <a:solidFill>
-                  <a:srgbClr val="EAF0F6"/>
-                </a:solidFill>
-                <a:latin typeface="Microsoft YaHei"/>
-              </a:rPr>
-              <a:t>输出 / 输入 —— 每次都在从零重写，而不是修改</a:t>
-            </a:r>
-          </a:p>
-        </p:txBody>
-      </p:sp>
-      <p:sp>
-        <p:nvSpPr>
-          <p:cNvPr id="32" name="Rounded Rectangle 31"/>
-          <p:cNvSpPr/>
-          <p:nvPr/>
-        </p:nvSpPr>
-        <p:spPr>
-          <a:xfrm>
-            <a:off x="640080" y="4526280"/>
-            <a:ext cx="10908792" cy="1371600"/>
-          </a:xfrm>
-          <a:prstGeom prst="roundRect">
-            <a:avLst>
-              <a:gd name="adj" fmla="val 6000"/>
-            </a:avLst>
-          </a:prstGeom>
-          <a:solidFill>
-            <a:srgbClr val="182028"/>
-          </a:solidFill>
-          <a:ln w="12700">
-            <a:solidFill>
-              <a:srgbClr val="2B3642"/>
-            </a:solidFill>
-          </a:ln>
-          <a:effectLst/>
-        </p:spPr>
-        <p:style>
-          <a:lnRef idx="1">
-            <a:schemeClr val="accent1"/>
-          </a:lnRef>
-          <a:fillRef idx="3">
-            <a:schemeClr val="accent1"/>
-          </a:fillRef>
-          <a:effectRef idx="2">
-            <a:schemeClr val="accent1"/>
-          </a:effectRef>
-          <a:fontRef idx="minor">
-            <a:schemeClr val="lt1"/>
-          </a:fontRef>
-        </p:style>
-        <p:txBody>
-          <a:bodyPr rtlCol="0" anchor="ctr" wrap="square" lIns="182880"/>
-          <a:lstStyle/>
-          <a:p>
-            <a:pPr algn="l">
-              <a:spcBef>
-                <a:spcPts val="0"/>
-              </a:spcBef>
-            </a:pPr>
-            <a:r>
-              <a:rPr sz="1200" b="1">
-                <a:solidFill>
-                  <a:srgbClr val="35C48F"/>
-                </a:solidFill>
-                <a:latin typeface="Microsoft YaHei"/>
-              </a:rPr>
-              <a:t>关键判据</a:t>
-            </a:r>
-          </a:p>
-          <a:p>
-            <a:pPr algn="l">
-              <a:spcBef>
-                <a:spcPts val="400"/>
-              </a:spcBef>
-            </a:pPr>
-            <a:r>
-              <a:rPr sz="1300" b="0">
-                <a:solidFill>
-                  <a:srgbClr val="EAF0F6"/>
-                </a:solidFill>
-                <a:latin typeface="Microsoft YaHei"/>
-              </a:rPr>
-              <a:t>契约（60,720 字符）整件丢失 → 后端照 PRD 散文自己发明接口；别人的代码一件没进 → 不可能接线；测试报告一件没进 → 连修 6 轮不收敛。</a:t>
-            </a:r>
-          </a:p>
-        </p:txBody>
-      </p:sp>
-      <p:sp>
-        <p:nvSpPr>
-          <p:cNvPr id="33" name="TextBox 32"/>
-          <p:cNvSpPr txBox="1"/>
-          <p:nvPr/>
-        </p:nvSpPr>
-        <p:spPr>
-          <a:xfrm>
-            <a:off x="640080" y="6355080"/>
-            <a:ext cx="7315200" cy="274320"/>
-          </a:xfrm>
-          <a:prstGeom prst="rect">
-            <a:avLst/>
-          </a:prstGeom>
-          <a:noFill/>
-        </p:spPr>
-        <p:txBody>
-          <a:bodyPr wrap="square" lIns="0" rIns="0" tIns="0" bIns="0">
-            <a:spAutoFit/>
-          </a:bodyPr>
-          <a:lstStyle/>
-          <a:p>
-            <a:pPr algn="l">
-              <a:spcBef>
-                <a:spcPts val="0"/>
-              </a:spcBef>
-            </a:pPr>
-            <a:r>
               <a:rPr sz="1000" b="0">
                 <a:solidFill>
                   <a:srgbClr val="9AA7B4"/>
                 </a:solidFill>
                 <a:latin typeface="Microsoft YaHei"/>
               </a:rPr>
-              <a:t/>
-            </a:r>
-            <a:r>
-              <a:rPr sz="1000" b="0">
-                <a:solidFill>
-                  <a:srgbClr val="9AA7B4"/>
-                </a:solidFill>
-                <a:latin typeface="Microsoft YaHei"/>
-              </a:rPr>
-              <a:t>AgentForge · 多角色 AI 研发引擎 · 赛道 B</a:t>
-            </a:r>
-          </a:p>
-        </p:txBody>
-      </p:sp>
-      <p:sp>
-        <p:nvSpPr>
-          <p:cNvPr id="34" name="TextBox 33"/>
-          <p:cNvSpPr txBox="1"/>
-          <p:nvPr/>
-        </p:nvSpPr>
-        <p:spPr>
-          <a:xfrm>
-            <a:off x="10607040" y="6355080"/>
-            <a:ext cx="914400" cy="274320"/>
-          </a:xfrm>
-          <a:prstGeom prst="rect">
-            <a:avLst/>
-          </a:prstGeom>
-          <a:noFill/>
-        </p:spPr>
-        <p:txBody>
-          <a:bodyPr wrap="square" lIns="0" rIns="0" tIns="0" bIns="0">
-            <a:spAutoFit/>
-          </a:bodyPr>
-          <a:lstStyle/>
-          <a:p>
-            <a:pPr algn="l">
-              <a:spcBef>
-                <a:spcPts val="0"/>
-              </a:spcBef>
-            </a:pPr>
-            <a:r>
-              <a:rPr sz="1000" b="0">
-                <a:solidFill>
-                  <a:srgbClr val="9AA7B4"/>
-                </a:solidFill>
-                <a:latin typeface="Microsoft YaHei"/>
-              </a:rPr>
-              <a:t/>
-            </a:r>
-            <a:r>
-              <a:rPr sz="1000" b="0">
-                <a:solidFill>
-                  <a:srgbClr val="9AA7B4"/>
-                </a:solidFill>
-                <a:latin typeface="Microsoft YaHei"/>
-              </a:rPr>
-              <a:t>3 / 8</a:t>
+              <a:t>3 / 9</a:t>
             </a:r>
           </a:p>
         </p:txBody>
@@ -5722,7 +4984,7 @@
                 </a:solidFill>
                 <a:latin typeface="Microsoft YaHei"/>
               </a:rPr>
-              <a:t>架构</a:t>
+              <a:t>根因</a:t>
             </a:r>
           </a:p>
         </p:txBody>
@@ -5770,14 +5032,62 @@
                 </a:solidFill>
                 <a:latin typeface="Microsoft YaHei"/>
               </a:rPr>
-              <a:t>编排内核零 LLM，判断不可能被模型带偏</a:t>
+              <a:t>不是模型不行，是系统在让角色「盲写」</a:t>
+            </a:r>
+          </a:p>
+        </p:txBody>
+      </p:sp>
+      <p:sp>
+        <p:nvSpPr>
+          <p:cNvPr id="5" name="TextBox 4"/>
+          <p:cNvSpPr txBox="1"/>
+          <p:nvPr/>
+        </p:nvSpPr>
+        <p:spPr>
+          <a:xfrm>
+            <a:off x="640080" y="1481328"/>
+            <a:ext cx="10881360" cy="457200"/>
+          </a:xfrm>
+          <a:prstGeom prst="rect">
+            <a:avLst/>
+          </a:prstGeom>
+          <a:noFill/>
+        </p:spPr>
+        <p:txBody>
+          <a:bodyPr wrap="square" lIns="0" rIns="0" tIns="0" bIns="0">
+            <a:spAutoFit/>
+          </a:bodyPr>
+          <a:lstStyle/>
+          <a:p>
+            <a:pPr algn="l">
+              <a:spcBef>
+                <a:spcPts val="0"/>
+              </a:spcBef>
+            </a:pPr>
+            <a:r>
+              <a:rPr sz="1400" b="0">
+                <a:solidFill>
+                  <a:srgbClr val="9AA7B4"/>
+                </a:solidFill>
+                <a:latin typeface="Microsoft YaHei"/>
+              </a:rPr>
+              <a:t/>
+            </a:r>
+            <a:r>
+              <a:rPr sz="1400" b="0">
+                <a:solidFill>
+                  <a:srgbClr val="9AA7B4"/>
+                </a:solidFill>
+                <a:latin typeface="Microsoft YaHei"/>
+              </a:rPr>
+              <a:t>30 次调用、113 万 token，而每次调用的输入恒定在 10.6k</a:t>
             </a:r>
           </a:p>
         </p:txBody>
       </p:sp>
       <p:cxnSp>
         <p:nvCxnSpPr>
-          <p:cNvPr id="5" name="Connector 4"/>
+          <p:cNvPr id="6" name="Connector 5"/>
           <p:cNvCxnSpPr/>
           <p:nvPr/>
         </p:nvCxnSpPr>
@@ -5810,16 +5120,645 @@
           </a:fontRef>
         </p:style>
       </p:cxnSp>
-      <p:sp>
-        <p:nvSpPr>
-          <p:cNvPr id="6" name="Rounded Rectangle 5"/>
+      <p:cxnSp>
+        <p:nvCxnSpPr>
+          <p:cNvPr id="7" name="Connector 6"/>
+          <p:cNvCxnSpPr/>
+          <p:nvPr/>
+        </p:nvCxnSpPr>
+        <p:spPr>
+          <a:xfrm>
+            <a:off x="685800" y="3657599"/>
+            <a:ext cx="5577840" cy="0"/>
+          </a:xfrm>
+          <a:prstGeom prst="line">
+            <a:avLst/>
+          </a:prstGeom>
+          <a:ln>
+            <a:solidFill>
+              <a:srgbClr val="2B3642"/>
+            </a:solidFill>
+          </a:ln>
+        </p:spPr>
+        <p:style>
+          <a:lnRef idx="2">
+            <a:schemeClr val="accent1"/>
+          </a:lnRef>
+          <a:fillRef idx="0">
+            <a:schemeClr val="accent1"/>
+          </a:fillRef>
+          <a:effectRef idx="1">
+            <a:schemeClr val="accent1"/>
+          </a:effectRef>
+          <a:fontRef idx="minor">
+            <a:schemeClr val="tx1"/>
+          </a:fontRef>
+        </p:style>
+      </p:cxnSp>
+      <p:cxnSp>
+        <p:nvCxnSpPr>
+          <p:cNvPr id="8" name="Connector 7"/>
+          <p:cNvCxnSpPr/>
+          <p:nvPr/>
+        </p:nvCxnSpPr>
+        <p:spPr>
+          <a:xfrm>
+            <a:off x="685800" y="1874519"/>
+            <a:ext cx="0" cy="1783080"/>
+          </a:xfrm>
+          <a:prstGeom prst="line">
+            <a:avLst/>
+          </a:prstGeom>
+          <a:ln>
+            <a:solidFill>
+              <a:srgbClr val="2B3642"/>
+            </a:solidFill>
+          </a:ln>
+        </p:spPr>
+        <p:style>
+          <a:lnRef idx="2">
+            <a:schemeClr val="accent1"/>
+          </a:lnRef>
+          <a:fillRef idx="0">
+            <a:schemeClr val="accent1"/>
+          </a:fillRef>
+          <a:effectRef idx="1">
+            <a:schemeClr val="accent1"/>
+          </a:effectRef>
+          <a:fontRef idx="minor">
+            <a:schemeClr val="tx1"/>
+          </a:fontRef>
+        </p:style>
+      </p:cxnSp>
+      <p:sp>
+        <p:nvSpPr>
+          <p:cNvPr id="9" name="Oval 8"/>
           <p:cNvSpPr/>
           <p:nvPr/>
         </p:nvSpPr>
         <p:spPr>
           <a:xfrm>
-            <a:off x="640080" y="1783080"/>
-            <a:ext cx="8275320" cy="713232"/>
+            <a:off x="920877" y="2634184"/>
+            <a:ext cx="87630" cy="87630"/>
+          </a:xfrm>
+          <a:prstGeom prst="ellipse">
+            <a:avLst/>
+          </a:prstGeom>
+          <a:solidFill>
+            <a:srgbClr val="E86A5C"/>
+          </a:solidFill>
+          <a:ln>
+            <a:noFill/>
+          </a:ln>
+        </p:spPr>
+        <p:style>
+          <a:lnRef idx="1">
+            <a:schemeClr val="accent1"/>
+          </a:lnRef>
+          <a:fillRef idx="3">
+            <a:schemeClr val="accent1"/>
+          </a:fillRef>
+          <a:effectRef idx="2">
+            <a:schemeClr val="accent1"/>
+          </a:effectRef>
+          <a:fontRef idx="minor">
+            <a:schemeClr val="lt1"/>
+          </a:fontRef>
+        </p:style>
+        <p:txBody>
+          <a:bodyPr rtlCol="0" anchor="ctr"/>
+          <a:lstStyle/>
+          <a:p>
+            <a:pPr algn="ctr"/>
+          </a:p>
+        </p:txBody>
+      </p:sp>
+      <p:sp>
+        <p:nvSpPr>
+          <p:cNvPr id="10" name="Oval 9"/>
+          <p:cNvSpPr/>
+          <p:nvPr/>
+        </p:nvSpPr>
+        <p:spPr>
+          <a:xfrm>
+            <a:off x="1701774" y="2572561"/>
+            <a:ext cx="87630" cy="87630"/>
+          </a:xfrm>
+          <a:prstGeom prst="ellipse">
+            <a:avLst/>
+          </a:prstGeom>
+          <a:solidFill>
+            <a:srgbClr val="E86A5C"/>
+          </a:solidFill>
+          <a:ln>
+            <a:noFill/>
+          </a:ln>
+        </p:spPr>
+        <p:style>
+          <a:lnRef idx="1">
+            <a:schemeClr val="accent1"/>
+          </a:lnRef>
+          <a:fillRef idx="3">
+            <a:schemeClr val="accent1"/>
+          </a:fillRef>
+          <a:effectRef idx="2">
+            <a:schemeClr val="accent1"/>
+          </a:effectRef>
+          <a:fontRef idx="minor">
+            <a:schemeClr val="lt1"/>
+          </a:fontRef>
+        </p:style>
+        <p:txBody>
+          <a:bodyPr rtlCol="0" anchor="ctr"/>
+          <a:lstStyle/>
+          <a:p>
+            <a:pPr algn="ctr"/>
+          </a:p>
+        </p:txBody>
+      </p:sp>
+      <p:cxnSp>
+        <p:nvCxnSpPr>
+          <p:cNvPr id="11" name="Connector 10"/>
+          <p:cNvCxnSpPr/>
+          <p:nvPr/>
+        </p:nvCxnSpPr>
+        <p:spPr>
+          <a:xfrm flipV="1">
+            <a:off x="964692" y="2616376"/>
+            <a:ext cx="780897" cy="61623"/>
+          </a:xfrm>
+          <a:prstGeom prst="line">
+            <a:avLst/>
+          </a:prstGeom>
+          <a:ln w="15875">
+            <a:solidFill>
+              <a:srgbClr val="E86A5C"/>
+            </a:solidFill>
+          </a:ln>
+        </p:spPr>
+        <p:style>
+          <a:lnRef idx="2">
+            <a:schemeClr val="accent1"/>
+          </a:lnRef>
+          <a:fillRef idx="0">
+            <a:schemeClr val="accent1"/>
+          </a:fillRef>
+          <a:effectRef idx="1">
+            <a:schemeClr val="accent1"/>
+          </a:effectRef>
+          <a:fontRef idx="minor">
+            <a:schemeClr val="tx1"/>
+          </a:fontRef>
+        </p:style>
+      </p:cxnSp>
+      <p:sp>
+        <p:nvSpPr>
+          <p:cNvPr id="12" name="Oval 11"/>
+          <p:cNvSpPr/>
+          <p:nvPr/>
+        </p:nvSpPr>
+        <p:spPr>
+          <a:xfrm>
+            <a:off x="2482672" y="2424667"/>
+            <a:ext cx="87630" cy="87630"/>
+          </a:xfrm>
+          <a:prstGeom prst="ellipse">
+            <a:avLst/>
+          </a:prstGeom>
+          <a:solidFill>
+            <a:srgbClr val="E86A5C"/>
+          </a:solidFill>
+          <a:ln>
+            <a:noFill/>
+          </a:ln>
+        </p:spPr>
+        <p:style>
+          <a:lnRef idx="1">
+            <a:schemeClr val="accent1"/>
+          </a:lnRef>
+          <a:fillRef idx="3">
+            <a:schemeClr val="accent1"/>
+          </a:fillRef>
+          <a:effectRef idx="2">
+            <a:schemeClr val="accent1"/>
+          </a:effectRef>
+          <a:fontRef idx="minor">
+            <a:schemeClr val="lt1"/>
+          </a:fontRef>
+        </p:style>
+        <p:txBody>
+          <a:bodyPr rtlCol="0" anchor="ctr"/>
+          <a:lstStyle/>
+          <a:p>
+            <a:pPr algn="ctr"/>
+          </a:p>
+        </p:txBody>
+      </p:sp>
+      <p:cxnSp>
+        <p:nvCxnSpPr>
+          <p:cNvPr id="13" name="Connector 12"/>
+          <p:cNvCxnSpPr/>
+          <p:nvPr/>
+        </p:nvCxnSpPr>
+        <p:spPr>
+          <a:xfrm flipV="1">
+            <a:off x="1745589" y="2468482"/>
+            <a:ext cx="780898" cy="147894"/>
+          </a:xfrm>
+          <a:prstGeom prst="line">
+            <a:avLst/>
+          </a:prstGeom>
+          <a:ln w="15875">
+            <a:solidFill>
+              <a:srgbClr val="E86A5C"/>
+            </a:solidFill>
+          </a:ln>
+        </p:spPr>
+        <p:style>
+          <a:lnRef idx="2">
+            <a:schemeClr val="accent1"/>
+          </a:lnRef>
+          <a:fillRef idx="0">
+            <a:schemeClr val="accent1"/>
+          </a:fillRef>
+          <a:effectRef idx="1">
+            <a:schemeClr val="accent1"/>
+          </a:effectRef>
+          <a:fontRef idx="minor">
+            <a:schemeClr val="tx1"/>
+          </a:fontRef>
+        </p:style>
+      </p:cxnSp>
+      <p:sp>
+        <p:nvSpPr>
+          <p:cNvPr id="14" name="Oval 13"/>
+          <p:cNvSpPr/>
+          <p:nvPr/>
+        </p:nvSpPr>
+        <p:spPr>
+          <a:xfrm>
+            <a:off x="3263569" y="2671157"/>
+            <a:ext cx="87630" cy="87630"/>
+          </a:xfrm>
+          <a:prstGeom prst="ellipse">
+            <a:avLst/>
+          </a:prstGeom>
+          <a:solidFill>
+            <a:srgbClr val="E86A5C"/>
+          </a:solidFill>
+          <a:ln>
+            <a:noFill/>
+          </a:ln>
+        </p:spPr>
+        <p:style>
+          <a:lnRef idx="1">
+            <a:schemeClr val="accent1"/>
+          </a:lnRef>
+          <a:fillRef idx="3">
+            <a:schemeClr val="accent1"/>
+          </a:fillRef>
+          <a:effectRef idx="2">
+            <a:schemeClr val="accent1"/>
+          </a:effectRef>
+          <a:fontRef idx="minor">
+            <a:schemeClr val="lt1"/>
+          </a:fontRef>
+        </p:style>
+        <p:txBody>
+          <a:bodyPr rtlCol="0" anchor="ctr"/>
+          <a:lstStyle/>
+          <a:p>
+            <a:pPr algn="ctr"/>
+          </a:p>
+        </p:txBody>
+      </p:sp>
+      <p:cxnSp>
+        <p:nvCxnSpPr>
+          <p:cNvPr id="15" name="Connector 14"/>
+          <p:cNvCxnSpPr/>
+          <p:nvPr/>
+        </p:nvCxnSpPr>
+        <p:spPr>
+          <a:xfrm>
+            <a:off x="2526487" y="2468482"/>
+            <a:ext cx="780897" cy="246490"/>
+          </a:xfrm>
+          <a:prstGeom prst="line">
+            <a:avLst/>
+          </a:prstGeom>
+          <a:ln w="15875">
+            <a:solidFill>
+              <a:srgbClr val="E86A5C"/>
+            </a:solidFill>
+          </a:ln>
+        </p:spPr>
+        <p:style>
+          <a:lnRef idx="2">
+            <a:schemeClr val="accent1"/>
+          </a:lnRef>
+          <a:fillRef idx="0">
+            <a:schemeClr val="accent1"/>
+          </a:fillRef>
+          <a:effectRef idx="1">
+            <a:schemeClr val="accent1"/>
+          </a:effectRef>
+          <a:fontRef idx="minor">
+            <a:schemeClr val="tx1"/>
+          </a:fontRef>
+        </p:style>
+      </p:cxnSp>
+      <p:sp>
+        <p:nvSpPr>
+          <p:cNvPr id="16" name="Oval 15"/>
+          <p:cNvSpPr/>
+          <p:nvPr/>
+        </p:nvSpPr>
+        <p:spPr>
+          <a:xfrm>
+            <a:off x="4044467" y="2658833"/>
+            <a:ext cx="87630" cy="87630"/>
+          </a:xfrm>
+          <a:prstGeom prst="ellipse">
+            <a:avLst/>
+          </a:prstGeom>
+          <a:solidFill>
+            <a:srgbClr val="E86A5C"/>
+          </a:solidFill>
+          <a:ln>
+            <a:noFill/>
+          </a:ln>
+        </p:spPr>
+        <p:style>
+          <a:lnRef idx="1">
+            <a:schemeClr val="accent1"/>
+          </a:lnRef>
+          <a:fillRef idx="3">
+            <a:schemeClr val="accent1"/>
+          </a:fillRef>
+          <a:effectRef idx="2">
+            <a:schemeClr val="accent1"/>
+          </a:effectRef>
+          <a:fontRef idx="minor">
+            <a:schemeClr val="lt1"/>
+          </a:fontRef>
+        </p:style>
+        <p:txBody>
+          <a:bodyPr rtlCol="0" anchor="ctr"/>
+          <a:lstStyle/>
+          <a:p>
+            <a:pPr algn="ctr"/>
+          </a:p>
+        </p:txBody>
+      </p:sp>
+      <p:cxnSp>
+        <p:nvCxnSpPr>
+          <p:cNvPr id="17" name="Connector 16"/>
+          <p:cNvCxnSpPr/>
+          <p:nvPr/>
+        </p:nvCxnSpPr>
+        <p:spPr>
+          <a:xfrm flipV="1">
+            <a:off x="3307384" y="2702648"/>
+            <a:ext cx="780898" cy="12324"/>
+          </a:xfrm>
+          <a:prstGeom prst="line">
+            <a:avLst/>
+          </a:prstGeom>
+          <a:ln w="15875">
+            <a:solidFill>
+              <a:srgbClr val="E86A5C"/>
+            </a:solidFill>
+          </a:ln>
+        </p:spPr>
+        <p:style>
+          <a:lnRef idx="2">
+            <a:schemeClr val="accent1"/>
+          </a:lnRef>
+          <a:fillRef idx="0">
+            <a:schemeClr val="accent1"/>
+          </a:fillRef>
+          <a:effectRef idx="1">
+            <a:schemeClr val="accent1"/>
+          </a:effectRef>
+          <a:fontRef idx="minor">
+            <a:schemeClr val="tx1"/>
+          </a:fontRef>
+        </p:style>
+      </p:cxnSp>
+      <p:sp>
+        <p:nvSpPr>
+          <p:cNvPr id="18" name="Oval 17"/>
+          <p:cNvSpPr/>
+          <p:nvPr/>
+        </p:nvSpPr>
+        <p:spPr>
+          <a:xfrm>
+            <a:off x="4825365" y="2695806"/>
+            <a:ext cx="87630" cy="87630"/>
+          </a:xfrm>
+          <a:prstGeom prst="ellipse">
+            <a:avLst/>
+          </a:prstGeom>
+          <a:solidFill>
+            <a:srgbClr val="E86A5C"/>
+          </a:solidFill>
+          <a:ln>
+            <a:noFill/>
+          </a:ln>
+        </p:spPr>
+        <p:style>
+          <a:lnRef idx="1">
+            <a:schemeClr val="accent1"/>
+          </a:lnRef>
+          <a:fillRef idx="3">
+            <a:schemeClr val="accent1"/>
+          </a:fillRef>
+          <a:effectRef idx="2">
+            <a:schemeClr val="accent1"/>
+          </a:effectRef>
+          <a:fontRef idx="minor">
+            <a:schemeClr val="lt1"/>
+          </a:fontRef>
+        </p:style>
+        <p:txBody>
+          <a:bodyPr rtlCol="0" anchor="ctr"/>
+          <a:lstStyle/>
+          <a:p>
+            <a:pPr algn="ctr"/>
+          </a:p>
+        </p:txBody>
+      </p:sp>
+      <p:cxnSp>
+        <p:nvCxnSpPr>
+          <p:cNvPr id="19" name="Connector 18"/>
+          <p:cNvCxnSpPr/>
+          <p:nvPr/>
+        </p:nvCxnSpPr>
+        <p:spPr>
+          <a:xfrm>
+            <a:off x="4088282" y="2702648"/>
+            <a:ext cx="780898" cy="36973"/>
+          </a:xfrm>
+          <a:prstGeom prst="line">
+            <a:avLst/>
+          </a:prstGeom>
+          <a:ln w="15875">
+            <a:solidFill>
+              <a:srgbClr val="E86A5C"/>
+            </a:solidFill>
+          </a:ln>
+        </p:spPr>
+        <p:style>
+          <a:lnRef idx="2">
+            <a:schemeClr val="accent1"/>
+          </a:lnRef>
+          <a:fillRef idx="0">
+            <a:schemeClr val="accent1"/>
+          </a:fillRef>
+          <a:effectRef idx="1">
+            <a:schemeClr val="accent1"/>
+          </a:effectRef>
+          <a:fontRef idx="minor">
+            <a:schemeClr val="tx1"/>
+          </a:fontRef>
+        </p:style>
+      </p:cxnSp>
+      <p:sp>
+        <p:nvSpPr>
+          <p:cNvPr id="20" name="Oval 19"/>
+          <p:cNvSpPr/>
+          <p:nvPr/>
+        </p:nvSpPr>
+        <p:spPr>
+          <a:xfrm>
+            <a:off x="5662041" y="2178176"/>
+            <a:ext cx="87630" cy="87630"/>
+          </a:xfrm>
+          <a:prstGeom prst="ellipse">
+            <a:avLst/>
+          </a:prstGeom>
+          <a:solidFill>
+            <a:srgbClr val="E86A5C"/>
+          </a:solidFill>
+          <a:ln>
+            <a:noFill/>
+          </a:ln>
+        </p:spPr>
+        <p:style>
+          <a:lnRef idx="1">
+            <a:schemeClr val="accent1"/>
+          </a:lnRef>
+          <a:fillRef idx="3">
+            <a:schemeClr val="accent1"/>
+          </a:fillRef>
+          <a:effectRef idx="2">
+            <a:schemeClr val="accent1"/>
+          </a:effectRef>
+          <a:fontRef idx="minor">
+            <a:schemeClr val="lt1"/>
+          </a:fontRef>
+        </p:style>
+        <p:txBody>
+          <a:bodyPr rtlCol="0" anchor="ctr"/>
+          <a:lstStyle/>
+          <a:p>
+            <a:pPr algn="ctr"/>
+          </a:p>
+        </p:txBody>
+      </p:sp>
+      <p:cxnSp>
+        <p:nvCxnSpPr>
+          <p:cNvPr id="21" name="Connector 20"/>
+          <p:cNvCxnSpPr/>
+          <p:nvPr/>
+        </p:nvCxnSpPr>
+        <p:spPr>
+          <a:xfrm flipV="1">
+            <a:off x="4869180" y="2221991"/>
+            <a:ext cx="836676" cy="517630"/>
+          </a:xfrm>
+          <a:prstGeom prst="line">
+            <a:avLst/>
+          </a:prstGeom>
+          <a:ln w="15875">
+            <a:solidFill>
+              <a:srgbClr val="E86A5C"/>
+            </a:solidFill>
+          </a:ln>
+        </p:spPr>
+        <p:style>
+          <a:lnRef idx="2">
+            <a:schemeClr val="accent1"/>
+          </a:lnRef>
+          <a:fillRef idx="0">
+            <a:schemeClr val="accent1"/>
+          </a:fillRef>
+          <a:effectRef idx="1">
+            <a:schemeClr val="accent1"/>
+          </a:effectRef>
+          <a:fontRef idx="minor">
+            <a:schemeClr val="tx1"/>
+          </a:fontRef>
+        </p:style>
+      </p:cxnSp>
+      <p:sp>
+        <p:nvSpPr>
+          <p:cNvPr id="22" name="TextBox 21"/>
+          <p:cNvSpPr txBox="1"/>
+          <p:nvPr/>
+        </p:nvSpPr>
+        <p:spPr>
+          <a:xfrm>
+            <a:off x="685800" y="3785615"/>
+            <a:ext cx="5486400" cy="274320"/>
+          </a:xfrm>
+          <a:prstGeom prst="rect">
+            <a:avLst/>
+          </a:prstGeom>
+          <a:noFill/>
+        </p:spPr>
+        <p:txBody>
+          <a:bodyPr wrap="square" lIns="0" rIns="0" tIns="0" bIns="0">
+            <a:spAutoFit/>
+          </a:bodyPr>
+          <a:lstStyle/>
+          <a:p>
+            <a:pPr algn="l">
+              <a:spcBef>
+                <a:spcPts val="0"/>
+              </a:spcBef>
+            </a:pPr>
+            <a:r>
+              <a:rPr sz="1100" b="0">
+                <a:solidFill>
+                  <a:srgbClr val="9AA7B4"/>
+                </a:solidFill>
+                <a:latin typeface="Microsoft YaHei"/>
+              </a:rPr>
+              <a:t/>
+            </a:r>
+            <a:r>
+              <a:rPr sz="1100" b="0">
+                <a:solidFill>
+                  <a:srgbClr val="9AA7B4"/>
+                </a:solidFill>
+                <a:latin typeface="Microsoft YaHei"/>
+              </a:rPr>
+              <a:t>横轴：项目规模 0 → 4,443 行   ｜   纵轴：输入 token ≈ 10.6k（几乎不动）</a:t>
+            </a:r>
+          </a:p>
+        </p:txBody>
+      </p:sp>
+      <p:sp>
+        <p:nvSpPr>
+          <p:cNvPr id="23" name="Rounded Rectangle 22"/>
+          <p:cNvSpPr/>
+          <p:nvPr/>
+        </p:nvSpPr>
+        <p:spPr>
+          <a:xfrm>
+            <a:off x="6446520" y="1874519"/>
+            <a:ext cx="5102352" cy="713232"/>
           </a:xfrm>
           <a:prstGeom prst="roundRect">
             <a:avLst>
@@ -5860,14 +5799,14 @@
       </p:sp>
       <p:sp>
         <p:nvSpPr>
-          <p:cNvPr id="7" name="TextBox 6"/>
+          <p:cNvPr id="24" name="TextBox 23"/>
           <p:cNvSpPr txBox="1"/>
           <p:nvPr/>
         </p:nvSpPr>
         <p:spPr>
           <a:xfrm>
-            <a:off x="841248" y="1956816"/>
-            <a:ext cx="1143000" cy="365760"/>
+            <a:off x="6629400" y="1965959"/>
+            <a:ext cx="1234440" cy="502920"/>
           </a:xfrm>
           <a:prstGeom prst="rect">
             <a:avLst/>
@@ -5886,36 +5825,36 @@
               </a:spcBef>
             </a:pPr>
             <a:r>
-              <a:rPr sz="1400" b="1">
-                <a:solidFill>
-                  <a:srgbClr val="9AA7B4"/>
+              <a:rPr sz="2400" b="1">
+                <a:solidFill>
+                  <a:srgbClr val="E86A5C"/>
                 </a:solidFill>
                 <a:latin typeface="Microsoft YaHei"/>
               </a:rPr>
               <a:t/>
             </a:r>
             <a:r>
-              <a:rPr sz="1400" b="1">
-                <a:solidFill>
-                  <a:srgbClr val="9AA7B4"/>
-                </a:solidFill>
-                <a:latin typeface="Microsoft YaHei"/>
-              </a:rPr>
-              <a:t>入口</a:t>
-            </a:r>
-          </a:p>
-        </p:txBody>
-      </p:sp>
-      <p:sp>
-        <p:nvSpPr>
-          <p:cNvPr id="8" name="TextBox 7"/>
+              <a:rPr sz="2400" b="1">
+                <a:solidFill>
+                  <a:srgbClr val="E86A5C"/>
+                </a:solidFill>
+                <a:latin typeface="Microsoft YaHei"/>
+              </a:rPr>
+              <a:t>95%</a:t>
+            </a:r>
+          </a:p>
+        </p:txBody>
+      </p:sp>
+      <p:sp>
+        <p:nvSpPr>
+          <p:cNvPr id="25" name="TextBox 24"/>
           <p:cNvSpPr txBox="1"/>
           <p:nvPr/>
         </p:nvSpPr>
         <p:spPr>
           <a:xfrm>
-            <a:off x="2011680" y="1865376"/>
-            <a:ext cx="5212080" cy="548640"/>
+            <a:off x="7882127" y="2029967"/>
+            <a:ext cx="3520440" cy="502920"/>
           </a:xfrm>
           <a:prstGeom prst="rect">
             <a:avLst/>
@@ -5934,7 +5873,7 @@
               </a:spcBef>
             </a:pPr>
             <a:r>
-              <a:rPr sz="1200" b="0">
+              <a:rPr sz="1100" b="0">
                 <a:solidFill>
                   <a:srgbClr val="EAF0F6"/>
                 </a:solidFill>
@@ -5943,75 +5882,27 @@
               <a:t/>
             </a:r>
             <a:r>
-              <a:rPr sz="1200" b="0">
+              <a:rPr sz="1100" b="0">
                 <a:solidFill>
                   <a:srgbClr val="EAF0F6"/>
                 </a:solidFill>
                 <a:latin typeface="Microsoft YaHei"/>
               </a:rPr>
-              <a:t>CLI · Web 控制台</a:t>
-            </a:r>
-          </a:p>
-        </p:txBody>
-      </p:sp>
-      <p:sp>
-        <p:nvSpPr>
-          <p:cNvPr id="9" name="TextBox 8"/>
-          <p:cNvSpPr txBox="1"/>
-          <p:nvPr/>
-        </p:nvSpPr>
-        <p:spPr>
-          <a:xfrm>
-            <a:off x="6949440" y="1956816"/>
-            <a:ext cx="1810512" cy="365760"/>
-          </a:xfrm>
-          <a:prstGeom prst="rect">
-            <a:avLst/>
-          </a:prstGeom>
-          <a:noFill/>
-        </p:spPr>
-        <p:txBody>
-          <a:bodyPr wrap="square" lIns="0" rIns="0" tIns="0" bIns="0">
-            <a:spAutoFit/>
-          </a:bodyPr>
-          <a:lstStyle/>
-          <a:p>
-            <a:pPr algn="l">
-              <a:spcBef>
-                <a:spcPts val="0"/>
-              </a:spcBef>
-            </a:pPr>
-            <a:r>
-              <a:rPr sz="1000" b="0">
-                <a:solidFill>
-                  <a:srgbClr val="9AA7B4"/>
-                </a:solidFill>
-                <a:latin typeface="Microsoft YaHei"/>
-              </a:rPr>
-              <a:t/>
-            </a:r>
-            <a:r>
-              <a:rPr sz="1000" b="0">
-                <a:solidFill>
-                  <a:srgbClr val="9AA7B4"/>
-                </a:solidFill>
-                <a:latin typeface="Microsoft YaHei"/>
-              </a:rPr>
-              <a:t>cli-run.ts · server/</a:t>
-            </a:r>
-          </a:p>
-        </p:txBody>
-      </p:sp>
-      <p:sp>
-        <p:nvSpPr>
-          <p:cNvPr id="10" name="Rounded Rectangle 9"/>
+              <a:t>24,000 字符的上下文被「需求 + PRD + 任务图」吃掉</a:t>
+            </a:r>
+          </a:p>
+        </p:txBody>
+      </p:sp>
+      <p:sp>
+        <p:nvSpPr>
+          <p:cNvPr id="26" name="Rounded Rectangle 25"/>
           <p:cNvSpPr/>
           <p:nvPr/>
         </p:nvSpPr>
         <p:spPr>
           <a:xfrm>
-            <a:off x="640080" y="2587752"/>
-            <a:ext cx="8275320" cy="713232"/>
+            <a:off x="6446520" y="2697479"/>
+            <a:ext cx="5102352" cy="713232"/>
           </a:xfrm>
           <a:prstGeom prst="roundRect">
             <a:avLst>
@@ -6052,14 +5943,14 @@
       </p:sp>
       <p:sp>
         <p:nvSpPr>
-          <p:cNvPr id="11" name="TextBox 10"/>
+          <p:cNvPr id="27" name="TextBox 26"/>
           <p:cNvSpPr txBox="1"/>
           <p:nvPr/>
         </p:nvSpPr>
         <p:spPr>
           <a:xfrm>
-            <a:off x="841248" y="2761488"/>
-            <a:ext cx="1143000" cy="365760"/>
+            <a:off x="6629400" y="2788919"/>
+            <a:ext cx="1234440" cy="502920"/>
           </a:xfrm>
           <a:prstGeom prst="rect">
             <a:avLst/>
@@ -6078,36 +5969,36 @@
               </a:spcBef>
             </a:pPr>
             <a:r>
-              <a:rPr sz="1400" b="1">
-                <a:solidFill>
-                  <a:srgbClr val="35C48F"/>
+              <a:rPr sz="2400" b="1">
+                <a:solidFill>
+                  <a:srgbClr val="E86A5C"/>
                 </a:solidFill>
                 <a:latin typeface="Microsoft YaHei"/>
               </a:rPr>
               <a:t/>
             </a:r>
             <a:r>
-              <a:rPr sz="1400" b="1">
-                <a:solidFill>
-                  <a:srgbClr val="35C48F"/>
-                </a:solidFill>
-                <a:latin typeface="Microsoft YaHei"/>
-              </a:rPr>
-              <a:t>编排层</a:t>
-            </a:r>
-          </a:p>
-        </p:txBody>
-      </p:sp>
-      <p:sp>
-        <p:nvSpPr>
-          <p:cNvPr id="12" name="TextBox 11"/>
+              <a:rPr sz="2400" b="1">
+                <a:solidFill>
+                  <a:srgbClr val="E86A5C"/>
+                </a:solidFill>
+                <a:latin typeface="Microsoft YaHei"/>
+              </a:rPr>
+              <a:t>4.2%</a:t>
+            </a:r>
+          </a:p>
+        </p:txBody>
+      </p:sp>
+      <p:sp>
+        <p:nvSpPr>
+          <p:cNvPr id="28" name="TextBox 27"/>
           <p:cNvSpPr txBox="1"/>
           <p:nvPr/>
         </p:nvSpPr>
         <p:spPr>
           <a:xfrm>
-            <a:off x="2011680" y="2670048"/>
-            <a:ext cx="5212080" cy="548640"/>
+            <a:off x="7882127" y="2852927"/>
+            <a:ext cx="3520440" cy="502920"/>
           </a:xfrm>
           <a:prstGeom prst="rect">
             <a:avLst/>
@@ -6126,7 +6017,7 @@
               </a:spcBef>
             </a:pPr>
             <a:r>
-              <a:rPr sz="1200" b="0">
+              <a:rPr sz="1100" b="0">
                 <a:solidFill>
                   <a:srgbClr val="EAF0F6"/>
                 </a:solidFill>
@@ -6135,75 +6026,27 @@
               <a:t/>
             </a:r>
             <a:r>
-              <a:rPr sz="1200" b="0">
+              <a:rPr sz="1100" b="0">
                 <a:solidFill>
                   <a:srgbClr val="EAF0F6"/>
                 </a:solidFill>
                 <a:latin typeface="Microsoft YaHei"/>
               </a:rPr>
-              <a:t>8 阶段状态机 · 唯一 Gate · 账本 · 机械裁判 · 圆桌 · 逃生</a:t>
-            </a:r>
-          </a:p>
-        </p:txBody>
-      </p:sp>
-      <p:sp>
-        <p:nvSpPr>
-          <p:cNvPr id="13" name="TextBox 12"/>
-          <p:cNvSpPr txBox="1"/>
-          <p:nvPr/>
-        </p:nvSpPr>
-        <p:spPr>
-          <a:xfrm>
-            <a:off x="6949440" y="2761488"/>
-            <a:ext cx="1810512" cy="365760"/>
-          </a:xfrm>
-          <a:prstGeom prst="rect">
-            <a:avLst/>
-          </a:prstGeom>
-          <a:noFill/>
-        </p:spPr>
-        <p:txBody>
-          <a:bodyPr wrap="square" lIns="0" rIns="0" tIns="0" bIns="0">
-            <a:spAutoFit/>
-          </a:bodyPr>
-          <a:lstStyle/>
-          <a:p>
-            <a:pPr algn="l">
-              <a:spcBef>
-                <a:spcPts val="0"/>
-              </a:spcBef>
-            </a:pPr>
-            <a:r>
-              <a:rPr sz="1000" b="0">
-                <a:solidFill>
-                  <a:srgbClr val="9AA7B4"/>
-                </a:solidFill>
-                <a:latin typeface="Microsoft YaHei"/>
-              </a:rPr>
-              <a:t/>
-            </a:r>
-            <a:r>
-              <a:rPr sz="1000" b="0">
-                <a:solidFill>
-                  <a:srgbClr val="9AA7B4"/>
-                </a:solidFill>
-                <a:latin typeface="Microsoft YaHei"/>
-              </a:rPr>
-              <a:t>orchestrator/（零 LLM 调用）</a:t>
-            </a:r>
-          </a:p>
-        </p:txBody>
-      </p:sp>
-      <p:sp>
-        <p:nvSpPr>
-          <p:cNvPr id="14" name="Rounded Rectangle 13"/>
+              <a:t>54 万字符的工件里，真正送达模型的只有这么多</a:t>
+            </a:r>
+          </a:p>
+        </p:txBody>
+      </p:sp>
+      <p:sp>
+        <p:nvSpPr>
+          <p:cNvPr id="29" name="Rounded Rectangle 28"/>
           <p:cNvSpPr/>
           <p:nvPr/>
         </p:nvSpPr>
         <p:spPr>
           <a:xfrm>
-            <a:off x="640080" y="3392424"/>
-            <a:ext cx="8275320" cy="713232"/>
+            <a:off x="6446520" y="3520439"/>
+            <a:ext cx="5102352" cy="713232"/>
           </a:xfrm>
           <a:prstGeom prst="roundRect">
             <a:avLst>
@@ -6244,14 +6087,14 @@
       </p:sp>
       <p:sp>
         <p:nvSpPr>
-          <p:cNvPr id="15" name="TextBox 14"/>
+          <p:cNvPr id="30" name="TextBox 29"/>
           <p:cNvSpPr txBox="1"/>
           <p:nvPr/>
         </p:nvSpPr>
         <p:spPr>
           <a:xfrm>
-            <a:off x="841248" y="3566160"/>
-            <a:ext cx="1143000" cy="365760"/>
+            <a:off x="6629400" y="3611879"/>
+            <a:ext cx="1234440" cy="502920"/>
           </a:xfrm>
           <a:prstGeom prst="rect">
             <a:avLst/>
@@ -6270,36 +6113,36 @@
               </a:spcBef>
             </a:pPr>
             <a:r>
-              <a:rPr sz="1400" b="1">
-                <a:solidFill>
-                  <a:srgbClr val="35C48F"/>
+              <a:rPr sz="2400" b="1">
+                <a:solidFill>
+                  <a:srgbClr val="F2B544"/>
                 </a:solidFill>
                 <a:latin typeface="Microsoft YaHei"/>
               </a:rPr>
               <a:t/>
             </a:r>
             <a:r>
-              <a:rPr sz="1400" b="1">
-                <a:solidFill>
-                  <a:srgbClr val="35C48F"/>
-                </a:solidFill>
-                <a:latin typeface="Microsoft YaHei"/>
-              </a:rPr>
-              <a:t>验收层</a:t>
-            </a:r>
-          </a:p>
-        </p:txBody>
-      </p:sp>
-      <p:sp>
-        <p:nvSpPr>
-          <p:cNvPr id="16" name="TextBox 15"/>
+              <a:rPr sz="2400" b="1">
+                <a:solidFill>
+                  <a:srgbClr val="F2B544"/>
+                </a:solidFill>
+                <a:latin typeface="Microsoft YaHei"/>
+              </a:rPr>
+              <a:t>2.2 : 1</a:t>
+            </a:r>
+          </a:p>
+        </p:txBody>
+      </p:sp>
+      <p:sp>
+        <p:nvSpPr>
+          <p:cNvPr id="31" name="TextBox 30"/>
           <p:cNvSpPr txBox="1"/>
           <p:nvPr/>
         </p:nvSpPr>
         <p:spPr>
           <a:xfrm>
-            <a:off x="2011680" y="3474720"/>
-            <a:ext cx="5212080" cy="548640"/>
+            <a:off x="7882127" y="3675887"/>
+            <a:ext cx="3520440" cy="502920"/>
           </a:xfrm>
           <a:prstGeom prst="rect">
             <a:avLst/>
@@ -6318,7 +6161,7 @@
               </a:spcBef>
             </a:pPr>
             <a:r>
-              <a:rPr sz="1200" b="0">
+              <a:rPr sz="1100" b="0">
                 <a:solidFill>
                   <a:srgbClr val="EAF0F6"/>
                 </a:solidFill>
@@ -6327,75 +6170,27 @@
               <a:t/>
             </a:r>
             <a:r>
-              <a:rPr sz="1200" b="0">
+              <a:rPr sz="1100" b="0">
                 <a:solidFill>
                   <a:srgbClr val="EAF0F6"/>
                 </a:solidFill>
                 <a:latin typeface="Microsoft YaHei"/>
               </a:rPr>
-              <a:t>A1–A8 事实锚（编译/测试/探针/契约/基准） · B1–B3 语义锚</a:t>
-            </a:r>
-          </a:p>
-        </p:txBody>
-      </p:sp>
-      <p:sp>
-        <p:nvSpPr>
-          <p:cNvPr id="17" name="TextBox 16"/>
-          <p:cNvSpPr txBox="1"/>
-          <p:nvPr/>
-        </p:nvSpPr>
-        <p:spPr>
-          <a:xfrm>
-            <a:off x="6949440" y="3566160"/>
-            <a:ext cx="1810512" cy="365760"/>
-          </a:xfrm>
-          <a:prstGeom prst="rect">
-            <a:avLst/>
-          </a:prstGeom>
-          <a:noFill/>
-        </p:spPr>
-        <p:txBody>
-          <a:bodyPr wrap="square" lIns="0" rIns="0" tIns="0" bIns="0">
-            <a:spAutoFit/>
-          </a:bodyPr>
-          <a:lstStyle/>
-          <a:p>
-            <a:pPr algn="l">
-              <a:spcBef>
-                <a:spcPts val="0"/>
-              </a:spcBef>
-            </a:pPr>
-            <a:r>
-              <a:rPr sz="1000" b="0">
-                <a:solidFill>
-                  <a:srgbClr val="9AA7B4"/>
-                </a:solidFill>
-                <a:latin typeface="Microsoft YaHei"/>
-              </a:rPr>
-              <a:t/>
-            </a:r>
-            <a:r>
-              <a:rPr sz="1000" b="0">
-                <a:solidFill>
-                  <a:srgbClr val="9AA7B4"/>
-                </a:solidFill>
-                <a:latin typeface="Microsoft YaHei"/>
-              </a:rPr>
-              <a:t>anchors/（LLM 提议 + 机械核验）</a:t>
-            </a:r>
-          </a:p>
-        </p:txBody>
-      </p:sp>
-      <p:sp>
-        <p:nvSpPr>
-          <p:cNvPr id="18" name="Rounded Rectangle 17"/>
+              <a:t>输出 / 输入 —— 每次都在从零重写，而不是修改</a:t>
+            </a:r>
+          </a:p>
+        </p:txBody>
+      </p:sp>
+      <p:sp>
+        <p:nvSpPr>
+          <p:cNvPr id="32" name="Rounded Rectangle 31"/>
           <p:cNvSpPr/>
           <p:nvPr/>
         </p:nvSpPr>
         <p:spPr>
           <a:xfrm>
-            <a:off x="640080" y="4197096"/>
-            <a:ext cx="8275320" cy="713232"/>
+            <a:off x="640080" y="4526280"/>
+            <a:ext cx="10908792" cy="1371600"/>
           </a:xfrm>
           <a:prstGeom prst="roundRect">
             <a:avLst>
@@ -6427,23 +6222,52 @@
           </a:fontRef>
         </p:style>
         <p:txBody>
-          <a:bodyPr rtlCol="0" anchor="ctr"/>
-          <a:lstStyle/>
-          <a:p>
-            <a:pPr algn="ctr"/>
-          </a:p>
-        </p:txBody>
-      </p:sp>
-      <p:sp>
-        <p:nvSpPr>
-          <p:cNvPr id="19" name="TextBox 18"/>
+          <a:bodyPr rtlCol="0" anchor="ctr" wrap="square" lIns="182880"/>
+          <a:lstStyle/>
+          <a:p>
+            <a:pPr algn="l">
+              <a:spcBef>
+                <a:spcPts val="0"/>
+              </a:spcBef>
+            </a:pPr>
+            <a:r>
+              <a:rPr sz="1200" b="1">
+                <a:solidFill>
+                  <a:srgbClr val="35C48F"/>
+                </a:solidFill>
+                <a:latin typeface="Microsoft YaHei"/>
+              </a:rPr>
+              <a:t>关键判据</a:t>
+            </a:r>
+          </a:p>
+          <a:p>
+            <a:pPr algn="l">
+              <a:spcBef>
+                <a:spcPts val="400"/>
+              </a:spcBef>
+            </a:pPr>
+            <a:r>
+              <a:rPr sz="1300" b="0">
+                <a:solidFill>
+                  <a:srgbClr val="EAF0F6"/>
+                </a:solidFill>
+                <a:latin typeface="Microsoft YaHei"/>
+              </a:rPr>
+              <a:t>契约（60,720 字符）整件丢失 → 后端照 PRD 散文自己发明接口；别人的代码一件没进 → 不可能接线；测试报告一件没进 → 连修 6 轮不收敛。</a:t>
+            </a:r>
+          </a:p>
+        </p:txBody>
+      </p:sp>
+      <p:sp>
+        <p:nvSpPr>
+          <p:cNvPr id="33" name="TextBox 32"/>
           <p:cNvSpPr txBox="1"/>
           <p:nvPr/>
         </p:nvSpPr>
         <p:spPr>
           <a:xfrm>
-            <a:off x="841248" y="4370832"/>
-            <a:ext cx="1143000" cy="365760"/>
+            <a:off x="640080" y="6355080"/>
+            <a:ext cx="7315200" cy="274320"/>
           </a:xfrm>
           <a:prstGeom prst="rect">
             <a:avLst/>
@@ -6462,36 +6286,36 @@
               </a:spcBef>
             </a:pPr>
             <a:r>
-              <a:rPr sz="1400" b="1">
-                <a:solidFill>
-                  <a:srgbClr val="EAF0F6"/>
+              <a:rPr sz="1000" b="0">
+                <a:solidFill>
+                  <a:srgbClr val="9AA7B4"/>
                 </a:solidFill>
                 <a:latin typeface="Microsoft YaHei"/>
               </a:rPr>
               <a:t/>
             </a:r>
             <a:r>
-              <a:rPr sz="1400" b="1">
-                <a:solidFill>
-                  <a:srgbClr val="EAF0F6"/>
-                </a:solidFill>
-                <a:latin typeface="Microsoft YaHei"/>
-              </a:rPr>
-              <a:t>角色层</a:t>
-            </a:r>
-          </a:p>
-        </p:txBody>
-      </p:sp>
-      <p:sp>
-        <p:nvSpPr>
-          <p:cNvPr id="20" name="TextBox 19"/>
+              <a:rPr sz="1000" b="0">
+                <a:solidFill>
+                  <a:srgbClr val="9AA7B4"/>
+                </a:solidFill>
+                <a:latin typeface="Microsoft YaHei"/>
+              </a:rPr>
+              <a:t>AgentForge · 多角色 AI 研发引擎 · 赛道 B</a:t>
+            </a:r>
+          </a:p>
+        </p:txBody>
+      </p:sp>
+      <p:sp>
+        <p:nvSpPr>
+          <p:cNvPr id="34" name="TextBox 33"/>
           <p:cNvSpPr txBox="1"/>
           <p:nvPr/>
         </p:nvSpPr>
         <p:spPr>
           <a:xfrm>
-            <a:off x="2011680" y="4279392"/>
-            <a:ext cx="5212080" cy="548640"/>
+            <a:off x="10607040" y="6355080"/>
+            <a:ext cx="914400" cy="274320"/>
           </a:xfrm>
           <a:prstGeom prst="rect">
             <a:avLst/>
@@ -6510,528 +6334,22 @@
               </a:spcBef>
             </a:pPr>
             <a:r>
-              <a:rPr sz="1200" b="0">
-                <a:solidFill>
-                  <a:srgbClr val="EAF0F6"/>
+              <a:rPr sz="1000" b="0">
+                <a:solidFill>
+                  <a:srgbClr val="9AA7B4"/>
                 </a:solidFill>
                 <a:latin typeface="Microsoft YaHei"/>
               </a:rPr>
               <a:t/>
             </a:r>
             <a:r>
-              <a:rPr sz="1200" b="0">
-                <a:solidFill>
-                  <a:srgbClr val="EAF0F6"/>
-                </a:solidFill>
-                <a:latin typeface="Microsoft YaHei"/>
-              </a:rPr>
-              <a:t>pm · backend · frontend · test · host</a:t>
-            </a:r>
-          </a:p>
-        </p:txBody>
-      </p:sp>
-      <p:sp>
-        <p:nvSpPr>
-          <p:cNvPr id="21" name="TextBox 20"/>
-          <p:cNvSpPr txBox="1"/>
-          <p:nvPr/>
-        </p:nvSpPr>
-        <p:spPr>
-          <a:xfrm>
-            <a:off x="6949440" y="4370832"/>
-            <a:ext cx="1810512" cy="365760"/>
-          </a:xfrm>
-          <a:prstGeom prst="rect">
-            <a:avLst/>
-          </a:prstGeom>
-          <a:noFill/>
-        </p:spPr>
-        <p:txBody>
-          <a:bodyPr wrap="square" lIns="0" rIns="0" tIns="0" bIns="0">
-            <a:spAutoFit/>
-          </a:bodyPr>
-          <a:lstStyle/>
-          <a:p>
-            <a:pPr algn="l">
-              <a:spcBef>
-                <a:spcPts val="0"/>
-              </a:spcBef>
-            </a:pPr>
-            <a:r>
               <a:rPr sz="1000" b="0">
                 <a:solidFill>
                   <a:srgbClr val="9AA7B4"/>
                 </a:solidFill>
                 <a:latin typeface="Microsoft YaHei"/>
               </a:rPr>
-              <a:t/>
-            </a:r>
-            <a:r>
-              <a:rPr sz="1000" b="0">
-                <a:solidFill>
-                  <a:srgbClr val="9AA7B4"/>
-                </a:solidFill>
-                <a:latin typeface="Microsoft YaHei"/>
-              </a:rPr>
-              <a:t>roles/（上下文装配 + schema 门禁）</a:t>
-            </a:r>
-          </a:p>
-        </p:txBody>
-      </p:sp>
-      <p:sp>
-        <p:nvSpPr>
-          <p:cNvPr id="22" name="Rounded Rectangle 21"/>
-          <p:cNvSpPr/>
-          <p:nvPr/>
-        </p:nvSpPr>
-        <p:spPr>
-          <a:xfrm>
-            <a:off x="640080" y="5001768"/>
-            <a:ext cx="8275320" cy="713232"/>
-          </a:xfrm>
-          <a:prstGeom prst="roundRect">
-            <a:avLst>
-              <a:gd name="adj" fmla="val 6000"/>
-            </a:avLst>
-          </a:prstGeom>
-          <a:solidFill>
-            <a:srgbClr val="182028"/>
-          </a:solidFill>
-          <a:ln w="12700">
-            <a:solidFill>
-              <a:srgbClr val="2B3642"/>
-            </a:solidFill>
-          </a:ln>
-          <a:effectLst/>
-        </p:spPr>
-        <p:style>
-          <a:lnRef idx="1">
-            <a:schemeClr val="accent1"/>
-          </a:lnRef>
-          <a:fillRef idx="3">
-            <a:schemeClr val="accent1"/>
-          </a:fillRef>
-          <a:effectRef idx="2">
-            <a:schemeClr val="accent1"/>
-          </a:effectRef>
-          <a:fontRef idx="minor">
-            <a:schemeClr val="lt1"/>
-          </a:fontRef>
-        </p:style>
-        <p:txBody>
-          <a:bodyPr rtlCol="0" anchor="ctr"/>
-          <a:lstStyle/>
-          <a:p>
-            <a:pPr algn="ctr"/>
-          </a:p>
-        </p:txBody>
-      </p:sp>
-      <p:sp>
-        <p:nvSpPr>
-          <p:cNvPr id="23" name="TextBox 22"/>
-          <p:cNvSpPr txBox="1"/>
-          <p:nvPr/>
-        </p:nvSpPr>
-        <p:spPr>
-          <a:xfrm>
-            <a:off x="841248" y="5175504"/>
-            <a:ext cx="1143000" cy="365760"/>
-          </a:xfrm>
-          <a:prstGeom prst="rect">
-            <a:avLst/>
-          </a:prstGeom>
-          <a:noFill/>
-        </p:spPr>
-        <p:txBody>
-          <a:bodyPr wrap="square" lIns="0" rIns="0" tIns="0" bIns="0">
-            <a:spAutoFit/>
-          </a:bodyPr>
-          <a:lstStyle/>
-          <a:p>
-            <a:pPr algn="l">
-              <a:spcBef>
-                <a:spcPts val="0"/>
-              </a:spcBef>
-            </a:pPr>
-            <a:r>
-              <a:rPr sz="1400" b="1">
-                <a:solidFill>
-                  <a:srgbClr val="9AA7B4"/>
-                </a:solidFill>
-                <a:latin typeface="Microsoft YaHei"/>
-              </a:rPr>
-              <a:t/>
-            </a:r>
-            <a:r>
-              <a:rPr sz="1400" b="1">
-                <a:solidFill>
-                  <a:srgbClr val="9AA7B4"/>
-                </a:solidFill>
-                <a:latin typeface="Microsoft YaHei"/>
-              </a:rPr>
-              <a:t>能力层</a:t>
-            </a:r>
-          </a:p>
-        </p:txBody>
-      </p:sp>
-      <p:sp>
-        <p:nvSpPr>
-          <p:cNvPr id="24" name="TextBox 23"/>
-          <p:cNvSpPr txBox="1"/>
-          <p:nvPr/>
-        </p:nvSpPr>
-        <p:spPr>
-          <a:xfrm>
-            <a:off x="2011680" y="5084064"/>
-            <a:ext cx="5212080" cy="548640"/>
-          </a:xfrm>
-          <a:prstGeom prst="rect">
-            <a:avLst/>
-          </a:prstGeom>
-          <a:noFill/>
-        </p:spPr>
-        <p:txBody>
-          <a:bodyPr wrap="square" lIns="0" rIns="0" tIns="0" bIns="0">
-            <a:spAutoFit/>
-          </a:bodyPr>
-          <a:lstStyle/>
-          <a:p>
-            <a:pPr algn="l">
-              <a:spcBef>
-                <a:spcPts val="0"/>
-              </a:spcBef>
-            </a:pPr>
-            <a:r>
-              <a:rPr sz="1200" b="0">
-                <a:solidFill>
-                  <a:srgbClr val="EAF0F6"/>
-                </a:solidFill>
-                <a:latin typeface="Microsoft YaHei"/>
-              </a:rPr>
-              <a:t/>
-            </a:r>
-            <a:r>
-              <a:rPr sz="1200" b="0">
-                <a:solidFill>
-                  <a:srgbClr val="EAF0F6"/>
-                </a:solidFill>
-                <a:latin typeface="Microsoft YaHei"/>
-              </a:rPr>
-              <a:t>Provider 抽象 · 录制回放 · 三层记忆 · 工件库 · 哈希链日志</a:t>
-            </a:r>
-          </a:p>
-        </p:txBody>
-      </p:sp>
-      <p:sp>
-        <p:nvSpPr>
-          <p:cNvPr id="25" name="TextBox 24"/>
-          <p:cNvSpPr txBox="1"/>
-          <p:nvPr/>
-        </p:nvSpPr>
-        <p:spPr>
-          <a:xfrm>
-            <a:off x="6949440" y="5175504"/>
-            <a:ext cx="1810512" cy="365760"/>
-          </a:xfrm>
-          <a:prstGeom prst="rect">
-            <a:avLst/>
-          </a:prstGeom>
-          <a:noFill/>
-        </p:spPr>
-        <p:txBody>
-          <a:bodyPr wrap="square" lIns="0" rIns="0" tIns="0" bIns="0">
-            <a:spAutoFit/>
-          </a:bodyPr>
-          <a:lstStyle/>
-          <a:p>
-            <a:pPr algn="l">
-              <a:spcBef>
-                <a:spcPts val="0"/>
-              </a:spcBef>
-            </a:pPr>
-            <a:r>
-              <a:rPr sz="1000" b="0">
-                <a:solidFill>
-                  <a:srgbClr val="9AA7B4"/>
-                </a:solidFill>
-                <a:latin typeface="Microsoft YaHei"/>
-              </a:rPr>
-              <a:t/>
-            </a:r>
-            <a:r>
-              <a:rPr sz="1000" b="0">
-                <a:solidFill>
-                  <a:srgbClr val="9AA7B4"/>
-                </a:solidFill>
-                <a:latin typeface="Microsoft YaHei"/>
-              </a:rPr>
-              <a:t>llm/ · memory/ · core/</a:t>
-            </a:r>
-          </a:p>
-        </p:txBody>
-      </p:sp>
-      <p:sp>
-        <p:nvSpPr>
-          <p:cNvPr id="26" name="Rounded Rectangle 25"/>
-          <p:cNvSpPr/>
-          <p:nvPr/>
-        </p:nvSpPr>
-        <p:spPr>
-          <a:xfrm>
-            <a:off x="9098280" y="1783080"/>
-            <a:ext cx="2450592" cy="3566160"/>
-          </a:xfrm>
-          <a:prstGeom prst="roundRect">
-            <a:avLst>
-              <a:gd name="adj" fmla="val 6000"/>
-            </a:avLst>
-          </a:prstGeom>
-          <a:solidFill>
-            <a:srgbClr val="182028"/>
-          </a:solidFill>
-          <a:ln w="12700">
-            <a:solidFill>
-              <a:srgbClr val="2B3642"/>
-            </a:solidFill>
-          </a:ln>
-          <a:effectLst/>
-        </p:spPr>
-        <p:style>
-          <a:lnRef idx="1">
-            <a:schemeClr val="accent1"/>
-          </a:lnRef>
-          <a:fillRef idx="3">
-            <a:schemeClr val="accent1"/>
-          </a:fillRef>
-          <a:effectRef idx="2">
-            <a:schemeClr val="accent1"/>
-          </a:effectRef>
-          <a:fontRef idx="minor">
-            <a:schemeClr val="lt1"/>
-          </a:fontRef>
-        </p:style>
-        <p:txBody>
-          <a:bodyPr rtlCol="0" anchor="ctr" wrap="square" lIns="137160" tIns="109728"/>
-          <a:lstStyle/>
-          <a:p>
-            <a:pPr algn="l">
-              <a:spcBef>
-                <a:spcPts val="0"/>
-              </a:spcBef>
-            </a:pPr>
-            <a:r>
-              <a:rPr sz="1300" b="1">
-                <a:solidFill>
-                  <a:srgbClr val="35C48F"/>
-                </a:solidFill>
-                <a:latin typeface="Microsoft YaHei"/>
-              </a:rPr>
-              <a:t>三个设计决定</a:t>
-            </a:r>
-          </a:p>
-          <a:p>
-            <a:pPr algn="l">
-              <a:spcBef>
-                <a:spcPts val="1200"/>
-              </a:spcBef>
-            </a:pPr>
-            <a:r>
-              <a:rPr sz="1100" b="0">
-                <a:solidFill>
-                  <a:srgbClr val="EAF0F6"/>
-                </a:solidFill>
-                <a:latin typeface="Microsoft YaHei"/>
-              </a:rPr>
-              <a:t>① 编排里没有一次 LLM 调用</a:t>
-            </a:r>
-          </a:p>
-          <a:p>
-            <a:pPr algn="l">
-              <a:spcBef>
-                <a:spcPts val="800"/>
-              </a:spcBef>
-            </a:pPr>
-            <a:r>
-              <a:rPr sz="1100" b="0">
-                <a:solidFill>
-                  <a:srgbClr val="EAF0F6"/>
-                </a:solidFill>
-                <a:latin typeface="Microsoft YaHei"/>
-              </a:rPr>
-              <a:t>② SKIPPED ≠ PASS</a:t>
-            </a:r>
-          </a:p>
-          <a:p>
-            <a:pPr algn="l">
-              <a:spcBef>
-                <a:spcPts val="800"/>
-              </a:spcBef>
-            </a:pPr>
-            <a:r>
-              <a:rPr sz="1100" b="0">
-                <a:solidFill>
-                  <a:srgbClr val="EAF0F6"/>
-                </a:solidFill>
-                <a:latin typeface="Microsoft YaHei"/>
-              </a:rPr>
-              <a:t>③ 8 个阶段共用同一个 Gate</a:t>
-            </a:r>
-          </a:p>
-        </p:txBody>
-      </p:sp>
-      <p:sp>
-        <p:nvSpPr>
-          <p:cNvPr id="27" name="Rounded Rectangle 26"/>
-          <p:cNvSpPr/>
-          <p:nvPr/>
-        </p:nvSpPr>
-        <p:spPr>
-          <a:xfrm>
-            <a:off x="640080" y="5806440"/>
-            <a:ext cx="10908792" cy="457200"/>
-          </a:xfrm>
-          <a:prstGeom prst="roundRect">
-            <a:avLst>
-              <a:gd name="adj" fmla="val 6000"/>
-            </a:avLst>
-          </a:prstGeom>
-          <a:solidFill>
-            <a:srgbClr val="182028"/>
-          </a:solidFill>
-          <a:ln w="12700">
-            <a:solidFill>
-              <a:srgbClr val="2B3642"/>
-            </a:solidFill>
-          </a:ln>
-          <a:effectLst/>
-        </p:spPr>
-        <p:style>
-          <a:lnRef idx="1">
-            <a:schemeClr val="accent1"/>
-          </a:lnRef>
-          <a:fillRef idx="3">
-            <a:schemeClr val="accent1"/>
-          </a:fillRef>
-          <a:effectRef idx="2">
-            <a:schemeClr val="accent1"/>
-          </a:effectRef>
-          <a:fontRef idx="minor">
-            <a:schemeClr val="lt1"/>
-          </a:fontRef>
-        </p:style>
-        <p:txBody>
-          <a:bodyPr rtlCol="0" anchor="ctr" wrap="square" lIns="137160"/>
-          <a:lstStyle/>
-          <a:p>
-            <a:pPr algn="l">
-              <a:spcBef>
-                <a:spcPts val="0"/>
-              </a:spcBef>
-            </a:pPr>
-            <a:r>
-              <a:rPr sz="1100" b="0">
-                <a:solidFill>
-                  <a:srgbClr val="9AA7B4"/>
-                </a:solidFill>
-                <a:latin typeface="Microsoft YaHei"/>
-              </a:rPr>
-              <a:t>零依赖：Node ≥ 24 原生执行 TypeScript，克隆即跑（401 个测试；CI 断言仓库根目录没有 node_modules）</a:t>
-            </a:r>
-          </a:p>
-        </p:txBody>
-      </p:sp>
-      <p:sp>
-        <p:nvSpPr>
-          <p:cNvPr id="28" name="TextBox 27"/>
-          <p:cNvSpPr txBox="1"/>
-          <p:nvPr/>
-        </p:nvSpPr>
-        <p:spPr>
-          <a:xfrm>
-            <a:off x="640080" y="6355080"/>
-            <a:ext cx="7315200" cy="274320"/>
-          </a:xfrm>
-          <a:prstGeom prst="rect">
-            <a:avLst/>
-          </a:prstGeom>
-          <a:noFill/>
-        </p:spPr>
-        <p:txBody>
-          <a:bodyPr wrap="square" lIns="0" rIns="0" tIns="0" bIns="0">
-            <a:spAutoFit/>
-          </a:bodyPr>
-          <a:lstStyle/>
-          <a:p>
-            <a:pPr algn="l">
-              <a:spcBef>
-                <a:spcPts val="0"/>
-              </a:spcBef>
-            </a:pPr>
-            <a:r>
-              <a:rPr sz="1000" b="0">
-                <a:solidFill>
-                  <a:srgbClr val="9AA7B4"/>
-                </a:solidFill>
-                <a:latin typeface="Microsoft YaHei"/>
-              </a:rPr>
-              <a:t/>
-            </a:r>
-            <a:r>
-              <a:rPr sz="1000" b="0">
-                <a:solidFill>
-                  <a:srgbClr val="9AA7B4"/>
-                </a:solidFill>
-                <a:latin typeface="Microsoft YaHei"/>
-              </a:rPr>
-              <a:t>AgentForge · 多角色 AI 研发引擎 · 赛道 B</a:t>
-            </a:r>
-          </a:p>
-        </p:txBody>
-      </p:sp>
-      <p:sp>
-        <p:nvSpPr>
-          <p:cNvPr id="29" name="TextBox 28"/>
-          <p:cNvSpPr txBox="1"/>
-          <p:nvPr/>
-        </p:nvSpPr>
-        <p:spPr>
-          <a:xfrm>
-            <a:off x="10607040" y="6355080"/>
-            <a:ext cx="914400" cy="274320"/>
-          </a:xfrm>
-          <a:prstGeom prst="rect">
-            <a:avLst/>
-          </a:prstGeom>
-          <a:noFill/>
-        </p:spPr>
-        <p:txBody>
-          <a:bodyPr wrap="square" lIns="0" rIns="0" tIns="0" bIns="0">
-            <a:spAutoFit/>
-          </a:bodyPr>
-          <a:lstStyle/>
-          <a:p>
-            <a:pPr algn="l">
-              <a:spcBef>
-                <a:spcPts val="0"/>
-              </a:spcBef>
-            </a:pPr>
-            <a:r>
-              <a:rPr sz="1000" b="0">
-                <a:solidFill>
-                  <a:srgbClr val="9AA7B4"/>
-                </a:solidFill>
-                <a:latin typeface="Microsoft YaHei"/>
-              </a:rPr>
-              <a:t/>
-            </a:r>
-            <a:r>
-              <a:rPr sz="1000" b="0">
-                <a:solidFill>
-                  <a:srgbClr val="9AA7B4"/>
-                </a:solidFill>
-                <a:latin typeface="Microsoft YaHei"/>
-              </a:rPr>
-              <a:t>4 / 8</a:t>
+              <a:t>4 / 9</a:t>
             </a:r>
           </a:p>
         </p:txBody>
@@ -7141,7 +6459,7 @@
                 </a:solidFill>
                 <a:latin typeface="Microsoft YaHei"/>
               </a:rPr>
-              <a:t>Agent 链路</a:t>
+              <a:t>架构</a:t>
             </a:r>
           </a:p>
         </p:txBody>
@@ -7189,62 +6507,14 @@
                 </a:solidFill>
                 <a:latin typeface="Microsoft YaHei"/>
               </a:rPr>
-              <a:t>五个角色不直接对话，只传接口</a:t>
-            </a:r>
-          </a:p>
-        </p:txBody>
-      </p:sp>
-      <p:sp>
-        <p:nvSpPr>
-          <p:cNvPr id="5" name="TextBox 4"/>
-          <p:cNvSpPr txBox="1"/>
-          <p:nvPr/>
-        </p:nvSpPr>
-        <p:spPr>
-          <a:xfrm>
-            <a:off x="640080" y="1481328"/>
-            <a:ext cx="10881360" cy="457200"/>
-          </a:xfrm>
-          <a:prstGeom prst="rect">
-            <a:avLst/>
-          </a:prstGeom>
-          <a:noFill/>
-        </p:spPr>
-        <p:txBody>
-          <a:bodyPr wrap="square" lIns="0" rIns="0" tIns="0" bIns="0">
-            <a:spAutoFit/>
-          </a:bodyPr>
-          <a:lstStyle/>
-          <a:p>
-            <a:pPr algn="l">
-              <a:spcBef>
-                <a:spcPts val="0"/>
-              </a:spcBef>
-            </a:pPr>
-            <a:r>
-              <a:rPr sz="1400" b="0">
-                <a:solidFill>
-                  <a:srgbClr val="9AA7B4"/>
-                </a:solidFill>
-                <a:latin typeface="Microsoft YaHei"/>
-              </a:rPr>
-              <a:t/>
-            </a:r>
-            <a:r>
-              <a:rPr sz="1400" b="0">
-                <a:solidFill>
-                  <a:srgbClr val="9AA7B4"/>
-                </a:solidFill>
-                <a:latin typeface="Microsoft YaHei"/>
-              </a:rPr>
-              <a:t>谁能看到什么由代码强制，不靠提示词自律</a:t>
+              <a:t>编排内核零 LLM，判断不可能被模型带偏</a:t>
             </a:r>
           </a:p>
         </p:txBody>
       </p:sp>
       <p:cxnSp>
         <p:nvCxnSpPr>
-          <p:cNvPr id="6" name="Connector 5"/>
+          <p:cNvPr id="5" name="Connector 4"/>
           <p:cNvCxnSpPr/>
           <p:nvPr/>
         </p:nvCxnSpPr>
@@ -7279,14 +6549,14 @@
       </p:cxnSp>
       <p:sp>
         <p:nvSpPr>
-          <p:cNvPr id="7" name="Rounded Rectangle 6"/>
+          <p:cNvPr id="6" name="Rounded Rectangle 5"/>
           <p:cNvSpPr/>
           <p:nvPr/>
         </p:nvSpPr>
         <p:spPr>
           <a:xfrm>
             <a:off x="640080" y="1783080"/>
-            <a:ext cx="5120640" cy="3246120"/>
+            <a:ext cx="8275320" cy="713232"/>
           </a:xfrm>
           <a:prstGeom prst="roundRect">
             <a:avLst>
@@ -7318,7 +6588,33 @@
           </a:fontRef>
         </p:style>
         <p:txBody>
-          <a:bodyPr rtlCol="0" anchor="ctr" wrap="square" lIns="182880" tIns="137160"/>
+          <a:bodyPr rtlCol="0" anchor="ctr"/>
+          <a:lstStyle/>
+          <a:p>
+            <a:pPr algn="ctr"/>
+          </a:p>
+        </p:txBody>
+      </p:sp>
+      <p:sp>
+        <p:nvSpPr>
+          <p:cNvPr id="7" name="TextBox 6"/>
+          <p:cNvSpPr txBox="1"/>
+          <p:nvPr/>
+        </p:nvSpPr>
+        <p:spPr>
+          <a:xfrm>
+            <a:off x="841248" y="1956816"/>
+            <a:ext cx="1143000" cy="365760"/>
+          </a:xfrm>
+          <a:prstGeom prst="rect">
+            <a:avLst/>
+          </a:prstGeom>
+          <a:noFill/>
+        </p:spPr>
+        <p:txBody>
+          <a:bodyPr wrap="square" lIns="0" rIns="0" tIns="0" bIns="0">
+            <a:spAutoFit/>
+          </a:bodyPr>
           <a:lstStyle/>
           <a:p>
             <a:pPr algn="l">
@@ -7327,19 +6623,51 @@
               </a:spcBef>
             </a:pPr>
             <a:r>
-              <a:rPr sz="1600" b="1">
-                <a:solidFill>
-                  <a:srgbClr val="E86A5C"/>
-                </a:solidFill>
-                <a:latin typeface="Microsoft YaHei"/>
-              </a:rPr>
-              <a:t>✗ 全文互传</a:t>
-            </a:r>
-          </a:p>
-          <a:p>
-            <a:pPr algn="l">
-              <a:spcBef>
-                <a:spcPts val="1200"/>
+              <a:rPr sz="1400" b="1">
+                <a:solidFill>
+                  <a:srgbClr val="9AA7B4"/>
+                </a:solidFill>
+                <a:latin typeface="Microsoft YaHei"/>
+              </a:rPr>
+              <a:t/>
+            </a:r>
+            <a:r>
+              <a:rPr sz="1400" b="1">
+                <a:solidFill>
+                  <a:srgbClr val="9AA7B4"/>
+                </a:solidFill>
+                <a:latin typeface="Microsoft YaHei"/>
+              </a:rPr>
+              <a:t>入口</a:t>
+            </a:r>
+          </a:p>
+        </p:txBody>
+      </p:sp>
+      <p:sp>
+        <p:nvSpPr>
+          <p:cNvPr id="8" name="TextBox 7"/>
+          <p:cNvSpPr txBox="1"/>
+          <p:nvPr/>
+        </p:nvSpPr>
+        <p:spPr>
+          <a:xfrm>
+            <a:off x="2011680" y="1865376"/>
+            <a:ext cx="5212080" cy="548640"/>
+          </a:xfrm>
+          <a:prstGeom prst="rect">
+            <a:avLst/>
+          </a:prstGeom>
+          <a:noFill/>
+        </p:spPr>
+        <p:txBody>
+          <a:bodyPr wrap="square" lIns="0" rIns="0" tIns="0" bIns="0">
+            <a:spAutoFit/>
+          </a:bodyPr>
+          <a:lstStyle/>
+          <a:p>
+            <a:pPr algn="l">
+              <a:spcBef>
+                <a:spcPts val="0"/>
               </a:spcBef>
             </a:pPr>
             <a:r>
@@ -7349,15 +6677,8 @@
                 </a:solidFill>
                 <a:latin typeface="Microsoft YaHei"/>
               </a:rPr>
-              <a:t>把全部源码堆进一个大上下文 =</a:t>
-            </a:r>
-          </a:p>
-          <a:p>
-            <a:pPr algn="l">
-              <a:spcBef>
-                <a:spcPts val="400"/>
-              </a:spcBef>
-            </a:pPr>
+              <a:t/>
+            </a:r>
             <a:r>
               <a:rPr sz="1200" b="0">
                 <a:solidFill>
@@ -7365,69 +6686,69 @@
                 </a:solidFill>
                 <a:latin typeface="Microsoft YaHei"/>
               </a:rPr>
-              <a:t>把多角色系统退化成单一大上下文，</a:t>
-            </a:r>
-          </a:p>
-          <a:p>
-            <a:pPr algn="l">
-              <a:spcBef>
-                <a:spcPts val="400"/>
-              </a:spcBef>
-            </a:pPr>
-            <a:r>
-              <a:rPr sz="1200" b="0">
-                <a:solidFill>
-                  <a:srgbClr val="EAF0F6"/>
-                </a:solidFill>
-                <a:latin typeface="Microsoft YaHei"/>
-              </a:rPr>
-              <a:t>切分就白做了；</a:t>
-            </a:r>
-          </a:p>
-          <a:p>
-            <a:pPr algn="l">
-              <a:spcBef>
-                <a:spcPts val="400"/>
-              </a:spcBef>
-            </a:pPr>
-            <a:r>
-              <a:rPr sz="1200" b="0">
-                <a:solidFill>
-                  <a:srgbClr val="EAF0F6"/>
-                </a:solidFill>
-                <a:latin typeface="Microsoft YaHei"/>
-              </a:rPr>
-              <a:t>而且下一个更大的项目会再次溢出。</a:t>
-            </a:r>
-          </a:p>
-          <a:p>
-            <a:pPr algn="l">
-              <a:spcBef>
-                <a:spcPts val="1400"/>
-              </a:spcBef>
-            </a:pPr>
-            <a:r>
-              <a:rPr sz="1100" b="0">
+              <a:t>CLI · Web 控制台</a:t>
+            </a:r>
+          </a:p>
+        </p:txBody>
+      </p:sp>
+      <p:sp>
+        <p:nvSpPr>
+          <p:cNvPr id="9" name="TextBox 8"/>
+          <p:cNvSpPr txBox="1"/>
+          <p:nvPr/>
+        </p:nvSpPr>
+        <p:spPr>
+          <a:xfrm>
+            <a:off x="6949440" y="1956816"/>
+            <a:ext cx="1810512" cy="365760"/>
+          </a:xfrm>
+          <a:prstGeom prst="rect">
+            <a:avLst/>
+          </a:prstGeom>
+          <a:noFill/>
+        </p:spPr>
+        <p:txBody>
+          <a:bodyPr wrap="square" lIns="0" rIns="0" tIns="0" bIns="0">
+            <a:spAutoFit/>
+          </a:bodyPr>
+          <a:lstStyle/>
+          <a:p>
+            <a:pPr algn="l">
+              <a:spcBef>
+                <a:spcPts val="0"/>
+              </a:spcBef>
+            </a:pPr>
+            <a:r>
+              <a:rPr sz="1000" b="0">
                 <a:solidFill>
                   <a:srgbClr val="9AA7B4"/>
                 </a:solidFill>
                 <a:latin typeface="Microsoft YaHei"/>
               </a:rPr>
-              <a:t>实测：11 个模块全文 = 20 万字符</a:t>
-            </a:r>
-          </a:p>
-        </p:txBody>
-      </p:sp>
-      <p:sp>
-        <p:nvSpPr>
-          <p:cNvPr id="8" name="Rounded Rectangle 7"/>
+              <a:t/>
+            </a:r>
+            <a:r>
+              <a:rPr sz="1000" b="0">
+                <a:solidFill>
+                  <a:srgbClr val="9AA7B4"/>
+                </a:solidFill>
+                <a:latin typeface="Microsoft YaHei"/>
+              </a:rPr>
+              <a:t>cli-run.ts · server/</a:t>
+            </a:r>
+          </a:p>
+        </p:txBody>
+      </p:sp>
+      <p:sp>
+        <p:nvSpPr>
+          <p:cNvPr id="10" name="Rounded Rectangle 9"/>
           <p:cNvSpPr/>
           <p:nvPr/>
         </p:nvSpPr>
         <p:spPr>
           <a:xfrm>
-            <a:off x="6053328" y="1783080"/>
-            <a:ext cx="5495544" cy="3246120"/>
+            <a:off x="640080" y="2587752"/>
+            <a:ext cx="8275320" cy="713232"/>
           </a:xfrm>
           <a:prstGeom prst="roundRect">
             <a:avLst>
@@ -7459,7 +6780,33 @@
           </a:fontRef>
         </p:style>
         <p:txBody>
-          <a:bodyPr rtlCol="0" anchor="ctr" wrap="square" lIns="182880" tIns="137160"/>
+          <a:bodyPr rtlCol="0" anchor="ctr"/>
+          <a:lstStyle/>
+          <a:p>
+            <a:pPr algn="ctr"/>
+          </a:p>
+        </p:txBody>
+      </p:sp>
+      <p:sp>
+        <p:nvSpPr>
+          <p:cNvPr id="11" name="TextBox 10"/>
+          <p:cNvSpPr txBox="1"/>
+          <p:nvPr/>
+        </p:nvSpPr>
+        <p:spPr>
+          <a:xfrm>
+            <a:off x="841248" y="2761488"/>
+            <a:ext cx="1143000" cy="365760"/>
+          </a:xfrm>
+          <a:prstGeom prst="rect">
+            <a:avLst/>
+          </a:prstGeom>
+          <a:noFill/>
+        </p:spPr>
+        <p:txBody>
+          <a:bodyPr wrap="square" lIns="0" rIns="0" tIns="0" bIns="0">
+            <a:spAutoFit/>
+          </a:bodyPr>
           <a:lstStyle/>
           <a:p>
             <a:pPr algn="l">
@@ -7468,107 +6815,132 @@
               </a:spcBef>
             </a:pPr>
             <a:r>
-              <a:rPr sz="1600" b="1">
+              <a:rPr sz="1400" b="1">
                 <a:solidFill>
                   <a:srgbClr val="35C48F"/>
                 </a:solidFill>
                 <a:latin typeface="Microsoft YaHei"/>
               </a:rPr>
-              <a:t>✓ 接口卡：只给导出签名</a:t>
-            </a:r>
-          </a:p>
-          <a:p>
-            <a:pPr algn="l">
-              <a:spcBef>
-                <a:spcPts val="1400"/>
-              </a:spcBef>
-            </a:pPr>
-            <a:r>
-              <a:rPr sz="1100" b="0">
+              <a:t/>
+            </a:r>
+            <a:r>
+              <a:rPr sz="1400" b="1">
+                <a:solidFill>
+                  <a:srgbClr val="35C48F"/>
+                </a:solidFill>
+                <a:latin typeface="Microsoft YaHei"/>
+              </a:rPr>
+              <a:t>编排层</a:t>
+            </a:r>
+          </a:p>
+        </p:txBody>
+      </p:sp>
+      <p:sp>
+        <p:nvSpPr>
+          <p:cNvPr id="12" name="TextBox 11"/>
+          <p:cNvSpPr txBox="1"/>
+          <p:nvPr/>
+        </p:nvSpPr>
+        <p:spPr>
+          <a:xfrm>
+            <a:off x="2011680" y="2670048"/>
+            <a:ext cx="5212080" cy="548640"/>
+          </a:xfrm>
+          <a:prstGeom prst="rect">
+            <a:avLst/>
+          </a:prstGeom>
+          <a:noFill/>
+        </p:spPr>
+        <p:txBody>
+          <a:bodyPr wrap="square" lIns="0" rIns="0" tIns="0" bIns="0">
+            <a:spAutoFit/>
+          </a:bodyPr>
+          <a:lstStyle/>
+          <a:p>
+            <a:pPr algn="l">
+              <a:spcBef>
+                <a:spcPts val="0"/>
+              </a:spcBef>
+            </a:pPr>
+            <a:r>
+              <a:rPr sz="1200" b="0">
                 <a:solidFill>
                   <a:srgbClr val="EAF0F6"/>
                 </a:solidFill>
                 <a:latin typeface="Microsoft YaHei"/>
               </a:rPr>
-              <a:t>export function handlePapersRoute(req: PapersRequest): PapersResponse | null</a:t>
-            </a:r>
-          </a:p>
-          <a:p>
-            <a:pPr algn="l">
-              <a:spcBef>
-                <a:spcPts val="400"/>
-              </a:spcBef>
-            </a:pPr>
-            <a:r>
-              <a:rPr sz="1100" b="0">
+              <a:t/>
+            </a:r>
+            <a:r>
+              <a:rPr sz="1200" b="0">
                 <a:solidFill>
                   <a:srgbClr val="EAF0F6"/>
                 </a:solidFill>
                 <a:latin typeface="Microsoft YaHei"/>
               </a:rPr>
-              <a:t>export function listPapers(): PaperRecord[]</a:t>
-            </a:r>
-          </a:p>
-          <a:p>
-            <a:pPr algn="l">
-              <a:spcBef>
-                <a:spcPts val="400"/>
-              </a:spcBef>
-            </a:pPr>
-            <a:r>
-              <a:rPr sz="1100" b="0">
-                <a:solidFill>
-                  <a:srgbClr val="EAF0F6"/>
-                </a:solidFill>
-                <a:latin typeface="Microsoft YaHei"/>
-              </a:rPr>
-              <a:t>export interface PaperRecord</a:t>
-            </a:r>
-          </a:p>
-          <a:p>
-            <a:pPr algn="l">
-              <a:spcBef>
-                <a:spcPts val="1400"/>
-              </a:spcBef>
-            </a:pPr>
-            <a:r>
-              <a:rPr sz="1100" b="0">
-                <a:solidFill>
-                  <a:srgbClr val="35C48F"/>
-                </a:solidFill>
-                <a:latin typeface="Microsoft YaHei"/>
-              </a:rPr>
-              <a:t>实测：11 个模块的全部签名 ≈ 5 千字符</a:t>
-            </a:r>
-          </a:p>
-          <a:p>
-            <a:pPr algn="l">
-              <a:spcBef>
-                <a:spcPts val="400"/>
-              </a:spcBef>
-            </a:pPr>
-            <a:r>
-              <a:rPr sz="1100" b="0">
+              <a:t>8 阶段状态机 · 唯一 Gate · 账本 · 机械裁判 · 圆桌 · 逃生</a:t>
+            </a:r>
+          </a:p>
+        </p:txBody>
+      </p:sp>
+      <p:sp>
+        <p:nvSpPr>
+          <p:cNvPr id="13" name="TextBox 12"/>
+          <p:cNvSpPr txBox="1"/>
+          <p:nvPr/>
+        </p:nvSpPr>
+        <p:spPr>
+          <a:xfrm>
+            <a:off x="6949440" y="2761488"/>
+            <a:ext cx="1810512" cy="365760"/>
+          </a:xfrm>
+          <a:prstGeom prst="rect">
+            <a:avLst/>
+          </a:prstGeom>
+          <a:noFill/>
+        </p:spPr>
+        <p:txBody>
+          <a:bodyPr wrap="square" lIns="0" rIns="0" tIns="0" bIns="0">
+            <a:spAutoFit/>
+          </a:bodyPr>
+          <a:lstStyle/>
+          <a:p>
+            <a:pPr algn="l">
+              <a:spcBef>
+                <a:spcPts val="0"/>
+              </a:spcBef>
+            </a:pPr>
+            <a:r>
+              <a:rPr sz="1000" b="0">
                 <a:solidFill>
                   <a:srgbClr val="9AA7B4"/>
                 </a:solidFill>
                 <a:latin typeface="Microsoft YaHei"/>
               </a:rPr>
-              <a:t>与全文相差 40 倍 —— 这是「只传接口」的量化价值</a:t>
-            </a:r>
-          </a:p>
-        </p:txBody>
-      </p:sp>
-      <p:sp>
-        <p:nvSpPr>
-          <p:cNvPr id="9" name="Rounded Rectangle 8"/>
+              <a:t/>
+            </a:r>
+            <a:r>
+              <a:rPr sz="1000" b="0">
+                <a:solidFill>
+                  <a:srgbClr val="9AA7B4"/>
+                </a:solidFill>
+                <a:latin typeface="Microsoft YaHei"/>
+              </a:rPr>
+              <a:t>orchestrator/（零 LLM 调用）</a:t>
+            </a:r>
+          </a:p>
+        </p:txBody>
+      </p:sp>
+      <p:sp>
+        <p:nvSpPr>
+          <p:cNvPr id="14" name="Rounded Rectangle 13"/>
           <p:cNvSpPr/>
           <p:nvPr/>
         </p:nvSpPr>
         <p:spPr>
           <a:xfrm>
-            <a:off x="640080" y="5193792"/>
-            <a:ext cx="5120640" cy="1051560"/>
+            <a:off x="640080" y="3392424"/>
+            <a:ext cx="8275320" cy="713232"/>
           </a:xfrm>
           <a:prstGeom prst="roundRect">
             <a:avLst>
@@ -7600,7 +6972,33 @@
           </a:fontRef>
         </p:style>
         <p:txBody>
-          <a:bodyPr rtlCol="0" anchor="ctr" wrap="square" lIns="137160"/>
+          <a:bodyPr rtlCol="0" anchor="ctr"/>
+          <a:lstStyle/>
+          <a:p>
+            <a:pPr algn="ctr"/>
+          </a:p>
+        </p:txBody>
+      </p:sp>
+      <p:sp>
+        <p:nvSpPr>
+          <p:cNvPr id="15" name="TextBox 14"/>
+          <p:cNvSpPr txBox="1"/>
+          <p:nvPr/>
+        </p:nvSpPr>
+        <p:spPr>
+          <a:xfrm>
+            <a:off x="841248" y="3566160"/>
+            <a:ext cx="1143000" cy="365760"/>
+          </a:xfrm>
+          <a:prstGeom prst="rect">
+            <a:avLst/>
+          </a:prstGeom>
+          <a:noFill/>
+        </p:spPr>
+        <p:txBody>
+          <a:bodyPr wrap="square" lIns="0" rIns="0" tIns="0" bIns="0">
+            <a:spAutoFit/>
+          </a:bodyPr>
           <a:lstStyle/>
           <a:p>
             <a:pPr algn="l">
@@ -7609,43 +7007,132 @@
               </a:spcBef>
             </a:pPr>
             <a:r>
-              <a:rPr sz="1200" b="1">
+              <a:rPr sz="1400" b="1">
                 <a:solidFill>
                   <a:srgbClr val="35C48F"/>
                 </a:solidFill>
                 <a:latin typeface="Microsoft YaHei"/>
               </a:rPr>
-              <a:t>六种通信通道</a:t>
-            </a:r>
-          </a:p>
-          <a:p>
-            <a:pPr algn="l">
-              <a:spcBef>
-                <a:spcPts val="400"/>
+              <a:t/>
+            </a:r>
+            <a:r>
+              <a:rPr sz="1400" b="1">
+                <a:solidFill>
+                  <a:srgbClr val="35C48F"/>
+                </a:solidFill>
+                <a:latin typeface="Microsoft YaHei"/>
+              </a:rPr>
+              <a:t>验收层</a:t>
+            </a:r>
+          </a:p>
+        </p:txBody>
+      </p:sp>
+      <p:sp>
+        <p:nvSpPr>
+          <p:cNvPr id="16" name="TextBox 15"/>
+          <p:cNvSpPr txBox="1"/>
+          <p:nvPr/>
+        </p:nvSpPr>
+        <p:spPr>
+          <a:xfrm>
+            <a:off x="2011680" y="3474720"/>
+            <a:ext cx="5212080" cy="548640"/>
+          </a:xfrm>
+          <a:prstGeom prst="rect">
+            <a:avLst/>
+          </a:prstGeom>
+          <a:noFill/>
+        </p:spPr>
+        <p:txBody>
+          <a:bodyPr wrap="square" lIns="0" rIns="0" tIns="0" bIns="0">
+            <a:spAutoFit/>
+          </a:bodyPr>
+          <a:lstStyle/>
+          <a:p>
+            <a:pPr algn="l">
+              <a:spcBef>
+                <a:spcPts val="0"/>
+              </a:spcBef>
+            </a:pPr>
+            <a:r>
+              <a:rPr sz="1200" b="0">
+                <a:solidFill>
+                  <a:srgbClr val="EAF0F6"/>
+                </a:solidFill>
+                <a:latin typeface="Microsoft YaHei"/>
+              </a:rPr>
+              <a:t/>
+            </a:r>
+            <a:r>
+              <a:rPr sz="1200" b="0">
+                <a:solidFill>
+                  <a:srgbClr val="EAF0F6"/>
+                </a:solidFill>
+                <a:latin typeface="Microsoft YaHei"/>
+              </a:rPr>
+              <a:t>A1–A8 事实锚（编译/测试/探针/契约/基准） · B1–B3 语义锚</a:t>
+            </a:r>
+          </a:p>
+        </p:txBody>
+      </p:sp>
+      <p:sp>
+        <p:nvSpPr>
+          <p:cNvPr id="17" name="TextBox 16"/>
+          <p:cNvSpPr txBox="1"/>
+          <p:nvPr/>
+        </p:nvSpPr>
+        <p:spPr>
+          <a:xfrm>
+            <a:off x="6949440" y="3566160"/>
+            <a:ext cx="1810512" cy="365760"/>
+          </a:xfrm>
+          <a:prstGeom prst="rect">
+            <a:avLst/>
+          </a:prstGeom>
+          <a:noFill/>
+        </p:spPr>
+        <p:txBody>
+          <a:bodyPr wrap="square" lIns="0" rIns="0" tIns="0" bIns="0">
+            <a:spAutoFit/>
+          </a:bodyPr>
+          <a:lstStyle/>
+          <a:p>
+            <a:pPr algn="l">
+              <a:spcBef>
+                <a:spcPts val="0"/>
               </a:spcBef>
             </a:pPr>
             <a:r>
               <a:rPr sz="1000" b="0">
                 <a:solidFill>
-                  <a:srgbClr val="EAF0F6"/>
-                </a:solidFill>
-                <a:latin typeface="Microsoft YaHei"/>
-              </a:rPr>
-              <a:t>工件库 · 读权限矩阵 · 契约（唯一必须送达）· 模块接口卡 · 工单 · 圆桌</a:t>
-            </a:r>
-          </a:p>
-        </p:txBody>
-      </p:sp>
-      <p:sp>
-        <p:nvSpPr>
-          <p:cNvPr id="10" name="Rounded Rectangle 9"/>
+                  <a:srgbClr val="9AA7B4"/>
+                </a:solidFill>
+                <a:latin typeface="Microsoft YaHei"/>
+              </a:rPr>
+              <a:t/>
+            </a:r>
+            <a:r>
+              <a:rPr sz="1000" b="0">
+                <a:solidFill>
+                  <a:srgbClr val="9AA7B4"/>
+                </a:solidFill>
+                <a:latin typeface="Microsoft YaHei"/>
+              </a:rPr>
+              <a:t>anchors/（LLM 提议 + 机械核验）</a:t>
+            </a:r>
+          </a:p>
+        </p:txBody>
+      </p:sp>
+      <p:sp>
+        <p:nvSpPr>
+          <p:cNvPr id="18" name="Rounded Rectangle 17"/>
           <p:cNvSpPr/>
           <p:nvPr/>
         </p:nvSpPr>
         <p:spPr>
           <a:xfrm>
-            <a:off x="6053328" y="5193792"/>
-            <a:ext cx="5495544" cy="1051560"/>
+            <a:off x="640080" y="4197096"/>
+            <a:ext cx="8275320" cy="713232"/>
           </a:xfrm>
           <a:prstGeom prst="roundRect">
             <a:avLst>
@@ -7677,52 +7164,23 @@
           </a:fontRef>
         </p:style>
         <p:txBody>
-          <a:bodyPr rtlCol="0" anchor="ctr" wrap="square" lIns="137160"/>
-          <a:lstStyle/>
-          <a:p>
-            <a:pPr algn="l">
-              <a:spcBef>
-                <a:spcPts val="0"/>
-              </a:spcBef>
-            </a:pPr>
-            <a:r>
-              <a:rPr sz="1200" b="1">
-                <a:solidFill>
-                  <a:srgbClr val="35C48F"/>
-                </a:solidFill>
-                <a:latin typeface="Microsoft YaHei"/>
-              </a:rPr>
-              <a:t>五层配额（从「谁先谁得」改成「谁需要谁得」）</a:t>
-            </a:r>
-          </a:p>
-          <a:p>
-            <a:pPr algn="l">
-              <a:spcBef>
-                <a:spcPts val="400"/>
-              </a:spcBef>
-            </a:pPr>
-            <a:r>
-              <a:rPr sz="1100" b="0">
-                <a:solidFill>
-                  <a:srgbClr val="EAF0F6"/>
-                </a:solidFill>
-                <a:latin typeface="Microsoft YaHei"/>
-              </a:rPr>
-              <a:t>规格 → 执行事实 → 模块接口 → 代码全文 → 需求计划（关键三件保证送达）</a:t>
-            </a:r>
-          </a:p>
-        </p:txBody>
-      </p:sp>
-      <p:sp>
-        <p:nvSpPr>
-          <p:cNvPr id="11" name="TextBox 10"/>
+          <a:bodyPr rtlCol="0" anchor="ctr"/>
+          <a:lstStyle/>
+          <a:p>
+            <a:pPr algn="ctr"/>
+          </a:p>
+        </p:txBody>
+      </p:sp>
+      <p:sp>
+        <p:nvSpPr>
+          <p:cNvPr id="19" name="TextBox 18"/>
           <p:cNvSpPr txBox="1"/>
           <p:nvPr/>
         </p:nvSpPr>
         <p:spPr>
           <a:xfrm>
-            <a:off x="640080" y="6355080"/>
-            <a:ext cx="7315200" cy="274320"/>
+            <a:off x="841248" y="4370832"/>
+            <a:ext cx="1143000" cy="365760"/>
           </a:xfrm>
           <a:prstGeom prst="rect">
             <a:avLst/>
@@ -7741,36 +7199,36 @@
               </a:spcBef>
             </a:pPr>
             <a:r>
-              <a:rPr sz="1000" b="0">
-                <a:solidFill>
-                  <a:srgbClr val="9AA7B4"/>
+              <a:rPr sz="1400" b="1">
+                <a:solidFill>
+                  <a:srgbClr val="EAF0F6"/>
                 </a:solidFill>
                 <a:latin typeface="Microsoft YaHei"/>
               </a:rPr>
               <a:t/>
             </a:r>
             <a:r>
-              <a:rPr sz="1000" b="0">
-                <a:solidFill>
-                  <a:srgbClr val="9AA7B4"/>
-                </a:solidFill>
-                <a:latin typeface="Microsoft YaHei"/>
-              </a:rPr>
-              <a:t>AgentForge · 多角色 AI 研发引擎 · 赛道 B</a:t>
-            </a:r>
-          </a:p>
-        </p:txBody>
-      </p:sp>
-      <p:sp>
-        <p:nvSpPr>
-          <p:cNvPr id="12" name="TextBox 11"/>
+              <a:rPr sz="1400" b="1">
+                <a:solidFill>
+                  <a:srgbClr val="EAF0F6"/>
+                </a:solidFill>
+                <a:latin typeface="Microsoft YaHei"/>
+              </a:rPr>
+              <a:t>角色层</a:t>
+            </a:r>
+          </a:p>
+        </p:txBody>
+      </p:sp>
+      <p:sp>
+        <p:nvSpPr>
+          <p:cNvPr id="20" name="TextBox 19"/>
           <p:cNvSpPr txBox="1"/>
           <p:nvPr/>
         </p:nvSpPr>
         <p:spPr>
           <a:xfrm>
-            <a:off x="10607040" y="6355080"/>
-            <a:ext cx="914400" cy="274320"/>
+            <a:off x="2011680" y="4279392"/>
+            <a:ext cx="5212080" cy="548640"/>
           </a:xfrm>
           <a:prstGeom prst="rect">
             <a:avLst/>
@@ -7789,6 +7247,54 @@
               </a:spcBef>
             </a:pPr>
             <a:r>
+              <a:rPr sz="1200" b="0">
+                <a:solidFill>
+                  <a:srgbClr val="EAF0F6"/>
+                </a:solidFill>
+                <a:latin typeface="Microsoft YaHei"/>
+              </a:rPr>
+              <a:t/>
+            </a:r>
+            <a:r>
+              <a:rPr sz="1200" b="0">
+                <a:solidFill>
+                  <a:srgbClr val="EAF0F6"/>
+                </a:solidFill>
+                <a:latin typeface="Microsoft YaHei"/>
+              </a:rPr>
+              <a:t>pm · backend · frontend · test · host</a:t>
+            </a:r>
+          </a:p>
+        </p:txBody>
+      </p:sp>
+      <p:sp>
+        <p:nvSpPr>
+          <p:cNvPr id="21" name="TextBox 20"/>
+          <p:cNvSpPr txBox="1"/>
+          <p:nvPr/>
+        </p:nvSpPr>
+        <p:spPr>
+          <a:xfrm>
+            <a:off x="6949440" y="4370832"/>
+            <a:ext cx="1810512" cy="365760"/>
+          </a:xfrm>
+          <a:prstGeom prst="rect">
+            <a:avLst/>
+          </a:prstGeom>
+          <a:noFill/>
+        </p:spPr>
+        <p:txBody>
+          <a:bodyPr wrap="square" lIns="0" rIns="0" tIns="0" bIns="0">
+            <a:spAutoFit/>
+          </a:bodyPr>
+          <a:lstStyle/>
+          <a:p>
+            <a:pPr algn="l">
+              <a:spcBef>
+                <a:spcPts val="0"/>
+              </a:spcBef>
+            </a:pPr>
+            <a:r>
               <a:rPr sz="1000" b="0">
                 <a:solidFill>
                   <a:srgbClr val="9AA7B4"/>
@@ -7804,7 +7310,465 @@
                 </a:solidFill>
                 <a:latin typeface="Microsoft YaHei"/>
               </a:rPr>
-              <a:t>5 / 8</a:t>
+              <a:t>roles/（上下文装配 + schema 门禁）</a:t>
+            </a:r>
+          </a:p>
+        </p:txBody>
+      </p:sp>
+      <p:sp>
+        <p:nvSpPr>
+          <p:cNvPr id="22" name="Rounded Rectangle 21"/>
+          <p:cNvSpPr/>
+          <p:nvPr/>
+        </p:nvSpPr>
+        <p:spPr>
+          <a:xfrm>
+            <a:off x="640080" y="5001768"/>
+            <a:ext cx="8275320" cy="713232"/>
+          </a:xfrm>
+          <a:prstGeom prst="roundRect">
+            <a:avLst>
+              <a:gd name="adj" fmla="val 6000"/>
+            </a:avLst>
+          </a:prstGeom>
+          <a:solidFill>
+            <a:srgbClr val="182028"/>
+          </a:solidFill>
+          <a:ln w="12700">
+            <a:solidFill>
+              <a:srgbClr val="2B3642"/>
+            </a:solidFill>
+          </a:ln>
+          <a:effectLst/>
+        </p:spPr>
+        <p:style>
+          <a:lnRef idx="1">
+            <a:schemeClr val="accent1"/>
+          </a:lnRef>
+          <a:fillRef idx="3">
+            <a:schemeClr val="accent1"/>
+          </a:fillRef>
+          <a:effectRef idx="2">
+            <a:schemeClr val="accent1"/>
+          </a:effectRef>
+          <a:fontRef idx="minor">
+            <a:schemeClr val="lt1"/>
+          </a:fontRef>
+        </p:style>
+        <p:txBody>
+          <a:bodyPr rtlCol="0" anchor="ctr"/>
+          <a:lstStyle/>
+          <a:p>
+            <a:pPr algn="ctr"/>
+          </a:p>
+        </p:txBody>
+      </p:sp>
+      <p:sp>
+        <p:nvSpPr>
+          <p:cNvPr id="23" name="TextBox 22"/>
+          <p:cNvSpPr txBox="1"/>
+          <p:nvPr/>
+        </p:nvSpPr>
+        <p:spPr>
+          <a:xfrm>
+            <a:off x="841248" y="5175504"/>
+            <a:ext cx="1143000" cy="365760"/>
+          </a:xfrm>
+          <a:prstGeom prst="rect">
+            <a:avLst/>
+          </a:prstGeom>
+          <a:noFill/>
+        </p:spPr>
+        <p:txBody>
+          <a:bodyPr wrap="square" lIns="0" rIns="0" tIns="0" bIns="0">
+            <a:spAutoFit/>
+          </a:bodyPr>
+          <a:lstStyle/>
+          <a:p>
+            <a:pPr algn="l">
+              <a:spcBef>
+                <a:spcPts val="0"/>
+              </a:spcBef>
+            </a:pPr>
+            <a:r>
+              <a:rPr sz="1400" b="1">
+                <a:solidFill>
+                  <a:srgbClr val="9AA7B4"/>
+                </a:solidFill>
+                <a:latin typeface="Microsoft YaHei"/>
+              </a:rPr>
+              <a:t/>
+            </a:r>
+            <a:r>
+              <a:rPr sz="1400" b="1">
+                <a:solidFill>
+                  <a:srgbClr val="9AA7B4"/>
+                </a:solidFill>
+                <a:latin typeface="Microsoft YaHei"/>
+              </a:rPr>
+              <a:t>能力层</a:t>
+            </a:r>
+          </a:p>
+        </p:txBody>
+      </p:sp>
+      <p:sp>
+        <p:nvSpPr>
+          <p:cNvPr id="24" name="TextBox 23"/>
+          <p:cNvSpPr txBox="1"/>
+          <p:nvPr/>
+        </p:nvSpPr>
+        <p:spPr>
+          <a:xfrm>
+            <a:off x="2011680" y="5084064"/>
+            <a:ext cx="5212080" cy="548640"/>
+          </a:xfrm>
+          <a:prstGeom prst="rect">
+            <a:avLst/>
+          </a:prstGeom>
+          <a:noFill/>
+        </p:spPr>
+        <p:txBody>
+          <a:bodyPr wrap="square" lIns="0" rIns="0" tIns="0" bIns="0">
+            <a:spAutoFit/>
+          </a:bodyPr>
+          <a:lstStyle/>
+          <a:p>
+            <a:pPr algn="l">
+              <a:spcBef>
+                <a:spcPts val="0"/>
+              </a:spcBef>
+            </a:pPr>
+            <a:r>
+              <a:rPr sz="1200" b="0">
+                <a:solidFill>
+                  <a:srgbClr val="EAF0F6"/>
+                </a:solidFill>
+                <a:latin typeface="Microsoft YaHei"/>
+              </a:rPr>
+              <a:t/>
+            </a:r>
+            <a:r>
+              <a:rPr sz="1200" b="0">
+                <a:solidFill>
+                  <a:srgbClr val="EAF0F6"/>
+                </a:solidFill>
+                <a:latin typeface="Microsoft YaHei"/>
+              </a:rPr>
+              <a:t>Provider 抽象 · 录制回放 · 三层记忆 · 工件库 · 哈希链日志</a:t>
+            </a:r>
+          </a:p>
+        </p:txBody>
+      </p:sp>
+      <p:sp>
+        <p:nvSpPr>
+          <p:cNvPr id="25" name="TextBox 24"/>
+          <p:cNvSpPr txBox="1"/>
+          <p:nvPr/>
+        </p:nvSpPr>
+        <p:spPr>
+          <a:xfrm>
+            <a:off x="6949440" y="5175504"/>
+            <a:ext cx="1810512" cy="365760"/>
+          </a:xfrm>
+          <a:prstGeom prst="rect">
+            <a:avLst/>
+          </a:prstGeom>
+          <a:noFill/>
+        </p:spPr>
+        <p:txBody>
+          <a:bodyPr wrap="square" lIns="0" rIns="0" tIns="0" bIns="0">
+            <a:spAutoFit/>
+          </a:bodyPr>
+          <a:lstStyle/>
+          <a:p>
+            <a:pPr algn="l">
+              <a:spcBef>
+                <a:spcPts val="0"/>
+              </a:spcBef>
+            </a:pPr>
+            <a:r>
+              <a:rPr sz="1000" b="0">
+                <a:solidFill>
+                  <a:srgbClr val="9AA7B4"/>
+                </a:solidFill>
+                <a:latin typeface="Microsoft YaHei"/>
+              </a:rPr>
+              <a:t/>
+            </a:r>
+            <a:r>
+              <a:rPr sz="1000" b="0">
+                <a:solidFill>
+                  <a:srgbClr val="9AA7B4"/>
+                </a:solidFill>
+                <a:latin typeface="Microsoft YaHei"/>
+              </a:rPr>
+              <a:t>llm/ · memory/ · core/</a:t>
+            </a:r>
+          </a:p>
+        </p:txBody>
+      </p:sp>
+      <p:sp>
+        <p:nvSpPr>
+          <p:cNvPr id="26" name="Rounded Rectangle 25"/>
+          <p:cNvSpPr/>
+          <p:nvPr/>
+        </p:nvSpPr>
+        <p:spPr>
+          <a:xfrm>
+            <a:off x="9098280" y="1783080"/>
+            <a:ext cx="2450592" cy="3566160"/>
+          </a:xfrm>
+          <a:prstGeom prst="roundRect">
+            <a:avLst>
+              <a:gd name="adj" fmla="val 6000"/>
+            </a:avLst>
+          </a:prstGeom>
+          <a:solidFill>
+            <a:srgbClr val="182028"/>
+          </a:solidFill>
+          <a:ln w="12700">
+            <a:solidFill>
+              <a:srgbClr val="2B3642"/>
+            </a:solidFill>
+          </a:ln>
+          <a:effectLst/>
+        </p:spPr>
+        <p:style>
+          <a:lnRef idx="1">
+            <a:schemeClr val="accent1"/>
+          </a:lnRef>
+          <a:fillRef idx="3">
+            <a:schemeClr val="accent1"/>
+          </a:fillRef>
+          <a:effectRef idx="2">
+            <a:schemeClr val="accent1"/>
+          </a:effectRef>
+          <a:fontRef idx="minor">
+            <a:schemeClr val="lt1"/>
+          </a:fontRef>
+        </p:style>
+        <p:txBody>
+          <a:bodyPr rtlCol="0" anchor="ctr" wrap="square" lIns="137160" tIns="109728"/>
+          <a:lstStyle/>
+          <a:p>
+            <a:pPr algn="l">
+              <a:spcBef>
+                <a:spcPts val="0"/>
+              </a:spcBef>
+            </a:pPr>
+            <a:r>
+              <a:rPr sz="1300" b="1">
+                <a:solidFill>
+                  <a:srgbClr val="35C48F"/>
+                </a:solidFill>
+                <a:latin typeface="Microsoft YaHei"/>
+              </a:rPr>
+              <a:t>三个设计决定</a:t>
+            </a:r>
+          </a:p>
+          <a:p>
+            <a:pPr algn="l">
+              <a:spcBef>
+                <a:spcPts val="1200"/>
+              </a:spcBef>
+            </a:pPr>
+            <a:r>
+              <a:rPr sz="1100" b="0">
+                <a:solidFill>
+                  <a:srgbClr val="EAF0F6"/>
+                </a:solidFill>
+                <a:latin typeface="Microsoft YaHei"/>
+              </a:rPr>
+              <a:t>① 编排里没有一次 LLM 调用</a:t>
+            </a:r>
+          </a:p>
+          <a:p>
+            <a:pPr algn="l">
+              <a:spcBef>
+                <a:spcPts val="800"/>
+              </a:spcBef>
+            </a:pPr>
+            <a:r>
+              <a:rPr sz="1100" b="0">
+                <a:solidFill>
+                  <a:srgbClr val="EAF0F6"/>
+                </a:solidFill>
+                <a:latin typeface="Microsoft YaHei"/>
+              </a:rPr>
+              <a:t>② SKIPPED ≠ PASS</a:t>
+            </a:r>
+          </a:p>
+          <a:p>
+            <a:pPr algn="l">
+              <a:spcBef>
+                <a:spcPts val="800"/>
+              </a:spcBef>
+            </a:pPr>
+            <a:r>
+              <a:rPr sz="1100" b="0">
+                <a:solidFill>
+                  <a:srgbClr val="EAF0F6"/>
+                </a:solidFill>
+                <a:latin typeface="Microsoft YaHei"/>
+              </a:rPr>
+              <a:t>③ 8 个阶段共用同一个 Gate</a:t>
+            </a:r>
+          </a:p>
+        </p:txBody>
+      </p:sp>
+      <p:sp>
+        <p:nvSpPr>
+          <p:cNvPr id="27" name="Rounded Rectangle 26"/>
+          <p:cNvSpPr/>
+          <p:nvPr/>
+        </p:nvSpPr>
+        <p:spPr>
+          <a:xfrm>
+            <a:off x="640080" y="5806440"/>
+            <a:ext cx="10908792" cy="457200"/>
+          </a:xfrm>
+          <a:prstGeom prst="roundRect">
+            <a:avLst>
+              <a:gd name="adj" fmla="val 6000"/>
+            </a:avLst>
+          </a:prstGeom>
+          <a:solidFill>
+            <a:srgbClr val="182028"/>
+          </a:solidFill>
+          <a:ln w="12700">
+            <a:solidFill>
+              <a:srgbClr val="2B3642"/>
+            </a:solidFill>
+          </a:ln>
+          <a:effectLst/>
+        </p:spPr>
+        <p:style>
+          <a:lnRef idx="1">
+            <a:schemeClr val="accent1"/>
+          </a:lnRef>
+          <a:fillRef idx="3">
+            <a:schemeClr val="accent1"/>
+          </a:fillRef>
+          <a:effectRef idx="2">
+            <a:schemeClr val="accent1"/>
+          </a:effectRef>
+          <a:fontRef idx="minor">
+            <a:schemeClr val="lt1"/>
+          </a:fontRef>
+        </p:style>
+        <p:txBody>
+          <a:bodyPr rtlCol="0" anchor="ctr" wrap="square" lIns="137160"/>
+          <a:lstStyle/>
+          <a:p>
+            <a:pPr algn="l">
+              <a:spcBef>
+                <a:spcPts val="0"/>
+              </a:spcBef>
+            </a:pPr>
+            <a:r>
+              <a:rPr sz="1100" b="0">
+                <a:solidFill>
+                  <a:srgbClr val="9AA7B4"/>
+                </a:solidFill>
+                <a:latin typeface="Microsoft YaHei"/>
+              </a:rPr>
+              <a:t>零依赖：Node ≥ 24 原生执行 TypeScript，克隆即跑（401 个测试；CI 断言仓库根目录没有 node_modules）</a:t>
+            </a:r>
+          </a:p>
+        </p:txBody>
+      </p:sp>
+      <p:sp>
+        <p:nvSpPr>
+          <p:cNvPr id="28" name="TextBox 27"/>
+          <p:cNvSpPr txBox="1"/>
+          <p:nvPr/>
+        </p:nvSpPr>
+        <p:spPr>
+          <a:xfrm>
+            <a:off x="640080" y="6355080"/>
+            <a:ext cx="7315200" cy="274320"/>
+          </a:xfrm>
+          <a:prstGeom prst="rect">
+            <a:avLst/>
+          </a:prstGeom>
+          <a:noFill/>
+        </p:spPr>
+        <p:txBody>
+          <a:bodyPr wrap="square" lIns="0" rIns="0" tIns="0" bIns="0">
+            <a:spAutoFit/>
+          </a:bodyPr>
+          <a:lstStyle/>
+          <a:p>
+            <a:pPr algn="l">
+              <a:spcBef>
+                <a:spcPts val="0"/>
+              </a:spcBef>
+            </a:pPr>
+            <a:r>
+              <a:rPr sz="1000" b="0">
+                <a:solidFill>
+                  <a:srgbClr val="9AA7B4"/>
+                </a:solidFill>
+                <a:latin typeface="Microsoft YaHei"/>
+              </a:rPr>
+              <a:t/>
+            </a:r>
+            <a:r>
+              <a:rPr sz="1000" b="0">
+                <a:solidFill>
+                  <a:srgbClr val="9AA7B4"/>
+                </a:solidFill>
+                <a:latin typeface="Microsoft YaHei"/>
+              </a:rPr>
+              <a:t>AgentForge · 多角色 AI 研发引擎 · 赛道 B</a:t>
+            </a:r>
+          </a:p>
+        </p:txBody>
+      </p:sp>
+      <p:sp>
+        <p:nvSpPr>
+          <p:cNvPr id="29" name="TextBox 28"/>
+          <p:cNvSpPr txBox="1"/>
+          <p:nvPr/>
+        </p:nvSpPr>
+        <p:spPr>
+          <a:xfrm>
+            <a:off x="10607040" y="6355080"/>
+            <a:ext cx="914400" cy="274320"/>
+          </a:xfrm>
+          <a:prstGeom prst="rect">
+            <a:avLst/>
+          </a:prstGeom>
+          <a:noFill/>
+        </p:spPr>
+        <p:txBody>
+          <a:bodyPr wrap="square" lIns="0" rIns="0" tIns="0" bIns="0">
+            <a:spAutoFit/>
+          </a:bodyPr>
+          <a:lstStyle/>
+          <a:p>
+            <a:pPr algn="l">
+              <a:spcBef>
+                <a:spcPts val="0"/>
+              </a:spcBef>
+            </a:pPr>
+            <a:r>
+              <a:rPr sz="1000" b="0">
+                <a:solidFill>
+                  <a:srgbClr val="9AA7B4"/>
+                </a:solidFill>
+                <a:latin typeface="Microsoft YaHei"/>
+              </a:rPr>
+              <a:t/>
+            </a:r>
+            <a:r>
+              <a:rPr sz="1000" b="0">
+                <a:solidFill>
+                  <a:srgbClr val="9AA7B4"/>
+                </a:solidFill>
+                <a:latin typeface="Microsoft YaHei"/>
+              </a:rPr>
+              <a:t>5 / 9</a:t>
             </a:r>
           </a:p>
         </p:txBody>
@@ -7914,7 +7878,7 @@
                 </a:solidFill>
                 <a:latin typeface="Microsoft YaHei"/>
               </a:rPr>
-              <a:t>异常处理</a:t>
+              <a:t>Agent 链路</a:t>
             </a:r>
           </a:p>
         </p:txBody>
@@ -7962,7 +7926,7 @@
                 </a:solidFill>
                 <a:latin typeface="Microsoft YaHei"/>
               </a:rPr>
-              <a:t>四层逃生，机械判定，保证不死锁</a:t>
+              <a:t>五个角色不直接对话，只传接口</a:t>
             </a:r>
           </a:p>
         </p:txBody>
@@ -8010,7 +7974,7 @@
                 </a:solidFill>
                 <a:latin typeface="Microsoft YaHei"/>
               </a:rPr>
-              <a:t>decideEscape() 的三个分支穷举了所有情况 —— 它一定返回一个可执行动作</a:t>
+              <a:t>谁能看到什么由代码强制，不靠提示词自律</a:t>
             </a:r>
           </a:p>
         </p:txBody>
@@ -8059,7 +8023,7 @@
         <p:spPr>
           <a:xfrm>
             <a:off x="640080" y="1783080"/>
-            <a:ext cx="6766560" cy="786384"/>
+            <a:ext cx="5120640" cy="3246120"/>
           </a:xfrm>
           <a:prstGeom prst="roundRect">
             <a:avLst>
@@ -8091,33 +8055,7 @@
           </a:fontRef>
         </p:style>
         <p:txBody>
-          <a:bodyPr rtlCol="0" anchor="ctr"/>
-          <a:lstStyle/>
-          <a:p>
-            <a:pPr algn="ctr"/>
-          </a:p>
-        </p:txBody>
-      </p:sp>
-      <p:sp>
-        <p:nvSpPr>
-          <p:cNvPr id="8" name="TextBox 7"/>
-          <p:cNvSpPr txBox="1"/>
-          <p:nvPr/>
-        </p:nvSpPr>
-        <p:spPr>
-          <a:xfrm>
-            <a:off x="841248" y="1901952"/>
-            <a:ext cx="1828800" cy="365760"/>
-          </a:xfrm>
-          <a:prstGeom prst="rect">
-            <a:avLst/>
-          </a:prstGeom>
-          <a:noFill/>
-        </p:spPr>
-        <p:txBody>
-          <a:bodyPr wrap="square" lIns="0" rIns="0" tIns="0" bIns="0">
-            <a:spAutoFit/>
-          </a:bodyPr>
+          <a:bodyPr rtlCol="0" anchor="ctr" wrap="square" lIns="182880" tIns="137160"/>
           <a:lstStyle/>
           <a:p>
             <a:pPr algn="l">
@@ -8126,132 +8064,107 @@
               </a:spcBef>
             </a:pPr>
             <a:r>
-              <a:rPr sz="1500" b="1">
-                <a:solidFill>
-                  <a:srgbClr val="35C48F"/>
-                </a:solidFill>
-                <a:latin typeface="Microsoft YaHei"/>
-              </a:rPr>
-              <a:t/>
-            </a:r>
-            <a:r>
-              <a:rPr sz="1500" b="1">
-                <a:solidFill>
-                  <a:srgbClr val="35C48F"/>
-                </a:solidFill>
-                <a:latin typeface="Microsoft YaHei"/>
-              </a:rPr>
-              <a:t>① 打回返工</a:t>
-            </a:r>
-          </a:p>
-        </p:txBody>
-      </p:sp>
-      <p:sp>
-        <p:nvSpPr>
-          <p:cNvPr id="9" name="TextBox 8"/>
-          <p:cNvSpPr txBox="1"/>
-          <p:nvPr/>
-        </p:nvSpPr>
-        <p:spPr>
-          <a:xfrm>
-            <a:off x="2651760" y="1883664"/>
-            <a:ext cx="4572000" cy="274320"/>
-          </a:xfrm>
-          <a:prstGeom prst="rect">
-            <a:avLst/>
-          </a:prstGeom>
-          <a:noFill/>
-        </p:spPr>
-        <p:txBody>
-          <a:bodyPr wrap="square" lIns="0" rIns="0" tIns="0" bIns="0">
-            <a:spAutoFit/>
-          </a:bodyPr>
-          <a:lstStyle/>
-          <a:p>
-            <a:pPr algn="l">
-              <a:spcBef>
-                <a:spcPts val="0"/>
+              <a:rPr sz="1600" b="1">
+                <a:solidFill>
+                  <a:srgbClr val="E86A5C"/>
+                </a:solidFill>
+                <a:latin typeface="Microsoft YaHei"/>
+              </a:rPr>
+              <a:t>✗ 全文互传</a:t>
+            </a:r>
+          </a:p>
+          <a:p>
+            <a:pPr algn="l">
+              <a:spcBef>
+                <a:spcPts val="1200"/>
+              </a:spcBef>
+            </a:pPr>
+            <a:r>
+              <a:rPr sz="1200" b="0">
+                <a:solidFill>
+                  <a:srgbClr val="EAF0F6"/>
+                </a:solidFill>
+                <a:latin typeface="Microsoft YaHei"/>
+              </a:rPr>
+              <a:t>把全部源码堆进一个大上下文 =</a:t>
+            </a:r>
+          </a:p>
+          <a:p>
+            <a:pPr algn="l">
+              <a:spcBef>
+                <a:spcPts val="400"/>
+              </a:spcBef>
+            </a:pPr>
+            <a:r>
+              <a:rPr sz="1200" b="0">
+                <a:solidFill>
+                  <a:srgbClr val="EAF0F6"/>
+                </a:solidFill>
+                <a:latin typeface="Microsoft YaHei"/>
+              </a:rPr>
+              <a:t>把多角色系统退化成单一大上下文，</a:t>
+            </a:r>
+          </a:p>
+          <a:p>
+            <a:pPr algn="l">
+              <a:spcBef>
+                <a:spcPts val="400"/>
+              </a:spcBef>
+            </a:pPr>
+            <a:r>
+              <a:rPr sz="1200" b="0">
+                <a:solidFill>
+                  <a:srgbClr val="EAF0F6"/>
+                </a:solidFill>
+                <a:latin typeface="Microsoft YaHei"/>
+              </a:rPr>
+              <a:t>切分就白做了；</a:t>
+            </a:r>
+          </a:p>
+          <a:p>
+            <a:pPr algn="l">
+              <a:spcBef>
+                <a:spcPts val="400"/>
+              </a:spcBef>
+            </a:pPr>
+            <a:r>
+              <a:rPr sz="1200" b="0">
+                <a:solidFill>
+                  <a:srgbClr val="EAF0F6"/>
+                </a:solidFill>
+                <a:latin typeface="Microsoft YaHei"/>
+              </a:rPr>
+              <a:t>而且下一个更大的项目会再次溢出。</a:t>
+            </a:r>
+          </a:p>
+          <a:p>
+            <a:pPr algn="l">
+              <a:spcBef>
+                <a:spcPts val="1400"/>
               </a:spcBef>
             </a:pPr>
             <a:r>
               <a:rPr sz="1100" b="0">
                 <a:solidFill>
-                  <a:srgbClr val="EAF0F6"/>
-                </a:solidFill>
-                <a:latin typeface="Microsoft YaHei"/>
-              </a:rPr>
-              <a:t/>
-            </a:r>
-            <a:r>
-              <a:rPr sz="1100" b="0">
-                <a:solidFill>
-                  <a:srgbClr val="EAF0F6"/>
-                </a:solidFill>
-                <a:latin typeface="Microsoft YaHei"/>
-              </a:rPr>
-              <a:t>能归因就先打回；一条都归不了因才开会</a:t>
-            </a:r>
-          </a:p>
-        </p:txBody>
-      </p:sp>
-      <p:sp>
-        <p:nvSpPr>
-          <p:cNvPr id="10" name="TextBox 9"/>
-          <p:cNvSpPr txBox="1"/>
-          <p:nvPr/>
-        </p:nvSpPr>
-        <p:spPr>
-          <a:xfrm>
-            <a:off x="2651760" y="2167128"/>
-            <a:ext cx="4572000" cy="274320"/>
-          </a:xfrm>
-          <a:prstGeom prst="rect">
-            <a:avLst/>
-          </a:prstGeom>
-          <a:noFill/>
-        </p:spPr>
-        <p:txBody>
-          <a:bodyPr wrap="square" lIns="0" rIns="0" tIns="0" bIns="0">
-            <a:spAutoFit/>
-          </a:bodyPr>
-          <a:lstStyle/>
-          <a:p>
-            <a:pPr algn="l">
-              <a:spcBef>
-                <a:spcPts val="0"/>
-              </a:spcBef>
-            </a:pPr>
-            <a:r>
-              <a:rPr sz="1000" b="0">
-                <a:solidFill>
                   <a:srgbClr val="9AA7B4"/>
                 </a:solidFill>
                 <a:latin typeface="Microsoft YaHei"/>
               </a:rPr>
-              <a:t/>
-            </a:r>
-            <a:r>
-              <a:rPr sz="1000" b="0">
-                <a:solidFill>
-                  <a:srgbClr val="9AA7B4"/>
-                </a:solidFill>
-                <a:latin typeface="Microsoft YaHei"/>
-              </a:rPr>
-              <a:t>便宜、确定、有明确验收条件</a:t>
-            </a:r>
-          </a:p>
-        </p:txBody>
-      </p:sp>
-      <p:sp>
-        <p:nvSpPr>
-          <p:cNvPr id="11" name="Rounded Rectangle 10"/>
+              <a:t>实测：11 个模块全文 = 20 万字符</a:t>
+            </a:r>
+          </a:p>
+        </p:txBody>
+      </p:sp>
+      <p:sp>
+        <p:nvSpPr>
+          <p:cNvPr id="8" name="Rounded Rectangle 7"/>
           <p:cNvSpPr/>
           <p:nvPr/>
         </p:nvSpPr>
         <p:spPr>
           <a:xfrm>
-            <a:off x="640080" y="2679192"/>
-            <a:ext cx="6766560" cy="786384"/>
+            <a:off x="6053328" y="1783080"/>
+            <a:ext cx="5495544" cy="3246120"/>
           </a:xfrm>
           <a:prstGeom prst="roundRect">
             <a:avLst>
@@ -8283,33 +8196,7 @@
           </a:fontRef>
         </p:style>
         <p:txBody>
-          <a:bodyPr rtlCol="0" anchor="ctr"/>
-          <a:lstStyle/>
-          <a:p>
-            <a:pPr algn="ctr"/>
-          </a:p>
-        </p:txBody>
-      </p:sp>
-      <p:sp>
-        <p:nvSpPr>
-          <p:cNvPr id="12" name="TextBox 11"/>
-          <p:cNvSpPr txBox="1"/>
-          <p:nvPr/>
-        </p:nvSpPr>
-        <p:spPr>
-          <a:xfrm>
-            <a:off x="841248" y="2798064"/>
-            <a:ext cx="1828800" cy="365760"/>
-          </a:xfrm>
-          <a:prstGeom prst="rect">
-            <a:avLst/>
-          </a:prstGeom>
-          <a:noFill/>
-        </p:spPr>
-        <p:txBody>
-          <a:bodyPr wrap="square" lIns="0" rIns="0" tIns="0" bIns="0">
-            <a:spAutoFit/>
-          </a:bodyPr>
+          <a:bodyPr rtlCol="0" anchor="ctr" wrap="square" lIns="182880" tIns="137160"/>
           <a:lstStyle/>
           <a:p>
             <a:pPr algn="l">
@@ -8318,51 +8205,19 @@
               </a:spcBef>
             </a:pPr>
             <a:r>
-              <a:rPr sz="1500" b="1">
-                <a:solidFill>
-                  <a:srgbClr val="F2B544"/>
-                </a:solidFill>
-                <a:latin typeface="Microsoft YaHei"/>
-              </a:rPr>
-              <a:t/>
-            </a:r>
-            <a:r>
-              <a:rPr sz="1500" b="1">
-                <a:solidFill>
-                  <a:srgbClr val="F2B544"/>
-                </a:solidFill>
-                <a:latin typeface="Microsoft YaHei"/>
-              </a:rPr>
-              <a:t>② 圆桌会议</a:t>
-            </a:r>
-          </a:p>
-        </p:txBody>
-      </p:sp>
-      <p:sp>
-        <p:nvSpPr>
-          <p:cNvPr id="13" name="TextBox 12"/>
-          <p:cNvSpPr txBox="1"/>
-          <p:nvPr/>
-        </p:nvSpPr>
-        <p:spPr>
-          <a:xfrm>
-            <a:off x="2651760" y="2779776"/>
-            <a:ext cx="4572000" cy="274320"/>
-          </a:xfrm>
-          <a:prstGeom prst="rect">
-            <a:avLst/>
-          </a:prstGeom>
-          <a:noFill/>
-        </p:spPr>
-        <p:txBody>
-          <a:bodyPr wrap="square" lIns="0" rIns="0" tIns="0" bIns="0">
-            <a:spAutoFit/>
-          </a:bodyPr>
-          <a:lstStyle/>
-          <a:p>
-            <a:pPr algn="l">
-              <a:spcBef>
-                <a:spcPts val="0"/>
+              <a:rPr sz="1600" b="1">
+                <a:solidFill>
+                  <a:srgbClr val="35C48F"/>
+                </a:solidFill>
+                <a:latin typeface="Microsoft YaHei"/>
+              </a:rPr>
+              <a:t>✓ 接口卡：只给导出签名</a:t>
+            </a:r>
+          </a:p>
+          <a:p>
+            <a:pPr algn="l">
+              <a:spcBef>
+                <a:spcPts val="1400"/>
               </a:spcBef>
             </a:pPr>
             <a:r>
@@ -8372,8 +8227,15 @@
                 </a:solidFill>
                 <a:latin typeface="Microsoft YaHei"/>
               </a:rPr>
-              <a:t/>
-            </a:r>
+              <a:t>export function handlePapersRoute(req: PapersRequest): PapersResponse | null</a:t>
+            </a:r>
+          </a:p>
+          <a:p>
+            <a:pPr algn="l">
+              <a:spcBef>
+                <a:spcPts val="400"/>
+              </a:spcBef>
+            </a:pPr>
             <a:r>
               <a:rPr sz="1100" b="0">
                 <a:solidFill>
@@ -8381,69 +8243,69 @@
                 </a:solidFill>
                 <a:latin typeface="Microsoft YaHei"/>
               </a:rPr>
-              <a:t>唯一允许 LLM 协商的地方（T1–T5）</a:t>
-            </a:r>
-          </a:p>
-        </p:txBody>
-      </p:sp>
-      <p:sp>
-        <p:nvSpPr>
-          <p:cNvPr id="14" name="TextBox 13"/>
-          <p:cNvSpPr txBox="1"/>
-          <p:nvPr/>
-        </p:nvSpPr>
-        <p:spPr>
-          <a:xfrm>
-            <a:off x="2651760" y="3063240"/>
-            <a:ext cx="4572000" cy="274320"/>
-          </a:xfrm>
-          <a:prstGeom prst="rect">
-            <a:avLst/>
-          </a:prstGeom>
-          <a:noFill/>
-        </p:spPr>
-        <p:txBody>
-          <a:bodyPr wrap="square" lIns="0" rIns="0" tIns="0" bIns="0">
-            <a:spAutoFit/>
-          </a:bodyPr>
-          <a:lstStyle/>
-          <a:p>
-            <a:pPr algn="l">
-              <a:spcBef>
-                <a:spcPts val="0"/>
-              </a:spcBef>
-            </a:pPr>
-            <a:r>
-              <a:rPr sz="1000" b="0">
+              <a:t>export function listPapers(): PaperRecord[]</a:t>
+            </a:r>
+          </a:p>
+          <a:p>
+            <a:pPr algn="l">
+              <a:spcBef>
+                <a:spcPts val="400"/>
+              </a:spcBef>
+            </a:pPr>
+            <a:r>
+              <a:rPr sz="1100" b="0">
+                <a:solidFill>
+                  <a:srgbClr val="EAF0F6"/>
+                </a:solidFill>
+                <a:latin typeface="Microsoft YaHei"/>
+              </a:rPr>
+              <a:t>export interface PaperRecord</a:t>
+            </a:r>
+          </a:p>
+          <a:p>
+            <a:pPr algn="l">
+              <a:spcBef>
+                <a:spcPts val="1400"/>
+              </a:spcBef>
+            </a:pPr>
+            <a:r>
+              <a:rPr sz="1100" b="0">
+                <a:solidFill>
+                  <a:srgbClr val="35C48F"/>
+                </a:solidFill>
+                <a:latin typeface="Microsoft YaHei"/>
+              </a:rPr>
+              <a:t>实测：11 个模块的全部签名 ≈ 5 千字符</a:t>
+            </a:r>
+          </a:p>
+          <a:p>
+            <a:pPr algn="l">
+              <a:spcBef>
+                <a:spcPts val="400"/>
+              </a:spcBef>
+            </a:pPr>
+            <a:r>
+              <a:rPr sz="1100" b="0">
                 <a:solidFill>
                   <a:srgbClr val="9AA7B4"/>
                 </a:solidFill>
                 <a:latin typeface="Microsoft YaHei"/>
               </a:rPr>
-              <a:t/>
-            </a:r>
-            <a:r>
-              <a:rPr sz="1000" b="0">
-                <a:solidFill>
-                  <a:srgbClr val="9AA7B4"/>
-                </a:solidFill>
-                <a:latin typeface="Microsoft YaHei"/>
-              </a:rPr>
-              <a:t>只「归因完全失灵」才触发</a:t>
-            </a:r>
-          </a:p>
-        </p:txBody>
-      </p:sp>
-      <p:sp>
-        <p:nvSpPr>
-          <p:cNvPr id="15" name="Rounded Rectangle 14"/>
+              <a:t>与全文相差 40 倍 —— 这是「只传接口」的量化价值</a:t>
+            </a:r>
+          </a:p>
+        </p:txBody>
+      </p:sp>
+      <p:sp>
+        <p:nvSpPr>
+          <p:cNvPr id="9" name="Rounded Rectangle 8"/>
           <p:cNvSpPr/>
           <p:nvPr/>
         </p:nvSpPr>
         <p:spPr>
           <a:xfrm>
-            <a:off x="640080" y="3575304"/>
-            <a:ext cx="6766560" cy="786384"/>
+            <a:off x="640080" y="5193792"/>
+            <a:ext cx="5120640" cy="1051560"/>
           </a:xfrm>
           <a:prstGeom prst="roundRect">
             <a:avLst>
@@ -8475,33 +8337,7 @@
           </a:fontRef>
         </p:style>
         <p:txBody>
-          <a:bodyPr rtlCol="0" anchor="ctr"/>
-          <a:lstStyle/>
-          <a:p>
-            <a:pPr algn="ctr"/>
-          </a:p>
-        </p:txBody>
-      </p:sp>
-      <p:sp>
-        <p:nvSpPr>
-          <p:cNvPr id="16" name="TextBox 15"/>
-          <p:cNvSpPr txBox="1"/>
-          <p:nvPr/>
-        </p:nvSpPr>
-        <p:spPr>
-          <a:xfrm>
-            <a:off x="841248" y="3694176"/>
-            <a:ext cx="1828800" cy="365760"/>
-          </a:xfrm>
-          <a:prstGeom prst="rect">
-            <a:avLst/>
-          </a:prstGeom>
-          <a:noFill/>
-        </p:spPr>
-        <p:txBody>
-          <a:bodyPr wrap="square" lIns="0" rIns="0" tIns="0" bIns="0">
-            <a:spAutoFit/>
-          </a:bodyPr>
+          <a:bodyPr rtlCol="0" anchor="ctr" wrap="square" lIns="137160"/>
           <a:lstStyle/>
           <a:p>
             <a:pPr algn="l">
@@ -8510,132 +8346,43 @@
               </a:spcBef>
             </a:pPr>
             <a:r>
-              <a:rPr sz="1500" b="1">
-                <a:solidFill>
-                  <a:srgbClr val="F2B544"/>
-                </a:solidFill>
-                <a:latin typeface="Microsoft YaHei"/>
-              </a:rPr>
-              <a:t/>
-            </a:r>
-            <a:r>
-              <a:rPr sz="1500" b="1">
-                <a:solidFill>
-                  <a:srgbClr val="F2B544"/>
-                </a:solidFill>
-                <a:latin typeface="Microsoft YaHei"/>
-              </a:rPr>
-              <a:t>③ 升级真人</a:t>
-            </a:r>
-          </a:p>
-        </p:txBody>
-      </p:sp>
-      <p:sp>
-        <p:nvSpPr>
-          <p:cNvPr id="17" name="TextBox 16"/>
-          <p:cNvSpPr txBox="1"/>
-          <p:nvPr/>
-        </p:nvSpPr>
-        <p:spPr>
-          <a:xfrm>
-            <a:off x="2651760" y="3675888"/>
-            <a:ext cx="4572000" cy="274320"/>
-          </a:xfrm>
-          <a:prstGeom prst="rect">
-            <a:avLst/>
-          </a:prstGeom>
-          <a:noFill/>
-        </p:spPr>
-        <p:txBody>
-          <a:bodyPr wrap="square" lIns="0" rIns="0" tIns="0" bIns="0">
-            <a:spAutoFit/>
-          </a:bodyPr>
-          <a:lstStyle/>
-          <a:p>
-            <a:pPr algn="l">
-              <a:spcBef>
-                <a:spcPts val="0"/>
-              </a:spcBef>
-            </a:pPr>
-            <a:r>
-              <a:rPr sz="1100" b="0">
+              <a:rPr sz="1200" b="1">
+                <a:solidFill>
+                  <a:srgbClr val="35C48F"/>
+                </a:solidFill>
+                <a:latin typeface="Microsoft YaHei"/>
+              </a:rPr>
+              <a:t>六种通信通道</a:t>
+            </a:r>
+          </a:p>
+          <a:p>
+            <a:pPr algn="l">
+              <a:spcBef>
+                <a:spcPts val="400"/>
+              </a:spcBef>
+            </a:pPr>
+            <a:r>
+              <a:rPr sz="1000" b="0">
                 <a:solidFill>
                   <a:srgbClr val="EAF0F6"/>
                 </a:solidFill>
                 <a:latin typeface="Microsoft YaHei"/>
               </a:rPr>
-              <a:t/>
-            </a:r>
-            <a:r>
-              <a:rPr sz="1100" b="0">
-                <a:solidFill>
-                  <a:srgbClr val="EAF0F6"/>
-                </a:solidFill>
-                <a:latin typeface="Microsoft YaHei"/>
-              </a:rPr>
-              <a:t>打包成仲裁包，人只需做一次决定</a:t>
-            </a:r>
-          </a:p>
-        </p:txBody>
-      </p:sp>
-      <p:sp>
-        <p:nvSpPr>
-          <p:cNvPr id="18" name="TextBox 17"/>
-          <p:cNvSpPr txBox="1"/>
-          <p:nvPr/>
-        </p:nvSpPr>
-        <p:spPr>
-          <a:xfrm>
-            <a:off x="2651760" y="3959352"/>
-            <a:ext cx="4572000" cy="274320"/>
-          </a:xfrm>
-          <a:prstGeom prst="rect">
-            <a:avLst/>
-          </a:prstGeom>
-          <a:noFill/>
-        </p:spPr>
-        <p:txBody>
-          <a:bodyPr wrap="square" lIns="0" rIns="0" tIns="0" bIns="0">
-            <a:spAutoFit/>
-          </a:bodyPr>
-          <a:lstStyle/>
-          <a:p>
-            <a:pPr algn="l">
-              <a:spcBef>
-                <a:spcPts val="0"/>
-              </a:spcBef>
-            </a:pPr>
-            <a:r>
-              <a:rPr sz="1000" b="0">
-                <a:solidFill>
-                  <a:srgbClr val="9AA7B4"/>
-                </a:solidFill>
-                <a:latin typeface="Microsoft YaHei"/>
-              </a:rPr>
-              <a:t/>
-            </a:r>
-            <a:r>
-              <a:rPr sz="1000" b="0">
-                <a:solidFill>
-                  <a:srgbClr val="9AA7B4"/>
-                </a:solidFill>
-                <a:latin typeface="Microsoft YaHei"/>
-              </a:rPr>
-              <a:t>圆桌无有效决议时</a:t>
-            </a:r>
-          </a:p>
-        </p:txBody>
-      </p:sp>
-      <p:sp>
-        <p:nvSpPr>
-          <p:cNvPr id="19" name="Rounded Rectangle 18"/>
+              <a:t>工件库 · 读权限矩阵 · 契约（唯一必须送达）· 模块接口卡 · 工单 · 圆桌</a:t>
+            </a:r>
+          </a:p>
+        </p:txBody>
+      </p:sp>
+      <p:sp>
+        <p:nvSpPr>
+          <p:cNvPr id="10" name="Rounded Rectangle 9"/>
           <p:cNvSpPr/>
           <p:nvPr/>
         </p:nvSpPr>
         <p:spPr>
           <a:xfrm>
-            <a:off x="640080" y="4471416"/>
-            <a:ext cx="6766560" cy="786384"/>
+            <a:off x="6053328" y="5193792"/>
+            <a:ext cx="5495544" cy="1051560"/>
           </a:xfrm>
           <a:prstGeom prst="roundRect">
             <a:avLst>
@@ -8667,23 +8414,52 @@
           </a:fontRef>
         </p:style>
         <p:txBody>
-          <a:bodyPr rtlCol="0" anchor="ctr"/>
-          <a:lstStyle/>
-          <a:p>
-            <a:pPr algn="ctr"/>
-          </a:p>
-        </p:txBody>
-      </p:sp>
-      <p:sp>
-        <p:nvSpPr>
-          <p:cNvPr id="20" name="TextBox 19"/>
+          <a:bodyPr rtlCol="0" anchor="ctr" wrap="square" lIns="137160"/>
+          <a:lstStyle/>
+          <a:p>
+            <a:pPr algn="l">
+              <a:spcBef>
+                <a:spcPts val="0"/>
+              </a:spcBef>
+            </a:pPr>
+            <a:r>
+              <a:rPr sz="1200" b="1">
+                <a:solidFill>
+                  <a:srgbClr val="35C48F"/>
+                </a:solidFill>
+                <a:latin typeface="Microsoft YaHei"/>
+              </a:rPr>
+              <a:t>五层配额（从「谁先谁得」改成「谁需要谁得」）</a:t>
+            </a:r>
+          </a:p>
+          <a:p>
+            <a:pPr algn="l">
+              <a:spcBef>
+                <a:spcPts val="400"/>
+              </a:spcBef>
+            </a:pPr>
+            <a:r>
+              <a:rPr sz="1100" b="0">
+                <a:solidFill>
+                  <a:srgbClr val="EAF0F6"/>
+                </a:solidFill>
+                <a:latin typeface="Microsoft YaHei"/>
+              </a:rPr>
+              <a:t>规格 → 执行事实 → 模块接口 → 代码全文 → 需求计划（关键三件保证送达）</a:t>
+            </a:r>
+          </a:p>
+        </p:txBody>
+      </p:sp>
+      <p:sp>
+        <p:nvSpPr>
+          <p:cNvPr id="11" name="TextBox 10"/>
           <p:cNvSpPr txBox="1"/>
           <p:nvPr/>
         </p:nvSpPr>
         <p:spPr>
           <a:xfrm>
-            <a:off x="841248" y="4590288"/>
-            <a:ext cx="1828800" cy="365760"/>
+            <a:off x="640080" y="6355080"/>
+            <a:ext cx="7315200" cy="274320"/>
           </a:xfrm>
           <a:prstGeom prst="rect">
             <a:avLst/>
@@ -8702,7 +8478,7 @@
               </a:spcBef>
             </a:pPr>
             <a:r>
-              <a:rPr sz="1500" b="1">
+              <a:rPr sz="1000" b="0">
                 <a:solidFill>
                   <a:srgbClr val="9AA7B4"/>
                 </a:solidFill>
@@ -8711,27 +8487,27 @@
               <a:t/>
             </a:r>
             <a:r>
-              <a:rPr sz="1500" b="1">
+              <a:rPr sz="1000" b="0">
                 <a:solidFill>
                   <a:srgbClr val="9AA7B4"/>
                 </a:solidFill>
                 <a:latin typeface="Microsoft YaHei"/>
               </a:rPr>
-              <a:t>④ 带债通过</a:t>
-            </a:r>
-          </a:p>
-        </p:txBody>
-      </p:sp>
-      <p:sp>
-        <p:nvSpPr>
-          <p:cNvPr id="21" name="TextBox 20"/>
+              <a:t>AgentForge · 多角色 AI 研发引擎 · 赛道 B</a:t>
+            </a:r>
+          </a:p>
+        </p:txBody>
+      </p:sp>
+      <p:sp>
+        <p:nvSpPr>
+          <p:cNvPr id="12" name="TextBox 11"/>
           <p:cNvSpPr txBox="1"/>
           <p:nvPr/>
         </p:nvSpPr>
         <p:spPr>
           <a:xfrm>
-            <a:off x="2651760" y="4572000"/>
-            <a:ext cx="4572000" cy="274320"/>
+            <a:off x="10607040" y="6355080"/>
+            <a:ext cx="914400" cy="274320"/>
           </a:xfrm>
           <a:prstGeom prst="rect">
             <a:avLst/>
@@ -8750,432 +8526,22 @@
               </a:spcBef>
             </a:pPr>
             <a:r>
-              <a:rPr sz="1100" b="0">
-                <a:solidFill>
-                  <a:srgbClr val="EAF0F6"/>
+              <a:rPr sz="1000" b="0">
+                <a:solidFill>
+                  <a:srgbClr val="9AA7B4"/>
                 </a:solidFill>
                 <a:latin typeface="Microsoft YaHei"/>
               </a:rPr>
               <a:t/>
             </a:r>
             <a:r>
-              <a:rPr sz="1100" b="0">
-                <a:solidFill>
-                  <a:srgbClr val="EAF0F6"/>
-                </a:solidFill>
-                <a:latin typeface="Microsoft YaHei"/>
-              </a:rPr>
-              <a:t>写 DebtRecord + 需求标 accepted_with_debt</a:t>
-            </a:r>
-          </a:p>
-        </p:txBody>
-      </p:sp>
-      <p:sp>
-        <p:nvSpPr>
-          <p:cNvPr id="22" name="TextBox 21"/>
-          <p:cNvSpPr txBox="1"/>
-          <p:nvPr/>
-        </p:nvSpPr>
-        <p:spPr>
-          <a:xfrm>
-            <a:off x="2651760" y="4855464"/>
-            <a:ext cx="4572000" cy="274320"/>
-          </a:xfrm>
-          <a:prstGeom prst="rect">
-            <a:avLst/>
-          </a:prstGeom>
-          <a:noFill/>
-        </p:spPr>
-        <p:txBody>
-          <a:bodyPr wrap="square" lIns="0" rIns="0" tIns="0" bIns="0">
-            <a:spAutoFit/>
-          </a:bodyPr>
-          <a:lstStyle/>
-          <a:p>
-            <a:pPr algn="l">
-              <a:spcBef>
-                <a:spcPts val="0"/>
-              </a:spcBef>
-            </a:pPr>
-            <a:r>
               <a:rPr sz="1000" b="0">
                 <a:solidFill>
                   <a:srgbClr val="9AA7B4"/>
                 </a:solidFill>
                 <a:latin typeface="Microsoft YaHei"/>
               </a:rPr>
-              <a:t/>
-            </a:r>
-            <a:r>
-              <a:rPr sz="1000" b="0">
-                <a:solidFill>
-                  <a:srgbClr val="9AA7B4"/>
-                </a:solidFill>
-                <a:latin typeface="Microsoft YaHei"/>
-              </a:rPr>
-              <a:t>真人不可用时的最终出口</a:t>
-            </a:r>
-          </a:p>
-        </p:txBody>
-      </p:sp>
-      <p:sp>
-        <p:nvSpPr>
-          <p:cNvPr id="23" name="Rounded Rectangle 22"/>
-          <p:cNvSpPr/>
-          <p:nvPr/>
-        </p:nvSpPr>
-        <p:spPr>
-          <a:xfrm>
-            <a:off x="7635240" y="1783080"/>
-            <a:ext cx="3913632" cy="3401568"/>
-          </a:xfrm>
-          <a:prstGeom prst="roundRect">
-            <a:avLst>
-              <a:gd name="adj" fmla="val 6000"/>
-            </a:avLst>
-          </a:prstGeom>
-          <a:solidFill>
-            <a:srgbClr val="182028"/>
-          </a:solidFill>
-          <a:ln w="12700">
-            <a:solidFill>
-              <a:srgbClr val="2B3642"/>
-            </a:solidFill>
-          </a:ln>
-          <a:effectLst/>
-        </p:spPr>
-        <p:style>
-          <a:lnRef idx="1">
-            <a:schemeClr val="accent1"/>
-          </a:lnRef>
-          <a:fillRef idx="3">
-            <a:schemeClr val="accent1"/>
-          </a:fillRef>
-          <a:effectRef idx="2">
-            <a:schemeClr val="accent1"/>
-          </a:effectRef>
-          <a:fontRef idx="minor">
-            <a:schemeClr val="lt1"/>
-          </a:fontRef>
-        </p:style>
-        <p:txBody>
-          <a:bodyPr rtlCol="0" anchor="ctr" wrap="square" lIns="164592" tIns="128016"/>
-          <a:lstStyle/>
-          <a:p>
-            <a:pPr algn="l">
-              <a:spcBef>
-                <a:spcPts val="0"/>
-              </a:spcBef>
-            </a:pPr>
-            <a:r>
-              <a:rPr sz="1400" b="1">
-                <a:solidFill>
-                  <a:srgbClr val="35C48F"/>
-                </a:solidFill>
-                <a:latin typeface="Microsoft YaHei"/>
-              </a:rPr>
-              <a:t>四个防空转机制</a:t>
-            </a:r>
-          </a:p>
-          <a:p>
-            <a:pPr algn="l">
-              <a:spcBef>
-                <a:spcPts val="1200"/>
-              </a:spcBef>
-            </a:pPr>
-            <a:r>
-              <a:rPr sz="1100" b="0">
-                <a:solidFill>
-                  <a:srgbClr val="EAF0F6"/>
-                </a:solidFill>
-                <a:latin typeface="Microsoft YaHei"/>
-              </a:rPr>
-              <a:t>阻断 3 次后权限自动终止</a:t>
-            </a:r>
-          </a:p>
-          <a:p>
-            <a:pPr algn="l">
-              <a:spcBef>
-                <a:spcPts val="200"/>
-              </a:spcBef>
-            </a:pPr>
-            <a:r>
-              <a:rPr sz="1000" b="0">
-                <a:solidFill>
-                  <a:srgbClr val="9AA7B4"/>
-                </a:solidFill>
-                <a:latin typeface="Microsoft YaHei"/>
-              </a:rPr>
-              <a:t>否则两个 Agent 能互相否决到死</a:t>
-            </a:r>
-          </a:p>
-          <a:p>
-            <a:pPr algn="l">
-              <a:spcBef>
-                <a:spcPts val="1000"/>
-              </a:spcBef>
-            </a:pPr>
-            <a:r>
-              <a:rPr sz="1100" b="0">
-                <a:solidFill>
-                  <a:srgbClr val="EAF0F6"/>
-                </a:solidFill>
-                <a:latin typeface="Microsoft YaHei"/>
-              </a:rPr>
-              <a:t>签名未变 → 不再开会</a:t>
-            </a:r>
-          </a:p>
-          <a:p>
-            <a:pPr algn="l">
-              <a:spcBef>
-                <a:spcPts val="200"/>
-              </a:spcBef>
-            </a:pPr>
-            <a:r>
-              <a:rPr sz="1000" b="0">
-                <a:solidFill>
-                  <a:srgbClr val="9AA7B4"/>
-                </a:solidFill>
-                <a:latin typeface="Microsoft YaHei"/>
-              </a:rPr>
-              <a:t>实测过某阶段连开 6 次圆桌</a:t>
-            </a:r>
-          </a:p>
-          <a:p>
-            <a:pPr algn="l">
-              <a:spcBef>
-                <a:spcPts val="1000"/>
-              </a:spcBef>
-            </a:pPr>
-            <a:r>
-              <a:rPr sz="1100" b="0">
-                <a:solidFill>
-                  <a:srgbClr val="EAF0F6"/>
-                </a:solidFill>
-                <a:latin typeface="Microsoft YaHei"/>
-              </a:rPr>
-              <a:t>修复无效 → 直接转逃生</a:t>
-            </a:r>
-          </a:p>
-          <a:p>
-            <a:pPr algn="l">
-              <a:spcBef>
-                <a:spcPts val="200"/>
-              </a:spcBef>
-            </a:pPr>
-            <a:r>
-              <a:rPr sz="1000" b="0">
-                <a:solidFill>
-                  <a:srgbClr val="9AA7B4"/>
-                </a:solidFill>
-                <a:latin typeface="Microsoft YaHei"/>
-              </a:rPr>
-              <a:t>不重复付费</a:t>
-            </a:r>
-          </a:p>
-          <a:p>
-            <a:pPr algn="l">
-              <a:spcBef>
-                <a:spcPts val="1000"/>
-              </a:spcBef>
-            </a:pPr>
-            <a:r>
-              <a:rPr sz="1100" b="0">
-                <a:solidFill>
-                  <a:srgbClr val="EAF0F6"/>
-                </a:solidFill>
-                <a:latin typeface="Microsoft YaHei"/>
-              </a:rPr>
-              <a:t>上下文超长 → 预算减半重试</a:t>
-            </a:r>
-          </a:p>
-          <a:p>
-            <a:pPr algn="l">
-              <a:spcBef>
-                <a:spcPts val="200"/>
-              </a:spcBef>
-            </a:pPr>
-            <a:r>
-              <a:rPr sz="1000" b="0">
-                <a:solidFill>
-                  <a:srgbClr val="9AA7B4"/>
-                </a:solidFill>
-                <a:latin typeface="Microsoft YaHei"/>
-              </a:rPr>
-              <a:t>不让一次 400 打死整轮 run</a:t>
-            </a:r>
-          </a:p>
-        </p:txBody>
-      </p:sp>
-      <p:sp>
-        <p:nvSpPr>
-          <p:cNvPr id="24" name="Rounded Rectangle 23"/>
-          <p:cNvSpPr/>
-          <p:nvPr/>
-        </p:nvSpPr>
-        <p:spPr>
-          <a:xfrm>
-            <a:off x="640080" y="5532120"/>
-            <a:ext cx="10908792" cy="713232"/>
-          </a:xfrm>
-          <a:prstGeom prst="roundRect">
-            <a:avLst>
-              <a:gd name="adj" fmla="val 6000"/>
-            </a:avLst>
-          </a:prstGeom>
-          <a:solidFill>
-            <a:srgbClr val="182028"/>
-          </a:solidFill>
-          <a:ln w="12700">
-            <a:solidFill>
-              <a:srgbClr val="2B3642"/>
-            </a:solidFill>
-          </a:ln>
-          <a:effectLst/>
-        </p:spPr>
-        <p:style>
-          <a:lnRef idx="1">
-            <a:schemeClr val="accent1"/>
-          </a:lnRef>
-          <a:fillRef idx="3">
-            <a:schemeClr val="accent1"/>
-          </a:fillRef>
-          <a:effectRef idx="2">
-            <a:schemeClr val="accent1"/>
-          </a:effectRef>
-          <a:fontRef idx="minor">
-            <a:schemeClr val="lt1"/>
-          </a:fontRef>
-        </p:style>
-        <p:txBody>
-          <a:bodyPr rtlCol="0" anchor="ctr" wrap="square" lIns="182880"/>
-          <a:lstStyle/>
-          <a:p>
-            <a:pPr algn="l">
-              <a:spcBef>
-                <a:spcPts val="0"/>
-              </a:spcBef>
-            </a:pPr>
-            <a:r>
-              <a:rPr sz="1000" b="1">
-                <a:solidFill>
-                  <a:srgbClr val="35C48F"/>
-                </a:solidFill>
-                <a:latin typeface="Microsoft YaHei"/>
-              </a:rPr>
-              <a:t>真实日志</a:t>
-            </a:r>
-          </a:p>
-          <a:p>
-            <a:pPr algn="l">
-              <a:spcBef>
-                <a:spcPts val="200"/>
-              </a:spcBef>
-            </a:pPr>
-            <a:r>
-              <a:rPr sz="1100" b="0">
-                <a:solidFill>
-                  <a:srgbClr val="9AA7B4"/>
-                </a:solidFill>
-                <a:latin typeface="Microsoft YaHei"/>
-              </a:rPr>
-              <a:t>[CONTRACTING] 工单修复后硬失败签名未变（pm 的修复没有改变任何东西），不再重复重试，转逃生流程 → 带债通过（受影响需求 3 条）</a:t>
-            </a:r>
-          </a:p>
-        </p:txBody>
-      </p:sp>
-      <p:sp>
-        <p:nvSpPr>
-          <p:cNvPr id="25" name="TextBox 24"/>
-          <p:cNvSpPr txBox="1"/>
-          <p:nvPr/>
-        </p:nvSpPr>
-        <p:spPr>
-          <a:xfrm>
-            <a:off x="640080" y="6355080"/>
-            <a:ext cx="7315200" cy="274320"/>
-          </a:xfrm>
-          <a:prstGeom prst="rect">
-            <a:avLst/>
-          </a:prstGeom>
-          <a:noFill/>
-        </p:spPr>
-        <p:txBody>
-          <a:bodyPr wrap="square" lIns="0" rIns="0" tIns="0" bIns="0">
-            <a:spAutoFit/>
-          </a:bodyPr>
-          <a:lstStyle/>
-          <a:p>
-            <a:pPr algn="l">
-              <a:spcBef>
-                <a:spcPts val="0"/>
-              </a:spcBef>
-            </a:pPr>
-            <a:r>
-              <a:rPr sz="1000" b="0">
-                <a:solidFill>
-                  <a:srgbClr val="9AA7B4"/>
-                </a:solidFill>
-                <a:latin typeface="Microsoft YaHei"/>
-              </a:rPr>
-              <a:t/>
-            </a:r>
-            <a:r>
-              <a:rPr sz="1000" b="0">
-                <a:solidFill>
-                  <a:srgbClr val="9AA7B4"/>
-                </a:solidFill>
-                <a:latin typeface="Microsoft YaHei"/>
-              </a:rPr>
-              <a:t>AgentForge · 多角色 AI 研发引擎 · 赛道 B</a:t>
-            </a:r>
-          </a:p>
-        </p:txBody>
-      </p:sp>
-      <p:sp>
-        <p:nvSpPr>
-          <p:cNvPr id="26" name="TextBox 25"/>
-          <p:cNvSpPr txBox="1"/>
-          <p:nvPr/>
-        </p:nvSpPr>
-        <p:spPr>
-          <a:xfrm>
-            <a:off x="10607040" y="6355080"/>
-            <a:ext cx="914400" cy="274320"/>
-          </a:xfrm>
-          <a:prstGeom prst="rect">
-            <a:avLst/>
-          </a:prstGeom>
-          <a:noFill/>
-        </p:spPr>
-        <p:txBody>
-          <a:bodyPr wrap="square" lIns="0" rIns="0" tIns="0" bIns="0">
-            <a:spAutoFit/>
-          </a:bodyPr>
-          <a:lstStyle/>
-          <a:p>
-            <a:pPr algn="l">
-              <a:spcBef>
-                <a:spcPts val="0"/>
-              </a:spcBef>
-            </a:pPr>
-            <a:r>
-              <a:rPr sz="1000" b="0">
-                <a:solidFill>
-                  <a:srgbClr val="9AA7B4"/>
-                </a:solidFill>
-                <a:latin typeface="Microsoft YaHei"/>
-              </a:rPr>
-              <a:t/>
-            </a:r>
-            <a:r>
-              <a:rPr sz="1000" b="0">
-                <a:solidFill>
-                  <a:srgbClr val="9AA7B4"/>
-                </a:solidFill>
-                <a:latin typeface="Microsoft YaHei"/>
-              </a:rPr>
-              <a:t>6 / 8</a:t>
+              <a:t>6 / 9</a:t>
             </a:r>
           </a:p>
         </p:txBody>
@@ -9285,7 +8651,7 @@
                 </a:solidFill>
                 <a:latin typeface="Microsoft YaHei"/>
               </a:rPr>
-              <a:t>可观测性</a:t>
+              <a:t>异常处理</a:t>
             </a:r>
           </a:p>
         </p:txBody>
@@ -9333,7 +8699,7 @@
                 </a:solidFill>
                 <a:latin typeface="Microsoft YaHei"/>
               </a:rPr>
-              <a:t>能回答「它到底看到了什么」</a:t>
+              <a:t>四层逃生，机械判定，保证不死锁</a:t>
             </a:r>
           </a:p>
         </p:txBody>
@@ -9381,7 +8747,7 @@
                 </a:solidFill>
                 <a:latin typeface="Microsoft YaHei"/>
               </a:rPr>
-              <a:t>在这一行存在之前，「为什么它老是做不对」只能靠猜 —— 我们为此花了两小时复算</a:t>
+              <a:t>decideEscape() 的三个分支穷举了所有情况 —— 它一定返回一个可执行动作</a:t>
             </a:r>
           </a:p>
         </p:txBody>
@@ -9430,7 +8796,7 @@
         <p:spPr>
           <a:xfrm>
             <a:off x="640080" y="1783080"/>
-            <a:ext cx="6675120" cy="2514600"/>
+            <a:ext cx="6766560" cy="786384"/>
           </a:xfrm>
           <a:prstGeom prst="roundRect">
             <a:avLst>
@@ -9462,7 +8828,33 @@
           </a:fontRef>
         </p:style>
         <p:txBody>
-          <a:bodyPr rtlCol="0" anchor="ctr" wrap="square" lIns="164592" tIns="128016"/>
+          <a:bodyPr rtlCol="0" anchor="ctr"/>
+          <a:lstStyle/>
+          <a:p>
+            <a:pPr algn="ctr"/>
+          </a:p>
+        </p:txBody>
+      </p:sp>
+      <p:sp>
+        <p:nvSpPr>
+          <p:cNvPr id="8" name="TextBox 7"/>
+          <p:cNvSpPr txBox="1"/>
+          <p:nvPr/>
+        </p:nvSpPr>
+        <p:spPr>
+          <a:xfrm>
+            <a:off x="841248" y="1901952"/>
+            <a:ext cx="1828800" cy="365760"/>
+          </a:xfrm>
+          <a:prstGeom prst="rect">
+            <a:avLst/>
+          </a:prstGeom>
+          <a:noFill/>
+        </p:spPr>
+        <p:txBody>
+          <a:bodyPr wrap="square" lIns="0" rIns="0" tIns="0" bIns="0">
+            <a:spAutoFit/>
+          </a:bodyPr>
           <a:lstStyle/>
           <a:p>
             <a:pPr algn="l">
@@ -9471,107 +8863,132 @@
               </a:spcBef>
             </a:pPr>
             <a:r>
-              <a:rPr sz="1200" b="1">
+              <a:rPr sz="1500" b="1">
                 <a:solidFill>
                   <a:srgbClr val="35C48F"/>
                 </a:solidFill>
                 <a:latin typeface="Microsoft YaHei"/>
               </a:rPr>
-              <a:t>run 日志里的输入审计（每次调用都记）</a:t>
-            </a:r>
-          </a:p>
-          <a:p>
-            <a:pPr algn="l">
-              <a:spcBef>
-                <a:spcPts val="1200"/>
-              </a:spcBef>
-            </a:pPr>
-            <a:r>
-              <a:rPr sz="1200" b="0">
+              <a:t/>
+            </a:r>
+            <a:r>
+              <a:rPr sz="1500" b="1">
+                <a:solidFill>
+                  <a:srgbClr val="35C48F"/>
+                </a:solidFill>
+                <a:latin typeface="Microsoft YaHei"/>
+              </a:rPr>
+              <a:t>① 打回返工</a:t>
+            </a:r>
+          </a:p>
+        </p:txBody>
+      </p:sp>
+      <p:sp>
+        <p:nvSpPr>
+          <p:cNvPr id="9" name="TextBox 8"/>
+          <p:cNvSpPr txBox="1"/>
+          <p:nvPr/>
+        </p:nvSpPr>
+        <p:spPr>
+          <a:xfrm>
+            <a:off x="2651760" y="1883664"/>
+            <a:ext cx="4572000" cy="274320"/>
+          </a:xfrm>
+          <a:prstGeom prst="rect">
+            <a:avLst/>
+          </a:prstGeom>
+          <a:noFill/>
+        </p:spPr>
+        <p:txBody>
+          <a:bodyPr wrap="square" lIns="0" rIns="0" tIns="0" bIns="0">
+            <a:spAutoFit/>
+          </a:bodyPr>
+          <a:lstStyle/>
+          <a:p>
+            <a:pPr algn="l">
+              <a:spcBef>
+                <a:spcPts val="0"/>
+              </a:spcBef>
+            </a:pPr>
+            <a:r>
+              <a:rPr sz="1100" b="0">
                 <a:solidFill>
                   <a:srgbClr val="EAF0F6"/>
                 </a:solidFill>
                 <a:latin typeface="Microsoft YaHei"/>
               </a:rPr>
-              <a:t>上下文：23,177 / 60,000 字符（39%）  注入 3 个 · 丢弃 0 个</a:t>
-            </a:r>
-          </a:p>
-          <a:p>
-            <a:pPr algn="l">
-              <a:spcBef>
-                <a:spcPts val="200"/>
-              </a:spcBef>
-            </a:pPr>
+              <a:t/>
+            </a:r>
             <a:r>
               <a:rPr sz="1100" b="0">
                 <a:solidFill>
+                  <a:srgbClr val="EAF0F6"/>
+                </a:solidFill>
+                <a:latin typeface="Microsoft YaHei"/>
+              </a:rPr>
+              <a:t>能归因就先打回；一条都归不了因才开会</a:t>
+            </a:r>
+          </a:p>
+        </p:txBody>
+      </p:sp>
+      <p:sp>
+        <p:nvSpPr>
+          <p:cNvPr id="10" name="TextBox 9"/>
+          <p:cNvSpPr txBox="1"/>
+          <p:nvPr/>
+        </p:nvSpPr>
+        <p:spPr>
+          <a:xfrm>
+            <a:off x="2651760" y="2167128"/>
+            <a:ext cx="4572000" cy="274320"/>
+          </a:xfrm>
+          <a:prstGeom prst="rect">
+            <a:avLst/>
+          </a:prstGeom>
+          <a:noFill/>
+        </p:spPr>
+        <p:txBody>
+          <a:bodyPr wrap="square" lIns="0" rIns="0" tIns="0" bIns="0">
+            <a:spAutoFit/>
+          </a:bodyPr>
+          <a:lstStyle/>
+          <a:p>
+            <a:pPr algn="l">
+              <a:spcBef>
+                <a:spcPts val="0"/>
+              </a:spcBef>
+            </a:pPr>
+            <a:r>
+              <a:rPr sz="1000" b="0">
+                <a:solidFill>
                   <a:srgbClr val="9AA7B4"/>
                 </a:solidFill>
                 <a:latin typeface="Microsoft YaHei"/>
               </a:rPr>
-              <a:t>  其中契约摘要 1 个</a:t>
-            </a:r>
-          </a:p>
-          <a:p>
-            <a:pPr algn="l">
-              <a:spcBef>
-                <a:spcPts val="200"/>
-              </a:spcBef>
-            </a:pPr>
-            <a:r>
-              <a:rPr sz="1100" b="0">
+              <a:t/>
+            </a:r>
+            <a:r>
+              <a:rPr sz="1000" b="0">
                 <a:solidFill>
                   <a:srgbClr val="9AA7B4"/>
                 </a:solidFill>
                 <a:latin typeface="Microsoft YaHei"/>
               </a:rPr>
-              <a:t>  未注入：TaskGraph-001(15520·tier-cap)</a:t>
-            </a:r>
-          </a:p>
-          <a:p>
-            <a:pPr algn="l">
-              <a:spcBef>
-                <a:spcPts val="1000"/>
-              </a:spcBef>
-            </a:pPr>
-            <a:r>
-              <a:rPr sz="1100" b="0">
-                <a:solidFill>
-                  <a:srgbClr val="9AA7B4"/>
-                </a:solidFill>
-                <a:latin typeface="Microsoft YaHei"/>
-              </a:rPr>
-              <a:t>  injected[]: {id, kind, chars, digest? | card?}</a:t>
-            </a:r>
-          </a:p>
-          <a:p>
-            <a:pPr algn="l">
-              <a:spcBef>
-                <a:spcPts val="200"/>
-              </a:spcBef>
-            </a:pPr>
-            <a:r>
-              <a:rPr sz="1100" b="0">
-                <a:solidFill>
-                  <a:srgbClr val="9AA7B4"/>
-                </a:solidFill>
-                <a:latin typeface="Microsoft YaHei"/>
-              </a:rPr>
-              <a:t>  omitted[]: {id, kind, chars, reason: tier-cap | no-space}</a:t>
-            </a:r>
-          </a:p>
-        </p:txBody>
-      </p:sp>
-      <p:sp>
-        <p:nvSpPr>
-          <p:cNvPr id="8" name="Rounded Rectangle 7"/>
+              <a:t>便宜、确定、有明确验收条件</a:t>
+            </a:r>
+          </a:p>
+        </p:txBody>
+      </p:sp>
+      <p:sp>
+        <p:nvSpPr>
+          <p:cNvPr id="11" name="Rounded Rectangle 10"/>
           <p:cNvSpPr/>
           <p:nvPr/>
         </p:nvSpPr>
         <p:spPr>
           <a:xfrm>
-            <a:off x="7543800" y="1783080"/>
-            <a:ext cx="4005072" cy="758952"/>
+            <a:off x="640080" y="2679192"/>
+            <a:ext cx="6766560" cy="786384"/>
           </a:xfrm>
           <a:prstGeom prst="roundRect">
             <a:avLst>
@@ -9612,14 +9029,14 @@
       </p:sp>
       <p:sp>
         <p:nvSpPr>
-          <p:cNvPr id="9" name="TextBox 8"/>
+          <p:cNvPr id="12" name="TextBox 11"/>
           <p:cNvSpPr txBox="1"/>
           <p:nvPr/>
         </p:nvSpPr>
         <p:spPr>
           <a:xfrm>
-            <a:off x="7726679" y="1892808"/>
-            <a:ext cx="3657600" cy="274320"/>
+            <a:off x="841248" y="2798064"/>
+            <a:ext cx="1828800" cy="365760"/>
           </a:xfrm>
           <a:prstGeom prst="rect">
             <a:avLst/>
@@ -9638,36 +9055,36 @@
               </a:spcBef>
             </a:pPr>
             <a:r>
-              <a:rPr sz="1300" b="1">
-                <a:solidFill>
-                  <a:srgbClr val="35C48F"/>
+              <a:rPr sz="1500" b="1">
+                <a:solidFill>
+                  <a:srgbClr val="F2B544"/>
                 </a:solidFill>
                 <a:latin typeface="Microsoft YaHei"/>
               </a:rPr>
               <a:t/>
             </a:r>
             <a:r>
-              <a:rPr sz="1300" b="1">
-                <a:solidFill>
-                  <a:srgbClr val="35C48F"/>
-                </a:solidFill>
-                <a:latin typeface="Microsoft YaHei"/>
-              </a:rPr>
-              <a:t>哈希链日志</a:t>
-            </a:r>
-          </a:p>
-        </p:txBody>
-      </p:sp>
-      <p:sp>
-        <p:nvSpPr>
-          <p:cNvPr id="10" name="TextBox 9"/>
+              <a:rPr sz="1500" b="1">
+                <a:solidFill>
+                  <a:srgbClr val="F2B544"/>
+                </a:solidFill>
+                <a:latin typeface="Microsoft YaHei"/>
+              </a:rPr>
+              <a:t>② 圆桌会议</a:t>
+            </a:r>
+          </a:p>
+        </p:txBody>
+      </p:sp>
+      <p:sp>
+        <p:nvSpPr>
+          <p:cNvPr id="13" name="TextBox 12"/>
           <p:cNvSpPr txBox="1"/>
           <p:nvPr/>
         </p:nvSpPr>
         <p:spPr>
           <a:xfrm>
-            <a:off x="7726679" y="2176272"/>
-            <a:ext cx="3657600" cy="320040"/>
+            <a:off x="2651760" y="2779776"/>
+            <a:ext cx="4572000" cy="274320"/>
           </a:xfrm>
           <a:prstGeom prst="rect">
             <a:avLst/>
@@ -9686,6 +9103,54 @@
               </a:spcBef>
             </a:pPr>
             <a:r>
+              <a:rPr sz="1100" b="0">
+                <a:solidFill>
+                  <a:srgbClr val="EAF0F6"/>
+                </a:solidFill>
+                <a:latin typeface="Microsoft YaHei"/>
+              </a:rPr>
+              <a:t/>
+            </a:r>
+            <a:r>
+              <a:rPr sz="1100" b="0">
+                <a:solidFill>
+                  <a:srgbClr val="EAF0F6"/>
+                </a:solidFill>
+                <a:latin typeface="Microsoft YaHei"/>
+              </a:rPr>
+              <a:t>唯一允许 LLM 协商的地方（T1–T5）</a:t>
+            </a:r>
+          </a:p>
+        </p:txBody>
+      </p:sp>
+      <p:sp>
+        <p:nvSpPr>
+          <p:cNvPr id="14" name="TextBox 13"/>
+          <p:cNvSpPr txBox="1"/>
+          <p:nvPr/>
+        </p:nvSpPr>
+        <p:spPr>
+          <a:xfrm>
+            <a:off x="2651760" y="3063240"/>
+            <a:ext cx="4572000" cy="274320"/>
+          </a:xfrm>
+          <a:prstGeom prst="rect">
+            <a:avLst/>
+          </a:prstGeom>
+          <a:noFill/>
+        </p:spPr>
+        <p:txBody>
+          <a:bodyPr wrap="square" lIns="0" rIns="0" tIns="0" bIns="0">
+            <a:spAutoFit/>
+          </a:bodyPr>
+          <a:lstStyle/>
+          <a:p>
+            <a:pPr algn="l">
+              <a:spcBef>
+                <a:spcPts val="0"/>
+              </a:spcBef>
+            </a:pPr>
+            <a:r>
               <a:rPr sz="1000" b="0">
                 <a:solidFill>
                   <a:srgbClr val="9AA7B4"/>
@@ -9701,21 +9166,21 @@
                 </a:solidFill>
                 <a:latin typeface="Microsoft YaHei"/>
               </a:rPr>
-              <a:t>任何一条被改，链就断</a:t>
-            </a:r>
-          </a:p>
-        </p:txBody>
-      </p:sp>
-      <p:sp>
-        <p:nvSpPr>
-          <p:cNvPr id="11" name="Rounded Rectangle 10"/>
+              <a:t>只「归因完全失灵」才触发</a:t>
+            </a:r>
+          </a:p>
+        </p:txBody>
+      </p:sp>
+      <p:sp>
+        <p:nvSpPr>
+          <p:cNvPr id="15" name="Rounded Rectangle 14"/>
           <p:cNvSpPr/>
           <p:nvPr/>
         </p:nvSpPr>
         <p:spPr>
           <a:xfrm>
-            <a:off x="7543800" y="2651760"/>
-            <a:ext cx="4005072" cy="758952"/>
+            <a:off x="640080" y="3575304"/>
+            <a:ext cx="6766560" cy="786384"/>
           </a:xfrm>
           <a:prstGeom prst="roundRect">
             <a:avLst>
@@ -9756,14 +9221,14 @@
       </p:sp>
       <p:sp>
         <p:nvSpPr>
-          <p:cNvPr id="12" name="TextBox 11"/>
+          <p:cNvPr id="16" name="TextBox 15"/>
           <p:cNvSpPr txBox="1"/>
           <p:nvPr/>
         </p:nvSpPr>
         <p:spPr>
           <a:xfrm>
-            <a:off x="7726679" y="2761488"/>
-            <a:ext cx="3657600" cy="274320"/>
+            <a:off x="841248" y="3694176"/>
+            <a:ext cx="1828800" cy="365760"/>
           </a:xfrm>
           <a:prstGeom prst="rect">
             <a:avLst/>
@@ -9782,36 +9247,36 @@
               </a:spcBef>
             </a:pPr>
             <a:r>
-              <a:rPr sz="1300" b="1">
-                <a:solidFill>
-                  <a:srgbClr val="EAF0F6"/>
+              <a:rPr sz="1500" b="1">
+                <a:solidFill>
+                  <a:srgbClr val="F2B544"/>
                 </a:solidFill>
                 <a:latin typeface="Microsoft YaHei"/>
               </a:rPr>
               <a:t/>
             </a:r>
             <a:r>
-              <a:rPr sz="1300" b="1">
-                <a:solidFill>
-                  <a:srgbClr val="EAF0F6"/>
-                </a:solidFill>
-                <a:latin typeface="Microsoft YaHei"/>
-              </a:rPr>
-              <a:t>回放</a:t>
-            </a:r>
-          </a:p>
-        </p:txBody>
-      </p:sp>
-      <p:sp>
-        <p:nvSpPr>
-          <p:cNvPr id="13" name="TextBox 12"/>
+              <a:rPr sz="1500" b="1">
+                <a:solidFill>
+                  <a:srgbClr val="F2B544"/>
+                </a:solidFill>
+                <a:latin typeface="Microsoft YaHei"/>
+              </a:rPr>
+              <a:t>③ 升级真人</a:t>
+            </a:r>
+          </a:p>
+        </p:txBody>
+      </p:sp>
+      <p:sp>
+        <p:nvSpPr>
+          <p:cNvPr id="17" name="TextBox 16"/>
           <p:cNvSpPr txBox="1"/>
           <p:nvPr/>
         </p:nvSpPr>
         <p:spPr>
           <a:xfrm>
-            <a:off x="7726679" y="3044952"/>
-            <a:ext cx="3657600" cy="320040"/>
+            <a:off x="2651760" y="3675888"/>
+            <a:ext cx="4572000" cy="274320"/>
           </a:xfrm>
           <a:prstGeom prst="rect">
             <a:avLst/>
@@ -9830,6 +9295,54 @@
               </a:spcBef>
             </a:pPr>
             <a:r>
+              <a:rPr sz="1100" b="0">
+                <a:solidFill>
+                  <a:srgbClr val="EAF0F6"/>
+                </a:solidFill>
+                <a:latin typeface="Microsoft YaHei"/>
+              </a:rPr>
+              <a:t/>
+            </a:r>
+            <a:r>
+              <a:rPr sz="1100" b="0">
+                <a:solidFill>
+                  <a:srgbClr val="EAF0F6"/>
+                </a:solidFill>
+                <a:latin typeface="Microsoft YaHei"/>
+              </a:rPr>
+              <a:t>打包成仲裁包，人只需做一次决定</a:t>
+            </a:r>
+          </a:p>
+        </p:txBody>
+      </p:sp>
+      <p:sp>
+        <p:nvSpPr>
+          <p:cNvPr id="18" name="TextBox 17"/>
+          <p:cNvSpPr txBox="1"/>
+          <p:nvPr/>
+        </p:nvSpPr>
+        <p:spPr>
+          <a:xfrm>
+            <a:off x="2651760" y="3959352"/>
+            <a:ext cx="4572000" cy="274320"/>
+          </a:xfrm>
+          <a:prstGeom prst="rect">
+            <a:avLst/>
+          </a:prstGeom>
+          <a:noFill/>
+        </p:spPr>
+        <p:txBody>
+          <a:bodyPr wrap="square" lIns="0" rIns="0" tIns="0" bIns="0">
+            <a:spAutoFit/>
+          </a:bodyPr>
+          <a:lstStyle/>
+          <a:p>
+            <a:pPr algn="l">
+              <a:spcBef>
+                <a:spcPts val="0"/>
+              </a:spcBef>
+            </a:pPr>
+            <a:r>
               <a:rPr sz="1000" b="0">
                 <a:solidFill>
                   <a:srgbClr val="9AA7B4"/>
@@ -9845,21 +9358,21 @@
                 </a:solidFill>
                 <a:latin typeface="Microsoft YaHei"/>
               </a:rPr>
-              <a:t>同一批模型输出可重放，把不确定性从实验里摘出去</a:t>
-            </a:r>
-          </a:p>
-        </p:txBody>
-      </p:sp>
-      <p:sp>
-        <p:nvSpPr>
-          <p:cNvPr id="14" name="Rounded Rectangle 13"/>
+              <a:t>圆桌无有效决议时</a:t>
+            </a:r>
+          </a:p>
+        </p:txBody>
+      </p:sp>
+      <p:sp>
+        <p:nvSpPr>
+          <p:cNvPr id="19" name="Rounded Rectangle 18"/>
           <p:cNvSpPr/>
           <p:nvPr/>
         </p:nvSpPr>
         <p:spPr>
           <a:xfrm>
-            <a:off x="7543800" y="3520440"/>
-            <a:ext cx="4005072" cy="758952"/>
+            <a:off x="640080" y="4471416"/>
+            <a:ext cx="6766560" cy="786384"/>
           </a:xfrm>
           <a:prstGeom prst="roundRect">
             <a:avLst>
@@ -9900,14 +9413,14 @@
       </p:sp>
       <p:sp>
         <p:nvSpPr>
-          <p:cNvPr id="15" name="TextBox 14"/>
+          <p:cNvPr id="20" name="TextBox 19"/>
           <p:cNvSpPr txBox="1"/>
           <p:nvPr/>
         </p:nvSpPr>
         <p:spPr>
           <a:xfrm>
-            <a:off x="7726679" y="3630168"/>
-            <a:ext cx="3657600" cy="274320"/>
+            <a:off x="841248" y="4590288"/>
+            <a:ext cx="1828800" cy="365760"/>
           </a:xfrm>
           <a:prstGeom prst="rect">
             <a:avLst/>
@@ -9926,36 +9439,36 @@
               </a:spcBef>
             </a:pPr>
             <a:r>
-              <a:rPr sz="1300" b="1">
-                <a:solidFill>
-                  <a:srgbClr val="F2B544"/>
+              <a:rPr sz="1500" b="1">
+                <a:solidFill>
+                  <a:srgbClr val="9AA7B4"/>
                 </a:solidFill>
                 <a:latin typeface="Microsoft YaHei"/>
               </a:rPr>
               <a:t/>
             </a:r>
             <a:r>
-              <a:rPr sz="1300" b="1">
-                <a:solidFill>
-                  <a:srgbClr val="F2B544"/>
-                </a:solidFill>
-                <a:latin typeface="Microsoft YaHei"/>
-              </a:rPr>
-              <a:t>锚点靶场</a:t>
-            </a:r>
-          </a:p>
-        </p:txBody>
-      </p:sp>
-      <p:sp>
-        <p:nvSpPr>
-          <p:cNvPr id="16" name="TextBox 15"/>
+              <a:rPr sz="1500" b="1">
+                <a:solidFill>
+                  <a:srgbClr val="9AA7B4"/>
+                </a:solidFill>
+                <a:latin typeface="Microsoft YaHei"/>
+              </a:rPr>
+              <a:t>④ 带债通过</a:t>
+            </a:r>
+          </a:p>
+        </p:txBody>
+      </p:sp>
+      <p:sp>
+        <p:nvSpPr>
+          <p:cNvPr id="21" name="TextBox 20"/>
           <p:cNvSpPr txBox="1"/>
           <p:nvPr/>
         </p:nvSpPr>
         <p:spPr>
           <a:xfrm>
-            <a:off x="7726679" y="3913632"/>
-            <a:ext cx="3657600" cy="320040"/>
+            <a:off x="2651760" y="4572000"/>
+            <a:ext cx="4572000" cy="274320"/>
           </a:xfrm>
           <a:prstGeom prst="rect">
             <a:avLst/>
@@ -9974,6 +9487,54 @@
               </a:spcBef>
             </a:pPr>
             <a:r>
+              <a:rPr sz="1100" b="0">
+                <a:solidFill>
+                  <a:srgbClr val="EAF0F6"/>
+                </a:solidFill>
+                <a:latin typeface="Microsoft YaHei"/>
+              </a:rPr>
+              <a:t/>
+            </a:r>
+            <a:r>
+              <a:rPr sz="1100" b="0">
+                <a:solidFill>
+                  <a:srgbClr val="EAF0F6"/>
+                </a:solidFill>
+                <a:latin typeface="Microsoft YaHei"/>
+              </a:rPr>
+              <a:t>写 DebtRecord + 需求标 accepted_with_debt</a:t>
+            </a:r>
+          </a:p>
+        </p:txBody>
+      </p:sp>
+      <p:sp>
+        <p:nvSpPr>
+          <p:cNvPr id="22" name="TextBox 21"/>
+          <p:cNvSpPr txBox="1"/>
+          <p:nvPr/>
+        </p:nvSpPr>
+        <p:spPr>
+          <a:xfrm>
+            <a:off x="2651760" y="4855464"/>
+            <a:ext cx="4572000" cy="274320"/>
+          </a:xfrm>
+          <a:prstGeom prst="rect">
+            <a:avLst/>
+          </a:prstGeom>
+          <a:noFill/>
+        </p:spPr>
+        <p:txBody>
+          <a:bodyPr wrap="square" lIns="0" rIns="0" tIns="0" bIns="0">
+            <a:spAutoFit/>
+          </a:bodyPr>
+          <a:lstStyle/>
+          <a:p>
+            <a:pPr algn="l">
+              <a:spcBef>
+                <a:spcPts val="0"/>
+              </a:spcBef>
+            </a:pPr>
+            <a:r>
               <a:rPr sz="1000" b="0">
                 <a:solidFill>
                   <a:srgbClr val="9AA7B4"/>
@@ -9989,21 +9550,21 @@
                 </a:solidFill>
                 <a:latin typeface="Microsoft YaHei"/>
               </a:rPr>
-              <a:t>45 个样本标定检查本身准不准</a:t>
-            </a:r>
-          </a:p>
-        </p:txBody>
-      </p:sp>
-      <p:sp>
-        <p:nvSpPr>
-          <p:cNvPr id="17" name="Rounded Rectangle 16"/>
+              <a:t>真人不可用时的最终出口</a:t>
+            </a:r>
+          </a:p>
+        </p:txBody>
+      </p:sp>
+      <p:sp>
+        <p:nvSpPr>
+          <p:cNvPr id="23" name="Rounded Rectangle 22"/>
           <p:cNvSpPr/>
           <p:nvPr/>
         </p:nvSpPr>
         <p:spPr>
           <a:xfrm>
-            <a:off x="640080" y="4526280"/>
-            <a:ext cx="10908792" cy="1600200"/>
+            <a:off x="7635240" y="1783080"/>
+            <a:ext cx="3913632" cy="3401568"/>
           </a:xfrm>
           <a:prstGeom prst="roundRect">
             <a:avLst>
@@ -10035,7 +9596,7 @@
           </a:fontRef>
         </p:style>
         <p:txBody>
-          <a:bodyPr rtlCol="0" anchor="ctr" wrap="square" lIns="182880" tIns="109728"/>
+          <a:bodyPr rtlCol="0" anchor="ctr" wrap="square" lIns="164592" tIns="128016"/>
           <a:lstStyle/>
           <a:p>
             <a:pPr algn="l">
@@ -10044,52 +9605,225 @@
               </a:spcBef>
             </a:pPr>
             <a:r>
-              <a:rPr sz="1300" b="1">
+              <a:rPr sz="1400" b="1">
                 <a:solidFill>
                   <a:srgbClr val="35C48F"/>
                 </a:solidFill>
                 <a:latin typeface="Microsoft YaHei"/>
               </a:rPr>
-              <a:t>靶场：45 个样本（30 注入 + 15 干净对照）</a:t>
-            </a:r>
-          </a:p>
-          <a:p>
-            <a:pPr algn="l">
-              <a:spcBef>
-                <a:spcPts val="800"/>
-              </a:spcBef>
-            </a:pPr>
-            <a:r>
-              <a:rPr sz="1800" b="1">
+              <a:t>四个防空转机制</a:t>
+            </a:r>
+          </a:p>
+          <a:p>
+            <a:pPr algn="l">
+              <a:spcBef>
+                <a:spcPts val="1200"/>
+              </a:spcBef>
+            </a:pPr>
+            <a:r>
+              <a:rPr sz="1100" b="0">
                 <a:solidFill>
                   <a:srgbClr val="EAF0F6"/>
                 </a:solidFill>
                 <a:latin typeface="Microsoft YaHei"/>
               </a:rPr>
-              <a:t>TP 30    FN 0    FP 0    TN 15    严重度不符 0</a:t>
-            </a:r>
-          </a:p>
-          <a:p>
-            <a:pPr algn="l">
-              <a:spcBef>
-                <a:spcPts val="600"/>
+              <a:t>阻断 3 次后权限自动终止</a:t>
+            </a:r>
+          </a:p>
+          <a:p>
+            <a:pPr algn="l">
+              <a:spcBef>
+                <a:spcPts val="200"/>
+              </a:spcBef>
+            </a:pPr>
+            <a:r>
+              <a:rPr sz="1000" b="0">
+                <a:solidFill>
+                  <a:srgbClr val="9AA7B4"/>
+                </a:solidFill>
+                <a:latin typeface="Microsoft YaHei"/>
+              </a:rPr>
+              <a:t>否则两个 Agent 能互相否决到死</a:t>
+            </a:r>
+          </a:p>
+          <a:p>
+            <a:pPr algn="l">
+              <a:spcBef>
+                <a:spcPts val="1000"/>
               </a:spcBef>
             </a:pPr>
             <a:r>
               <a:rPr sz="1100" b="0">
                 <a:solidFill>
+                  <a:srgbClr val="EAF0F6"/>
+                </a:solidFill>
+                <a:latin typeface="Microsoft YaHei"/>
+              </a:rPr>
+              <a:t>签名未变 → 不再开会</a:t>
+            </a:r>
+          </a:p>
+          <a:p>
+            <a:pPr algn="l">
+              <a:spcBef>
+                <a:spcPts val="200"/>
+              </a:spcBef>
+            </a:pPr>
+            <a:r>
+              <a:rPr sz="1000" b="0">
+                <a:solidFill>
                   <a:srgbClr val="9AA7B4"/>
                 </a:solidFill>
                 <a:latin typeface="Microsoft YaHei"/>
               </a:rPr>
-              <a:t>「干净通过率」比「检出率」更重要：一条会对好代码报警的检查，会让角色学会糊弄它 —— 此后所有真报都会被降权。</a:t>
-            </a:r>
-          </a:p>
-        </p:txBody>
-      </p:sp>
-      <p:sp>
-        <p:nvSpPr>
-          <p:cNvPr id="18" name="TextBox 17"/>
+              <a:t>实测过某阶段连开 6 次圆桌</a:t>
+            </a:r>
+          </a:p>
+          <a:p>
+            <a:pPr algn="l">
+              <a:spcBef>
+                <a:spcPts val="1000"/>
+              </a:spcBef>
+            </a:pPr>
+            <a:r>
+              <a:rPr sz="1100" b="0">
+                <a:solidFill>
+                  <a:srgbClr val="EAF0F6"/>
+                </a:solidFill>
+                <a:latin typeface="Microsoft YaHei"/>
+              </a:rPr>
+              <a:t>修复无效 → 直接转逃生</a:t>
+            </a:r>
+          </a:p>
+          <a:p>
+            <a:pPr algn="l">
+              <a:spcBef>
+                <a:spcPts val="200"/>
+              </a:spcBef>
+            </a:pPr>
+            <a:r>
+              <a:rPr sz="1000" b="0">
+                <a:solidFill>
+                  <a:srgbClr val="9AA7B4"/>
+                </a:solidFill>
+                <a:latin typeface="Microsoft YaHei"/>
+              </a:rPr>
+              <a:t>不重复付费</a:t>
+            </a:r>
+          </a:p>
+          <a:p>
+            <a:pPr algn="l">
+              <a:spcBef>
+                <a:spcPts val="1000"/>
+              </a:spcBef>
+            </a:pPr>
+            <a:r>
+              <a:rPr sz="1100" b="0">
+                <a:solidFill>
+                  <a:srgbClr val="EAF0F6"/>
+                </a:solidFill>
+                <a:latin typeface="Microsoft YaHei"/>
+              </a:rPr>
+              <a:t>上下文超长 → 预算减半重试</a:t>
+            </a:r>
+          </a:p>
+          <a:p>
+            <a:pPr algn="l">
+              <a:spcBef>
+                <a:spcPts val="200"/>
+              </a:spcBef>
+            </a:pPr>
+            <a:r>
+              <a:rPr sz="1000" b="0">
+                <a:solidFill>
+                  <a:srgbClr val="9AA7B4"/>
+                </a:solidFill>
+                <a:latin typeface="Microsoft YaHei"/>
+              </a:rPr>
+              <a:t>不让一次 400 打死整轮 run</a:t>
+            </a:r>
+          </a:p>
+        </p:txBody>
+      </p:sp>
+      <p:sp>
+        <p:nvSpPr>
+          <p:cNvPr id="24" name="Rounded Rectangle 23"/>
+          <p:cNvSpPr/>
+          <p:nvPr/>
+        </p:nvSpPr>
+        <p:spPr>
+          <a:xfrm>
+            <a:off x="640080" y="5532120"/>
+            <a:ext cx="10908792" cy="713232"/>
+          </a:xfrm>
+          <a:prstGeom prst="roundRect">
+            <a:avLst>
+              <a:gd name="adj" fmla="val 6000"/>
+            </a:avLst>
+          </a:prstGeom>
+          <a:solidFill>
+            <a:srgbClr val="182028"/>
+          </a:solidFill>
+          <a:ln w="12700">
+            <a:solidFill>
+              <a:srgbClr val="2B3642"/>
+            </a:solidFill>
+          </a:ln>
+          <a:effectLst/>
+        </p:spPr>
+        <p:style>
+          <a:lnRef idx="1">
+            <a:schemeClr val="accent1"/>
+          </a:lnRef>
+          <a:fillRef idx="3">
+            <a:schemeClr val="accent1"/>
+          </a:fillRef>
+          <a:effectRef idx="2">
+            <a:schemeClr val="accent1"/>
+          </a:effectRef>
+          <a:fontRef idx="minor">
+            <a:schemeClr val="lt1"/>
+          </a:fontRef>
+        </p:style>
+        <p:txBody>
+          <a:bodyPr rtlCol="0" anchor="ctr" wrap="square" lIns="182880"/>
+          <a:lstStyle/>
+          <a:p>
+            <a:pPr algn="l">
+              <a:spcBef>
+                <a:spcPts val="0"/>
+              </a:spcBef>
+            </a:pPr>
+            <a:r>
+              <a:rPr sz="1000" b="1">
+                <a:solidFill>
+                  <a:srgbClr val="35C48F"/>
+                </a:solidFill>
+                <a:latin typeface="Microsoft YaHei"/>
+              </a:rPr>
+              <a:t>真实日志</a:t>
+            </a:r>
+          </a:p>
+          <a:p>
+            <a:pPr algn="l">
+              <a:spcBef>
+                <a:spcPts val="200"/>
+              </a:spcBef>
+            </a:pPr>
+            <a:r>
+              <a:rPr sz="1100" b="0">
+                <a:solidFill>
+                  <a:srgbClr val="9AA7B4"/>
+                </a:solidFill>
+                <a:latin typeface="Microsoft YaHei"/>
+              </a:rPr>
+              <a:t>[CONTRACTING] 工单修复后硬失败签名未变（pm 的修复没有改变任何东西），不再重复重试，转逃生流程 → 带债通过（受影响需求 3 条）</a:t>
+            </a:r>
+          </a:p>
+        </p:txBody>
+      </p:sp>
+      <p:sp>
+        <p:nvSpPr>
+          <p:cNvPr id="25" name="TextBox 24"/>
           <p:cNvSpPr txBox="1"/>
           <p:nvPr/>
         </p:nvSpPr>
@@ -10137,7 +9871,7 @@
       </p:sp>
       <p:sp>
         <p:nvSpPr>
-          <p:cNvPr id="19" name="TextBox 18"/>
+          <p:cNvPr id="26" name="TextBox 25"/>
           <p:cNvSpPr txBox="1"/>
           <p:nvPr/>
         </p:nvSpPr>
@@ -10178,7 +9912,7 @@
                 </a:solidFill>
                 <a:latin typeface="Microsoft YaHei"/>
               </a:rPr>
-              <a:t>7 / 8</a:t>
+              <a:t>7 / 9</a:t>
             </a:r>
           </a:p>
         </p:txBody>
@@ -10288,7 +10022,7 @@
                 </a:solidFill>
                 <a:latin typeface="Microsoft YaHei"/>
               </a:rPr>
-              <a:t>结论</a:t>
+              <a:t>可观测性</a:t>
             </a:r>
           </a:p>
         </p:txBody>
@@ -10336,14 +10070,62 @@
                 </a:solidFill>
                 <a:latin typeface="Microsoft YaHei"/>
               </a:rPr>
-              <a:t>已经做到的，和还没做到的</a:t>
+              <a:t>能回答「它到底看到了什么」</a:t>
+            </a:r>
+          </a:p>
+        </p:txBody>
+      </p:sp>
+      <p:sp>
+        <p:nvSpPr>
+          <p:cNvPr id="5" name="TextBox 4"/>
+          <p:cNvSpPr txBox="1"/>
+          <p:nvPr/>
+        </p:nvSpPr>
+        <p:spPr>
+          <a:xfrm>
+            <a:off x="640080" y="1481328"/>
+            <a:ext cx="10881360" cy="457200"/>
+          </a:xfrm>
+          <a:prstGeom prst="rect">
+            <a:avLst/>
+          </a:prstGeom>
+          <a:noFill/>
+        </p:spPr>
+        <p:txBody>
+          <a:bodyPr wrap="square" lIns="0" rIns="0" tIns="0" bIns="0">
+            <a:spAutoFit/>
+          </a:bodyPr>
+          <a:lstStyle/>
+          <a:p>
+            <a:pPr algn="l">
+              <a:spcBef>
+                <a:spcPts val="0"/>
+              </a:spcBef>
+            </a:pPr>
+            <a:r>
+              <a:rPr sz="1400" b="0">
+                <a:solidFill>
+                  <a:srgbClr val="9AA7B4"/>
+                </a:solidFill>
+                <a:latin typeface="Microsoft YaHei"/>
+              </a:rPr>
+              <a:t/>
+            </a:r>
+            <a:r>
+              <a:rPr sz="1400" b="0">
+                <a:solidFill>
+                  <a:srgbClr val="9AA7B4"/>
+                </a:solidFill>
+                <a:latin typeface="Microsoft YaHei"/>
+              </a:rPr>
+              <a:t>在这一行存在之前，「为什么它老是做不对」只能靠猜 —— 我们为此花了两小时复算</a:t>
             </a:r>
           </a:p>
         </p:txBody>
       </p:sp>
       <p:cxnSp>
         <p:nvCxnSpPr>
-          <p:cNvPr id="5" name="Connector 4"/>
+          <p:cNvPr id="6" name="Connector 5"/>
           <p:cNvCxnSpPr/>
           <p:nvPr/>
         </p:nvCxnSpPr>
@@ -10378,14 +10160,14 @@
       </p:cxnSp>
       <p:sp>
         <p:nvSpPr>
-          <p:cNvPr id="6" name="Rounded Rectangle 5"/>
+          <p:cNvPr id="7" name="Rounded Rectangle 6"/>
           <p:cNvSpPr/>
           <p:nvPr/>
         </p:nvSpPr>
         <p:spPr>
           <a:xfrm>
             <a:off x="640080" y="1783080"/>
-            <a:ext cx="5303520" cy="3611880"/>
+            <a:ext cx="6675120" cy="2514600"/>
           </a:xfrm>
           <a:prstGeom prst="roundRect">
             <a:avLst>
@@ -10417,7 +10199,7 @@
           </a:fontRef>
         </p:style>
         <p:txBody>
-          <a:bodyPr rtlCol="0" anchor="t" wrap="square" lIns="182880" tIns="137160"/>
+          <a:bodyPr rtlCol="0" anchor="ctr" wrap="square" lIns="164592" tIns="128016"/>
           <a:lstStyle/>
           <a:p>
             <a:pPr algn="l">
@@ -10426,29 +10208,29 @@
               </a:spcBef>
             </a:pPr>
             <a:r>
-              <a:rPr sz="1600" b="1">
+              <a:rPr sz="1200" b="1">
                 <a:solidFill>
                   <a:srgbClr val="35C48F"/>
                 </a:solidFill>
                 <a:latin typeface="Microsoft YaHei"/>
               </a:rPr>
-              <a:t>已经做到</a:t>
-            </a:r>
-          </a:p>
-          <a:p>
-            <a:pPr algn="l">
-              <a:spcBef>
-                <a:spcPts val="1400"/>
-              </a:spcBef>
-            </a:pPr>
-            <a:r>
-              <a:rPr sz="1300" b="0">
+              <a:t>run 日志里的输入审计（每次调用都记）</a:t>
+            </a:r>
+          </a:p>
+          <a:p>
+            <a:pPr algn="l">
+              <a:spcBef>
+                <a:spcPts val="1200"/>
+              </a:spcBef>
+            </a:pPr>
+            <a:r>
+              <a:rPr sz="1200" b="0">
                 <a:solidFill>
                   <a:srgbClr val="EAF0F6"/>
                 </a:solidFill>
                 <a:latin typeface="Microsoft YaHei"/>
               </a:rPr>
-              <a:t>一个 AI 写出来、真的能跑的系统</a:t>
+              <a:t>上下文：23,177 / 60,000 字符（39%）  注入 3 个 · 丢弃 0 个</a:t>
             </a:r>
           </a:p>
           <a:p>
@@ -10464,7 +10246,23 @@
                 </a:solidFill>
                 <a:latin typeface="Microsoft YaHei"/>
               </a:rPr>
-              <a:t>单元测试 22 / 22，端到端 33 / 33，零依赖启动</a:t>
+              <a:t>  其中契约摘要 1 个</a:t>
+            </a:r>
+          </a:p>
+          <a:p>
+            <a:pPr algn="l">
+              <a:spcBef>
+                <a:spcPts val="200"/>
+              </a:spcBef>
+            </a:pPr>
+            <a:r>
+              <a:rPr sz="1100" b="0">
+                <a:solidFill>
+                  <a:srgbClr val="9AA7B4"/>
+                </a:solidFill>
+                <a:latin typeface="Microsoft YaHei"/>
+              </a:rPr>
+              <a:t>  未注入：TaskGraph-001(15520·tier-cap)</a:t>
             </a:r>
           </a:p>
           <a:p>
@@ -10474,13 +10272,13 @@
               </a:spcBef>
             </a:pPr>
             <a:r>
-              <a:rPr sz="1300" b="0">
-                <a:solidFill>
-                  <a:srgbClr val="EAF0F6"/>
-                </a:solidFill>
-                <a:latin typeface="Microsoft YaHei"/>
-              </a:rPr>
-              <a:t>11 条确定性锚点 + 401 个测试守着「检查本身是对的」</a:t>
+              <a:rPr sz="1100" b="0">
+                <a:solidFill>
+                  <a:srgbClr val="9AA7B4"/>
+                </a:solidFill>
+                <a:latin typeface="Microsoft YaHei"/>
+              </a:rPr>
+              <a:t>  injected[]: {id, kind, chars, digest? | card?}</a:t>
             </a:r>
           </a:p>
           <a:p>
@@ -10496,53 +10294,21 @@
                 </a:solidFill>
                 <a:latin typeface="Microsoft YaHei"/>
               </a:rPr>
-              <a:t>靶场 45 样本零误报</a:t>
-            </a:r>
-          </a:p>
-          <a:p>
-            <a:pPr algn="l">
-              <a:spcBef>
-                <a:spcPts val="1000"/>
-              </a:spcBef>
-            </a:pPr>
-            <a:r>
-              <a:rPr sz="1300" b="0">
-                <a:solidFill>
-                  <a:srgbClr val="EAF0F6"/>
-                </a:solidFill>
-                <a:latin typeface="Microsoft YaHei"/>
-              </a:rPr>
-              <a:t>一条可复用的方法论</a:t>
-            </a:r>
-          </a:p>
-          <a:p>
-            <a:pPr algn="l">
-              <a:spcBef>
-                <a:spcPts val="200"/>
-              </a:spcBef>
-            </a:pPr>
-            <a:r>
-              <a:rPr sz="1100" b="0">
-                <a:solidFill>
-                  <a:srgbClr val="9AA7B4"/>
-                </a:solidFill>
-                <a:latin typeface="Microsoft YaHei"/>
-              </a:rPr>
-              <a:t>先让失败可见，再谈减少失败</a:t>
-            </a:r>
-          </a:p>
-        </p:txBody>
-      </p:sp>
-      <p:sp>
-        <p:nvSpPr>
-          <p:cNvPr id="7" name="Rounded Rectangle 6"/>
+              <a:t>  omitted[]: {id, kind, chars, reason: tier-cap | no-space}</a:t>
+            </a:r>
+          </a:p>
+        </p:txBody>
+      </p:sp>
+      <p:sp>
+        <p:nvSpPr>
+          <p:cNvPr id="8" name="Rounded Rectangle 7"/>
           <p:cNvSpPr/>
           <p:nvPr/>
         </p:nvSpPr>
         <p:spPr>
           <a:xfrm>
-            <a:off x="6245352" y="1783080"/>
-            <a:ext cx="5303520" cy="3611880"/>
+            <a:off x="7543800" y="1783080"/>
+            <a:ext cx="4005072" cy="758952"/>
           </a:xfrm>
           <a:prstGeom prst="roundRect">
             <a:avLst>
@@ -10574,6 +10340,977 @@
           </a:fontRef>
         </p:style>
         <p:txBody>
+          <a:bodyPr rtlCol="0" anchor="ctr"/>
+          <a:lstStyle/>
+          <a:p>
+            <a:pPr algn="ctr"/>
+          </a:p>
+        </p:txBody>
+      </p:sp>
+      <p:sp>
+        <p:nvSpPr>
+          <p:cNvPr id="9" name="TextBox 8"/>
+          <p:cNvSpPr txBox="1"/>
+          <p:nvPr/>
+        </p:nvSpPr>
+        <p:spPr>
+          <a:xfrm>
+            <a:off x="7726679" y="1892808"/>
+            <a:ext cx="3657600" cy="274320"/>
+          </a:xfrm>
+          <a:prstGeom prst="rect">
+            <a:avLst/>
+          </a:prstGeom>
+          <a:noFill/>
+        </p:spPr>
+        <p:txBody>
+          <a:bodyPr wrap="square" lIns="0" rIns="0" tIns="0" bIns="0">
+            <a:spAutoFit/>
+          </a:bodyPr>
+          <a:lstStyle/>
+          <a:p>
+            <a:pPr algn="l">
+              <a:spcBef>
+                <a:spcPts val="0"/>
+              </a:spcBef>
+            </a:pPr>
+            <a:r>
+              <a:rPr sz="1300" b="1">
+                <a:solidFill>
+                  <a:srgbClr val="35C48F"/>
+                </a:solidFill>
+                <a:latin typeface="Microsoft YaHei"/>
+              </a:rPr>
+              <a:t/>
+            </a:r>
+            <a:r>
+              <a:rPr sz="1300" b="1">
+                <a:solidFill>
+                  <a:srgbClr val="35C48F"/>
+                </a:solidFill>
+                <a:latin typeface="Microsoft YaHei"/>
+              </a:rPr>
+              <a:t>哈希链日志</a:t>
+            </a:r>
+          </a:p>
+        </p:txBody>
+      </p:sp>
+      <p:sp>
+        <p:nvSpPr>
+          <p:cNvPr id="10" name="TextBox 9"/>
+          <p:cNvSpPr txBox="1"/>
+          <p:nvPr/>
+        </p:nvSpPr>
+        <p:spPr>
+          <a:xfrm>
+            <a:off x="7726679" y="2176272"/>
+            <a:ext cx="3657600" cy="320040"/>
+          </a:xfrm>
+          <a:prstGeom prst="rect">
+            <a:avLst/>
+          </a:prstGeom>
+          <a:noFill/>
+        </p:spPr>
+        <p:txBody>
+          <a:bodyPr wrap="square" lIns="0" rIns="0" tIns="0" bIns="0">
+            <a:spAutoFit/>
+          </a:bodyPr>
+          <a:lstStyle/>
+          <a:p>
+            <a:pPr algn="l">
+              <a:spcBef>
+                <a:spcPts val="0"/>
+              </a:spcBef>
+            </a:pPr>
+            <a:r>
+              <a:rPr sz="1000" b="0">
+                <a:solidFill>
+                  <a:srgbClr val="9AA7B4"/>
+                </a:solidFill>
+                <a:latin typeface="Microsoft YaHei"/>
+              </a:rPr>
+              <a:t/>
+            </a:r>
+            <a:r>
+              <a:rPr sz="1000" b="0">
+                <a:solidFill>
+                  <a:srgbClr val="9AA7B4"/>
+                </a:solidFill>
+                <a:latin typeface="Microsoft YaHei"/>
+              </a:rPr>
+              <a:t>任何一条被改，链就断</a:t>
+            </a:r>
+          </a:p>
+        </p:txBody>
+      </p:sp>
+      <p:sp>
+        <p:nvSpPr>
+          <p:cNvPr id="11" name="Rounded Rectangle 10"/>
+          <p:cNvSpPr/>
+          <p:nvPr/>
+        </p:nvSpPr>
+        <p:spPr>
+          <a:xfrm>
+            <a:off x="7543800" y="2651760"/>
+            <a:ext cx="4005072" cy="758952"/>
+          </a:xfrm>
+          <a:prstGeom prst="roundRect">
+            <a:avLst>
+              <a:gd name="adj" fmla="val 6000"/>
+            </a:avLst>
+          </a:prstGeom>
+          <a:solidFill>
+            <a:srgbClr val="182028"/>
+          </a:solidFill>
+          <a:ln w="12700">
+            <a:solidFill>
+              <a:srgbClr val="2B3642"/>
+            </a:solidFill>
+          </a:ln>
+          <a:effectLst/>
+        </p:spPr>
+        <p:style>
+          <a:lnRef idx="1">
+            <a:schemeClr val="accent1"/>
+          </a:lnRef>
+          <a:fillRef idx="3">
+            <a:schemeClr val="accent1"/>
+          </a:fillRef>
+          <a:effectRef idx="2">
+            <a:schemeClr val="accent1"/>
+          </a:effectRef>
+          <a:fontRef idx="minor">
+            <a:schemeClr val="lt1"/>
+          </a:fontRef>
+        </p:style>
+        <p:txBody>
+          <a:bodyPr rtlCol="0" anchor="ctr"/>
+          <a:lstStyle/>
+          <a:p>
+            <a:pPr algn="ctr"/>
+          </a:p>
+        </p:txBody>
+      </p:sp>
+      <p:sp>
+        <p:nvSpPr>
+          <p:cNvPr id="12" name="TextBox 11"/>
+          <p:cNvSpPr txBox="1"/>
+          <p:nvPr/>
+        </p:nvSpPr>
+        <p:spPr>
+          <a:xfrm>
+            <a:off x="7726679" y="2761488"/>
+            <a:ext cx="3657600" cy="274320"/>
+          </a:xfrm>
+          <a:prstGeom prst="rect">
+            <a:avLst/>
+          </a:prstGeom>
+          <a:noFill/>
+        </p:spPr>
+        <p:txBody>
+          <a:bodyPr wrap="square" lIns="0" rIns="0" tIns="0" bIns="0">
+            <a:spAutoFit/>
+          </a:bodyPr>
+          <a:lstStyle/>
+          <a:p>
+            <a:pPr algn="l">
+              <a:spcBef>
+                <a:spcPts val="0"/>
+              </a:spcBef>
+            </a:pPr>
+            <a:r>
+              <a:rPr sz="1300" b="1">
+                <a:solidFill>
+                  <a:srgbClr val="EAF0F6"/>
+                </a:solidFill>
+                <a:latin typeface="Microsoft YaHei"/>
+              </a:rPr>
+              <a:t/>
+            </a:r>
+            <a:r>
+              <a:rPr sz="1300" b="1">
+                <a:solidFill>
+                  <a:srgbClr val="EAF0F6"/>
+                </a:solidFill>
+                <a:latin typeface="Microsoft YaHei"/>
+              </a:rPr>
+              <a:t>回放</a:t>
+            </a:r>
+          </a:p>
+        </p:txBody>
+      </p:sp>
+      <p:sp>
+        <p:nvSpPr>
+          <p:cNvPr id="13" name="TextBox 12"/>
+          <p:cNvSpPr txBox="1"/>
+          <p:nvPr/>
+        </p:nvSpPr>
+        <p:spPr>
+          <a:xfrm>
+            <a:off x="7726679" y="3044952"/>
+            <a:ext cx="3657600" cy="320040"/>
+          </a:xfrm>
+          <a:prstGeom prst="rect">
+            <a:avLst/>
+          </a:prstGeom>
+          <a:noFill/>
+        </p:spPr>
+        <p:txBody>
+          <a:bodyPr wrap="square" lIns="0" rIns="0" tIns="0" bIns="0">
+            <a:spAutoFit/>
+          </a:bodyPr>
+          <a:lstStyle/>
+          <a:p>
+            <a:pPr algn="l">
+              <a:spcBef>
+                <a:spcPts val="0"/>
+              </a:spcBef>
+            </a:pPr>
+            <a:r>
+              <a:rPr sz="1000" b="0">
+                <a:solidFill>
+                  <a:srgbClr val="9AA7B4"/>
+                </a:solidFill>
+                <a:latin typeface="Microsoft YaHei"/>
+              </a:rPr>
+              <a:t/>
+            </a:r>
+            <a:r>
+              <a:rPr sz="1000" b="0">
+                <a:solidFill>
+                  <a:srgbClr val="9AA7B4"/>
+                </a:solidFill>
+                <a:latin typeface="Microsoft YaHei"/>
+              </a:rPr>
+              <a:t>同一批模型输出可重放，把不确定性从实验里摘出去</a:t>
+            </a:r>
+          </a:p>
+        </p:txBody>
+      </p:sp>
+      <p:sp>
+        <p:nvSpPr>
+          <p:cNvPr id="14" name="Rounded Rectangle 13"/>
+          <p:cNvSpPr/>
+          <p:nvPr/>
+        </p:nvSpPr>
+        <p:spPr>
+          <a:xfrm>
+            <a:off x="7543800" y="3520440"/>
+            <a:ext cx="4005072" cy="758952"/>
+          </a:xfrm>
+          <a:prstGeom prst="roundRect">
+            <a:avLst>
+              <a:gd name="adj" fmla="val 6000"/>
+            </a:avLst>
+          </a:prstGeom>
+          <a:solidFill>
+            <a:srgbClr val="182028"/>
+          </a:solidFill>
+          <a:ln w="12700">
+            <a:solidFill>
+              <a:srgbClr val="2B3642"/>
+            </a:solidFill>
+          </a:ln>
+          <a:effectLst/>
+        </p:spPr>
+        <p:style>
+          <a:lnRef idx="1">
+            <a:schemeClr val="accent1"/>
+          </a:lnRef>
+          <a:fillRef idx="3">
+            <a:schemeClr val="accent1"/>
+          </a:fillRef>
+          <a:effectRef idx="2">
+            <a:schemeClr val="accent1"/>
+          </a:effectRef>
+          <a:fontRef idx="minor">
+            <a:schemeClr val="lt1"/>
+          </a:fontRef>
+        </p:style>
+        <p:txBody>
+          <a:bodyPr rtlCol="0" anchor="ctr"/>
+          <a:lstStyle/>
+          <a:p>
+            <a:pPr algn="ctr"/>
+          </a:p>
+        </p:txBody>
+      </p:sp>
+      <p:sp>
+        <p:nvSpPr>
+          <p:cNvPr id="15" name="TextBox 14"/>
+          <p:cNvSpPr txBox="1"/>
+          <p:nvPr/>
+        </p:nvSpPr>
+        <p:spPr>
+          <a:xfrm>
+            <a:off x="7726679" y="3630168"/>
+            <a:ext cx="3657600" cy="274320"/>
+          </a:xfrm>
+          <a:prstGeom prst="rect">
+            <a:avLst/>
+          </a:prstGeom>
+          <a:noFill/>
+        </p:spPr>
+        <p:txBody>
+          <a:bodyPr wrap="square" lIns="0" rIns="0" tIns="0" bIns="0">
+            <a:spAutoFit/>
+          </a:bodyPr>
+          <a:lstStyle/>
+          <a:p>
+            <a:pPr algn="l">
+              <a:spcBef>
+                <a:spcPts val="0"/>
+              </a:spcBef>
+            </a:pPr>
+            <a:r>
+              <a:rPr sz="1300" b="1">
+                <a:solidFill>
+                  <a:srgbClr val="F2B544"/>
+                </a:solidFill>
+                <a:latin typeface="Microsoft YaHei"/>
+              </a:rPr>
+              <a:t/>
+            </a:r>
+            <a:r>
+              <a:rPr sz="1300" b="1">
+                <a:solidFill>
+                  <a:srgbClr val="F2B544"/>
+                </a:solidFill>
+                <a:latin typeface="Microsoft YaHei"/>
+              </a:rPr>
+              <a:t>锚点靶场</a:t>
+            </a:r>
+          </a:p>
+        </p:txBody>
+      </p:sp>
+      <p:sp>
+        <p:nvSpPr>
+          <p:cNvPr id="16" name="TextBox 15"/>
+          <p:cNvSpPr txBox="1"/>
+          <p:nvPr/>
+        </p:nvSpPr>
+        <p:spPr>
+          <a:xfrm>
+            <a:off x="7726679" y="3913632"/>
+            <a:ext cx="3657600" cy="320040"/>
+          </a:xfrm>
+          <a:prstGeom prst="rect">
+            <a:avLst/>
+          </a:prstGeom>
+          <a:noFill/>
+        </p:spPr>
+        <p:txBody>
+          <a:bodyPr wrap="square" lIns="0" rIns="0" tIns="0" bIns="0">
+            <a:spAutoFit/>
+          </a:bodyPr>
+          <a:lstStyle/>
+          <a:p>
+            <a:pPr algn="l">
+              <a:spcBef>
+                <a:spcPts val="0"/>
+              </a:spcBef>
+            </a:pPr>
+            <a:r>
+              <a:rPr sz="1000" b="0">
+                <a:solidFill>
+                  <a:srgbClr val="9AA7B4"/>
+                </a:solidFill>
+                <a:latin typeface="Microsoft YaHei"/>
+              </a:rPr>
+              <a:t/>
+            </a:r>
+            <a:r>
+              <a:rPr sz="1000" b="0">
+                <a:solidFill>
+                  <a:srgbClr val="9AA7B4"/>
+                </a:solidFill>
+                <a:latin typeface="Microsoft YaHei"/>
+              </a:rPr>
+              <a:t>45 个样本标定检查本身准不准</a:t>
+            </a:r>
+          </a:p>
+        </p:txBody>
+      </p:sp>
+      <p:sp>
+        <p:nvSpPr>
+          <p:cNvPr id="17" name="Rounded Rectangle 16"/>
+          <p:cNvSpPr/>
+          <p:nvPr/>
+        </p:nvSpPr>
+        <p:spPr>
+          <a:xfrm>
+            <a:off x="640080" y="4526280"/>
+            <a:ext cx="10908792" cy="1600200"/>
+          </a:xfrm>
+          <a:prstGeom prst="roundRect">
+            <a:avLst>
+              <a:gd name="adj" fmla="val 6000"/>
+            </a:avLst>
+          </a:prstGeom>
+          <a:solidFill>
+            <a:srgbClr val="182028"/>
+          </a:solidFill>
+          <a:ln w="12700">
+            <a:solidFill>
+              <a:srgbClr val="2B3642"/>
+            </a:solidFill>
+          </a:ln>
+          <a:effectLst/>
+        </p:spPr>
+        <p:style>
+          <a:lnRef idx="1">
+            <a:schemeClr val="accent1"/>
+          </a:lnRef>
+          <a:fillRef idx="3">
+            <a:schemeClr val="accent1"/>
+          </a:fillRef>
+          <a:effectRef idx="2">
+            <a:schemeClr val="accent1"/>
+          </a:effectRef>
+          <a:fontRef idx="minor">
+            <a:schemeClr val="lt1"/>
+          </a:fontRef>
+        </p:style>
+        <p:txBody>
+          <a:bodyPr rtlCol="0" anchor="ctr" wrap="square" lIns="182880" tIns="109728"/>
+          <a:lstStyle/>
+          <a:p>
+            <a:pPr algn="l">
+              <a:spcBef>
+                <a:spcPts val="0"/>
+              </a:spcBef>
+            </a:pPr>
+            <a:r>
+              <a:rPr sz="1300" b="1">
+                <a:solidFill>
+                  <a:srgbClr val="35C48F"/>
+                </a:solidFill>
+                <a:latin typeface="Microsoft YaHei"/>
+              </a:rPr>
+              <a:t>靶场：45 个样本（30 注入 + 15 干净对照）</a:t>
+            </a:r>
+          </a:p>
+          <a:p>
+            <a:pPr algn="l">
+              <a:spcBef>
+                <a:spcPts val="800"/>
+              </a:spcBef>
+            </a:pPr>
+            <a:r>
+              <a:rPr sz="1800" b="1">
+                <a:solidFill>
+                  <a:srgbClr val="EAF0F6"/>
+                </a:solidFill>
+                <a:latin typeface="Microsoft YaHei"/>
+              </a:rPr>
+              <a:t>TP 30    FN 0    FP 0    TN 15    严重度不符 0</a:t>
+            </a:r>
+          </a:p>
+          <a:p>
+            <a:pPr algn="l">
+              <a:spcBef>
+                <a:spcPts val="600"/>
+              </a:spcBef>
+            </a:pPr>
+            <a:r>
+              <a:rPr sz="1100" b="0">
+                <a:solidFill>
+                  <a:srgbClr val="9AA7B4"/>
+                </a:solidFill>
+                <a:latin typeface="Microsoft YaHei"/>
+              </a:rPr>
+              <a:t>「干净通过率」比「检出率」更重要：一条会对好代码报警的检查，会让角色学会糊弄它 —— 此后所有真报都会被降权。</a:t>
+            </a:r>
+          </a:p>
+        </p:txBody>
+      </p:sp>
+      <p:sp>
+        <p:nvSpPr>
+          <p:cNvPr id="18" name="TextBox 17"/>
+          <p:cNvSpPr txBox="1"/>
+          <p:nvPr/>
+        </p:nvSpPr>
+        <p:spPr>
+          <a:xfrm>
+            <a:off x="640080" y="6355080"/>
+            <a:ext cx="7315200" cy="274320"/>
+          </a:xfrm>
+          <a:prstGeom prst="rect">
+            <a:avLst/>
+          </a:prstGeom>
+          <a:noFill/>
+        </p:spPr>
+        <p:txBody>
+          <a:bodyPr wrap="square" lIns="0" rIns="0" tIns="0" bIns="0">
+            <a:spAutoFit/>
+          </a:bodyPr>
+          <a:lstStyle/>
+          <a:p>
+            <a:pPr algn="l">
+              <a:spcBef>
+                <a:spcPts val="0"/>
+              </a:spcBef>
+            </a:pPr>
+            <a:r>
+              <a:rPr sz="1000" b="0">
+                <a:solidFill>
+                  <a:srgbClr val="9AA7B4"/>
+                </a:solidFill>
+                <a:latin typeface="Microsoft YaHei"/>
+              </a:rPr>
+              <a:t/>
+            </a:r>
+            <a:r>
+              <a:rPr sz="1000" b="0">
+                <a:solidFill>
+                  <a:srgbClr val="9AA7B4"/>
+                </a:solidFill>
+                <a:latin typeface="Microsoft YaHei"/>
+              </a:rPr>
+              <a:t>AgentForge · 多角色 AI 研发引擎 · 赛道 B</a:t>
+            </a:r>
+          </a:p>
+        </p:txBody>
+      </p:sp>
+      <p:sp>
+        <p:nvSpPr>
+          <p:cNvPr id="19" name="TextBox 18"/>
+          <p:cNvSpPr txBox="1"/>
+          <p:nvPr/>
+        </p:nvSpPr>
+        <p:spPr>
+          <a:xfrm>
+            <a:off x="10607040" y="6355080"/>
+            <a:ext cx="914400" cy="274320"/>
+          </a:xfrm>
+          <a:prstGeom prst="rect">
+            <a:avLst/>
+          </a:prstGeom>
+          <a:noFill/>
+        </p:spPr>
+        <p:txBody>
+          <a:bodyPr wrap="square" lIns="0" rIns="0" tIns="0" bIns="0">
+            <a:spAutoFit/>
+          </a:bodyPr>
+          <a:lstStyle/>
+          <a:p>
+            <a:pPr algn="l">
+              <a:spcBef>
+                <a:spcPts val="0"/>
+              </a:spcBef>
+            </a:pPr>
+            <a:r>
+              <a:rPr sz="1000" b="0">
+                <a:solidFill>
+                  <a:srgbClr val="9AA7B4"/>
+                </a:solidFill>
+                <a:latin typeface="Microsoft YaHei"/>
+              </a:rPr>
+              <a:t/>
+            </a:r>
+            <a:r>
+              <a:rPr sz="1000" b="0">
+                <a:solidFill>
+                  <a:srgbClr val="9AA7B4"/>
+                </a:solidFill>
+                <a:latin typeface="Microsoft YaHei"/>
+              </a:rPr>
+              <a:t>8 / 9</a:t>
+            </a:r>
+          </a:p>
+        </p:txBody>
+      </p:sp>
+    </p:spTree>
+  </p:cSld>
+  <p:clrMapOvr>
+    <a:masterClrMapping/>
+  </p:clrMapOvr>
+</p:sld>
+</file>
+
+<file path=ppt/slides/slide9.xml><?xml version="1.0" encoding="utf-8"?>
+<p:sld xmlns:a="http://schemas.openxmlformats.org/drawingml/2006/main" xmlns:p="http://schemas.openxmlformats.org/presentationml/2006/main" xmlns:r="http://schemas.openxmlformats.org/officeDocument/2006/relationships">
+  <p:cSld>
+    <p:spTree>
+      <p:nvGrpSpPr>
+        <p:cNvPr id="1" name=""/>
+        <p:cNvGrpSpPr/>
+        <p:nvPr/>
+      </p:nvGrpSpPr>
+      <p:grpSpPr/>
+      <p:sp>
+        <p:nvSpPr>
+          <p:cNvPr id="2" name="Rectangle 1"/>
+          <p:cNvSpPr/>
+          <p:nvPr/>
+        </p:nvSpPr>
+        <p:spPr>
+          <a:xfrm>
+            <a:off x="0" y="0"/>
+            <a:ext cx="12191695" cy="6858000"/>
+          </a:xfrm>
+          <a:prstGeom prst="rect">
+            <a:avLst/>
+          </a:prstGeom>
+          <a:solidFill>
+            <a:srgbClr val="0F1419"/>
+          </a:solidFill>
+          <a:ln>
+            <a:noFill/>
+          </a:ln>
+          <a:effectLst/>
+        </p:spPr>
+        <p:style>
+          <a:lnRef idx="1">
+            <a:schemeClr val="accent1"/>
+          </a:lnRef>
+          <a:fillRef idx="3">
+            <a:schemeClr val="accent1"/>
+          </a:fillRef>
+          <a:effectRef idx="2">
+            <a:schemeClr val="accent1"/>
+          </a:effectRef>
+          <a:fontRef idx="minor">
+            <a:schemeClr val="lt1"/>
+          </a:fontRef>
+        </p:style>
+        <p:txBody>
+          <a:bodyPr rtlCol="0" anchor="ctr"/>
+          <a:lstStyle/>
+          <a:p>
+            <a:pPr algn="ctr"/>
+          </a:p>
+        </p:txBody>
+      </p:sp>
+      <p:sp>
+        <p:nvSpPr>
+          <p:cNvPr id="3" name="TextBox 2"/>
+          <p:cNvSpPr txBox="1"/>
+          <p:nvPr/>
+        </p:nvSpPr>
+        <p:spPr>
+          <a:xfrm>
+            <a:off x="640080" y="411480"/>
+            <a:ext cx="10881360" cy="365760"/>
+          </a:xfrm>
+          <a:prstGeom prst="rect">
+            <a:avLst/>
+          </a:prstGeom>
+          <a:noFill/>
+        </p:spPr>
+        <p:txBody>
+          <a:bodyPr wrap="square" lIns="0" rIns="0" tIns="0" bIns="0">
+            <a:spAutoFit/>
+          </a:bodyPr>
+          <a:lstStyle/>
+          <a:p>
+            <a:pPr algn="l">
+              <a:spcBef>
+                <a:spcPts val="0"/>
+              </a:spcBef>
+            </a:pPr>
+            <a:r>
+              <a:rPr sz="1300" b="1">
+                <a:solidFill>
+                  <a:srgbClr val="35C48F"/>
+                </a:solidFill>
+                <a:latin typeface="Microsoft YaHei"/>
+              </a:rPr>
+              <a:t/>
+            </a:r>
+            <a:r>
+              <a:rPr sz="1300" b="1">
+                <a:solidFill>
+                  <a:srgbClr val="35C48F"/>
+                </a:solidFill>
+                <a:latin typeface="Microsoft YaHei"/>
+              </a:rPr>
+              <a:t>结论</a:t>
+            </a:r>
+          </a:p>
+        </p:txBody>
+      </p:sp>
+      <p:sp>
+        <p:nvSpPr>
+          <p:cNvPr id="4" name="TextBox 3"/>
+          <p:cNvSpPr txBox="1"/>
+          <p:nvPr/>
+        </p:nvSpPr>
+        <p:spPr>
+          <a:xfrm>
+            <a:off x="640080" y="777240"/>
+            <a:ext cx="10881360" cy="731520"/>
+          </a:xfrm>
+          <a:prstGeom prst="rect">
+            <a:avLst/>
+          </a:prstGeom>
+          <a:noFill/>
+        </p:spPr>
+        <p:txBody>
+          <a:bodyPr wrap="square" lIns="0" rIns="0" tIns="0" bIns="0">
+            <a:spAutoFit/>
+          </a:bodyPr>
+          <a:lstStyle/>
+          <a:p>
+            <a:pPr algn="l">
+              <a:spcBef>
+                <a:spcPts val="0"/>
+              </a:spcBef>
+            </a:pPr>
+            <a:r>
+              <a:rPr sz="3000" b="1">
+                <a:solidFill>
+                  <a:srgbClr val="EAF0F6"/>
+                </a:solidFill>
+                <a:latin typeface="Microsoft YaHei"/>
+              </a:rPr>
+              <a:t/>
+            </a:r>
+            <a:r>
+              <a:rPr sz="3000" b="1">
+                <a:solidFill>
+                  <a:srgbClr val="EAF0F6"/>
+                </a:solidFill>
+                <a:latin typeface="Microsoft YaHei"/>
+              </a:rPr>
+              <a:t>已经做到的，和还没做到的</a:t>
+            </a:r>
+          </a:p>
+        </p:txBody>
+      </p:sp>
+      <p:cxnSp>
+        <p:nvCxnSpPr>
+          <p:cNvPr id="5" name="Connector 4"/>
+          <p:cNvCxnSpPr/>
+          <p:nvPr/>
+        </p:nvCxnSpPr>
+        <p:spPr>
+          <a:xfrm>
+            <a:off x="640080" y="1417320"/>
+            <a:ext cx="10908792" cy="0"/>
+          </a:xfrm>
+          <a:prstGeom prst="line">
+            <a:avLst/>
+          </a:prstGeom>
+          <a:ln w="12700">
+            <a:solidFill>
+              <a:srgbClr val="2B3642"/>
+            </a:solidFill>
+          </a:ln>
+        </p:spPr>
+        <p:style>
+          <a:lnRef idx="2">
+            <a:schemeClr val="accent1"/>
+          </a:lnRef>
+          <a:fillRef idx="0">
+            <a:schemeClr val="accent1"/>
+          </a:fillRef>
+          <a:effectRef idx="1">
+            <a:schemeClr val="accent1"/>
+          </a:effectRef>
+          <a:fontRef idx="minor">
+            <a:schemeClr val="tx1"/>
+          </a:fontRef>
+        </p:style>
+      </p:cxnSp>
+      <p:sp>
+        <p:nvSpPr>
+          <p:cNvPr id="6" name="Rounded Rectangle 5"/>
+          <p:cNvSpPr/>
+          <p:nvPr/>
+        </p:nvSpPr>
+        <p:spPr>
+          <a:xfrm>
+            <a:off x="640080" y="1783080"/>
+            <a:ext cx="5303520" cy="3611880"/>
+          </a:xfrm>
+          <a:prstGeom prst="roundRect">
+            <a:avLst>
+              <a:gd name="adj" fmla="val 6000"/>
+            </a:avLst>
+          </a:prstGeom>
+          <a:solidFill>
+            <a:srgbClr val="182028"/>
+          </a:solidFill>
+          <a:ln w="12700">
+            <a:solidFill>
+              <a:srgbClr val="2B3642"/>
+            </a:solidFill>
+          </a:ln>
+          <a:effectLst/>
+        </p:spPr>
+        <p:style>
+          <a:lnRef idx="1">
+            <a:schemeClr val="accent1"/>
+          </a:lnRef>
+          <a:fillRef idx="3">
+            <a:schemeClr val="accent1"/>
+          </a:fillRef>
+          <a:effectRef idx="2">
+            <a:schemeClr val="accent1"/>
+          </a:effectRef>
+          <a:fontRef idx="minor">
+            <a:schemeClr val="lt1"/>
+          </a:fontRef>
+        </p:style>
+        <p:txBody>
+          <a:bodyPr rtlCol="0" anchor="t" wrap="square" lIns="182880" tIns="137160"/>
+          <a:lstStyle/>
+          <a:p>
+            <a:pPr algn="l">
+              <a:spcBef>
+                <a:spcPts val="0"/>
+              </a:spcBef>
+            </a:pPr>
+            <a:r>
+              <a:rPr sz="1600" b="1">
+                <a:solidFill>
+                  <a:srgbClr val="35C48F"/>
+                </a:solidFill>
+                <a:latin typeface="Microsoft YaHei"/>
+              </a:rPr>
+              <a:t>已经做到</a:t>
+            </a:r>
+          </a:p>
+          <a:p>
+            <a:pPr algn="l">
+              <a:spcBef>
+                <a:spcPts val="1400"/>
+              </a:spcBef>
+            </a:pPr>
+            <a:r>
+              <a:rPr sz="1300" b="0">
+                <a:solidFill>
+                  <a:srgbClr val="EAF0F6"/>
+                </a:solidFill>
+                <a:latin typeface="Microsoft YaHei"/>
+              </a:rPr>
+              <a:t>一个 AI 写出来、真的能跑的系统</a:t>
+            </a:r>
+          </a:p>
+          <a:p>
+            <a:pPr algn="l">
+              <a:spcBef>
+                <a:spcPts val="200"/>
+              </a:spcBef>
+            </a:pPr>
+            <a:r>
+              <a:rPr sz="1100" b="0">
+                <a:solidFill>
+                  <a:srgbClr val="9AA7B4"/>
+                </a:solidFill>
+                <a:latin typeface="Microsoft YaHei"/>
+              </a:rPr>
+              <a:t>单元测试 22 / 22，端到端 33 / 33，零依赖启动</a:t>
+            </a:r>
+          </a:p>
+          <a:p>
+            <a:pPr algn="l">
+              <a:spcBef>
+                <a:spcPts val="1000"/>
+              </a:spcBef>
+            </a:pPr>
+            <a:r>
+              <a:rPr sz="1300" b="0">
+                <a:solidFill>
+                  <a:srgbClr val="EAF0F6"/>
+                </a:solidFill>
+                <a:latin typeface="Microsoft YaHei"/>
+              </a:rPr>
+              <a:t>11 条确定性锚点 + 401 个测试守着「检查本身是对的」</a:t>
+            </a:r>
+          </a:p>
+          <a:p>
+            <a:pPr algn="l">
+              <a:spcBef>
+                <a:spcPts val="200"/>
+              </a:spcBef>
+            </a:pPr>
+            <a:r>
+              <a:rPr sz="1100" b="0">
+                <a:solidFill>
+                  <a:srgbClr val="9AA7B4"/>
+                </a:solidFill>
+                <a:latin typeface="Microsoft YaHei"/>
+              </a:rPr>
+              <a:t>靶场 45 样本零误报</a:t>
+            </a:r>
+          </a:p>
+          <a:p>
+            <a:pPr algn="l">
+              <a:spcBef>
+                <a:spcPts val="1000"/>
+              </a:spcBef>
+            </a:pPr>
+            <a:r>
+              <a:rPr sz="1300" b="0">
+                <a:solidFill>
+                  <a:srgbClr val="EAF0F6"/>
+                </a:solidFill>
+                <a:latin typeface="Microsoft YaHei"/>
+              </a:rPr>
+              <a:t>一条可复用的方法论</a:t>
+            </a:r>
+          </a:p>
+          <a:p>
+            <a:pPr algn="l">
+              <a:spcBef>
+                <a:spcPts val="200"/>
+              </a:spcBef>
+            </a:pPr>
+            <a:r>
+              <a:rPr sz="1100" b="0">
+                <a:solidFill>
+                  <a:srgbClr val="9AA7B4"/>
+                </a:solidFill>
+                <a:latin typeface="Microsoft YaHei"/>
+              </a:rPr>
+              <a:t>先让失败可见，再谈减少失败</a:t>
+            </a:r>
+          </a:p>
+        </p:txBody>
+      </p:sp>
+      <p:sp>
+        <p:nvSpPr>
+          <p:cNvPr id="7" name="Rounded Rectangle 6"/>
+          <p:cNvSpPr/>
+          <p:nvPr/>
+        </p:nvSpPr>
+        <p:spPr>
+          <a:xfrm>
+            <a:off x="6245352" y="1783080"/>
+            <a:ext cx="5303520" cy="3611880"/>
+          </a:xfrm>
+          <a:prstGeom prst="roundRect">
+            <a:avLst>
+              <a:gd name="adj" fmla="val 6000"/>
+            </a:avLst>
+          </a:prstGeom>
+          <a:solidFill>
+            <a:srgbClr val="182028"/>
+          </a:solidFill>
+          <a:ln w="12700">
+            <a:solidFill>
+              <a:srgbClr val="2B3642"/>
+            </a:solidFill>
+          </a:ln>
+          <a:effectLst/>
+        </p:spPr>
+        <p:style>
+          <a:lnRef idx="1">
+            <a:schemeClr val="accent1"/>
+          </a:lnRef>
+          <a:fillRef idx="3">
+            <a:schemeClr val="accent1"/>
+          </a:fillRef>
+          <a:effectRef idx="2">
+            <a:schemeClr val="accent1"/>
+          </a:effectRef>
+          <a:fontRef idx="minor">
+            <a:schemeClr val="lt1"/>
+          </a:fontRef>
+        </p:style>
+        <p:txBody>
           <a:bodyPr rtlCol="0" anchor="t" wrap="square" lIns="182880" tIns="137160"/>
           <a:lstStyle/>
           <a:p>
@@ -10746,7 +11483,7 @@
                 </a:solidFill>
                 <a:latin typeface="Microsoft YaHei"/>
               </a:rPr>
-              <a:t>下面是它跑出来的真实系统，以及它在生成过程中自己报过的两个问题。</a:t>
+              <a:t>接下来是现场真实运行（3 分钟）—— 不播录屏，直接跑；产物与证据都在仓库里，可当场复核。</a:t>
             </a:r>
           </a:p>
         </p:txBody>
@@ -10842,7 +11579,7 @@
                 </a:solidFill>
                 <a:latin typeface="Microsoft YaHei"/>
               </a:rPr>
-              <a:t>8 / 8</a:t>
+              <a:t>9 / 9</a:t>
             </a:r>
           </a:p>
         </p:txBody>

--- a/docs/competition/AgentForge-赛道B.pptx
+++ b/docs/competition/AgentForge-赛道B.pptx
@@ -3142,57 +3142,14 @@
       </p:sp>
       <p:sp>
         <p:nvSpPr>
-          <p:cNvPr id="3" name="Rectangle 2"/>
-          <p:cNvSpPr/>
-          <p:nvPr/>
-        </p:nvSpPr>
-        <p:spPr>
-          <a:xfrm>
-            <a:off x="640080" y="1874519"/>
-            <a:ext cx="109728" cy="1920240"/>
-          </a:xfrm>
-          <a:prstGeom prst="rect">
-            <a:avLst/>
-          </a:prstGeom>
-          <a:solidFill>
-            <a:srgbClr val="35C48F"/>
-          </a:solidFill>
-          <a:ln>
-            <a:noFill/>
-          </a:ln>
-        </p:spPr>
-        <p:style>
-          <a:lnRef idx="1">
-            <a:schemeClr val="accent1"/>
-          </a:lnRef>
-          <a:fillRef idx="3">
-            <a:schemeClr val="accent1"/>
-          </a:fillRef>
-          <a:effectRef idx="2">
-            <a:schemeClr val="accent1"/>
-          </a:effectRef>
-          <a:fontRef idx="minor">
-            <a:schemeClr val="lt1"/>
-          </a:fontRef>
-        </p:style>
-        <p:txBody>
-          <a:bodyPr rtlCol="0" anchor="ctr"/>
-          <a:lstStyle/>
-          <a:p>
-            <a:pPr algn="ctr"/>
-          </a:p>
-        </p:txBody>
-      </p:sp>
-      <p:sp>
-        <p:nvSpPr>
-          <p:cNvPr id="4" name="TextBox 3"/>
+          <p:cNvPr id="3" name="TextBox 2"/>
           <p:cNvSpPr txBox="1"/>
           <p:nvPr/>
         </p:nvSpPr>
         <p:spPr>
           <a:xfrm>
-            <a:off x="960120" y="1737360"/>
-            <a:ext cx="10058400" cy="1737360"/>
+            <a:off x="640080" y="411480"/>
+            <a:ext cx="10881360" cy="365760"/>
           </a:xfrm>
           <a:prstGeom prst="rect">
             <a:avLst/>
@@ -3211,52 +3168,36 @@
               </a:spcBef>
             </a:pPr>
             <a:r>
-              <a:rPr sz="4400" b="1">
-                <a:solidFill>
-                  <a:srgbClr val="EAF0F6"/>
+              <a:rPr sz="1300" b="1">
+                <a:solidFill>
+                  <a:srgbClr val="35C48F"/>
                 </a:solidFill>
                 <a:latin typeface="Microsoft YaHei"/>
               </a:rPr>
               <a:t/>
             </a:r>
             <a:r>
-              <a:rPr sz="4400" b="1">
-                <a:solidFill>
-                  <a:srgbClr val="EAF0F6"/>
-                </a:solidFill>
-                <a:latin typeface="Microsoft YaHei"/>
-              </a:rPr>
-              <a:t>AgentForge</a:t>
-            </a:r>
-          </a:p>
-          <a:p>
-            <a:pPr algn="l">
-              <a:spcBef>
-                <a:spcPts val="1000"/>
-              </a:spcBef>
-            </a:pPr>
-            <a:r>
-              <a:rPr sz="2800" b="1">
+              <a:rPr sz="1300" b="1">
                 <a:solidFill>
                   <a:srgbClr val="35C48F"/>
                 </a:solidFill>
                 <a:latin typeface="Microsoft YaHei"/>
               </a:rPr>
-              <a:t>让「AI 说它做完了」变成能被机械证明的交付</a:t>
-            </a:r>
-          </a:p>
-        </p:txBody>
-      </p:sp>
-      <p:sp>
-        <p:nvSpPr>
-          <p:cNvPr id="5" name="TextBox 4"/>
+              <a:t>项目概述</a:t>
+            </a:r>
+          </a:p>
+        </p:txBody>
+      </p:sp>
+      <p:sp>
+        <p:nvSpPr>
+          <p:cNvPr id="4" name="TextBox 3"/>
           <p:cNvSpPr txBox="1"/>
           <p:nvPr/>
         </p:nvSpPr>
         <p:spPr>
           <a:xfrm>
-            <a:off x="960120" y="3794760"/>
-            <a:ext cx="9601200" cy="822960"/>
+            <a:off x="640080" y="777240"/>
+            <a:ext cx="10881360" cy="731520"/>
           </a:xfrm>
           <a:prstGeom prst="rect">
             <a:avLst/>
@@ -3275,7 +3216,55 @@
               </a:spcBef>
             </a:pPr>
             <a:r>
-              <a:rPr sz="1500" b="0">
+              <a:rPr sz="3000" b="1">
+                <a:solidFill>
+                  <a:srgbClr val="EAF0F6"/>
+                </a:solidFill>
+                <a:latin typeface="Microsoft YaHei"/>
+              </a:rPr>
+              <a:t/>
+            </a:r>
+            <a:r>
+              <a:rPr sz="3000" b="1">
+                <a:solidFill>
+                  <a:srgbClr val="EAF0F6"/>
+                </a:solidFill>
+                <a:latin typeface="Microsoft YaHei"/>
+              </a:rPr>
+              <a:t>AgentForge</a:t>
+            </a:r>
+          </a:p>
+        </p:txBody>
+      </p:sp>
+      <p:sp>
+        <p:nvSpPr>
+          <p:cNvPr id="5" name="TextBox 4"/>
+          <p:cNvSpPr txBox="1"/>
+          <p:nvPr/>
+        </p:nvSpPr>
+        <p:spPr>
+          <a:xfrm>
+            <a:off x="640080" y="1481328"/>
+            <a:ext cx="10881360" cy="457200"/>
+          </a:xfrm>
+          <a:prstGeom prst="rect">
+            <a:avLst/>
+          </a:prstGeom>
+          <a:noFill/>
+        </p:spPr>
+        <p:txBody>
+          <a:bodyPr wrap="square" lIns="0" rIns="0" tIns="0" bIns="0">
+            <a:spAutoFit/>
+          </a:bodyPr>
+          <a:lstStyle/>
+          <a:p>
+            <a:pPr algn="l">
+              <a:spcBef>
+                <a:spcPts val="0"/>
+              </a:spcBef>
+            </a:pPr>
+            <a:r>
+              <a:rPr sz="1400" b="0">
                 <a:solidFill>
                   <a:srgbClr val="9AA7B4"/>
                 </a:solidFill>
@@ -3284,43 +3273,62 @@
               <a:t/>
             </a:r>
             <a:r>
-              <a:rPr sz="1500" b="0">
+              <a:rPr sz="1400" b="0">
                 <a:solidFill>
                   <a:srgbClr val="9AA7B4"/>
                 </a:solidFill>
                 <a:latin typeface="Microsoft YaHei"/>
               </a:rPr>
-              <a:t>一个带确定性验收的多角色 AI 研发引擎</a:t>
-            </a:r>
-          </a:p>
-          <a:p>
-            <a:pPr algn="l">
-              <a:spcBef>
-                <a:spcPts val="600"/>
-              </a:spcBef>
-            </a:pPr>
-            <a:r>
-              <a:rPr sz="1300" b="0">
-                <a:solidFill>
-                  <a:srgbClr val="9AA7B4"/>
-                </a:solidFill>
-                <a:latin typeface="Microsoft YaHei"/>
-              </a:rPr>
-              <a:t>11 条锚点 · 5 个角色 · 8 个阶段 · 401 个测试 · 靶场零误报</a:t>
-            </a:r>
-          </a:p>
-        </p:txBody>
-      </p:sp>
-      <p:sp>
-        <p:nvSpPr>
-          <p:cNvPr id="6" name="Rounded Rectangle 5"/>
+              <a:t>让 AI 面对复杂任务时不跑偏、不走样、可被验证</a:t>
+            </a:r>
+          </a:p>
+        </p:txBody>
+      </p:sp>
+      <p:cxnSp>
+        <p:nvCxnSpPr>
+          <p:cNvPr id="6" name="Connector 5"/>
+          <p:cNvCxnSpPr/>
+          <p:nvPr/>
+        </p:nvCxnSpPr>
+        <p:spPr>
+          <a:xfrm>
+            <a:off x="640080" y="1417320"/>
+            <a:ext cx="10908792" cy="0"/>
+          </a:xfrm>
+          <a:prstGeom prst="line">
+            <a:avLst/>
+          </a:prstGeom>
+          <a:ln w="12700">
+            <a:solidFill>
+              <a:srgbClr val="2B3642"/>
+            </a:solidFill>
+          </a:ln>
+        </p:spPr>
+        <p:style>
+          <a:lnRef idx="2">
+            <a:schemeClr val="accent1"/>
+          </a:lnRef>
+          <a:fillRef idx="0">
+            <a:schemeClr val="accent1"/>
+          </a:fillRef>
+          <a:effectRef idx="1">
+            <a:schemeClr val="accent1"/>
+          </a:effectRef>
+          <a:fontRef idx="minor">
+            <a:schemeClr val="tx1"/>
+          </a:fontRef>
+        </p:style>
+      </p:cxnSp>
+      <p:sp>
+        <p:nvSpPr>
+          <p:cNvPr id="7" name="Rounded Rectangle 6"/>
           <p:cNvSpPr/>
           <p:nvPr/>
         </p:nvSpPr>
         <p:spPr>
           <a:xfrm>
-            <a:off x="640080" y="4892040"/>
-            <a:ext cx="10908792" cy="960120"/>
+            <a:off x="640080" y="1783080"/>
+            <a:ext cx="5349240" cy="2788920"/>
           </a:xfrm>
           <a:prstGeom prst="roundRect">
             <a:avLst>
@@ -3352,6 +3360,320 @@
           </a:fontRef>
         </p:style>
         <p:txBody>
+          <a:bodyPr rtlCol="0" anchor="ctr" wrap="square" lIns="182880" tIns="137160"/>
+          <a:lstStyle/>
+          <a:p>
+            <a:pPr algn="l">
+              <a:spcBef>
+                <a:spcPts val="0"/>
+              </a:spcBef>
+            </a:pPr>
+            <a:r>
+              <a:rPr sz="1500" b="1">
+                <a:solidFill>
+                  <a:srgbClr val="E86A5C"/>
+                </a:solidFill>
+                <a:latin typeface="Microsoft YaHei"/>
+              </a:rPr>
+              <a:t>解决什么问题</a:t>
+            </a:r>
+          </a:p>
+          <a:p>
+            <a:pPr algn="l">
+              <a:spcBef>
+                <a:spcPts val="1200"/>
+              </a:spcBef>
+            </a:pPr>
+            <a:r>
+              <a:rPr sz="1300" b="1">
+                <a:solidFill>
+                  <a:srgbClr val="EAF0F6"/>
+                </a:solidFill>
+                <a:latin typeface="Microsoft YaHei"/>
+              </a:rPr>
+              <a:t>① 上下文越长，目标偏移越严重</a:t>
+            </a:r>
+          </a:p>
+          <a:p>
+            <a:pPr algn="l">
+              <a:spcBef>
+                <a:spcPts val="200"/>
+              </a:spcBef>
+            </a:pPr>
+            <a:r>
+              <a:rPr sz="1100" b="0">
+                <a:solidFill>
+                  <a:srgbClr val="9AA7B4"/>
+                </a:solidFill>
+                <a:latin typeface="Microsoft YaHei"/>
+              </a:rPr>
+              <a:t>而复杂任务必然带来长上下文 —— 模型写着写着就忘了最初要什么</a:t>
+            </a:r>
+          </a:p>
+          <a:p>
+            <a:pPr algn="l">
+              <a:spcBef>
+                <a:spcPts val="1000"/>
+              </a:spcBef>
+            </a:pPr>
+            <a:r>
+              <a:rPr sz="1300" b="1">
+                <a:solidFill>
+                  <a:srgbClr val="EAF0F6"/>
+                </a:solidFill>
+                <a:latin typeface="Microsoft YaHei"/>
+              </a:rPr>
+              <a:t>② 单次生成质量不稳</a:t>
+            </a:r>
+          </a:p>
+          <a:p>
+            <a:pPr algn="l">
+              <a:spcBef>
+                <a:spcPts val="200"/>
+              </a:spcBef>
+            </a:pPr>
+            <a:r>
+              <a:rPr sz="1100" b="0">
+                <a:solidFill>
+                  <a:srgbClr val="9AA7B4"/>
+                </a:solidFill>
+                <a:latin typeface="Microsoft YaHei"/>
+              </a:rPr>
+              <a:t>同一份需求两次生成，结果不一样 —— 无法复现，也无法回归</a:t>
+            </a:r>
+          </a:p>
+          <a:p>
+            <a:pPr algn="l">
+              <a:spcBef>
+                <a:spcPts val="1000"/>
+              </a:spcBef>
+            </a:pPr>
+            <a:r>
+              <a:rPr sz="1300" b="1">
+                <a:solidFill>
+                  <a:srgbClr val="EAF0F6"/>
+                </a:solidFill>
+                <a:latin typeface="Microsoft YaHei"/>
+              </a:rPr>
+              <a:t>③ 生成结果难以验证</a:t>
+            </a:r>
+          </a:p>
+          <a:p>
+            <a:pPr algn="l">
+              <a:spcBef>
+                <a:spcPts val="200"/>
+              </a:spcBef>
+            </a:pPr>
+            <a:r>
+              <a:rPr sz="1100" b="0">
+                <a:solidFill>
+                  <a:srgbClr val="9AA7B4"/>
+                </a:solidFill>
+                <a:latin typeface="Microsoft YaHei"/>
+              </a:rPr>
+              <a:t>「看起来做完了」和「真的做完了」在代码库里长得几乎一样</a:t>
+            </a:r>
+          </a:p>
+        </p:txBody>
+      </p:sp>
+      <p:sp>
+        <p:nvSpPr>
+          <p:cNvPr id="8" name="Rounded Rectangle 7"/>
+          <p:cNvSpPr/>
+          <p:nvPr/>
+        </p:nvSpPr>
+        <p:spPr>
+          <a:xfrm>
+            <a:off x="6199632" y="1783080"/>
+            <a:ext cx="5349240" cy="2788920"/>
+          </a:xfrm>
+          <a:prstGeom prst="roundRect">
+            <a:avLst>
+              <a:gd name="adj" fmla="val 6000"/>
+            </a:avLst>
+          </a:prstGeom>
+          <a:solidFill>
+            <a:srgbClr val="182028"/>
+          </a:solidFill>
+          <a:ln w="12700">
+            <a:solidFill>
+              <a:srgbClr val="2B3642"/>
+            </a:solidFill>
+          </a:ln>
+          <a:effectLst/>
+        </p:spPr>
+        <p:style>
+          <a:lnRef idx="1">
+            <a:schemeClr val="accent1"/>
+          </a:lnRef>
+          <a:fillRef idx="3">
+            <a:schemeClr val="accent1"/>
+          </a:fillRef>
+          <a:effectRef idx="2">
+            <a:schemeClr val="accent1"/>
+          </a:effectRef>
+          <a:fontRef idx="minor">
+            <a:schemeClr val="lt1"/>
+          </a:fontRef>
+        </p:style>
+        <p:txBody>
+          <a:bodyPr rtlCol="0" anchor="ctr" wrap="square" lIns="182880" tIns="137160"/>
+          <a:lstStyle/>
+          <a:p>
+            <a:pPr algn="l">
+              <a:spcBef>
+                <a:spcPts val="0"/>
+              </a:spcBef>
+            </a:pPr>
+            <a:r>
+              <a:rPr sz="1500" b="1">
+                <a:solidFill>
+                  <a:srgbClr val="35C48F"/>
+                </a:solidFill>
+                <a:latin typeface="Microsoft YaHei"/>
+              </a:rPr>
+              <a:t>最终做出了什么</a:t>
+            </a:r>
+          </a:p>
+          <a:p>
+            <a:pPr algn="l">
+              <a:spcBef>
+                <a:spcPts val="1200"/>
+              </a:spcBef>
+            </a:pPr>
+            <a:r>
+              <a:rPr sz="1300" b="1">
+                <a:solidFill>
+                  <a:srgbClr val="EAF0F6"/>
+                </a:solidFill>
+                <a:latin typeface="Microsoft YaHei"/>
+              </a:rPr>
+              <a:t>一个多角色研发引擎</a:t>
+            </a:r>
+          </a:p>
+          <a:p>
+            <a:pPr algn="l">
+              <a:spcBef>
+                <a:spcPts val="200"/>
+              </a:spcBef>
+            </a:pPr>
+            <a:r>
+              <a:rPr sz="1100" b="0">
+                <a:solidFill>
+                  <a:srgbClr val="9AA7B4"/>
+                </a:solidFill>
+                <a:latin typeface="Microsoft YaHei"/>
+              </a:rPr>
+              <a:t>8 个阶段 · 11 条确定性锚点 · LLM 只负责产出，永远不是最终裁判</a:t>
+            </a:r>
+          </a:p>
+          <a:p>
+            <a:pPr algn="l">
+              <a:spcBef>
+                <a:spcPts val="1000"/>
+              </a:spcBef>
+            </a:pPr>
+            <a:r>
+              <a:rPr sz="1300" b="1">
+                <a:solidFill>
+                  <a:srgbClr val="EAF0F6"/>
+                </a:solidFill>
+                <a:latin typeface="Microsoft YaHei"/>
+              </a:rPr>
+              <a:t>产物 A：可运行的系统</a:t>
+            </a:r>
+          </a:p>
+          <a:p>
+            <a:pPr algn="l">
+              <a:spcBef>
+                <a:spcPts val="200"/>
+              </a:spcBef>
+            </a:pPr>
+            <a:r>
+              <a:rPr sz="1100" b="0">
+                <a:solidFill>
+                  <a:srgbClr val="9AA7B4"/>
+                </a:solidFill>
+                <a:latin typeface="Microsoft YaHei"/>
+              </a:rPr>
+              <a:t>茶歇系统 22 / 22 测试、33 / 33 端到端，零依赖即可启动</a:t>
+            </a:r>
+          </a:p>
+          <a:p>
+            <a:pPr algn="l">
+              <a:spcBef>
+                <a:spcPts val="1000"/>
+              </a:spcBef>
+            </a:pPr>
+            <a:r>
+              <a:rPr sz="1300" b="1">
+                <a:solidFill>
+                  <a:srgbClr val="EAF0F6"/>
+                </a:solidFill>
+                <a:latin typeface="Microsoft YaHei"/>
+              </a:rPr>
+              <a:t>产物 B：可复核的交付结论</a:t>
+            </a:r>
+          </a:p>
+          <a:p>
+            <a:pPr algn="l">
+              <a:spcBef>
+                <a:spcPts val="200"/>
+              </a:spcBef>
+            </a:pPr>
+            <a:r>
+              <a:rPr sz="1100" b="0">
+                <a:solidFill>
+                  <a:srgbClr val="9AA7B4"/>
+                </a:solidFill>
+                <a:latin typeface="Microsoft YaHei"/>
+              </a:rPr>
+              <a:t>14/14 与 22/22 条需求逐条确认达成，fullyVerified = true</a:t>
+            </a:r>
+          </a:p>
+        </p:txBody>
+      </p:sp>
+      <p:sp>
+        <p:nvSpPr>
+          <p:cNvPr id="9" name="Rounded Rectangle 8"/>
+          <p:cNvSpPr/>
+          <p:nvPr/>
+        </p:nvSpPr>
+        <p:spPr>
+          <a:xfrm>
+            <a:off x="640080" y="4773168"/>
+            <a:ext cx="10908792" cy="868680"/>
+          </a:xfrm>
+          <a:prstGeom prst="roundRect">
+            <a:avLst>
+              <a:gd name="adj" fmla="val 6000"/>
+            </a:avLst>
+          </a:prstGeom>
+          <a:solidFill>
+            <a:srgbClr val="182028"/>
+          </a:solidFill>
+          <a:ln w="12700">
+            <a:solidFill>
+              <a:srgbClr val="35C48F"/>
+            </a:solidFill>
+          </a:ln>
+          <a:effectLst/>
+        </p:spPr>
+        <p:style>
+          <a:lnRef idx="1">
+            <a:schemeClr val="accent1"/>
+          </a:lnRef>
+          <a:fillRef idx="3">
+            <a:schemeClr val="accent1"/>
+          </a:fillRef>
+          <a:effectRef idx="2">
+            <a:schemeClr val="accent1"/>
+          </a:effectRef>
+          <a:fontRef idx="minor">
+            <a:schemeClr val="lt1"/>
+          </a:fontRef>
+        </p:style>
+        <p:txBody>
           <a:bodyPr rtlCol="0" anchor="ctr" wrap="square" lIns="182880"/>
           <a:lstStyle/>
           <a:p>
@@ -3361,43 +3683,43 @@
               </a:spcBef>
             </a:pPr>
             <a:r>
-              <a:rPr sz="1500" b="1">
+              <a:rPr sz="1400" b="1">
                 <a:solidFill>
                   <a:srgbClr val="35C48F"/>
                 </a:solidFill>
                 <a:latin typeface="Microsoft YaHei"/>
               </a:rPr>
-              <a:t>实跑结果（可复核）：AI 产出的茶歇系统 —— 单元测试 22 / 22，端到端验收 33 / 33，零第三方依赖即可启动</a:t>
-            </a:r>
-          </a:p>
-          <a:p>
-            <a:pPr algn="l">
-              <a:spcBef>
-                <a:spcPts val="400"/>
-              </a:spcBef>
-            </a:pPr>
-            <a:r>
-              <a:rPr sz="1200" b="0">
+              <a:t>真实大模型完整交付 ×2（14/14 与 22/22 需求达成）· 每次 7 个门禁 · 两次打回都被修好 · 0 技术债</a:t>
+            </a:r>
+          </a:p>
+          <a:p>
+            <a:pPr algn="l">
+              <a:spcBef>
+                <a:spcPts val="300"/>
+              </a:spcBef>
+            </a:pPr>
+            <a:r>
+              <a:rPr sz="1100" b="0">
                 <a:solidFill>
                   <a:srgbClr val="9AA7B4"/>
                 </a:solidFill>
                 <a:latin typeface="Microsoft YaHei"/>
               </a:rPr>
-              <a:t>产物：demo/coffeebreak/   ·   证据：docs/competition/evidence/</a:t>
-            </a:r>
-          </a:p>
-        </p:txBody>
-      </p:sp>
-      <p:sp>
-        <p:nvSpPr>
-          <p:cNvPr id="7" name="TextBox 6"/>
+              <a:t>凭证：docs/competition/evidence/brief-s3/（verdict / gates / decisions / 调用记录）</a:t>
+            </a:r>
+          </a:p>
+        </p:txBody>
+      </p:sp>
+      <p:sp>
+        <p:nvSpPr>
+          <p:cNvPr id="10" name="TextBox 9"/>
           <p:cNvSpPr txBox="1"/>
           <p:nvPr/>
         </p:nvSpPr>
         <p:spPr>
           <a:xfrm>
-            <a:off x="640080" y="6080760"/>
-            <a:ext cx="6400800" cy="365760"/>
+            <a:off x="640080" y="5870448"/>
+            <a:ext cx="6400800" cy="320040"/>
           </a:xfrm>
           <a:prstGeom prst="rect">
             <a:avLst/>
@@ -3541,7 +3863,7 @@
                 </a:solidFill>
                 <a:latin typeface="Microsoft YaHei"/>
               </a:rPr>
-              <a:t>问题</a:t>
+              <a:t>问题与目标</a:t>
             </a:r>
           </a:p>
         </p:txBody>
@@ -3589,7 +3911,7 @@
                 </a:solidFill>
                 <a:latin typeface="Microsoft YaHei"/>
               </a:rPr>
-              <a:t>AI 编程的失败是「假绿灯」式的</a:t>
+              <a:t>AI 生成的两个本质问题：随机，且难验证</a:t>
             </a:r>
           </a:p>
         </p:txBody>
@@ -3637,7 +3959,7 @@
                 </a:solidFill>
                 <a:latin typeface="Microsoft YaHei"/>
               </a:rPr>
-              <a:t>看起来完整，实际跑不起来 —— 而工具自己不知道</a:t>
+              <a:t>真正的瓶颈不是「能不能生成」，而是「敢不敢把它交付出去」</a:t>
             </a:r>
           </a:p>
         </p:txBody>
@@ -3686,7 +4008,7 @@
         <p:spPr>
           <a:xfrm>
             <a:off x="640080" y="1783080"/>
-            <a:ext cx="5257800" cy="3246120"/>
+            <a:ext cx="5349240" cy="3154680"/>
           </a:xfrm>
           <a:prstGeom prst="roundRect">
             <a:avLst>
@@ -3727,77 +4049,141 @@
               </a:spcBef>
             </a:pPr>
             <a:r>
-              <a:rPr sz="1600" b="1">
+              <a:rPr sz="1500" b="1">
+                <a:solidFill>
+                  <a:srgbClr val="E86A5C"/>
+                </a:solidFill>
+                <a:latin typeface="Microsoft YaHei"/>
+              </a:rPr>
+              <a:t>为什么值得解决</a:t>
+            </a:r>
+          </a:p>
+          <a:p>
+            <a:pPr algn="l">
+              <a:spcBef>
+                <a:spcPts val="1200"/>
+              </a:spcBef>
+            </a:pPr>
+            <a:r>
+              <a:rPr sz="1300" b="1">
+                <a:solidFill>
+                  <a:srgbClr val="EAF0F6"/>
+                </a:solidFill>
+                <a:latin typeface="Microsoft YaHei"/>
+              </a:rPr>
+              <a:t>随机性</a:t>
+            </a:r>
+          </a:p>
+          <a:p>
+            <a:pPr algn="l">
+              <a:spcBef>
+                <a:spcPts val="200"/>
+              </a:spcBef>
+            </a:pPr>
+            <a:r>
+              <a:rPr sz="1100" b="0">
+                <a:solidFill>
+                  <a:srgbClr val="9AA7B4"/>
+                </a:solidFill>
+                <a:latin typeface="Microsoft YaHei"/>
+              </a:rPr>
+              <a:t>同一需求两次生成结果不同 —— 无法复现、无法回归、也无法承诺</a:t>
+            </a:r>
+          </a:p>
+          <a:p>
+            <a:pPr algn="l">
+              <a:spcBef>
+                <a:spcPts val="1000"/>
+              </a:spcBef>
+            </a:pPr>
+            <a:r>
+              <a:rPr sz="1300" b="1">
+                <a:solidFill>
+                  <a:srgbClr val="EAF0F6"/>
+                </a:solidFill>
+                <a:latin typeface="Microsoft YaHei"/>
+              </a:rPr>
+              <a:t>难验证</a:t>
+            </a:r>
+          </a:p>
+          <a:p>
+            <a:pPr algn="l">
+              <a:spcBef>
+                <a:spcPts val="200"/>
+              </a:spcBef>
+            </a:pPr>
+            <a:r>
+              <a:rPr sz="1100" b="0">
+                <a:solidFill>
+                  <a:srgbClr val="9AA7B4"/>
+                </a:solidFill>
+                <a:latin typeface="Microsoft YaHei"/>
+              </a:rPr>
+              <a:t>模型说「完成了」，但编译、测试、真实运行都可能不成立；</a:t>
+            </a:r>
+          </a:p>
+          <a:p>
+            <a:pPr algn="l">
+              <a:spcBef>
+                <a:spcPts val="200"/>
+              </a:spcBef>
+            </a:pPr>
+            <a:r>
+              <a:rPr sz="1100" b="0">
                 <a:solidFill>
                   <a:srgbClr val="F2B544"/>
                 </a:solidFill>
                 <a:latin typeface="Microsoft YaHei"/>
               </a:rPr>
-              <a:t>表面指标（工具说）</a:t>
-            </a:r>
-          </a:p>
-          <a:p>
-            <a:pPr algn="l">
-              <a:spcBef>
-                <a:spcPts val="1400"/>
-              </a:spcBef>
-            </a:pPr>
-            <a:r>
-              <a:rPr sz="1400" b="0">
+              <a:t>而用另一个 LLM 去验证，等于让被告当法官</a:t>
+            </a:r>
+          </a:p>
+          <a:p>
+            <a:pPr algn="l">
+              <a:spcBef>
+                <a:spcPts val="1000"/>
+              </a:spcBef>
+            </a:pPr>
+            <a:r>
+              <a:rPr sz="1200" b="1">
                 <a:solidFill>
                   <a:srgbClr val="EAF0F6"/>
                 </a:solidFill>
                 <a:latin typeface="Microsoft YaHei"/>
               </a:rPr>
-              <a:t>✓  18 个模块 / 4,443 行代码</a:t>
-            </a:r>
-          </a:p>
-          <a:p>
-            <a:pPr algn="l">
-              <a:spcBef>
-                <a:spcPts val="800"/>
-              </a:spcBef>
-            </a:pPr>
-            <a:r>
-              <a:rPr sz="1400" b="0">
-                <a:solidFill>
-                  <a:srgbClr val="EAF0F6"/>
-                </a:solidFill>
-                <a:latin typeface="Microsoft YaHei"/>
-              </a:rPr>
-              <a:t>✓  tsc --noEmit 通过（编译没问题）</a:t>
-            </a:r>
-          </a:p>
-          <a:p>
-            <a:pPr algn="l">
-              <a:spcBef>
-                <a:spcPts val="800"/>
-              </a:spcBef>
-            </a:pPr>
-            <a:r>
-              <a:rPr sz="1400" b="0">
-                <a:solidFill>
-                  <a:srgbClr val="EAF0F6"/>
-                </a:solidFill>
-                <a:latin typeface="Microsoft YaHei"/>
-              </a:rPr>
-              <a:t>✓  17 个契约端点「代码里全都实现了」</a:t>
-            </a:r>
-          </a:p>
-          <a:p>
-            <a:pPr algn="l">
-              <a:spcBef>
-                <a:spcPts val="800"/>
-              </a:spcBef>
-            </a:pPr>
-            <a:r>
-              <a:rPr sz="1400" b="0">
-                <a:solidFill>
-                  <a:srgbClr val="EAF0F6"/>
-                </a:solidFill>
-                <a:latin typeface="Microsoft YaHei"/>
-              </a:rPr>
-              <a:t>✓  写了 39 条测试</a:t>
+              <a:t>实测反例（我们自己的产物）</a:t>
+            </a:r>
+          </a:p>
+          <a:p>
+            <a:pPr algn="l">
+              <a:spcBef>
+                <a:spcPts val="200"/>
+              </a:spcBef>
+            </a:pPr>
+            <a:r>
+              <a:rPr sz="1000" b="0">
+                <a:solidFill>
+                  <a:srgbClr val="9AA7B4"/>
+                </a:solidFill>
+                <a:latin typeface="Microsoft YaHei"/>
+              </a:rPr>
+              <a:t>4,443 行代码 · tsc 通过 · 39 条测试 —— 12 个端点却一律返回 501，</a:t>
+            </a:r>
+          </a:p>
+          <a:p>
+            <a:pPr algn="l">
+              <a:spcBef>
+                <a:spcPts val="100"/>
+              </a:spcBef>
+            </a:pPr>
+            <a:r>
+              <a:rPr sz="1000" b="0">
+                <a:solidFill>
+                  <a:srgbClr val="9AA7B4"/>
+                </a:solidFill>
+                <a:latin typeface="Microsoft YaHei"/>
+              </a:rPr>
+              <a:t>而当时的检查报「17 个端点全部已实现」</a:t>
             </a:r>
           </a:p>
         </p:txBody>
@@ -3810,8 +4196,8 @@
         </p:nvSpPr>
         <p:spPr>
           <a:xfrm>
-            <a:off x="6291072" y="1783080"/>
-            <a:ext cx="5257800" cy="3246120"/>
+            <a:off x="6199632" y="1783080"/>
+            <a:ext cx="5349240" cy="3154680"/>
           </a:xfrm>
           <a:prstGeom prst="roundRect">
             <a:avLst>
@@ -3852,134 +4238,139 @@
               </a:spcBef>
             </a:pPr>
             <a:r>
-              <a:rPr sz="1600" b="1">
-                <a:solidFill>
-                  <a:srgbClr val="E86A5C"/>
-                </a:solidFill>
-                <a:latin typeface="Microsoft YaHei"/>
-              </a:rPr>
-              <a:t>真实结果（跑一下）</a:t>
-            </a:r>
-          </a:p>
-          <a:p>
-            <a:pPr algn="l">
-              <a:spcBef>
-                <a:spcPts val="1400"/>
-              </a:spcBef>
-            </a:pPr>
-            <a:r>
-              <a:rPr sz="1400" b="0">
+              <a:rPr sz="1500" b="1">
+                <a:solidFill>
+                  <a:srgbClr val="35C48F"/>
+                </a:solidFill>
+                <a:latin typeface="Microsoft YaHei"/>
+              </a:rPr>
+              <a:t>成功标准（可判定，不靠主观）</a:t>
+            </a:r>
+          </a:p>
+          <a:p>
+            <a:pPr algn="l">
+              <a:spcBef>
+                <a:spcPts val="1200"/>
+              </a:spcBef>
+            </a:pPr>
+            <a:r>
+              <a:rPr sz="1300" b="1">
                 <a:solidFill>
                   <a:srgbClr val="EAF0F6"/>
                 </a:solidFill>
                 <a:latin typeface="Microsoft YaHei"/>
               </a:rPr>
-              <a:t>✗  12 个端点一律返回 HTTP 501</a:t>
-            </a:r>
-          </a:p>
-          <a:p>
-            <a:pPr algn="l">
-              <a:spcBef>
-                <a:spcPts val="800"/>
-              </a:spcBef>
-            </a:pPr>
-            <a:r>
-              <a:rPr sz="1400" b="0">
+              <a:t>① 机械层全过</a:t>
+            </a:r>
+          </a:p>
+          <a:p>
+            <a:pPr algn="l">
+              <a:spcBef>
+                <a:spcPts val="200"/>
+              </a:spcBef>
+            </a:pPr>
+            <a:r>
+              <a:rPr sz="1100" b="0">
+                <a:solidFill>
+                  <a:srgbClr val="9AA7B4"/>
+                </a:solidFill>
+                <a:latin typeface="Microsoft YaHei"/>
+              </a:rPr>
+              <a:t>编译通过 · 测试真跑且全绿 · 服务真启动并响应 HTTP 探针</a:t>
+            </a:r>
+          </a:p>
+          <a:p>
+            <a:pPr algn="l">
+              <a:spcBef>
+                <a:spcPts val="1000"/>
+              </a:spcBef>
+            </a:pPr>
+            <a:r>
+              <a:rPr sz="1300" b="1">
                 <a:solidFill>
                   <a:srgbClr val="EAF0F6"/>
                 </a:solidFill>
                 <a:latin typeface="Microsoft YaHei"/>
               </a:rPr>
-              <a:t>✗  39 条测试里 26 条失败</a:t>
-            </a:r>
-          </a:p>
-          <a:p>
-            <a:pPr algn="l">
-              <a:spcBef>
-                <a:spcPts val="800"/>
-              </a:spcBef>
-            </a:pPr>
-            <a:r>
-              <a:rPr sz="1400" b="0">
+              <a:t>② 需求层逐条判定</a:t>
+            </a:r>
+          </a:p>
+          <a:p>
+            <a:pPr algn="l">
+              <a:spcBef>
+                <a:spcPts val="200"/>
+              </a:spcBef>
+            </a:pPr>
+            <a:r>
+              <a:rPr sz="1100" b="0">
+                <a:solidFill>
+                  <a:srgbClr val="9AA7B4"/>
+                </a:solidFill>
+                <a:latin typeface="Microsoft YaHei"/>
+              </a:rPr>
+              <a:t>每条需求的判定必须附真实文件与真实行号区间；编造证据 → 整条作废</a:t>
+            </a:r>
+          </a:p>
+          <a:p>
+            <a:pPr algn="l">
+              <a:spcBef>
+                <a:spcPts val="1000"/>
+              </a:spcBef>
+            </a:pPr>
+            <a:r>
+              <a:rPr sz="1300" b="1">
                 <a:solidFill>
                   <a:srgbClr val="EAF0F6"/>
                 </a:solidFill>
                 <a:latin typeface="Microsoft YaHei"/>
               </a:rPr>
-              <a:t>✗  业务模块一次都没被调用</a:t>
-            </a:r>
-          </a:p>
-          <a:p>
-            <a:pPr algn="l">
-              <a:spcBef>
-                <a:spcPts val="800"/>
-              </a:spcBef>
-            </a:pPr>
-            <a:r>
-              <a:rPr sz="1400" b="0">
-                <a:solidFill>
-                  <a:srgbClr val="EAF0F6"/>
-                </a:solidFill>
-                <a:latin typeface="Microsoft YaHei"/>
-              </a:rPr>
-              <a:t>✗  A7 锚点当时报「全部端点已实现」</a:t>
-            </a:r>
-          </a:p>
-        </p:txBody>
-      </p:sp>
-      <p:sp>
-        <p:nvSpPr>
-          <p:cNvPr id="9" name="Right Arrow 8"/>
+              <a:t>③ 不许自我满足</a:t>
+            </a:r>
+          </a:p>
+          <a:p>
+            <a:pPr algn="l">
+              <a:spcBef>
+                <a:spcPts val="200"/>
+              </a:spcBef>
+            </a:pPr>
+            <a:r>
+              <a:rPr sz="1100" b="0">
+                <a:solidFill>
+                  <a:srgbClr val="9AA7B4"/>
+                </a:solidFill>
+                <a:latin typeface="Microsoft YaHei"/>
+              </a:rPr>
+              <a:t>空交付 / SKIPPED / 带债 都必须显式记账，且都不算「通过」</a:t>
+            </a:r>
+          </a:p>
+          <a:p>
+            <a:pPr algn="l">
+              <a:spcBef>
+                <a:spcPts val="1200"/>
+              </a:spcBef>
+            </a:pPr>
+            <a:r>
+              <a:rPr sz="1200" b="1">
+                <a:solidFill>
+                  <a:srgbClr val="35C48F"/>
+                </a:solidFill>
+                <a:latin typeface="Microsoft YaHei"/>
+              </a:rPr>
+              <a:t>三条同时满足 = fullyVerified（真·完整交付）</a:t>
+            </a:r>
+          </a:p>
+        </p:txBody>
+      </p:sp>
+      <p:sp>
+        <p:nvSpPr>
+          <p:cNvPr id="9" name="Rounded Rectangle 8"/>
           <p:cNvSpPr/>
           <p:nvPr/>
         </p:nvSpPr>
         <p:spPr>
           <a:xfrm>
-            <a:off x="5870448" y="3154680"/>
-            <a:ext cx="420624" cy="457200"/>
-          </a:xfrm>
-          <a:prstGeom prst="rightArrow">
-            <a:avLst/>
-          </a:prstGeom>
-          <a:solidFill>
-            <a:srgbClr val="2B3642"/>
-          </a:solidFill>
-          <a:ln>
-            <a:noFill/>
-          </a:ln>
-        </p:spPr>
-        <p:style>
-          <a:lnRef idx="1">
-            <a:schemeClr val="accent1"/>
-          </a:lnRef>
-          <a:fillRef idx="3">
-            <a:schemeClr val="accent1"/>
-          </a:fillRef>
-          <a:effectRef idx="2">
-            <a:schemeClr val="accent1"/>
-          </a:effectRef>
-          <a:fontRef idx="minor">
-            <a:schemeClr val="lt1"/>
-          </a:fontRef>
-        </p:style>
-        <p:txBody>
-          <a:bodyPr rtlCol="0" anchor="ctr"/>
-          <a:lstStyle/>
-          <a:p>
-            <a:pPr algn="ctr"/>
-          </a:p>
-        </p:txBody>
-      </p:sp>
-      <p:sp>
-        <p:nvSpPr>
-          <p:cNvPr id="10" name="Rounded Rectangle 9"/>
-          <p:cNvSpPr/>
-          <p:nvPr/>
-        </p:nvSpPr>
-        <p:spPr>
-          <a:xfrm>
-            <a:off x="640080" y="5193792"/>
-            <a:ext cx="10908792" cy="1051560"/>
+            <a:off x="640080" y="5074920"/>
+            <a:ext cx="10908792" cy="822960"/>
           </a:xfrm>
           <a:prstGeom prst="roundRect">
             <a:avLst>
@@ -4020,36 +4411,36 @@
               </a:spcBef>
             </a:pPr>
             <a:r>
-              <a:rPr sz="1300" b="1">
-                <a:solidFill>
-                  <a:srgbClr val="EAF0F6"/>
-                </a:solidFill>
-                <a:latin typeface="Microsoft YaHei"/>
-              </a:rPr>
-              <a:t>根子是一行代码：鉴权通过后直接 sendJson(res, 501, { error: 'not implemented yet' }) 然后 return —— 从不调用业务模块</a:t>
-            </a:r>
-          </a:p>
-          <a:p>
-            <a:pPr algn="l">
-              <a:spcBef>
-                <a:spcPts val="400"/>
-              </a:spcBef>
-            </a:pPr>
-            <a:r>
-              <a:rPr sz="1200" b="0">
+              <a:rPr sz="1200" b="1">
+                <a:solidFill>
+                  <a:srgbClr val="35C48F"/>
+                </a:solidFill>
+                <a:latin typeface="Microsoft YaHei"/>
+              </a:rPr>
+              <a:t>这条标准不是口号 —— 同一套判据，刚刚用出两个相反结果：</a:t>
+            </a:r>
+          </a:p>
+          <a:p>
+            <a:pPr algn="l">
+              <a:spcBef>
+                <a:spcPts val="300"/>
+              </a:spcBef>
+            </a:pPr>
+            <a:r>
+              <a:rPr sz="1100" b="0">
                 <a:solidFill>
                   <a:srgbClr val="9AA7B4"/>
                 </a:solidFill>
                 <a:latin typeface="Microsoft YaHei"/>
               </a:rPr>
-              <a:t>而 4 个 handleXxx() 全都「导出了、无人调用」。这是我自己跑出来的真实产物，不是编的例子。</a:t>
-            </a:r>
-          </a:p>
-        </p:txBody>
-      </p:sp>
-      <p:sp>
-        <p:nvSpPr>
-          <p:cNvPr id="11" name="TextBox 10"/>
+              <a:t>① 认证了两次真交付（14/14、22/22 + fullyVerified）　② 拦下了一次空交付（只有规格、零代码，被判 fail）</a:t>
+            </a:r>
+          </a:p>
+        </p:txBody>
+      </p:sp>
+      <p:sp>
+        <p:nvSpPr>
+          <p:cNvPr id="10" name="TextBox 9"/>
           <p:cNvSpPr txBox="1"/>
           <p:nvPr/>
         </p:nvSpPr>
@@ -4097,7 +4488,7 @@
       </p:sp>
       <p:sp>
         <p:nvSpPr>
-          <p:cNvPr id="12" name="TextBox 11"/>
+          <p:cNvPr id="11" name="TextBox 10"/>
           <p:cNvSpPr txBox="1"/>
           <p:nvPr/>
         </p:nvSpPr>
@@ -4451,7 +4842,7 @@
                 </a:solidFill>
                 <a:latin typeface="Microsoft YaHei"/>
               </a:rPr>
-              <a:t>真实界面截图（headless 浏览器，1440×900）· 用 admin / admin123 登录后可见全部功能</a:t>
+              <a:t>真实界面截图（headless 浏览器，1440×900）· 20 个 TypeScript 源文件 · 22/22 测试 · 33/33 端到端</a:t>
             </a:r>
           </a:p>
         </p:txBody>
@@ -11185,7 +11576,7 @@
                 </a:solidFill>
                 <a:latin typeface="Microsoft YaHei"/>
               </a:rPr>
-              <a:t>一个 AI 写出来、真的能跑的系统</a:t>
+              <a:t>真实大模型完整交付过一次</a:t>
             </a:r>
           </a:p>
           <a:p>
@@ -11201,7 +11592,7 @@
                 </a:solidFill>
                 <a:latin typeface="Microsoft YaHei"/>
               </a:rPr>
-              <a:t>单元测试 22 / 22，端到端 33 / 33，零依赖启动</a:t>
+              <a:t>14/14 与 22/22 需求达成，fullyVerified = true，0 技术债</a:t>
             </a:r>
           </a:p>
           <a:p>
@@ -11342,7 +11733,7 @@
                 </a:solidFill>
                 <a:latin typeface="Microsoft YaHei"/>
               </a:rPr>
-              <a:t>没有一次自主跑到最终交付</a:t>
+              <a:t>成功率还不稳定</a:t>
             </a:r>
           </a:p>
           <a:p>
@@ -11358,7 +11749,7 @@
                 </a:solidFill>
                 <a:latin typeface="Microsoft YaHei"/>
               </a:rPr>
-              <a:t>成功那轮在最后一道关卡之后进程被环境回收 —— 产品是好的，编排没结账</a:t>
+              <a:t>四个平行任务里两个交付、一个仍在返工、一个卡在契约一致性</a:t>
             </a:r>
           </a:p>
           <a:p>

--- a/docs/competition/AgentForge-赛道B.pptx
+++ b/docs/competition/AgentForge-赛道B.pptx
@@ -5,17 +5,17 @@
     <p:sldMasterId id="2147483648" r:id="rId1"/>
   </p:sldMasterIdLst>
   <p:sldIdLst>
-    <p:sldId id="256" r:id="rId7"/>
-    <p:sldId id="257" r:id="rId8"/>
-    <p:sldId id="258" r:id="rId9"/>
-    <p:sldId id="259" r:id="rId10"/>
-    <p:sldId id="260" r:id="rId11"/>
-    <p:sldId id="261" r:id="rId12"/>
-    <p:sldId id="262" r:id="rId13"/>
-    <p:sldId id="263" r:id="rId14"/>
-    <p:sldId id="264" r:id="rId15"/>
+    <p:sldId id="256" r:id="rId2"/>
+    <p:sldId id="257" r:id="rId3"/>
+    <p:sldId id="258" r:id="rId4"/>
+    <p:sldId id="259" r:id="rId5"/>
+    <p:sldId id="260" r:id="rId6"/>
+    <p:sldId id="261" r:id="rId7"/>
+    <p:sldId id="262" r:id="rId8"/>
+    <p:sldId id="263" r:id="rId9"/>
+    <p:sldId id="264" r:id="rId10"/>
   </p:sldIdLst>
-  <p:sldSz cx="12191695" cy="6858000" type="screen4x3"/>
+  <p:sldSz cx="12192000" cy="6858000"/>
   <p:notesSz cx="6858000" cy="9144000"/>
   <p:defaultTextStyle>
     <a:defPPr>
@@ -112,6 +112,22 @@
       </a:defRPr>
     </a:lvl9pPr>
   </p:defaultTextStyle>
+  <p:extLst>
+    <p:ext uri="{EFAFB233-063F-42B5-8137-9DF3F51BA10A}">
+      <p15:sldGuideLst xmlns:p15="http://schemas.microsoft.com/office/powerpoint/2012/main">
+        <p15:guide id="1" orient="horz" pos="2160">
+          <p15:clr>
+            <a:srgbClr val="A4A3A4"/>
+          </p15:clr>
+        </p15:guide>
+        <p15:guide id="2" pos="2880">
+          <p15:clr>
+            <a:srgbClr val="A4A3A4"/>
+          </p15:clr>
+        </p15:guide>
+      </p15:sldGuideLst>
+    </p:ext>
+  </p:extLst>
 </p:presentation>
 </file>
 
@@ -153,10 +169,9 @@
           <a:lstStyle/>
           <a:p>
             <a:r>
-              <a:rPr lang="en-US" smtClean="0"/>
+              <a:rPr lang="en-US"/>
               <a:t>Click to edit Master title style</a:t>
             </a:r>
-            <a:endParaRPr lang="en-US"/>
           </a:p>
         </p:txBody>
       </p:sp>
@@ -272,10 +287,9 @@
           </a:lstStyle>
           <a:p>
             <a:r>
-              <a:rPr lang="en-US" smtClean="0"/>
+              <a:rPr lang="en-US"/>
               <a:t>Click to edit Master subtitle style</a:t>
             </a:r>
-            <a:endParaRPr lang="en-US"/>
           </a:p>
         </p:txBody>
       </p:sp>
@@ -296,7 +310,7 @@
           <a:p>
             <a:fld id="{5BCAD085-E8A6-8845-BD4E-CB4CCA059FC4}" type="datetimeFigureOut">
               <a:rPr lang="en-US" smtClean="0"/>
-              <a:t>1/27/13</a:t>
+              <a:t>10/24/2026</a:t>
             </a:fld>
             <a:endParaRPr lang="en-US"/>
           </a:p>
@@ -390,10 +404,9 @@
           <a:lstStyle/>
           <a:p>
             <a:r>
-              <a:rPr lang="en-US" smtClean="0"/>
+              <a:rPr lang="en-US"/>
               <a:t>Click to edit Master title style</a:t>
             </a:r>
-            <a:endParaRPr lang="en-US"/>
           </a:p>
         </p:txBody>
       </p:sp>
@@ -414,38 +427,37 @@
           <a:p>
             <a:pPr lvl="0"/>
             <a:r>
-              <a:rPr lang="en-US" smtClean="0"/>
+              <a:rPr lang="en-US"/>
               <a:t>Click to edit Master text styles</a:t>
             </a:r>
           </a:p>
           <a:p>
             <a:pPr lvl="1"/>
             <a:r>
-              <a:rPr lang="en-US" smtClean="0"/>
+              <a:rPr lang="en-US"/>
               <a:t>Second level</a:t>
             </a:r>
           </a:p>
           <a:p>
             <a:pPr lvl="2"/>
             <a:r>
-              <a:rPr lang="en-US" smtClean="0"/>
+              <a:rPr lang="en-US"/>
               <a:t>Third level</a:t>
             </a:r>
           </a:p>
           <a:p>
             <a:pPr lvl="3"/>
             <a:r>
-              <a:rPr lang="en-US" smtClean="0"/>
+              <a:rPr lang="en-US"/>
               <a:t>Fourth level</a:t>
             </a:r>
           </a:p>
           <a:p>
             <a:pPr lvl="4"/>
             <a:r>
-              <a:rPr lang="en-US" smtClean="0"/>
+              <a:rPr lang="en-US"/>
               <a:t>Fifth level</a:t>
             </a:r>
-            <a:endParaRPr lang="en-US"/>
           </a:p>
         </p:txBody>
       </p:sp>
@@ -466,7 +478,7 @@
           <a:p>
             <a:fld id="{5BCAD085-E8A6-8845-BD4E-CB4CCA059FC4}" type="datetimeFigureOut">
               <a:rPr lang="en-US" smtClean="0"/>
-              <a:t>1/27/13</a:t>
+              <a:t>10/24/2026</a:t>
             </a:fld>
             <a:endParaRPr lang="en-US"/>
           </a:p>
@@ -565,10 +577,9 @@
           <a:lstStyle/>
           <a:p>
             <a:r>
-              <a:rPr lang="en-US" smtClean="0"/>
+              <a:rPr lang="en-US"/>
               <a:t>Click to edit Master title style</a:t>
             </a:r>
-            <a:endParaRPr lang="en-US"/>
           </a:p>
         </p:txBody>
       </p:sp>
@@ -594,38 +605,37 @@
           <a:p>
             <a:pPr lvl="0"/>
             <a:r>
-              <a:rPr lang="en-US" smtClean="0"/>
+              <a:rPr lang="en-US"/>
               <a:t>Click to edit Master text styles</a:t>
             </a:r>
           </a:p>
           <a:p>
             <a:pPr lvl="1"/>
             <a:r>
-              <a:rPr lang="en-US" smtClean="0"/>
+              <a:rPr lang="en-US"/>
               <a:t>Second level</a:t>
             </a:r>
           </a:p>
           <a:p>
             <a:pPr lvl="2"/>
             <a:r>
-              <a:rPr lang="en-US" smtClean="0"/>
+              <a:rPr lang="en-US"/>
               <a:t>Third level</a:t>
             </a:r>
           </a:p>
           <a:p>
             <a:pPr lvl="3"/>
             <a:r>
-              <a:rPr lang="en-US" smtClean="0"/>
+              <a:rPr lang="en-US"/>
               <a:t>Fourth level</a:t>
             </a:r>
           </a:p>
           <a:p>
             <a:pPr lvl="4"/>
             <a:r>
-              <a:rPr lang="en-US" smtClean="0"/>
+              <a:rPr lang="en-US"/>
               <a:t>Fifth level</a:t>
             </a:r>
-            <a:endParaRPr lang="en-US"/>
           </a:p>
         </p:txBody>
       </p:sp>
@@ -646,7 +656,7 @@
           <a:p>
             <a:fld id="{5BCAD085-E8A6-8845-BD4E-CB4CCA059FC4}" type="datetimeFigureOut">
               <a:rPr lang="en-US" smtClean="0"/>
-              <a:t>1/27/13</a:t>
+              <a:t>10/24/2026</a:t>
             </a:fld>
             <a:endParaRPr lang="en-US"/>
           </a:p>
@@ -740,10 +750,9 @@
           <a:lstStyle/>
           <a:p>
             <a:r>
-              <a:rPr lang="en-US" smtClean="0"/>
+              <a:rPr lang="en-US"/>
               <a:t>Click to edit Master title style</a:t>
             </a:r>
-            <a:endParaRPr lang="en-US"/>
           </a:p>
         </p:txBody>
       </p:sp>
@@ -764,38 +773,37 @@
           <a:p>
             <a:pPr lvl="0"/>
             <a:r>
-              <a:rPr lang="en-US" smtClean="0"/>
+              <a:rPr lang="en-US"/>
               <a:t>Click to edit Master text styles</a:t>
             </a:r>
           </a:p>
           <a:p>
             <a:pPr lvl="1"/>
             <a:r>
-              <a:rPr lang="en-US" smtClean="0"/>
+              <a:rPr lang="en-US"/>
               <a:t>Second level</a:t>
             </a:r>
           </a:p>
           <a:p>
             <a:pPr lvl="2"/>
             <a:r>
-              <a:rPr lang="en-US" smtClean="0"/>
+              <a:rPr lang="en-US"/>
               <a:t>Third level</a:t>
             </a:r>
           </a:p>
           <a:p>
             <a:pPr lvl="3"/>
             <a:r>
-              <a:rPr lang="en-US" smtClean="0"/>
+              <a:rPr lang="en-US"/>
               <a:t>Fourth level</a:t>
             </a:r>
           </a:p>
           <a:p>
             <a:pPr lvl="4"/>
             <a:r>
-              <a:rPr lang="en-US" smtClean="0"/>
+              <a:rPr lang="en-US"/>
               <a:t>Fifth level</a:t>
             </a:r>
-            <a:endParaRPr lang="en-US"/>
           </a:p>
         </p:txBody>
       </p:sp>
@@ -816,7 +824,7 @@
           <a:p>
             <a:fld id="{5BCAD085-E8A6-8845-BD4E-CB4CCA059FC4}" type="datetimeFigureOut">
               <a:rPr lang="en-US" smtClean="0"/>
-              <a:t>1/27/13</a:t>
+              <a:t>10/24/2026</a:t>
             </a:fld>
             <a:endParaRPr lang="en-US"/>
           </a:p>
@@ -919,10 +927,9 @@
           </a:lstStyle>
           <a:p>
             <a:r>
-              <a:rPr lang="en-US" smtClean="0"/>
+              <a:rPr lang="en-US"/>
               <a:t>Click to edit Master title style</a:t>
             </a:r>
-            <a:endParaRPr lang="en-US"/>
           </a:p>
         </p:txBody>
       </p:sp>
@@ -1039,7 +1046,7 @@
           <a:p>
             <a:pPr lvl="0"/>
             <a:r>
-              <a:rPr lang="en-US" smtClean="0"/>
+              <a:rPr lang="en-US"/>
               <a:t>Click to edit Master text styles</a:t>
             </a:r>
           </a:p>
@@ -1062,7 +1069,7 @@
           <a:p>
             <a:fld id="{5BCAD085-E8A6-8845-BD4E-CB4CCA059FC4}" type="datetimeFigureOut">
               <a:rPr lang="en-US" smtClean="0"/>
-              <a:t>1/27/13</a:t>
+              <a:t>10/24/2026</a:t>
             </a:fld>
             <a:endParaRPr lang="en-US"/>
           </a:p>
@@ -1156,10 +1163,9 @@
           <a:lstStyle/>
           <a:p>
             <a:r>
-              <a:rPr lang="en-US" smtClean="0"/>
+              <a:rPr lang="en-US"/>
               <a:t>Click to edit Master title style</a:t>
             </a:r>
-            <a:endParaRPr lang="en-US"/>
           </a:p>
         </p:txBody>
       </p:sp>
@@ -1213,38 +1219,37 @@
           <a:p>
             <a:pPr lvl="0"/>
             <a:r>
-              <a:rPr lang="en-US" smtClean="0"/>
+              <a:rPr lang="en-US"/>
               <a:t>Click to edit Master text styles</a:t>
             </a:r>
           </a:p>
           <a:p>
             <a:pPr lvl="1"/>
             <a:r>
-              <a:rPr lang="en-US" smtClean="0"/>
+              <a:rPr lang="en-US"/>
               <a:t>Second level</a:t>
             </a:r>
           </a:p>
           <a:p>
             <a:pPr lvl="2"/>
             <a:r>
-              <a:rPr lang="en-US" smtClean="0"/>
+              <a:rPr lang="en-US"/>
               <a:t>Third level</a:t>
             </a:r>
           </a:p>
           <a:p>
             <a:pPr lvl="3"/>
             <a:r>
-              <a:rPr lang="en-US" smtClean="0"/>
+              <a:rPr lang="en-US"/>
               <a:t>Fourth level</a:t>
             </a:r>
           </a:p>
           <a:p>
             <a:pPr lvl="4"/>
             <a:r>
-              <a:rPr lang="en-US" smtClean="0"/>
+              <a:rPr lang="en-US"/>
               <a:t>Fifth level</a:t>
             </a:r>
-            <a:endParaRPr lang="en-US"/>
           </a:p>
         </p:txBody>
       </p:sp>
@@ -1298,38 +1303,37 @@
           <a:p>
             <a:pPr lvl="0"/>
             <a:r>
-              <a:rPr lang="en-US" smtClean="0"/>
+              <a:rPr lang="en-US"/>
               <a:t>Click to edit Master text styles</a:t>
             </a:r>
           </a:p>
           <a:p>
             <a:pPr lvl="1"/>
             <a:r>
-              <a:rPr lang="en-US" smtClean="0"/>
+              <a:rPr lang="en-US"/>
               <a:t>Second level</a:t>
             </a:r>
           </a:p>
           <a:p>
             <a:pPr lvl="2"/>
             <a:r>
-              <a:rPr lang="en-US" smtClean="0"/>
+              <a:rPr lang="en-US"/>
               <a:t>Third level</a:t>
             </a:r>
           </a:p>
           <a:p>
             <a:pPr lvl="3"/>
             <a:r>
-              <a:rPr lang="en-US" smtClean="0"/>
+              <a:rPr lang="en-US"/>
               <a:t>Fourth level</a:t>
             </a:r>
           </a:p>
           <a:p>
             <a:pPr lvl="4"/>
             <a:r>
-              <a:rPr lang="en-US" smtClean="0"/>
+              <a:rPr lang="en-US"/>
               <a:t>Fifth level</a:t>
             </a:r>
-            <a:endParaRPr lang="en-US"/>
           </a:p>
         </p:txBody>
       </p:sp>
@@ -1350,7 +1354,7 @@
           <a:p>
             <a:fld id="{5BCAD085-E8A6-8845-BD4E-CB4CCA059FC4}" type="datetimeFigureOut">
               <a:rPr lang="en-US" smtClean="0"/>
-              <a:t>1/27/13</a:t>
+              <a:t>10/24/2026</a:t>
             </a:fld>
             <a:endParaRPr lang="en-US"/>
           </a:p>
@@ -1448,10 +1452,9 @@
           </a:lstStyle>
           <a:p>
             <a:r>
-              <a:rPr lang="en-US" smtClean="0"/>
+              <a:rPr lang="en-US"/>
               <a:t>Click to edit Master title style</a:t>
             </a:r>
-            <a:endParaRPr lang="en-US"/>
           </a:p>
         </p:txBody>
       </p:sp>
@@ -1514,7 +1517,7 @@
           <a:p>
             <a:pPr lvl="0"/>
             <a:r>
-              <a:rPr lang="en-US" smtClean="0"/>
+              <a:rPr lang="en-US"/>
               <a:t>Click to edit Master text styles</a:t>
             </a:r>
           </a:p>
@@ -1570,38 +1573,37 @@
           <a:p>
             <a:pPr lvl="0"/>
             <a:r>
-              <a:rPr lang="en-US" smtClean="0"/>
+              <a:rPr lang="en-US"/>
               <a:t>Click to edit Master text styles</a:t>
             </a:r>
           </a:p>
           <a:p>
             <a:pPr lvl="1"/>
             <a:r>
-              <a:rPr lang="en-US" smtClean="0"/>
+              <a:rPr lang="en-US"/>
               <a:t>Second level</a:t>
             </a:r>
           </a:p>
           <a:p>
             <a:pPr lvl="2"/>
             <a:r>
-              <a:rPr lang="en-US" smtClean="0"/>
+              <a:rPr lang="en-US"/>
               <a:t>Third level</a:t>
             </a:r>
           </a:p>
           <a:p>
             <a:pPr lvl="3"/>
             <a:r>
-              <a:rPr lang="en-US" smtClean="0"/>
+              <a:rPr lang="en-US"/>
               <a:t>Fourth level</a:t>
             </a:r>
           </a:p>
           <a:p>
             <a:pPr lvl="4"/>
             <a:r>
-              <a:rPr lang="en-US" smtClean="0"/>
+              <a:rPr lang="en-US"/>
               <a:t>Fifth level</a:t>
             </a:r>
-            <a:endParaRPr lang="en-US"/>
           </a:p>
         </p:txBody>
       </p:sp>
@@ -1664,7 +1666,7 @@
           <a:p>
             <a:pPr lvl="0"/>
             <a:r>
-              <a:rPr lang="en-US" smtClean="0"/>
+              <a:rPr lang="en-US"/>
               <a:t>Click to edit Master text styles</a:t>
             </a:r>
           </a:p>
@@ -1720,38 +1722,37 @@
           <a:p>
             <a:pPr lvl="0"/>
             <a:r>
-              <a:rPr lang="en-US" smtClean="0"/>
+              <a:rPr lang="en-US"/>
               <a:t>Click to edit Master text styles</a:t>
             </a:r>
           </a:p>
           <a:p>
             <a:pPr lvl="1"/>
             <a:r>
-              <a:rPr lang="en-US" smtClean="0"/>
+              <a:rPr lang="en-US"/>
               <a:t>Second level</a:t>
             </a:r>
           </a:p>
           <a:p>
             <a:pPr lvl="2"/>
             <a:r>
-              <a:rPr lang="en-US" smtClean="0"/>
+              <a:rPr lang="en-US"/>
               <a:t>Third level</a:t>
             </a:r>
           </a:p>
           <a:p>
             <a:pPr lvl="3"/>
             <a:r>
-              <a:rPr lang="en-US" smtClean="0"/>
+              <a:rPr lang="en-US"/>
               <a:t>Fourth level</a:t>
             </a:r>
           </a:p>
           <a:p>
             <a:pPr lvl="4"/>
             <a:r>
-              <a:rPr lang="en-US" smtClean="0"/>
+              <a:rPr lang="en-US"/>
               <a:t>Fifth level</a:t>
             </a:r>
-            <a:endParaRPr lang="en-US"/>
           </a:p>
         </p:txBody>
       </p:sp>
@@ -1772,7 +1773,7 @@
           <a:p>
             <a:fld id="{5BCAD085-E8A6-8845-BD4E-CB4CCA059FC4}" type="datetimeFigureOut">
               <a:rPr lang="en-US" smtClean="0"/>
-              <a:t>1/27/13</a:t>
+              <a:t>10/24/2026</a:t>
             </a:fld>
             <a:endParaRPr lang="en-US"/>
           </a:p>
@@ -1866,10 +1867,9 @@
           <a:lstStyle/>
           <a:p>
             <a:r>
-              <a:rPr lang="en-US" smtClean="0"/>
+              <a:rPr lang="en-US"/>
               <a:t>Click to edit Master title style</a:t>
             </a:r>
-            <a:endParaRPr lang="en-US"/>
           </a:p>
         </p:txBody>
       </p:sp>
@@ -1890,7 +1890,7 @@
           <a:p>
             <a:fld id="{5BCAD085-E8A6-8845-BD4E-CB4CCA059FC4}" type="datetimeFigureOut">
               <a:rPr lang="en-US" smtClean="0"/>
-              <a:t>1/27/13</a:t>
+              <a:t>10/24/2026</a:t>
             </a:fld>
             <a:endParaRPr lang="en-US"/>
           </a:p>
@@ -1985,7 +1985,7 @@
           <a:p>
             <a:fld id="{5BCAD085-E8A6-8845-BD4E-CB4CCA059FC4}" type="datetimeFigureOut">
               <a:rPr lang="en-US" smtClean="0"/>
-              <a:t>1/27/13</a:t>
+              <a:t>10/24/2026</a:t>
             </a:fld>
             <a:endParaRPr lang="en-US"/>
           </a:p>
@@ -2088,10 +2088,9 @@
           </a:lstStyle>
           <a:p>
             <a:r>
-              <a:rPr lang="en-US" smtClean="0"/>
+              <a:rPr lang="en-US"/>
               <a:t>Click to edit Master title style</a:t>
             </a:r>
-            <a:endParaRPr lang="en-US"/>
           </a:p>
         </p:txBody>
       </p:sp>
@@ -2145,38 +2144,37 @@
           <a:p>
             <a:pPr lvl="0"/>
             <a:r>
-              <a:rPr lang="en-US" smtClean="0"/>
+              <a:rPr lang="en-US"/>
               <a:t>Click to edit Master text styles</a:t>
             </a:r>
           </a:p>
           <a:p>
             <a:pPr lvl="1"/>
             <a:r>
-              <a:rPr lang="en-US" smtClean="0"/>
+              <a:rPr lang="en-US"/>
               <a:t>Second level</a:t>
             </a:r>
           </a:p>
           <a:p>
             <a:pPr lvl="2"/>
             <a:r>
-              <a:rPr lang="en-US" smtClean="0"/>
+              <a:rPr lang="en-US"/>
               <a:t>Third level</a:t>
             </a:r>
           </a:p>
           <a:p>
             <a:pPr lvl="3"/>
             <a:r>
-              <a:rPr lang="en-US" smtClean="0"/>
+              <a:rPr lang="en-US"/>
               <a:t>Fourth level</a:t>
             </a:r>
           </a:p>
           <a:p>
             <a:pPr lvl="4"/>
             <a:r>
-              <a:rPr lang="en-US" smtClean="0"/>
+              <a:rPr lang="en-US"/>
               <a:t>Fifth level</a:t>
             </a:r>
-            <a:endParaRPr lang="en-US"/>
           </a:p>
         </p:txBody>
       </p:sp>
@@ -2239,7 +2237,7 @@
           <a:p>
             <a:pPr lvl="0"/>
             <a:r>
-              <a:rPr lang="en-US" smtClean="0"/>
+              <a:rPr lang="en-US"/>
               <a:t>Click to edit Master text styles</a:t>
             </a:r>
           </a:p>
@@ -2262,7 +2260,7 @@
           <a:p>
             <a:fld id="{5BCAD085-E8A6-8845-BD4E-CB4CCA059FC4}" type="datetimeFigureOut">
               <a:rPr lang="en-US" smtClean="0"/>
-              <a:t>1/27/13</a:t>
+              <a:t>10/24/2026</a:t>
             </a:fld>
             <a:endParaRPr lang="en-US"/>
           </a:p>
@@ -2365,10 +2363,9 @@
           </a:lstStyle>
           <a:p>
             <a:r>
-              <a:rPr lang="en-US" smtClean="0"/>
+              <a:rPr lang="en-US"/>
               <a:t>Click to edit Master title style</a:t>
             </a:r>
-            <a:endParaRPr lang="en-US"/>
           </a:p>
         </p:txBody>
       </p:sp>
@@ -2492,7 +2489,7 @@
           <a:p>
             <a:pPr lvl="0"/>
             <a:r>
-              <a:rPr lang="en-US" smtClean="0"/>
+              <a:rPr lang="en-US"/>
               <a:t>Click to edit Master text styles</a:t>
             </a:r>
           </a:p>
@@ -2515,7 +2512,7 @@
           <a:p>
             <a:fld id="{5BCAD085-E8A6-8845-BD4E-CB4CCA059FC4}" type="datetimeFigureOut">
               <a:rPr lang="en-US" smtClean="0"/>
-              <a:t>1/27/13</a:t>
+              <a:t>10/24/2026</a:t>
             </a:fld>
             <a:endParaRPr lang="en-US"/>
           </a:p>
@@ -2624,10 +2621,9 @@
           <a:lstStyle/>
           <a:p>
             <a:r>
-              <a:rPr lang="en-US" smtClean="0"/>
+              <a:rPr lang="en-US"/>
               <a:t>Click to edit Master title style</a:t>
             </a:r>
-            <a:endParaRPr lang="en-US"/>
           </a:p>
         </p:txBody>
       </p:sp>
@@ -2658,38 +2654,37 @@
           <a:p>
             <a:pPr lvl="0"/>
             <a:r>
-              <a:rPr lang="en-US" smtClean="0"/>
+              <a:rPr lang="en-US"/>
               <a:t>Click to edit Master text styles</a:t>
             </a:r>
           </a:p>
           <a:p>
             <a:pPr lvl="1"/>
             <a:r>
-              <a:rPr lang="en-US" smtClean="0"/>
+              <a:rPr lang="en-US"/>
               <a:t>Second level</a:t>
             </a:r>
           </a:p>
           <a:p>
             <a:pPr lvl="2"/>
             <a:r>
-              <a:rPr lang="en-US" smtClean="0"/>
+              <a:rPr lang="en-US"/>
               <a:t>Third level</a:t>
             </a:r>
           </a:p>
           <a:p>
             <a:pPr lvl="3"/>
             <a:r>
-              <a:rPr lang="en-US" smtClean="0"/>
+              <a:rPr lang="en-US"/>
               <a:t>Fourth level</a:t>
             </a:r>
           </a:p>
           <a:p>
             <a:pPr lvl="4"/>
             <a:r>
-              <a:rPr lang="en-US" smtClean="0"/>
+              <a:rPr lang="en-US"/>
               <a:t>Fifth level</a:t>
             </a:r>
-            <a:endParaRPr lang="en-US"/>
           </a:p>
         </p:txBody>
       </p:sp>
@@ -2728,7 +2723,7 @@
           <a:p>
             <a:fld id="{5BCAD085-E8A6-8845-BD4E-CB4CCA059FC4}" type="datetimeFigureOut">
               <a:rPr lang="en-US" smtClean="0"/>
-              <a:t>1/27/13</a:t>
+              <a:t>10/24/2026</a:t>
             </a:fld>
             <a:endParaRPr lang="en-US"/>
           </a:p>
@@ -3087,7 +3082,7 @@
 </file>
 
 <file path=ppt/slides/slide1.xml><?xml version="1.0" encoding="utf-8"?>
-<p:sld xmlns:a="http://schemas.openxmlformats.org/drawingml/2006/main" xmlns:p="http://schemas.openxmlformats.org/presentationml/2006/main" xmlns:r="http://schemas.openxmlformats.org/officeDocument/2006/relationships">
+<p:sld xmlns:a="http://schemas.openxmlformats.org/drawingml/2006/main" xmlns:r="http://schemas.openxmlformats.org/officeDocument/2006/relationships" xmlns:p="http://schemas.openxmlformats.org/presentationml/2006/main">
   <p:cSld>
     <p:spTree>
       <p:nvGrpSpPr>
@@ -3095,7 +3090,14 @@
         <p:cNvGrpSpPr/>
         <p:nvPr/>
       </p:nvGrpSpPr>
-      <p:grpSpPr/>
+      <p:grpSpPr>
+        <a:xfrm>
+          <a:off x="0" y="0"/>
+          <a:ext cx="0" cy="0"/>
+          <a:chOff x="0" y="0"/>
+          <a:chExt cx="0" cy="0"/>
+        </a:xfrm>
+      </p:grpSpPr>
       <p:sp>
         <p:nvSpPr>
           <p:cNvPr id="2" name="Rectangle 1"/>
@@ -3137,6 +3139,7 @@
           <a:lstStyle/>
           <a:p>
             <a:pPr algn="ctr"/>
+            <a:endParaRPr/>
           </a:p>
         </p:txBody>
       </p:sp>
@@ -3157,7 +3160,7 @@
           <a:noFill/>
         </p:spPr>
         <p:txBody>
-          <a:bodyPr wrap="square" lIns="0" rIns="0" tIns="0" bIns="0">
+          <a:bodyPr wrap="square" lIns="0" tIns="0" rIns="0" bIns="0">
             <a:spAutoFit/>
           </a:bodyPr>
           <a:lstStyle/>
@@ -3174,15 +3177,6 @@
                 </a:solidFill>
                 <a:latin typeface="Microsoft YaHei"/>
               </a:rPr>
-              <a:t/>
-            </a:r>
-            <a:r>
-              <a:rPr sz="1300" b="1">
-                <a:solidFill>
-                  <a:srgbClr val="35C48F"/>
-                </a:solidFill>
-                <a:latin typeface="Microsoft YaHei"/>
-              </a:rPr>
               <a:t>项目概述</a:t>
             </a:r>
           </a:p>
@@ -3205,7 +3199,7 @@
           <a:noFill/>
         </p:spPr>
         <p:txBody>
-          <a:bodyPr wrap="square" lIns="0" rIns="0" tIns="0" bIns="0">
+          <a:bodyPr wrap="square" lIns="0" tIns="0" rIns="0" bIns="0">
             <a:spAutoFit/>
           </a:bodyPr>
           <a:lstStyle/>
@@ -3222,15 +3216,6 @@
                 </a:solidFill>
                 <a:latin typeface="Microsoft YaHei"/>
               </a:rPr>
-              <a:t/>
-            </a:r>
-            <a:r>
-              <a:rPr sz="3000" b="1">
-                <a:solidFill>
-                  <a:srgbClr val="EAF0F6"/>
-                </a:solidFill>
-                <a:latin typeface="Microsoft YaHei"/>
-              </a:rPr>
               <a:t>AgentForge</a:t>
             </a:r>
           </a:p>
@@ -3253,7 +3238,7 @@
           <a:noFill/>
         </p:spPr>
         <p:txBody>
-          <a:bodyPr wrap="square" lIns="0" rIns="0" tIns="0" bIns="0">
+          <a:bodyPr wrap="square" lIns="0" tIns="0" rIns="0" bIns="0">
             <a:spAutoFit/>
           </a:bodyPr>
           <a:lstStyle/>
@@ -3263,15 +3248,6 @@
                 <a:spcPts val="0"/>
               </a:spcBef>
             </a:pPr>
-            <a:r>
-              <a:rPr sz="1400" b="0">
-                <a:solidFill>
-                  <a:srgbClr val="9AA7B4"/>
-                </a:solidFill>
-                <a:latin typeface="Microsoft YaHei"/>
-              </a:rPr>
-              <a:t/>
-            </a:r>
             <a:r>
               <a:rPr sz="1400" b="0">
                 <a:solidFill>
@@ -3360,7 +3336,7 @@
           </a:fontRef>
         </p:style>
         <p:txBody>
-          <a:bodyPr rtlCol="0" anchor="ctr" wrap="square" lIns="182880" tIns="137160"/>
+          <a:bodyPr wrap="square" lIns="182880" tIns="137160" rtlCol="0" anchor="ctr"/>
           <a:lstStyle/>
           <a:p>
             <a:pPr algn="l">
@@ -3517,7 +3493,7 @@
           </a:fontRef>
         </p:style>
         <p:txBody>
-          <a:bodyPr rtlCol="0" anchor="ctr" wrap="square" lIns="182880" tIns="137160"/>
+          <a:bodyPr wrap="square" lIns="182880" tIns="137160" rtlCol="0" anchor="ctr"/>
           <a:lstStyle/>
           <a:p>
             <a:pPr algn="l">
@@ -3674,7 +3650,7 @@
           </a:fontRef>
         </p:style>
         <p:txBody>
-          <a:bodyPr rtlCol="0" anchor="ctr" wrap="square" lIns="182880"/>
+          <a:bodyPr wrap="square" lIns="182880" rtlCol="0" anchor="ctr"/>
           <a:lstStyle/>
           <a:p>
             <a:pPr algn="l">
@@ -3727,7 +3703,7 @@
           <a:noFill/>
         </p:spPr>
         <p:txBody>
-          <a:bodyPr wrap="square" lIns="0" rIns="0" tIns="0" bIns="0">
+          <a:bodyPr wrap="square" lIns="0" tIns="0" rIns="0" bIns="0">
             <a:spAutoFit/>
           </a:bodyPr>
           <a:lstStyle/>
@@ -3737,15 +3713,6 @@
                 <a:spcPts val="0"/>
               </a:spcBef>
             </a:pPr>
-            <a:r>
-              <a:rPr sz="1200" b="0">
-                <a:solidFill>
-                  <a:srgbClr val="9AA7B4"/>
-                </a:solidFill>
-                <a:latin typeface="Microsoft YaHei"/>
-              </a:rPr>
-              <a:t/>
-            </a:r>
             <a:r>
               <a:rPr sz="1200" b="0">
                 <a:solidFill>
@@ -3767,7 +3734,7 @@
 </file>
 
 <file path=ppt/slides/slide2.xml><?xml version="1.0" encoding="utf-8"?>
-<p:sld xmlns:a="http://schemas.openxmlformats.org/drawingml/2006/main" xmlns:p="http://schemas.openxmlformats.org/presentationml/2006/main" xmlns:r="http://schemas.openxmlformats.org/officeDocument/2006/relationships">
+<p:sld xmlns:a="http://schemas.openxmlformats.org/drawingml/2006/main" xmlns:r="http://schemas.openxmlformats.org/officeDocument/2006/relationships" xmlns:p="http://schemas.openxmlformats.org/presentationml/2006/main">
   <p:cSld>
     <p:spTree>
       <p:nvGrpSpPr>
@@ -3775,7 +3742,14 @@
         <p:cNvGrpSpPr/>
         <p:nvPr/>
       </p:nvGrpSpPr>
-      <p:grpSpPr/>
+      <p:grpSpPr>
+        <a:xfrm>
+          <a:off x="0" y="0"/>
+          <a:ext cx="0" cy="0"/>
+          <a:chOff x="0" y="0"/>
+          <a:chExt cx="0" cy="0"/>
+        </a:xfrm>
+      </p:grpSpPr>
       <p:sp>
         <p:nvSpPr>
           <p:cNvPr id="2" name="Rectangle 1"/>
@@ -3817,6 +3791,7 @@
           <a:lstStyle/>
           <a:p>
             <a:pPr algn="ctr"/>
+            <a:endParaRPr/>
           </a:p>
         </p:txBody>
       </p:sp>
@@ -3837,7 +3812,7 @@
           <a:noFill/>
         </p:spPr>
         <p:txBody>
-          <a:bodyPr wrap="square" lIns="0" rIns="0" tIns="0" bIns="0">
+          <a:bodyPr wrap="square" lIns="0" tIns="0" rIns="0" bIns="0">
             <a:spAutoFit/>
           </a:bodyPr>
           <a:lstStyle/>
@@ -3854,15 +3829,6 @@
                 </a:solidFill>
                 <a:latin typeface="Microsoft YaHei"/>
               </a:rPr>
-              <a:t/>
-            </a:r>
-            <a:r>
-              <a:rPr sz="1300" b="1">
-                <a:solidFill>
-                  <a:srgbClr val="35C48F"/>
-                </a:solidFill>
-                <a:latin typeface="Microsoft YaHei"/>
-              </a:rPr>
               <a:t>问题与目标</a:t>
             </a:r>
           </a:p>
@@ -3885,7 +3851,7 @@
           <a:noFill/>
         </p:spPr>
         <p:txBody>
-          <a:bodyPr wrap="square" lIns="0" rIns="0" tIns="0" bIns="0">
+          <a:bodyPr wrap="square" lIns="0" tIns="0" rIns="0" bIns="0">
             <a:spAutoFit/>
           </a:bodyPr>
           <a:lstStyle/>
@@ -3902,15 +3868,6 @@
                 </a:solidFill>
                 <a:latin typeface="Microsoft YaHei"/>
               </a:rPr>
-              <a:t/>
-            </a:r>
-            <a:r>
-              <a:rPr sz="3000" b="1">
-                <a:solidFill>
-                  <a:srgbClr val="EAF0F6"/>
-                </a:solidFill>
-                <a:latin typeface="Microsoft YaHei"/>
-              </a:rPr>
               <a:t>AI 生成的两个本质问题：随机，且难验证</a:t>
             </a:r>
           </a:p>
@@ -3933,7 +3890,7 @@
           <a:noFill/>
         </p:spPr>
         <p:txBody>
-          <a:bodyPr wrap="square" lIns="0" rIns="0" tIns="0" bIns="0">
+          <a:bodyPr wrap="square" lIns="0" tIns="0" rIns="0" bIns="0">
             <a:spAutoFit/>
           </a:bodyPr>
           <a:lstStyle/>
@@ -3943,15 +3900,6 @@
                 <a:spcPts val="0"/>
               </a:spcBef>
             </a:pPr>
-            <a:r>
-              <a:rPr sz="1400" b="0">
-                <a:solidFill>
-                  <a:srgbClr val="9AA7B4"/>
-                </a:solidFill>
-                <a:latin typeface="Microsoft YaHei"/>
-              </a:rPr>
-              <a:t/>
-            </a:r>
             <a:r>
               <a:rPr sz="1400" b="0">
                 <a:solidFill>
@@ -4040,7 +3988,7 @@
           </a:fontRef>
         </p:style>
         <p:txBody>
-          <a:bodyPr rtlCol="0" anchor="ctr" wrap="square" lIns="182880" tIns="137160"/>
+          <a:bodyPr wrap="square" lIns="182880" tIns="137160" rtlCol="0" anchor="ctr"/>
           <a:lstStyle/>
           <a:p>
             <a:pPr algn="l">
@@ -4229,7 +4177,7 @@
           </a:fontRef>
         </p:style>
         <p:txBody>
-          <a:bodyPr rtlCol="0" anchor="ctr" wrap="square" lIns="182880" tIns="137160"/>
+          <a:bodyPr wrap="square" lIns="182880" tIns="137160" rtlCol="0" anchor="ctr"/>
           <a:lstStyle/>
           <a:p>
             <a:pPr algn="l">
@@ -4402,7 +4350,7 @@
           </a:fontRef>
         </p:style>
         <p:txBody>
-          <a:bodyPr rtlCol="0" anchor="ctr" wrap="square" lIns="182880"/>
+          <a:bodyPr wrap="square" lIns="182880" rtlCol="0" anchor="ctr"/>
           <a:lstStyle/>
           <a:p>
             <a:pPr algn="l">
@@ -4455,7 +4403,7 @@
           <a:noFill/>
         </p:spPr>
         <p:txBody>
-          <a:bodyPr wrap="square" lIns="0" rIns="0" tIns="0" bIns="0">
+          <a:bodyPr wrap="square" lIns="0" tIns="0" rIns="0" bIns="0">
             <a:spAutoFit/>
           </a:bodyPr>
           <a:lstStyle/>
@@ -4472,15 +4420,6 @@
                 </a:solidFill>
                 <a:latin typeface="Microsoft YaHei"/>
               </a:rPr>
-              <a:t/>
-            </a:r>
-            <a:r>
-              <a:rPr sz="1000" b="0">
-                <a:solidFill>
-                  <a:srgbClr val="9AA7B4"/>
-                </a:solidFill>
-                <a:latin typeface="Microsoft YaHei"/>
-              </a:rPr>
               <a:t>AgentForge · 多角色 AI 研发引擎 · 赛道 B</a:t>
             </a:r>
           </a:p>
@@ -4503,7 +4442,7 @@
           <a:noFill/>
         </p:spPr>
         <p:txBody>
-          <a:bodyPr wrap="square" lIns="0" rIns="0" tIns="0" bIns="0">
+          <a:bodyPr wrap="square" lIns="0" tIns="0" rIns="0" bIns="0">
             <a:spAutoFit/>
           </a:bodyPr>
           <a:lstStyle/>
@@ -4513,15 +4452,6 @@
                 <a:spcPts val="0"/>
               </a:spcBef>
             </a:pPr>
-            <a:r>
-              <a:rPr sz="1000" b="0">
-                <a:solidFill>
-                  <a:srgbClr val="9AA7B4"/>
-                </a:solidFill>
-                <a:latin typeface="Microsoft YaHei"/>
-              </a:rPr>
-              <a:t/>
-            </a:r>
             <a:r>
               <a:rPr sz="1000" b="0">
                 <a:solidFill>
@@ -4543,7 +4473,7 @@
 </file>
 
 <file path=ppt/slides/slide3.xml><?xml version="1.0" encoding="utf-8"?>
-<p:sld xmlns:a="http://schemas.openxmlformats.org/drawingml/2006/main" xmlns:p="http://schemas.openxmlformats.org/presentationml/2006/main" xmlns:r="http://schemas.openxmlformats.org/officeDocument/2006/relationships">
+<p:sld xmlns:a="http://schemas.openxmlformats.org/drawingml/2006/main" xmlns:r="http://schemas.openxmlformats.org/officeDocument/2006/relationships" xmlns:p="http://schemas.openxmlformats.org/presentationml/2006/main">
   <p:cSld>
     <p:spTree>
       <p:nvGrpSpPr>
@@ -4551,7 +4481,14 @@
         <p:cNvGrpSpPr/>
         <p:nvPr/>
       </p:nvGrpSpPr>
-      <p:grpSpPr/>
+      <p:grpSpPr>
+        <a:xfrm>
+          <a:off x="0" y="0"/>
+          <a:ext cx="0" cy="0"/>
+          <a:chOff x="0" y="0"/>
+          <a:chExt cx="0" cy="0"/>
+        </a:xfrm>
+      </p:grpSpPr>
       <p:sp>
         <p:nvSpPr>
           <p:cNvPr id="2" name="Rectangle 1"/>
@@ -4593,6 +4530,7 @@
           <a:lstStyle/>
           <a:p>
             <a:pPr algn="ctr"/>
+            <a:endParaRPr/>
           </a:p>
         </p:txBody>
       </p:sp>
@@ -4613,7 +4551,7 @@
           <a:noFill/>
         </p:spPr>
         <p:txBody>
-          <a:bodyPr wrap="square" lIns="0" rIns="0" tIns="0" bIns="0">
+          <a:bodyPr wrap="square" lIns="0" tIns="0" rIns="0" bIns="0">
             <a:spAutoFit/>
           </a:bodyPr>
           <a:lstStyle/>
@@ -4630,15 +4568,6 @@
                 </a:solidFill>
                 <a:latin typeface="Microsoft YaHei"/>
               </a:rPr>
-              <a:t/>
-            </a:r>
-            <a:r>
-              <a:rPr sz="1300" b="1">
-                <a:solidFill>
-                  <a:srgbClr val="35C48F"/>
-                </a:solidFill>
-                <a:latin typeface="Microsoft YaHei"/>
-              </a:rPr>
               <a:t>实跑产物</a:t>
             </a:r>
           </a:p>
@@ -4661,7 +4590,7 @@
           <a:noFill/>
         </p:spPr>
         <p:txBody>
-          <a:bodyPr wrap="square" lIns="0" rIns="0" tIns="0" bIns="0">
+          <a:bodyPr wrap="square" lIns="0" tIns="0" rIns="0" bIns="0">
             <a:spAutoFit/>
           </a:bodyPr>
           <a:lstStyle/>
@@ -4678,15 +4607,6 @@
                 </a:solidFill>
                 <a:latin typeface="Microsoft YaHei"/>
               </a:rPr>
-              <a:t/>
-            </a:r>
-            <a:r>
-              <a:rPr sz="3000" b="1">
-                <a:solidFill>
-                  <a:srgbClr val="EAF0F6"/>
-                </a:solidFill>
-                <a:latin typeface="Microsoft YaHei"/>
-              </a:rPr>
               <a:t>先看东西：一个 AI 写出来、真的能跑的系统</a:t>
             </a:r>
           </a:p>
@@ -4709,7 +4629,7 @@
           <a:noFill/>
         </p:spPr>
         <p:txBody>
-          <a:bodyPr wrap="square" lIns="0" rIns="0" tIns="0" bIns="0">
+          <a:bodyPr wrap="square" lIns="0" tIns="0" rIns="0" bIns="0">
             <a:spAutoFit/>
           </a:bodyPr>
           <a:lstStyle/>
@@ -4719,15 +4639,6 @@
                 <a:spcPts val="0"/>
               </a:spcBef>
             </a:pPr>
-            <a:r>
-              <a:rPr sz="1400" b="0">
-                <a:solidFill>
-                  <a:srgbClr val="9AA7B4"/>
-                </a:solidFill>
-                <a:latin typeface="Microsoft YaHei"/>
-              </a:rPr>
-              <a:t/>
-            </a:r>
             <a:r>
               <a:rPr sz="1400" b="0">
                 <a:solidFill>
@@ -4816,7 +4727,7 @@
           <a:noFill/>
         </p:spPr>
         <p:txBody>
-          <a:bodyPr wrap="square" lIns="0" rIns="0" tIns="0" bIns="0">
+          <a:bodyPr wrap="square" lIns="0" tIns="0" rIns="0" bIns="0">
             <a:spAutoFit/>
           </a:bodyPr>
           <a:lstStyle/>
@@ -4826,15 +4737,6 @@
                 <a:spcPts val="0"/>
               </a:spcBef>
             </a:pPr>
-            <a:r>
-              <a:rPr sz="1000" b="0">
-                <a:solidFill>
-                  <a:srgbClr val="9AA7B4"/>
-                </a:solidFill>
-                <a:latin typeface="Microsoft YaHei"/>
-              </a:rPr>
-              <a:t/>
-            </a:r>
             <a:r>
               <a:rPr sz="1000" b="0">
                 <a:solidFill>
@@ -4888,7 +4790,7 @@
           </a:fontRef>
         </p:style>
         <p:txBody>
-          <a:bodyPr rtlCol="0" anchor="ctr" wrap="square" lIns="137160" tIns="91440"/>
+          <a:bodyPr wrap="square" lIns="137160" tIns="91440" rtlCol="0" anchor="ctr"/>
           <a:lstStyle/>
           <a:p>
             <a:pPr algn="l">
@@ -4997,7 +4899,7 @@
           </a:fontRef>
         </p:style>
         <p:txBody>
-          <a:bodyPr rtlCol="0" anchor="ctr" wrap="square" lIns="137160" tIns="91440"/>
+          <a:bodyPr wrap="square" lIns="137160" tIns="91440" rtlCol="0" anchor="ctr"/>
           <a:lstStyle/>
           <a:p>
             <a:pPr algn="l">
@@ -5138,7 +5040,7 @@
           </a:fontRef>
         </p:style>
         <p:txBody>
-          <a:bodyPr rtlCol="0" anchor="ctr" wrap="square" lIns="137160"/>
+          <a:bodyPr wrap="square" lIns="137160" rtlCol="0" anchor="ctr"/>
           <a:lstStyle/>
           <a:p>
             <a:pPr algn="l">
@@ -5191,7 +5093,7 @@
           <a:noFill/>
         </p:spPr>
         <p:txBody>
-          <a:bodyPr wrap="square" lIns="0" rIns="0" tIns="0" bIns="0">
+          <a:bodyPr wrap="square" lIns="0" tIns="0" rIns="0" bIns="0">
             <a:spAutoFit/>
           </a:bodyPr>
           <a:lstStyle/>
@@ -5208,15 +5110,6 @@
                 </a:solidFill>
                 <a:latin typeface="Microsoft YaHei"/>
               </a:rPr>
-              <a:t/>
-            </a:r>
-            <a:r>
-              <a:rPr sz="1000" b="0">
-                <a:solidFill>
-                  <a:srgbClr val="9AA7B4"/>
-                </a:solidFill>
-                <a:latin typeface="Microsoft YaHei"/>
-              </a:rPr>
               <a:t>AgentForge · 多角色 AI 研发引擎 · 赛道 B</a:t>
             </a:r>
           </a:p>
@@ -5239,7 +5132,7 @@
           <a:noFill/>
         </p:spPr>
         <p:txBody>
-          <a:bodyPr wrap="square" lIns="0" rIns="0" tIns="0" bIns="0">
+          <a:bodyPr wrap="square" lIns="0" tIns="0" rIns="0" bIns="0">
             <a:spAutoFit/>
           </a:bodyPr>
           <a:lstStyle/>
@@ -5249,15 +5142,6 @@
                 <a:spcPts val="0"/>
               </a:spcBef>
             </a:pPr>
-            <a:r>
-              <a:rPr sz="1000" b="0">
-                <a:solidFill>
-                  <a:srgbClr val="9AA7B4"/>
-                </a:solidFill>
-                <a:latin typeface="Microsoft YaHei"/>
-              </a:rPr>
-              <a:t/>
-            </a:r>
             <a:r>
               <a:rPr sz="1000" b="0">
                 <a:solidFill>
@@ -5279,7 +5163,7 @@
 </file>
 
 <file path=ppt/slides/slide4.xml><?xml version="1.0" encoding="utf-8"?>
-<p:sld xmlns:a="http://schemas.openxmlformats.org/drawingml/2006/main" xmlns:p="http://schemas.openxmlformats.org/presentationml/2006/main" xmlns:r="http://schemas.openxmlformats.org/officeDocument/2006/relationships">
+<p:sld xmlns:a="http://schemas.openxmlformats.org/drawingml/2006/main" xmlns:r="http://schemas.openxmlformats.org/officeDocument/2006/relationships" xmlns:p="http://schemas.openxmlformats.org/presentationml/2006/main">
   <p:cSld>
     <p:spTree>
       <p:nvGrpSpPr>
@@ -5287,7 +5171,14 @@
         <p:cNvGrpSpPr/>
         <p:nvPr/>
       </p:nvGrpSpPr>
-      <p:grpSpPr/>
+      <p:grpSpPr>
+        <a:xfrm>
+          <a:off x="0" y="0"/>
+          <a:ext cx="0" cy="0"/>
+          <a:chOff x="0" y="0"/>
+          <a:chExt cx="0" cy="0"/>
+        </a:xfrm>
+      </p:grpSpPr>
       <p:sp>
         <p:nvSpPr>
           <p:cNvPr id="2" name="Rectangle 1"/>
@@ -5329,6 +5220,7 @@
           <a:lstStyle/>
           <a:p>
             <a:pPr algn="ctr"/>
+            <a:endParaRPr/>
           </a:p>
         </p:txBody>
       </p:sp>
@@ -5349,7 +5241,7 @@
           <a:noFill/>
         </p:spPr>
         <p:txBody>
-          <a:bodyPr wrap="square" lIns="0" rIns="0" tIns="0" bIns="0">
+          <a:bodyPr wrap="square" lIns="0" tIns="0" rIns="0" bIns="0">
             <a:spAutoFit/>
           </a:bodyPr>
           <a:lstStyle/>
@@ -5366,15 +5258,6 @@
                 </a:solidFill>
                 <a:latin typeface="Microsoft YaHei"/>
               </a:rPr>
-              <a:t/>
-            </a:r>
-            <a:r>
-              <a:rPr sz="1300" b="1">
-                <a:solidFill>
-                  <a:srgbClr val="35C48F"/>
-                </a:solidFill>
-                <a:latin typeface="Microsoft YaHei"/>
-              </a:rPr>
               <a:t>根因</a:t>
             </a:r>
           </a:p>
@@ -5397,7 +5280,7 @@
           <a:noFill/>
         </p:spPr>
         <p:txBody>
-          <a:bodyPr wrap="square" lIns="0" rIns="0" tIns="0" bIns="0">
+          <a:bodyPr wrap="square" lIns="0" tIns="0" rIns="0" bIns="0">
             <a:spAutoFit/>
           </a:bodyPr>
           <a:lstStyle/>
@@ -5414,15 +5297,6 @@
                 </a:solidFill>
                 <a:latin typeface="Microsoft YaHei"/>
               </a:rPr>
-              <a:t/>
-            </a:r>
-            <a:r>
-              <a:rPr sz="3000" b="1">
-                <a:solidFill>
-                  <a:srgbClr val="EAF0F6"/>
-                </a:solidFill>
-                <a:latin typeface="Microsoft YaHei"/>
-              </a:rPr>
               <a:t>不是模型不行，是系统在让角色「盲写」</a:t>
             </a:r>
           </a:p>
@@ -5445,7 +5319,7 @@
           <a:noFill/>
         </p:spPr>
         <p:txBody>
-          <a:bodyPr wrap="square" lIns="0" rIns="0" tIns="0" bIns="0">
+          <a:bodyPr wrap="square" lIns="0" tIns="0" rIns="0" bIns="0">
             <a:spAutoFit/>
           </a:bodyPr>
           <a:lstStyle/>
@@ -5455,15 +5329,6 @@
                 <a:spcPts val="0"/>
               </a:spcBef>
             </a:pPr>
-            <a:r>
-              <a:rPr sz="1400" b="0">
-                <a:solidFill>
-                  <a:srgbClr val="9AA7B4"/>
-                </a:solidFill>
-                <a:latin typeface="Microsoft YaHei"/>
-              </a:rPr>
-              <a:t/>
-            </a:r>
             <a:r>
               <a:rPr sz="1400" b="0">
                 <a:solidFill>
@@ -5621,6 +5486,7 @@
           <a:lstStyle/>
           <a:p>
             <a:pPr algn="ctr"/>
+            <a:endParaRPr/>
           </a:p>
         </p:txBody>
       </p:sp>
@@ -5664,6 +5530,7 @@
           <a:lstStyle/>
           <a:p>
             <a:pPr algn="ctr"/>
+            <a:endParaRPr/>
           </a:p>
         </p:txBody>
       </p:sp>
@@ -5742,6 +5609,7 @@
           <a:lstStyle/>
           <a:p>
             <a:pPr algn="ctr"/>
+            <a:endParaRPr/>
           </a:p>
         </p:txBody>
       </p:sp>
@@ -5820,6 +5688,7 @@
           <a:lstStyle/>
           <a:p>
             <a:pPr algn="ctr"/>
+            <a:endParaRPr/>
           </a:p>
         </p:txBody>
       </p:sp>
@@ -5898,6 +5767,7 @@
           <a:lstStyle/>
           <a:p>
             <a:pPr algn="ctr"/>
+            <a:endParaRPr/>
           </a:p>
         </p:txBody>
       </p:sp>
@@ -5976,6 +5846,7 @@
           <a:lstStyle/>
           <a:p>
             <a:pPr algn="ctr"/>
+            <a:endParaRPr/>
           </a:p>
         </p:txBody>
       </p:sp>
@@ -6054,6 +5925,7 @@
           <a:lstStyle/>
           <a:p>
             <a:pPr algn="ctr"/>
+            <a:endParaRPr/>
           </a:p>
         </p:txBody>
       </p:sp>
@@ -6109,7 +5981,7 @@
           <a:noFill/>
         </p:spPr>
         <p:txBody>
-          <a:bodyPr wrap="square" lIns="0" rIns="0" tIns="0" bIns="0">
+          <a:bodyPr wrap="square" lIns="0" tIns="0" rIns="0" bIns="0">
             <a:spAutoFit/>
           </a:bodyPr>
           <a:lstStyle/>
@@ -6119,15 +5991,6 @@
                 <a:spcPts val="0"/>
               </a:spcBef>
             </a:pPr>
-            <a:r>
-              <a:rPr sz="1100" b="0">
-                <a:solidFill>
-                  <a:srgbClr val="9AA7B4"/>
-                </a:solidFill>
-                <a:latin typeface="Microsoft YaHei"/>
-              </a:rPr>
-              <a:t/>
-            </a:r>
             <a:r>
               <a:rPr sz="1100" b="0">
                 <a:solidFill>
@@ -6185,6 +6048,7 @@
           <a:lstStyle/>
           <a:p>
             <a:pPr algn="ctr"/>
+            <a:endParaRPr/>
           </a:p>
         </p:txBody>
       </p:sp>
@@ -6205,7 +6069,7 @@
           <a:noFill/>
         </p:spPr>
         <p:txBody>
-          <a:bodyPr wrap="square" lIns="0" rIns="0" tIns="0" bIns="0">
+          <a:bodyPr wrap="square" lIns="0" tIns="0" rIns="0" bIns="0">
             <a:spAutoFit/>
           </a:bodyPr>
           <a:lstStyle/>
@@ -6222,15 +6086,6 @@
                 </a:solidFill>
                 <a:latin typeface="Microsoft YaHei"/>
               </a:rPr>
-              <a:t/>
-            </a:r>
-            <a:r>
-              <a:rPr sz="2400" b="1">
-                <a:solidFill>
-                  <a:srgbClr val="E86A5C"/>
-                </a:solidFill>
-                <a:latin typeface="Microsoft YaHei"/>
-              </a:rPr>
               <a:t>95%</a:t>
             </a:r>
           </a:p>
@@ -6253,7 +6108,7 @@
           <a:noFill/>
         </p:spPr>
         <p:txBody>
-          <a:bodyPr wrap="square" lIns="0" rIns="0" tIns="0" bIns="0">
+          <a:bodyPr wrap="square" lIns="0" tIns="0" rIns="0" bIns="0">
             <a:spAutoFit/>
           </a:bodyPr>
           <a:lstStyle/>
@@ -6263,15 +6118,6 @@
                 <a:spcPts val="0"/>
               </a:spcBef>
             </a:pPr>
-            <a:r>
-              <a:rPr sz="1100" b="0">
-                <a:solidFill>
-                  <a:srgbClr val="EAF0F6"/>
-                </a:solidFill>
-                <a:latin typeface="Microsoft YaHei"/>
-              </a:rPr>
-              <a:t/>
-            </a:r>
             <a:r>
               <a:rPr sz="1100" b="0">
                 <a:solidFill>
@@ -6329,6 +6175,7 @@
           <a:lstStyle/>
           <a:p>
             <a:pPr algn="ctr"/>
+            <a:endParaRPr/>
           </a:p>
         </p:txBody>
       </p:sp>
@@ -6349,7 +6196,7 @@
           <a:noFill/>
         </p:spPr>
         <p:txBody>
-          <a:bodyPr wrap="square" lIns="0" rIns="0" tIns="0" bIns="0">
+          <a:bodyPr wrap="square" lIns="0" tIns="0" rIns="0" bIns="0">
             <a:spAutoFit/>
           </a:bodyPr>
           <a:lstStyle/>
@@ -6366,15 +6213,6 @@
                 </a:solidFill>
                 <a:latin typeface="Microsoft YaHei"/>
               </a:rPr>
-              <a:t/>
-            </a:r>
-            <a:r>
-              <a:rPr sz="2400" b="1">
-                <a:solidFill>
-                  <a:srgbClr val="E86A5C"/>
-                </a:solidFill>
-                <a:latin typeface="Microsoft YaHei"/>
-              </a:rPr>
               <a:t>4.2%</a:t>
             </a:r>
           </a:p>
@@ -6397,7 +6235,7 @@
           <a:noFill/>
         </p:spPr>
         <p:txBody>
-          <a:bodyPr wrap="square" lIns="0" rIns="0" tIns="0" bIns="0">
+          <a:bodyPr wrap="square" lIns="0" tIns="0" rIns="0" bIns="0">
             <a:spAutoFit/>
           </a:bodyPr>
           <a:lstStyle/>
@@ -6407,15 +6245,6 @@
                 <a:spcPts val="0"/>
               </a:spcBef>
             </a:pPr>
-            <a:r>
-              <a:rPr sz="1100" b="0">
-                <a:solidFill>
-                  <a:srgbClr val="EAF0F6"/>
-                </a:solidFill>
-                <a:latin typeface="Microsoft YaHei"/>
-              </a:rPr>
-              <a:t/>
-            </a:r>
             <a:r>
               <a:rPr sz="1100" b="0">
                 <a:solidFill>
@@ -6473,6 +6302,7 @@
           <a:lstStyle/>
           <a:p>
             <a:pPr algn="ctr"/>
+            <a:endParaRPr/>
           </a:p>
         </p:txBody>
       </p:sp>
@@ -6493,7 +6323,7 @@
           <a:noFill/>
         </p:spPr>
         <p:txBody>
-          <a:bodyPr wrap="square" lIns="0" rIns="0" tIns="0" bIns="0">
+          <a:bodyPr wrap="square" lIns="0" tIns="0" rIns="0" bIns="0">
             <a:spAutoFit/>
           </a:bodyPr>
           <a:lstStyle/>
@@ -6510,15 +6340,6 @@
                 </a:solidFill>
                 <a:latin typeface="Microsoft YaHei"/>
               </a:rPr>
-              <a:t/>
-            </a:r>
-            <a:r>
-              <a:rPr sz="2400" b="1">
-                <a:solidFill>
-                  <a:srgbClr val="F2B544"/>
-                </a:solidFill>
-                <a:latin typeface="Microsoft YaHei"/>
-              </a:rPr>
               <a:t>2.2 : 1</a:t>
             </a:r>
           </a:p>
@@ -6541,7 +6362,7 @@
           <a:noFill/>
         </p:spPr>
         <p:txBody>
-          <a:bodyPr wrap="square" lIns="0" rIns="0" tIns="0" bIns="0">
+          <a:bodyPr wrap="square" lIns="0" tIns="0" rIns="0" bIns="0">
             <a:spAutoFit/>
           </a:bodyPr>
           <a:lstStyle/>
@@ -6551,15 +6372,6 @@
                 <a:spcPts val="0"/>
               </a:spcBef>
             </a:pPr>
-            <a:r>
-              <a:rPr sz="1100" b="0">
-                <a:solidFill>
-                  <a:srgbClr val="EAF0F6"/>
-                </a:solidFill>
-                <a:latin typeface="Microsoft YaHei"/>
-              </a:rPr>
-              <a:t/>
-            </a:r>
             <a:r>
               <a:rPr sz="1100" b="0">
                 <a:solidFill>
@@ -6613,7 +6425,7 @@
           </a:fontRef>
         </p:style>
         <p:txBody>
-          <a:bodyPr rtlCol="0" anchor="ctr" wrap="square" lIns="182880"/>
+          <a:bodyPr wrap="square" lIns="182880" rtlCol="0" anchor="ctr"/>
           <a:lstStyle/>
           <a:p>
             <a:pPr algn="l">
@@ -6666,7 +6478,7 @@
           <a:noFill/>
         </p:spPr>
         <p:txBody>
-          <a:bodyPr wrap="square" lIns="0" rIns="0" tIns="0" bIns="0">
+          <a:bodyPr wrap="square" lIns="0" tIns="0" rIns="0" bIns="0">
             <a:spAutoFit/>
           </a:bodyPr>
           <a:lstStyle/>
@@ -6683,15 +6495,6 @@
                 </a:solidFill>
                 <a:latin typeface="Microsoft YaHei"/>
               </a:rPr>
-              <a:t/>
-            </a:r>
-            <a:r>
-              <a:rPr sz="1000" b="0">
-                <a:solidFill>
-                  <a:srgbClr val="9AA7B4"/>
-                </a:solidFill>
-                <a:latin typeface="Microsoft YaHei"/>
-              </a:rPr>
               <a:t>AgentForge · 多角色 AI 研发引擎 · 赛道 B</a:t>
             </a:r>
           </a:p>
@@ -6714,7 +6517,7 @@
           <a:noFill/>
         </p:spPr>
         <p:txBody>
-          <a:bodyPr wrap="square" lIns="0" rIns="0" tIns="0" bIns="0">
+          <a:bodyPr wrap="square" lIns="0" tIns="0" rIns="0" bIns="0">
             <a:spAutoFit/>
           </a:bodyPr>
           <a:lstStyle/>
@@ -6724,15 +6527,6 @@
                 <a:spcPts val="0"/>
               </a:spcBef>
             </a:pPr>
-            <a:r>
-              <a:rPr sz="1000" b="0">
-                <a:solidFill>
-                  <a:srgbClr val="9AA7B4"/>
-                </a:solidFill>
-                <a:latin typeface="Microsoft YaHei"/>
-              </a:rPr>
-              <a:t/>
-            </a:r>
             <a:r>
               <a:rPr sz="1000" b="0">
                 <a:solidFill>
@@ -6754,7 +6548,7 @@
 </file>
 
 <file path=ppt/slides/slide5.xml><?xml version="1.0" encoding="utf-8"?>
-<p:sld xmlns:a="http://schemas.openxmlformats.org/drawingml/2006/main" xmlns:p="http://schemas.openxmlformats.org/presentationml/2006/main" xmlns:r="http://schemas.openxmlformats.org/officeDocument/2006/relationships">
+<p:sld xmlns:a="http://schemas.openxmlformats.org/drawingml/2006/main" xmlns:r="http://schemas.openxmlformats.org/officeDocument/2006/relationships" xmlns:p="http://schemas.openxmlformats.org/presentationml/2006/main">
   <p:cSld>
     <p:spTree>
       <p:nvGrpSpPr>
@@ -6762,7 +6556,14 @@
         <p:cNvGrpSpPr/>
         <p:nvPr/>
       </p:nvGrpSpPr>
-      <p:grpSpPr/>
+      <p:grpSpPr>
+        <a:xfrm>
+          <a:off x="0" y="0"/>
+          <a:ext cx="0" cy="0"/>
+          <a:chOff x="0" y="0"/>
+          <a:chExt cx="0" cy="0"/>
+        </a:xfrm>
+      </p:grpSpPr>
       <p:sp>
         <p:nvSpPr>
           <p:cNvPr id="2" name="Rectangle 1"/>
@@ -6804,6 +6605,7 @@
           <a:lstStyle/>
           <a:p>
             <a:pPr algn="ctr"/>
+            <a:endParaRPr/>
           </a:p>
         </p:txBody>
       </p:sp>
@@ -6824,7 +6626,7 @@
           <a:noFill/>
         </p:spPr>
         <p:txBody>
-          <a:bodyPr wrap="square" lIns="0" rIns="0" tIns="0" bIns="0">
+          <a:bodyPr wrap="square" lIns="0" tIns="0" rIns="0" bIns="0">
             <a:spAutoFit/>
           </a:bodyPr>
           <a:lstStyle/>
@@ -6841,15 +6643,6 @@
                 </a:solidFill>
                 <a:latin typeface="Microsoft YaHei"/>
               </a:rPr>
-              <a:t/>
-            </a:r>
-            <a:r>
-              <a:rPr sz="1300" b="1">
-                <a:solidFill>
-                  <a:srgbClr val="35C48F"/>
-                </a:solidFill>
-                <a:latin typeface="Microsoft YaHei"/>
-              </a:rPr>
               <a:t>架构</a:t>
             </a:r>
           </a:p>
@@ -6872,7 +6665,7 @@
           <a:noFill/>
         </p:spPr>
         <p:txBody>
-          <a:bodyPr wrap="square" lIns="0" rIns="0" tIns="0" bIns="0">
+          <a:bodyPr wrap="square" lIns="0" tIns="0" rIns="0" bIns="0">
             <a:spAutoFit/>
           </a:bodyPr>
           <a:lstStyle/>
@@ -6882,15 +6675,6 @@
                 <a:spcPts val="0"/>
               </a:spcBef>
             </a:pPr>
-            <a:r>
-              <a:rPr sz="3000" b="1">
-                <a:solidFill>
-                  <a:srgbClr val="EAF0F6"/>
-                </a:solidFill>
-                <a:latin typeface="Microsoft YaHei"/>
-              </a:rPr>
-              <a:t/>
-            </a:r>
             <a:r>
               <a:rPr sz="3000" b="1">
                 <a:solidFill>
@@ -6983,6 +6767,7 @@
           <a:lstStyle/>
           <a:p>
             <a:pPr algn="ctr"/>
+            <a:endParaRPr/>
           </a:p>
         </p:txBody>
       </p:sp>
@@ -7003,7 +6788,7 @@
           <a:noFill/>
         </p:spPr>
         <p:txBody>
-          <a:bodyPr wrap="square" lIns="0" rIns="0" tIns="0" bIns="0">
+          <a:bodyPr wrap="square" lIns="0" tIns="0" rIns="0" bIns="0">
             <a:spAutoFit/>
           </a:bodyPr>
           <a:lstStyle/>
@@ -7020,15 +6805,6 @@
                 </a:solidFill>
                 <a:latin typeface="Microsoft YaHei"/>
               </a:rPr>
-              <a:t/>
-            </a:r>
-            <a:r>
-              <a:rPr sz="1400" b="1">
-                <a:solidFill>
-                  <a:srgbClr val="9AA7B4"/>
-                </a:solidFill>
-                <a:latin typeface="Microsoft YaHei"/>
-              </a:rPr>
               <a:t>入口</a:t>
             </a:r>
           </a:p>
@@ -7051,7 +6827,7 @@
           <a:noFill/>
         </p:spPr>
         <p:txBody>
-          <a:bodyPr wrap="square" lIns="0" rIns="0" tIns="0" bIns="0">
+          <a:bodyPr wrap="square" lIns="0" tIns="0" rIns="0" bIns="0">
             <a:spAutoFit/>
           </a:bodyPr>
           <a:lstStyle/>
@@ -7068,15 +6844,6 @@
                 </a:solidFill>
                 <a:latin typeface="Microsoft YaHei"/>
               </a:rPr>
-              <a:t/>
-            </a:r>
-            <a:r>
-              <a:rPr sz="1200" b="0">
-                <a:solidFill>
-                  <a:srgbClr val="EAF0F6"/>
-                </a:solidFill>
-                <a:latin typeface="Microsoft YaHei"/>
-              </a:rPr>
               <a:t>CLI · Web 控制台</a:t>
             </a:r>
           </a:p>
@@ -7099,7 +6866,7 @@
           <a:noFill/>
         </p:spPr>
         <p:txBody>
-          <a:bodyPr wrap="square" lIns="0" rIns="0" tIns="0" bIns="0">
+          <a:bodyPr wrap="square" lIns="0" tIns="0" rIns="0" bIns="0">
             <a:spAutoFit/>
           </a:bodyPr>
           <a:lstStyle/>
@@ -7109,15 +6876,6 @@
                 <a:spcPts val="0"/>
               </a:spcBef>
             </a:pPr>
-            <a:r>
-              <a:rPr sz="1000" b="0">
-                <a:solidFill>
-                  <a:srgbClr val="9AA7B4"/>
-                </a:solidFill>
-                <a:latin typeface="Microsoft YaHei"/>
-              </a:rPr>
-              <a:t/>
-            </a:r>
             <a:r>
               <a:rPr sz="1000" b="0">
                 <a:solidFill>
@@ -7175,6 +6933,7 @@
           <a:lstStyle/>
           <a:p>
             <a:pPr algn="ctr"/>
+            <a:endParaRPr/>
           </a:p>
         </p:txBody>
       </p:sp>
@@ -7195,7 +6954,7 @@
           <a:noFill/>
         </p:spPr>
         <p:txBody>
-          <a:bodyPr wrap="square" lIns="0" rIns="0" tIns="0" bIns="0">
+          <a:bodyPr wrap="square" lIns="0" tIns="0" rIns="0" bIns="0">
             <a:spAutoFit/>
           </a:bodyPr>
           <a:lstStyle/>
@@ -7212,15 +6971,6 @@
                 </a:solidFill>
                 <a:latin typeface="Microsoft YaHei"/>
               </a:rPr>
-              <a:t/>
-            </a:r>
-            <a:r>
-              <a:rPr sz="1400" b="1">
-                <a:solidFill>
-                  <a:srgbClr val="35C48F"/>
-                </a:solidFill>
-                <a:latin typeface="Microsoft YaHei"/>
-              </a:rPr>
               <a:t>编排层</a:t>
             </a:r>
           </a:p>
@@ -7243,7 +6993,7 @@
           <a:noFill/>
         </p:spPr>
         <p:txBody>
-          <a:bodyPr wrap="square" lIns="0" rIns="0" tIns="0" bIns="0">
+          <a:bodyPr wrap="square" lIns="0" tIns="0" rIns="0" bIns="0">
             <a:spAutoFit/>
           </a:bodyPr>
           <a:lstStyle/>
@@ -7260,15 +7010,6 @@
                 </a:solidFill>
                 <a:latin typeface="Microsoft YaHei"/>
               </a:rPr>
-              <a:t/>
-            </a:r>
-            <a:r>
-              <a:rPr sz="1200" b="0">
-                <a:solidFill>
-                  <a:srgbClr val="EAF0F6"/>
-                </a:solidFill>
-                <a:latin typeface="Microsoft YaHei"/>
-              </a:rPr>
               <a:t>8 阶段状态机 · 唯一 Gate · 账本 · 机械裁判 · 圆桌 · 逃生</a:t>
             </a:r>
           </a:p>
@@ -7291,7 +7032,7 @@
           <a:noFill/>
         </p:spPr>
         <p:txBody>
-          <a:bodyPr wrap="square" lIns="0" rIns="0" tIns="0" bIns="0">
+          <a:bodyPr wrap="square" lIns="0" tIns="0" rIns="0" bIns="0">
             <a:spAutoFit/>
           </a:bodyPr>
           <a:lstStyle/>
@@ -7301,15 +7042,6 @@
                 <a:spcPts val="0"/>
               </a:spcBef>
             </a:pPr>
-            <a:r>
-              <a:rPr sz="1000" b="0">
-                <a:solidFill>
-                  <a:srgbClr val="9AA7B4"/>
-                </a:solidFill>
-                <a:latin typeface="Microsoft YaHei"/>
-              </a:rPr>
-              <a:t/>
-            </a:r>
             <a:r>
               <a:rPr sz="1000" b="0">
                 <a:solidFill>
@@ -7367,6 +7099,7 @@
           <a:lstStyle/>
           <a:p>
             <a:pPr algn="ctr"/>
+            <a:endParaRPr/>
           </a:p>
         </p:txBody>
       </p:sp>
@@ -7387,7 +7120,7 @@
           <a:noFill/>
         </p:spPr>
         <p:txBody>
-          <a:bodyPr wrap="square" lIns="0" rIns="0" tIns="0" bIns="0">
+          <a:bodyPr wrap="square" lIns="0" tIns="0" rIns="0" bIns="0">
             <a:spAutoFit/>
           </a:bodyPr>
           <a:lstStyle/>
@@ -7404,15 +7137,6 @@
                 </a:solidFill>
                 <a:latin typeface="Microsoft YaHei"/>
               </a:rPr>
-              <a:t/>
-            </a:r>
-            <a:r>
-              <a:rPr sz="1400" b="1">
-                <a:solidFill>
-                  <a:srgbClr val="35C48F"/>
-                </a:solidFill>
-                <a:latin typeface="Microsoft YaHei"/>
-              </a:rPr>
               <a:t>验收层</a:t>
             </a:r>
           </a:p>
@@ -7435,7 +7159,7 @@
           <a:noFill/>
         </p:spPr>
         <p:txBody>
-          <a:bodyPr wrap="square" lIns="0" rIns="0" tIns="0" bIns="0">
+          <a:bodyPr wrap="square" lIns="0" tIns="0" rIns="0" bIns="0">
             <a:spAutoFit/>
           </a:bodyPr>
           <a:lstStyle/>
@@ -7452,15 +7176,6 @@
                 </a:solidFill>
                 <a:latin typeface="Microsoft YaHei"/>
               </a:rPr>
-              <a:t/>
-            </a:r>
-            <a:r>
-              <a:rPr sz="1200" b="0">
-                <a:solidFill>
-                  <a:srgbClr val="EAF0F6"/>
-                </a:solidFill>
-                <a:latin typeface="Microsoft YaHei"/>
-              </a:rPr>
               <a:t>A1–A8 事实锚（编译/测试/探针/契约/基准） · B1–B3 语义锚</a:t>
             </a:r>
           </a:p>
@@ -7483,7 +7198,7 @@
           <a:noFill/>
         </p:spPr>
         <p:txBody>
-          <a:bodyPr wrap="square" lIns="0" rIns="0" tIns="0" bIns="0">
+          <a:bodyPr wrap="square" lIns="0" tIns="0" rIns="0" bIns="0">
             <a:spAutoFit/>
           </a:bodyPr>
           <a:lstStyle/>
@@ -7493,15 +7208,6 @@
                 <a:spcPts val="0"/>
               </a:spcBef>
             </a:pPr>
-            <a:r>
-              <a:rPr sz="1000" b="0">
-                <a:solidFill>
-                  <a:srgbClr val="9AA7B4"/>
-                </a:solidFill>
-                <a:latin typeface="Microsoft YaHei"/>
-              </a:rPr>
-              <a:t/>
-            </a:r>
             <a:r>
               <a:rPr sz="1000" b="0">
                 <a:solidFill>
@@ -7559,6 +7265,7 @@
           <a:lstStyle/>
           <a:p>
             <a:pPr algn="ctr"/>
+            <a:endParaRPr/>
           </a:p>
         </p:txBody>
       </p:sp>
@@ -7579,7 +7286,7 @@
           <a:noFill/>
         </p:spPr>
         <p:txBody>
-          <a:bodyPr wrap="square" lIns="0" rIns="0" tIns="0" bIns="0">
+          <a:bodyPr wrap="square" lIns="0" tIns="0" rIns="0" bIns="0">
             <a:spAutoFit/>
           </a:bodyPr>
           <a:lstStyle/>
@@ -7596,15 +7303,6 @@
                 </a:solidFill>
                 <a:latin typeface="Microsoft YaHei"/>
               </a:rPr>
-              <a:t/>
-            </a:r>
-            <a:r>
-              <a:rPr sz="1400" b="1">
-                <a:solidFill>
-                  <a:srgbClr val="EAF0F6"/>
-                </a:solidFill>
-                <a:latin typeface="Microsoft YaHei"/>
-              </a:rPr>
               <a:t>角色层</a:t>
             </a:r>
           </a:p>
@@ -7627,7 +7325,7 @@
           <a:noFill/>
         </p:spPr>
         <p:txBody>
-          <a:bodyPr wrap="square" lIns="0" rIns="0" tIns="0" bIns="0">
+          <a:bodyPr wrap="square" lIns="0" tIns="0" rIns="0" bIns="0">
             <a:spAutoFit/>
           </a:bodyPr>
           <a:lstStyle/>
@@ -7644,15 +7342,6 @@
                 </a:solidFill>
                 <a:latin typeface="Microsoft YaHei"/>
               </a:rPr>
-              <a:t/>
-            </a:r>
-            <a:r>
-              <a:rPr sz="1200" b="0">
-                <a:solidFill>
-                  <a:srgbClr val="EAF0F6"/>
-                </a:solidFill>
-                <a:latin typeface="Microsoft YaHei"/>
-              </a:rPr>
               <a:t>pm · backend · frontend · test · host</a:t>
             </a:r>
           </a:p>
@@ -7675,7 +7364,7 @@
           <a:noFill/>
         </p:spPr>
         <p:txBody>
-          <a:bodyPr wrap="square" lIns="0" rIns="0" tIns="0" bIns="0">
+          <a:bodyPr wrap="square" lIns="0" tIns="0" rIns="0" bIns="0">
             <a:spAutoFit/>
           </a:bodyPr>
           <a:lstStyle/>
@@ -7685,15 +7374,6 @@
                 <a:spcPts val="0"/>
               </a:spcBef>
             </a:pPr>
-            <a:r>
-              <a:rPr sz="1000" b="0">
-                <a:solidFill>
-                  <a:srgbClr val="9AA7B4"/>
-                </a:solidFill>
-                <a:latin typeface="Microsoft YaHei"/>
-              </a:rPr>
-              <a:t/>
-            </a:r>
             <a:r>
               <a:rPr sz="1000" b="0">
                 <a:solidFill>
@@ -7751,6 +7431,7 @@
           <a:lstStyle/>
           <a:p>
             <a:pPr algn="ctr"/>
+            <a:endParaRPr/>
           </a:p>
         </p:txBody>
       </p:sp>
@@ -7771,7 +7452,7 @@
           <a:noFill/>
         </p:spPr>
         <p:txBody>
-          <a:bodyPr wrap="square" lIns="0" rIns="0" tIns="0" bIns="0">
+          <a:bodyPr wrap="square" lIns="0" tIns="0" rIns="0" bIns="0">
             <a:spAutoFit/>
           </a:bodyPr>
           <a:lstStyle/>
@@ -7788,15 +7469,6 @@
                 </a:solidFill>
                 <a:latin typeface="Microsoft YaHei"/>
               </a:rPr>
-              <a:t/>
-            </a:r>
-            <a:r>
-              <a:rPr sz="1400" b="1">
-                <a:solidFill>
-                  <a:srgbClr val="9AA7B4"/>
-                </a:solidFill>
-                <a:latin typeface="Microsoft YaHei"/>
-              </a:rPr>
               <a:t>能力层</a:t>
             </a:r>
           </a:p>
@@ -7819,7 +7491,7 @@
           <a:noFill/>
         </p:spPr>
         <p:txBody>
-          <a:bodyPr wrap="square" lIns="0" rIns="0" tIns="0" bIns="0">
+          <a:bodyPr wrap="square" lIns="0" tIns="0" rIns="0" bIns="0">
             <a:spAutoFit/>
           </a:bodyPr>
           <a:lstStyle/>
@@ -7836,15 +7508,6 @@
                 </a:solidFill>
                 <a:latin typeface="Microsoft YaHei"/>
               </a:rPr>
-              <a:t/>
-            </a:r>
-            <a:r>
-              <a:rPr sz="1200" b="0">
-                <a:solidFill>
-                  <a:srgbClr val="EAF0F6"/>
-                </a:solidFill>
-                <a:latin typeface="Microsoft YaHei"/>
-              </a:rPr>
               <a:t>Provider 抽象 · 录制回放 · 三层记忆 · 工件库 · 哈希链日志</a:t>
             </a:r>
           </a:p>
@@ -7867,7 +7530,7 @@
           <a:noFill/>
         </p:spPr>
         <p:txBody>
-          <a:bodyPr wrap="square" lIns="0" rIns="0" tIns="0" bIns="0">
+          <a:bodyPr wrap="square" lIns="0" tIns="0" rIns="0" bIns="0">
             <a:spAutoFit/>
           </a:bodyPr>
           <a:lstStyle/>
@@ -7877,15 +7540,6 @@
                 <a:spcPts val="0"/>
               </a:spcBef>
             </a:pPr>
-            <a:r>
-              <a:rPr sz="1000" b="0">
-                <a:solidFill>
-                  <a:srgbClr val="9AA7B4"/>
-                </a:solidFill>
-                <a:latin typeface="Microsoft YaHei"/>
-              </a:rPr>
-              <a:t/>
-            </a:r>
             <a:r>
               <a:rPr sz="1000" b="0">
                 <a:solidFill>
@@ -7939,7 +7593,7 @@
           </a:fontRef>
         </p:style>
         <p:txBody>
-          <a:bodyPr rtlCol="0" anchor="ctr" wrap="square" lIns="137160" tIns="109728"/>
+          <a:bodyPr wrap="square" lIns="137160" tIns="109728" rtlCol="0" anchor="ctr"/>
           <a:lstStyle/>
           <a:p>
             <a:pPr algn="l">
@@ -8048,7 +7702,7 @@
           </a:fontRef>
         </p:style>
         <p:txBody>
-          <a:bodyPr rtlCol="0" anchor="ctr" wrap="square" lIns="137160"/>
+          <a:bodyPr wrap="square" lIns="137160" rtlCol="0" anchor="ctr"/>
           <a:lstStyle/>
           <a:p>
             <a:pPr algn="l">
@@ -8085,7 +7739,7 @@
           <a:noFill/>
         </p:spPr>
         <p:txBody>
-          <a:bodyPr wrap="square" lIns="0" rIns="0" tIns="0" bIns="0">
+          <a:bodyPr wrap="square" lIns="0" tIns="0" rIns="0" bIns="0">
             <a:spAutoFit/>
           </a:bodyPr>
           <a:lstStyle/>
@@ -8102,15 +7756,6 @@
                 </a:solidFill>
                 <a:latin typeface="Microsoft YaHei"/>
               </a:rPr>
-              <a:t/>
-            </a:r>
-            <a:r>
-              <a:rPr sz="1000" b="0">
-                <a:solidFill>
-                  <a:srgbClr val="9AA7B4"/>
-                </a:solidFill>
-                <a:latin typeface="Microsoft YaHei"/>
-              </a:rPr>
               <a:t>AgentForge · 多角色 AI 研发引擎 · 赛道 B</a:t>
             </a:r>
           </a:p>
@@ -8133,7 +7778,7 @@
           <a:noFill/>
         </p:spPr>
         <p:txBody>
-          <a:bodyPr wrap="square" lIns="0" rIns="0" tIns="0" bIns="0">
+          <a:bodyPr wrap="square" lIns="0" tIns="0" rIns="0" bIns="0">
             <a:spAutoFit/>
           </a:bodyPr>
           <a:lstStyle/>
@@ -8143,15 +7788,6 @@
                 <a:spcPts val="0"/>
               </a:spcBef>
             </a:pPr>
-            <a:r>
-              <a:rPr sz="1000" b="0">
-                <a:solidFill>
-                  <a:srgbClr val="9AA7B4"/>
-                </a:solidFill>
-                <a:latin typeface="Microsoft YaHei"/>
-              </a:rPr>
-              <a:t/>
-            </a:r>
             <a:r>
               <a:rPr sz="1000" b="0">
                 <a:solidFill>
@@ -8173,7 +7809,7 @@
 </file>
 
 <file path=ppt/slides/slide6.xml><?xml version="1.0" encoding="utf-8"?>
-<p:sld xmlns:a="http://schemas.openxmlformats.org/drawingml/2006/main" xmlns:p="http://schemas.openxmlformats.org/presentationml/2006/main" xmlns:r="http://schemas.openxmlformats.org/officeDocument/2006/relationships">
+<p:sld xmlns:a="http://schemas.openxmlformats.org/drawingml/2006/main" xmlns:r="http://schemas.openxmlformats.org/officeDocument/2006/relationships" xmlns:p="http://schemas.openxmlformats.org/presentationml/2006/main">
   <p:cSld>
     <p:spTree>
       <p:nvGrpSpPr>
@@ -8181,7 +7817,14 @@
         <p:cNvGrpSpPr/>
         <p:nvPr/>
       </p:nvGrpSpPr>
-      <p:grpSpPr/>
+      <p:grpSpPr>
+        <a:xfrm>
+          <a:off x="0" y="0"/>
+          <a:ext cx="0" cy="0"/>
+          <a:chOff x="0" y="0"/>
+          <a:chExt cx="0" cy="0"/>
+        </a:xfrm>
+      </p:grpSpPr>
       <p:sp>
         <p:nvSpPr>
           <p:cNvPr id="2" name="Rectangle 1"/>
@@ -8223,6 +7866,7 @@
           <a:lstStyle/>
           <a:p>
             <a:pPr algn="ctr"/>
+            <a:endParaRPr/>
           </a:p>
         </p:txBody>
       </p:sp>
@@ -8243,7 +7887,7 @@
           <a:noFill/>
         </p:spPr>
         <p:txBody>
-          <a:bodyPr wrap="square" lIns="0" rIns="0" tIns="0" bIns="0">
+          <a:bodyPr wrap="square" lIns="0" tIns="0" rIns="0" bIns="0">
             <a:spAutoFit/>
           </a:bodyPr>
           <a:lstStyle/>
@@ -8260,15 +7904,6 @@
                 </a:solidFill>
                 <a:latin typeface="Microsoft YaHei"/>
               </a:rPr>
-              <a:t/>
-            </a:r>
-            <a:r>
-              <a:rPr sz="1300" b="1">
-                <a:solidFill>
-                  <a:srgbClr val="35C48F"/>
-                </a:solidFill>
-                <a:latin typeface="Microsoft YaHei"/>
-              </a:rPr>
               <a:t>Agent 链路</a:t>
             </a:r>
           </a:p>
@@ -8291,7 +7926,7 @@
           <a:noFill/>
         </p:spPr>
         <p:txBody>
-          <a:bodyPr wrap="square" lIns="0" rIns="0" tIns="0" bIns="0">
+          <a:bodyPr wrap="square" lIns="0" tIns="0" rIns="0" bIns="0">
             <a:spAutoFit/>
           </a:bodyPr>
           <a:lstStyle/>
@@ -8308,15 +7943,6 @@
                 </a:solidFill>
                 <a:latin typeface="Microsoft YaHei"/>
               </a:rPr>
-              <a:t/>
-            </a:r>
-            <a:r>
-              <a:rPr sz="3000" b="1">
-                <a:solidFill>
-                  <a:srgbClr val="EAF0F6"/>
-                </a:solidFill>
-                <a:latin typeface="Microsoft YaHei"/>
-              </a:rPr>
               <a:t>五个角色不直接对话，只传接口</a:t>
             </a:r>
           </a:p>
@@ -8339,7 +7965,7 @@
           <a:noFill/>
         </p:spPr>
         <p:txBody>
-          <a:bodyPr wrap="square" lIns="0" rIns="0" tIns="0" bIns="0">
+          <a:bodyPr wrap="square" lIns="0" tIns="0" rIns="0" bIns="0">
             <a:spAutoFit/>
           </a:bodyPr>
           <a:lstStyle/>
@@ -8349,15 +7975,6 @@
                 <a:spcPts val="0"/>
               </a:spcBef>
             </a:pPr>
-            <a:r>
-              <a:rPr sz="1400" b="0">
-                <a:solidFill>
-                  <a:srgbClr val="9AA7B4"/>
-                </a:solidFill>
-                <a:latin typeface="Microsoft YaHei"/>
-              </a:rPr>
-              <a:t/>
-            </a:r>
             <a:r>
               <a:rPr sz="1400" b="0">
                 <a:solidFill>
@@ -8446,7 +8063,7 @@
           </a:fontRef>
         </p:style>
         <p:txBody>
-          <a:bodyPr rtlCol="0" anchor="ctr" wrap="square" lIns="182880" tIns="137160"/>
+          <a:bodyPr wrap="square" lIns="182880" tIns="137160" rtlCol="0" anchor="ctr"/>
           <a:lstStyle/>
           <a:p>
             <a:pPr algn="l">
@@ -8587,7 +8204,7 @@
           </a:fontRef>
         </p:style>
         <p:txBody>
-          <a:bodyPr rtlCol="0" anchor="ctr" wrap="square" lIns="182880" tIns="137160"/>
+          <a:bodyPr wrap="square" lIns="182880" tIns="137160" rtlCol="0" anchor="ctr"/>
           <a:lstStyle/>
           <a:p>
             <a:pPr algn="l">
@@ -8728,7 +8345,7 @@
           </a:fontRef>
         </p:style>
         <p:txBody>
-          <a:bodyPr rtlCol="0" anchor="ctr" wrap="square" lIns="137160"/>
+          <a:bodyPr wrap="square" lIns="137160" rtlCol="0" anchor="ctr"/>
           <a:lstStyle/>
           <a:p>
             <a:pPr algn="l">
@@ -8805,7 +8422,7 @@
           </a:fontRef>
         </p:style>
         <p:txBody>
-          <a:bodyPr rtlCol="0" anchor="ctr" wrap="square" lIns="137160"/>
+          <a:bodyPr wrap="square" lIns="137160" rtlCol="0" anchor="ctr"/>
           <a:lstStyle/>
           <a:p>
             <a:pPr algn="l">
@@ -8858,7 +8475,7 @@
           <a:noFill/>
         </p:spPr>
         <p:txBody>
-          <a:bodyPr wrap="square" lIns="0" rIns="0" tIns="0" bIns="0">
+          <a:bodyPr wrap="square" lIns="0" tIns="0" rIns="0" bIns="0">
             <a:spAutoFit/>
           </a:bodyPr>
           <a:lstStyle/>
@@ -8875,15 +8492,6 @@
                 </a:solidFill>
                 <a:latin typeface="Microsoft YaHei"/>
               </a:rPr>
-              <a:t/>
-            </a:r>
-            <a:r>
-              <a:rPr sz="1000" b="0">
-                <a:solidFill>
-                  <a:srgbClr val="9AA7B4"/>
-                </a:solidFill>
-                <a:latin typeface="Microsoft YaHei"/>
-              </a:rPr>
               <a:t>AgentForge · 多角色 AI 研发引擎 · 赛道 B</a:t>
             </a:r>
           </a:p>
@@ -8906,7 +8514,7 @@
           <a:noFill/>
         </p:spPr>
         <p:txBody>
-          <a:bodyPr wrap="square" lIns="0" rIns="0" tIns="0" bIns="0">
+          <a:bodyPr wrap="square" lIns="0" tIns="0" rIns="0" bIns="0">
             <a:spAutoFit/>
           </a:bodyPr>
           <a:lstStyle/>
@@ -8916,15 +8524,6 @@
                 <a:spcPts val="0"/>
               </a:spcBef>
             </a:pPr>
-            <a:r>
-              <a:rPr sz="1000" b="0">
-                <a:solidFill>
-                  <a:srgbClr val="9AA7B4"/>
-                </a:solidFill>
-                <a:latin typeface="Microsoft YaHei"/>
-              </a:rPr>
-              <a:t/>
-            </a:r>
             <a:r>
               <a:rPr sz="1000" b="0">
                 <a:solidFill>
@@ -8946,7 +8545,7 @@
 </file>
 
 <file path=ppt/slides/slide7.xml><?xml version="1.0" encoding="utf-8"?>
-<p:sld xmlns:a="http://schemas.openxmlformats.org/drawingml/2006/main" xmlns:p="http://schemas.openxmlformats.org/presentationml/2006/main" xmlns:r="http://schemas.openxmlformats.org/officeDocument/2006/relationships">
+<p:sld xmlns:a="http://schemas.openxmlformats.org/drawingml/2006/main" xmlns:r="http://schemas.openxmlformats.org/officeDocument/2006/relationships" xmlns:p="http://schemas.openxmlformats.org/presentationml/2006/main">
   <p:cSld>
     <p:spTree>
       <p:nvGrpSpPr>
@@ -8954,7 +8553,14 @@
         <p:cNvGrpSpPr/>
         <p:nvPr/>
       </p:nvGrpSpPr>
-      <p:grpSpPr/>
+      <p:grpSpPr>
+        <a:xfrm>
+          <a:off x="0" y="0"/>
+          <a:ext cx="0" cy="0"/>
+          <a:chOff x="0" y="0"/>
+          <a:chExt cx="0" cy="0"/>
+        </a:xfrm>
+      </p:grpSpPr>
       <p:sp>
         <p:nvSpPr>
           <p:cNvPr id="2" name="Rectangle 1"/>
@@ -8996,6 +8602,7 @@
           <a:lstStyle/>
           <a:p>
             <a:pPr algn="ctr"/>
+            <a:endParaRPr/>
           </a:p>
         </p:txBody>
       </p:sp>
@@ -9016,7 +8623,7 @@
           <a:noFill/>
         </p:spPr>
         <p:txBody>
-          <a:bodyPr wrap="square" lIns="0" rIns="0" tIns="0" bIns="0">
+          <a:bodyPr wrap="square" lIns="0" tIns="0" rIns="0" bIns="0">
             <a:spAutoFit/>
           </a:bodyPr>
           <a:lstStyle/>
@@ -9033,15 +8640,6 @@
                 </a:solidFill>
                 <a:latin typeface="Microsoft YaHei"/>
               </a:rPr>
-              <a:t/>
-            </a:r>
-            <a:r>
-              <a:rPr sz="1300" b="1">
-                <a:solidFill>
-                  <a:srgbClr val="35C48F"/>
-                </a:solidFill>
-                <a:latin typeface="Microsoft YaHei"/>
-              </a:rPr>
               <a:t>异常处理</a:t>
             </a:r>
           </a:p>
@@ -9064,7 +8662,7 @@
           <a:noFill/>
         </p:spPr>
         <p:txBody>
-          <a:bodyPr wrap="square" lIns="0" rIns="0" tIns="0" bIns="0">
+          <a:bodyPr wrap="square" lIns="0" tIns="0" rIns="0" bIns="0">
             <a:spAutoFit/>
           </a:bodyPr>
           <a:lstStyle/>
@@ -9081,15 +8679,6 @@
                 </a:solidFill>
                 <a:latin typeface="Microsoft YaHei"/>
               </a:rPr>
-              <a:t/>
-            </a:r>
-            <a:r>
-              <a:rPr sz="3000" b="1">
-                <a:solidFill>
-                  <a:srgbClr val="EAF0F6"/>
-                </a:solidFill>
-                <a:latin typeface="Microsoft YaHei"/>
-              </a:rPr>
               <a:t>四层逃生，机械判定，保证不死锁</a:t>
             </a:r>
           </a:p>
@@ -9112,7 +8701,7 @@
           <a:noFill/>
         </p:spPr>
         <p:txBody>
-          <a:bodyPr wrap="square" lIns="0" rIns="0" tIns="0" bIns="0">
+          <a:bodyPr wrap="square" lIns="0" tIns="0" rIns="0" bIns="0">
             <a:spAutoFit/>
           </a:bodyPr>
           <a:lstStyle/>
@@ -9122,15 +8711,6 @@
                 <a:spcPts val="0"/>
               </a:spcBef>
             </a:pPr>
-            <a:r>
-              <a:rPr sz="1400" b="0">
-                <a:solidFill>
-                  <a:srgbClr val="9AA7B4"/>
-                </a:solidFill>
-                <a:latin typeface="Microsoft YaHei"/>
-              </a:rPr>
-              <a:t/>
-            </a:r>
             <a:r>
               <a:rPr sz="1400" b="0">
                 <a:solidFill>
@@ -9223,6 +8803,7 @@
           <a:lstStyle/>
           <a:p>
             <a:pPr algn="ctr"/>
+            <a:endParaRPr/>
           </a:p>
         </p:txBody>
       </p:sp>
@@ -9243,7 +8824,7 @@
           <a:noFill/>
         </p:spPr>
         <p:txBody>
-          <a:bodyPr wrap="square" lIns="0" rIns="0" tIns="0" bIns="0">
+          <a:bodyPr wrap="square" lIns="0" tIns="0" rIns="0" bIns="0">
             <a:spAutoFit/>
           </a:bodyPr>
           <a:lstStyle/>
@@ -9260,15 +8841,6 @@
                 </a:solidFill>
                 <a:latin typeface="Microsoft YaHei"/>
               </a:rPr>
-              <a:t/>
-            </a:r>
-            <a:r>
-              <a:rPr sz="1500" b="1">
-                <a:solidFill>
-                  <a:srgbClr val="35C48F"/>
-                </a:solidFill>
-                <a:latin typeface="Microsoft YaHei"/>
-              </a:rPr>
               <a:t>① 打回返工</a:t>
             </a:r>
           </a:p>
@@ -9291,7 +8863,7 @@
           <a:noFill/>
         </p:spPr>
         <p:txBody>
-          <a:bodyPr wrap="square" lIns="0" rIns="0" tIns="0" bIns="0">
+          <a:bodyPr wrap="square" lIns="0" tIns="0" rIns="0" bIns="0">
             <a:spAutoFit/>
           </a:bodyPr>
           <a:lstStyle/>
@@ -9308,15 +8880,6 @@
                 </a:solidFill>
                 <a:latin typeface="Microsoft YaHei"/>
               </a:rPr>
-              <a:t/>
-            </a:r>
-            <a:r>
-              <a:rPr sz="1100" b="0">
-                <a:solidFill>
-                  <a:srgbClr val="EAF0F6"/>
-                </a:solidFill>
-                <a:latin typeface="Microsoft YaHei"/>
-              </a:rPr>
               <a:t>能归因就先打回；一条都归不了因才开会</a:t>
             </a:r>
           </a:p>
@@ -9339,7 +8902,7 @@
           <a:noFill/>
         </p:spPr>
         <p:txBody>
-          <a:bodyPr wrap="square" lIns="0" rIns="0" tIns="0" bIns="0">
+          <a:bodyPr wrap="square" lIns="0" tIns="0" rIns="0" bIns="0">
             <a:spAutoFit/>
           </a:bodyPr>
           <a:lstStyle/>
@@ -9349,15 +8912,6 @@
                 <a:spcPts val="0"/>
               </a:spcBef>
             </a:pPr>
-            <a:r>
-              <a:rPr sz="1000" b="0">
-                <a:solidFill>
-                  <a:srgbClr val="9AA7B4"/>
-                </a:solidFill>
-                <a:latin typeface="Microsoft YaHei"/>
-              </a:rPr>
-              <a:t/>
-            </a:r>
             <a:r>
               <a:rPr sz="1000" b="0">
                 <a:solidFill>
@@ -9415,6 +8969,7 @@
           <a:lstStyle/>
           <a:p>
             <a:pPr algn="ctr"/>
+            <a:endParaRPr/>
           </a:p>
         </p:txBody>
       </p:sp>
@@ -9435,7 +8990,7 @@
           <a:noFill/>
         </p:spPr>
         <p:txBody>
-          <a:bodyPr wrap="square" lIns="0" rIns="0" tIns="0" bIns="0">
+          <a:bodyPr wrap="square" lIns="0" tIns="0" rIns="0" bIns="0">
             <a:spAutoFit/>
           </a:bodyPr>
           <a:lstStyle/>
@@ -9452,15 +9007,6 @@
                 </a:solidFill>
                 <a:latin typeface="Microsoft YaHei"/>
               </a:rPr>
-              <a:t/>
-            </a:r>
-            <a:r>
-              <a:rPr sz="1500" b="1">
-                <a:solidFill>
-                  <a:srgbClr val="F2B544"/>
-                </a:solidFill>
-                <a:latin typeface="Microsoft YaHei"/>
-              </a:rPr>
               <a:t>② 圆桌会议</a:t>
             </a:r>
           </a:p>
@@ -9483,7 +9029,7 @@
           <a:noFill/>
         </p:spPr>
         <p:txBody>
-          <a:bodyPr wrap="square" lIns="0" rIns="0" tIns="0" bIns="0">
+          <a:bodyPr wrap="square" lIns="0" tIns="0" rIns="0" bIns="0">
             <a:spAutoFit/>
           </a:bodyPr>
           <a:lstStyle/>
@@ -9500,15 +9046,6 @@
                 </a:solidFill>
                 <a:latin typeface="Microsoft YaHei"/>
               </a:rPr>
-              <a:t/>
-            </a:r>
-            <a:r>
-              <a:rPr sz="1100" b="0">
-                <a:solidFill>
-                  <a:srgbClr val="EAF0F6"/>
-                </a:solidFill>
-                <a:latin typeface="Microsoft YaHei"/>
-              </a:rPr>
               <a:t>唯一允许 LLM 协商的地方（T1–T5）</a:t>
             </a:r>
           </a:p>
@@ -9531,7 +9068,7 @@
           <a:noFill/>
         </p:spPr>
         <p:txBody>
-          <a:bodyPr wrap="square" lIns="0" rIns="0" tIns="0" bIns="0">
+          <a:bodyPr wrap="square" lIns="0" tIns="0" rIns="0" bIns="0">
             <a:spAutoFit/>
           </a:bodyPr>
           <a:lstStyle/>
@@ -9541,15 +9078,6 @@
                 <a:spcPts val="0"/>
               </a:spcBef>
             </a:pPr>
-            <a:r>
-              <a:rPr sz="1000" b="0">
-                <a:solidFill>
-                  <a:srgbClr val="9AA7B4"/>
-                </a:solidFill>
-                <a:latin typeface="Microsoft YaHei"/>
-              </a:rPr>
-              <a:t/>
-            </a:r>
             <a:r>
               <a:rPr sz="1000" b="0">
                 <a:solidFill>
@@ -9607,6 +9135,7 @@
           <a:lstStyle/>
           <a:p>
             <a:pPr algn="ctr"/>
+            <a:endParaRPr/>
           </a:p>
         </p:txBody>
       </p:sp>
@@ -9627,7 +9156,7 @@
           <a:noFill/>
         </p:spPr>
         <p:txBody>
-          <a:bodyPr wrap="square" lIns="0" rIns="0" tIns="0" bIns="0">
+          <a:bodyPr wrap="square" lIns="0" tIns="0" rIns="0" bIns="0">
             <a:spAutoFit/>
           </a:bodyPr>
           <a:lstStyle/>
@@ -9644,15 +9173,6 @@
                 </a:solidFill>
                 <a:latin typeface="Microsoft YaHei"/>
               </a:rPr>
-              <a:t/>
-            </a:r>
-            <a:r>
-              <a:rPr sz="1500" b="1">
-                <a:solidFill>
-                  <a:srgbClr val="F2B544"/>
-                </a:solidFill>
-                <a:latin typeface="Microsoft YaHei"/>
-              </a:rPr>
               <a:t>③ 升级真人</a:t>
             </a:r>
           </a:p>
@@ -9675,7 +9195,7 @@
           <a:noFill/>
         </p:spPr>
         <p:txBody>
-          <a:bodyPr wrap="square" lIns="0" rIns="0" tIns="0" bIns="0">
+          <a:bodyPr wrap="square" lIns="0" tIns="0" rIns="0" bIns="0">
             <a:spAutoFit/>
           </a:bodyPr>
           <a:lstStyle/>
@@ -9692,15 +9212,6 @@
                 </a:solidFill>
                 <a:latin typeface="Microsoft YaHei"/>
               </a:rPr>
-              <a:t/>
-            </a:r>
-            <a:r>
-              <a:rPr sz="1100" b="0">
-                <a:solidFill>
-                  <a:srgbClr val="EAF0F6"/>
-                </a:solidFill>
-                <a:latin typeface="Microsoft YaHei"/>
-              </a:rPr>
               <a:t>打包成仲裁包，人只需做一次决定</a:t>
             </a:r>
           </a:p>
@@ -9723,7 +9234,7 @@
           <a:noFill/>
         </p:spPr>
         <p:txBody>
-          <a:bodyPr wrap="square" lIns="0" rIns="0" tIns="0" bIns="0">
+          <a:bodyPr wrap="square" lIns="0" tIns="0" rIns="0" bIns="0">
             <a:spAutoFit/>
           </a:bodyPr>
           <a:lstStyle/>
@@ -9733,15 +9244,6 @@
                 <a:spcPts val="0"/>
               </a:spcBef>
             </a:pPr>
-            <a:r>
-              <a:rPr sz="1000" b="0">
-                <a:solidFill>
-                  <a:srgbClr val="9AA7B4"/>
-                </a:solidFill>
-                <a:latin typeface="Microsoft YaHei"/>
-              </a:rPr>
-              <a:t/>
-            </a:r>
             <a:r>
               <a:rPr sz="1000" b="0">
                 <a:solidFill>
@@ -9799,6 +9301,7 @@
           <a:lstStyle/>
           <a:p>
             <a:pPr algn="ctr"/>
+            <a:endParaRPr/>
           </a:p>
         </p:txBody>
       </p:sp>
@@ -9819,7 +9322,7 @@
           <a:noFill/>
         </p:spPr>
         <p:txBody>
-          <a:bodyPr wrap="square" lIns="0" rIns="0" tIns="0" bIns="0">
+          <a:bodyPr wrap="square" lIns="0" tIns="0" rIns="0" bIns="0">
             <a:spAutoFit/>
           </a:bodyPr>
           <a:lstStyle/>
@@ -9836,15 +9339,6 @@
                 </a:solidFill>
                 <a:latin typeface="Microsoft YaHei"/>
               </a:rPr>
-              <a:t/>
-            </a:r>
-            <a:r>
-              <a:rPr sz="1500" b="1">
-                <a:solidFill>
-                  <a:srgbClr val="9AA7B4"/>
-                </a:solidFill>
-                <a:latin typeface="Microsoft YaHei"/>
-              </a:rPr>
               <a:t>④ 带债通过</a:t>
             </a:r>
           </a:p>
@@ -9867,7 +9361,7 @@
           <a:noFill/>
         </p:spPr>
         <p:txBody>
-          <a:bodyPr wrap="square" lIns="0" rIns="0" tIns="0" bIns="0">
+          <a:bodyPr wrap="square" lIns="0" tIns="0" rIns="0" bIns="0">
             <a:spAutoFit/>
           </a:bodyPr>
           <a:lstStyle/>
@@ -9884,15 +9378,6 @@
                 </a:solidFill>
                 <a:latin typeface="Microsoft YaHei"/>
               </a:rPr>
-              <a:t/>
-            </a:r>
-            <a:r>
-              <a:rPr sz="1100" b="0">
-                <a:solidFill>
-                  <a:srgbClr val="EAF0F6"/>
-                </a:solidFill>
-                <a:latin typeface="Microsoft YaHei"/>
-              </a:rPr>
               <a:t>写 DebtRecord + 需求标 accepted_with_debt</a:t>
             </a:r>
           </a:p>
@@ -9915,7 +9400,7 @@
           <a:noFill/>
         </p:spPr>
         <p:txBody>
-          <a:bodyPr wrap="square" lIns="0" rIns="0" tIns="0" bIns="0">
+          <a:bodyPr wrap="square" lIns="0" tIns="0" rIns="0" bIns="0">
             <a:spAutoFit/>
           </a:bodyPr>
           <a:lstStyle/>
@@ -9925,15 +9410,6 @@
                 <a:spcPts val="0"/>
               </a:spcBef>
             </a:pPr>
-            <a:r>
-              <a:rPr sz="1000" b="0">
-                <a:solidFill>
-                  <a:srgbClr val="9AA7B4"/>
-                </a:solidFill>
-                <a:latin typeface="Microsoft YaHei"/>
-              </a:rPr>
-              <a:t/>
-            </a:r>
             <a:r>
               <a:rPr sz="1000" b="0">
                 <a:solidFill>
@@ -9987,7 +9463,7 @@
           </a:fontRef>
         </p:style>
         <p:txBody>
-          <a:bodyPr rtlCol="0" anchor="ctr" wrap="square" lIns="164592" tIns="128016"/>
+          <a:bodyPr wrap="square" lIns="164592" tIns="128016" rtlCol="0" anchor="ctr"/>
           <a:lstStyle/>
           <a:p>
             <a:pPr algn="l">
@@ -10176,7 +9652,7 @@
           </a:fontRef>
         </p:style>
         <p:txBody>
-          <a:bodyPr rtlCol="0" anchor="ctr" wrap="square" lIns="182880"/>
+          <a:bodyPr wrap="square" lIns="182880" rtlCol="0" anchor="ctr"/>
           <a:lstStyle/>
           <a:p>
             <a:pPr algn="l">
@@ -10229,7 +9705,7 @@
           <a:noFill/>
         </p:spPr>
         <p:txBody>
-          <a:bodyPr wrap="square" lIns="0" rIns="0" tIns="0" bIns="0">
+          <a:bodyPr wrap="square" lIns="0" tIns="0" rIns="0" bIns="0">
             <a:spAutoFit/>
           </a:bodyPr>
           <a:lstStyle/>
@@ -10246,15 +9722,6 @@
                 </a:solidFill>
                 <a:latin typeface="Microsoft YaHei"/>
               </a:rPr>
-              <a:t/>
-            </a:r>
-            <a:r>
-              <a:rPr sz="1000" b="0">
-                <a:solidFill>
-                  <a:srgbClr val="9AA7B4"/>
-                </a:solidFill>
-                <a:latin typeface="Microsoft YaHei"/>
-              </a:rPr>
               <a:t>AgentForge · 多角色 AI 研发引擎 · 赛道 B</a:t>
             </a:r>
           </a:p>
@@ -10277,7 +9744,7 @@
           <a:noFill/>
         </p:spPr>
         <p:txBody>
-          <a:bodyPr wrap="square" lIns="0" rIns="0" tIns="0" bIns="0">
+          <a:bodyPr wrap="square" lIns="0" tIns="0" rIns="0" bIns="0">
             <a:spAutoFit/>
           </a:bodyPr>
           <a:lstStyle/>
@@ -10287,15 +9754,6 @@
                 <a:spcPts val="0"/>
               </a:spcBef>
             </a:pPr>
-            <a:r>
-              <a:rPr sz="1000" b="0">
-                <a:solidFill>
-                  <a:srgbClr val="9AA7B4"/>
-                </a:solidFill>
-                <a:latin typeface="Microsoft YaHei"/>
-              </a:rPr>
-              <a:t/>
-            </a:r>
             <a:r>
               <a:rPr sz="1000" b="0">
                 <a:solidFill>
@@ -10317,7 +9775,7 @@
 </file>
 
 <file path=ppt/slides/slide8.xml><?xml version="1.0" encoding="utf-8"?>
-<p:sld xmlns:a="http://schemas.openxmlformats.org/drawingml/2006/main" xmlns:p="http://schemas.openxmlformats.org/presentationml/2006/main" xmlns:r="http://schemas.openxmlformats.org/officeDocument/2006/relationships">
+<p:sld xmlns:a="http://schemas.openxmlformats.org/drawingml/2006/main" xmlns:r="http://schemas.openxmlformats.org/officeDocument/2006/relationships" xmlns:p="http://schemas.openxmlformats.org/presentationml/2006/main">
   <p:cSld>
     <p:spTree>
       <p:nvGrpSpPr>
@@ -10325,7 +9783,14 @@
         <p:cNvGrpSpPr/>
         <p:nvPr/>
       </p:nvGrpSpPr>
-      <p:grpSpPr/>
+      <p:grpSpPr>
+        <a:xfrm>
+          <a:off x="0" y="0"/>
+          <a:ext cx="0" cy="0"/>
+          <a:chOff x="0" y="0"/>
+          <a:chExt cx="0" cy="0"/>
+        </a:xfrm>
+      </p:grpSpPr>
       <p:sp>
         <p:nvSpPr>
           <p:cNvPr id="2" name="Rectangle 1"/>
@@ -10367,6 +9832,7 @@
           <a:lstStyle/>
           <a:p>
             <a:pPr algn="ctr"/>
+            <a:endParaRPr/>
           </a:p>
         </p:txBody>
       </p:sp>
@@ -10387,7 +9853,7 @@
           <a:noFill/>
         </p:spPr>
         <p:txBody>
-          <a:bodyPr wrap="square" lIns="0" rIns="0" tIns="0" bIns="0">
+          <a:bodyPr wrap="square" lIns="0" tIns="0" rIns="0" bIns="0">
             <a:spAutoFit/>
           </a:bodyPr>
           <a:lstStyle/>
@@ -10404,15 +9870,6 @@
                 </a:solidFill>
                 <a:latin typeface="Microsoft YaHei"/>
               </a:rPr>
-              <a:t/>
-            </a:r>
-            <a:r>
-              <a:rPr sz="1300" b="1">
-                <a:solidFill>
-                  <a:srgbClr val="35C48F"/>
-                </a:solidFill>
-                <a:latin typeface="Microsoft YaHei"/>
-              </a:rPr>
               <a:t>可观测性</a:t>
             </a:r>
           </a:p>
@@ -10435,7 +9892,7 @@
           <a:noFill/>
         </p:spPr>
         <p:txBody>
-          <a:bodyPr wrap="square" lIns="0" rIns="0" tIns="0" bIns="0">
+          <a:bodyPr wrap="square" lIns="0" tIns="0" rIns="0" bIns="0">
             <a:spAutoFit/>
           </a:bodyPr>
           <a:lstStyle/>
@@ -10452,15 +9909,6 @@
                 </a:solidFill>
                 <a:latin typeface="Microsoft YaHei"/>
               </a:rPr>
-              <a:t/>
-            </a:r>
-            <a:r>
-              <a:rPr sz="3000" b="1">
-                <a:solidFill>
-                  <a:srgbClr val="EAF0F6"/>
-                </a:solidFill>
-                <a:latin typeface="Microsoft YaHei"/>
-              </a:rPr>
               <a:t>能回答「它到底看到了什么」</a:t>
             </a:r>
           </a:p>
@@ -10483,7 +9931,7 @@
           <a:noFill/>
         </p:spPr>
         <p:txBody>
-          <a:bodyPr wrap="square" lIns="0" rIns="0" tIns="0" bIns="0">
+          <a:bodyPr wrap="square" lIns="0" tIns="0" rIns="0" bIns="0">
             <a:spAutoFit/>
           </a:bodyPr>
           <a:lstStyle/>
@@ -10493,15 +9941,6 @@
                 <a:spcPts val="0"/>
               </a:spcBef>
             </a:pPr>
-            <a:r>
-              <a:rPr sz="1400" b="0">
-                <a:solidFill>
-                  <a:srgbClr val="9AA7B4"/>
-                </a:solidFill>
-                <a:latin typeface="Microsoft YaHei"/>
-              </a:rPr>
-              <a:t/>
-            </a:r>
             <a:r>
               <a:rPr sz="1400" b="0">
                 <a:solidFill>
@@ -10590,7 +10029,7 @@
           </a:fontRef>
         </p:style>
         <p:txBody>
-          <a:bodyPr rtlCol="0" anchor="ctr" wrap="square" lIns="164592" tIns="128016"/>
+          <a:bodyPr wrap="square" lIns="164592" tIns="128016" rtlCol="0" anchor="ctr"/>
           <a:lstStyle/>
           <a:p>
             <a:pPr algn="l">
@@ -10735,6 +10174,7 @@
           <a:lstStyle/>
           <a:p>
             <a:pPr algn="ctr"/>
+            <a:endParaRPr/>
           </a:p>
         </p:txBody>
       </p:sp>
@@ -10755,7 +10195,7 @@
           <a:noFill/>
         </p:spPr>
         <p:txBody>
-          <a:bodyPr wrap="square" lIns="0" rIns="0" tIns="0" bIns="0">
+          <a:bodyPr wrap="square" lIns="0" tIns="0" rIns="0" bIns="0">
             <a:spAutoFit/>
           </a:bodyPr>
           <a:lstStyle/>
@@ -10772,15 +10212,6 @@
                 </a:solidFill>
                 <a:latin typeface="Microsoft YaHei"/>
               </a:rPr>
-              <a:t/>
-            </a:r>
-            <a:r>
-              <a:rPr sz="1300" b="1">
-                <a:solidFill>
-                  <a:srgbClr val="35C48F"/>
-                </a:solidFill>
-                <a:latin typeface="Microsoft YaHei"/>
-              </a:rPr>
               <a:t>哈希链日志</a:t>
             </a:r>
           </a:p>
@@ -10803,7 +10234,7 @@
           <a:noFill/>
         </p:spPr>
         <p:txBody>
-          <a:bodyPr wrap="square" lIns="0" rIns="0" tIns="0" bIns="0">
+          <a:bodyPr wrap="square" lIns="0" tIns="0" rIns="0" bIns="0">
             <a:spAutoFit/>
           </a:bodyPr>
           <a:lstStyle/>
@@ -10813,15 +10244,6 @@
                 <a:spcPts val="0"/>
               </a:spcBef>
             </a:pPr>
-            <a:r>
-              <a:rPr sz="1000" b="0">
-                <a:solidFill>
-                  <a:srgbClr val="9AA7B4"/>
-                </a:solidFill>
-                <a:latin typeface="Microsoft YaHei"/>
-              </a:rPr>
-              <a:t/>
-            </a:r>
             <a:r>
               <a:rPr sz="1000" b="0">
                 <a:solidFill>
@@ -10879,6 +10301,7 @@
           <a:lstStyle/>
           <a:p>
             <a:pPr algn="ctr"/>
+            <a:endParaRPr/>
           </a:p>
         </p:txBody>
       </p:sp>
@@ -10899,7 +10322,7 @@
           <a:noFill/>
         </p:spPr>
         <p:txBody>
-          <a:bodyPr wrap="square" lIns="0" rIns="0" tIns="0" bIns="0">
+          <a:bodyPr wrap="square" lIns="0" tIns="0" rIns="0" bIns="0">
             <a:spAutoFit/>
           </a:bodyPr>
           <a:lstStyle/>
@@ -10916,15 +10339,6 @@
                 </a:solidFill>
                 <a:latin typeface="Microsoft YaHei"/>
               </a:rPr>
-              <a:t/>
-            </a:r>
-            <a:r>
-              <a:rPr sz="1300" b="1">
-                <a:solidFill>
-                  <a:srgbClr val="EAF0F6"/>
-                </a:solidFill>
-                <a:latin typeface="Microsoft YaHei"/>
-              </a:rPr>
               <a:t>回放</a:t>
             </a:r>
           </a:p>
@@ -10947,7 +10361,7 @@
           <a:noFill/>
         </p:spPr>
         <p:txBody>
-          <a:bodyPr wrap="square" lIns="0" rIns="0" tIns="0" bIns="0">
+          <a:bodyPr wrap="square" lIns="0" tIns="0" rIns="0" bIns="0">
             <a:spAutoFit/>
           </a:bodyPr>
           <a:lstStyle/>
@@ -10957,15 +10371,6 @@
                 <a:spcPts val="0"/>
               </a:spcBef>
             </a:pPr>
-            <a:r>
-              <a:rPr sz="1000" b="0">
-                <a:solidFill>
-                  <a:srgbClr val="9AA7B4"/>
-                </a:solidFill>
-                <a:latin typeface="Microsoft YaHei"/>
-              </a:rPr>
-              <a:t/>
-            </a:r>
             <a:r>
               <a:rPr sz="1000" b="0">
                 <a:solidFill>
@@ -11023,6 +10428,7 @@
           <a:lstStyle/>
           <a:p>
             <a:pPr algn="ctr"/>
+            <a:endParaRPr/>
           </a:p>
         </p:txBody>
       </p:sp>
@@ -11043,7 +10449,7 @@
           <a:noFill/>
         </p:spPr>
         <p:txBody>
-          <a:bodyPr wrap="square" lIns="0" rIns="0" tIns="0" bIns="0">
+          <a:bodyPr wrap="square" lIns="0" tIns="0" rIns="0" bIns="0">
             <a:spAutoFit/>
           </a:bodyPr>
           <a:lstStyle/>
@@ -11060,15 +10466,6 @@
                 </a:solidFill>
                 <a:latin typeface="Microsoft YaHei"/>
               </a:rPr>
-              <a:t/>
-            </a:r>
-            <a:r>
-              <a:rPr sz="1300" b="1">
-                <a:solidFill>
-                  <a:srgbClr val="F2B544"/>
-                </a:solidFill>
-                <a:latin typeface="Microsoft YaHei"/>
-              </a:rPr>
               <a:t>锚点靶场</a:t>
             </a:r>
           </a:p>
@@ -11091,7 +10488,7 @@
           <a:noFill/>
         </p:spPr>
         <p:txBody>
-          <a:bodyPr wrap="square" lIns="0" rIns="0" tIns="0" bIns="0">
+          <a:bodyPr wrap="square" lIns="0" tIns="0" rIns="0" bIns="0">
             <a:spAutoFit/>
           </a:bodyPr>
           <a:lstStyle/>
@@ -11101,15 +10498,6 @@
                 <a:spcPts val="0"/>
               </a:spcBef>
             </a:pPr>
-            <a:r>
-              <a:rPr sz="1000" b="0">
-                <a:solidFill>
-                  <a:srgbClr val="9AA7B4"/>
-                </a:solidFill>
-                <a:latin typeface="Microsoft YaHei"/>
-              </a:rPr>
-              <a:t/>
-            </a:r>
             <a:r>
               <a:rPr sz="1000" b="0">
                 <a:solidFill>
@@ -11163,7 +10551,7 @@
           </a:fontRef>
         </p:style>
         <p:txBody>
-          <a:bodyPr rtlCol="0" anchor="ctr" wrap="square" lIns="182880" tIns="109728"/>
+          <a:bodyPr wrap="square" lIns="182880" tIns="109728" rtlCol="0" anchor="ctr"/>
           <a:lstStyle/>
           <a:p>
             <a:pPr algn="l">
@@ -11232,7 +10620,7 @@
           <a:noFill/>
         </p:spPr>
         <p:txBody>
-          <a:bodyPr wrap="square" lIns="0" rIns="0" tIns="0" bIns="0">
+          <a:bodyPr wrap="square" lIns="0" tIns="0" rIns="0" bIns="0">
             <a:spAutoFit/>
           </a:bodyPr>
           <a:lstStyle/>
@@ -11249,15 +10637,6 @@
                 </a:solidFill>
                 <a:latin typeface="Microsoft YaHei"/>
               </a:rPr>
-              <a:t/>
-            </a:r>
-            <a:r>
-              <a:rPr sz="1000" b="0">
-                <a:solidFill>
-                  <a:srgbClr val="9AA7B4"/>
-                </a:solidFill>
-                <a:latin typeface="Microsoft YaHei"/>
-              </a:rPr>
               <a:t>AgentForge · 多角色 AI 研发引擎 · 赛道 B</a:t>
             </a:r>
           </a:p>
@@ -11280,7 +10659,7 @@
           <a:noFill/>
         </p:spPr>
         <p:txBody>
-          <a:bodyPr wrap="square" lIns="0" rIns="0" tIns="0" bIns="0">
+          <a:bodyPr wrap="square" lIns="0" tIns="0" rIns="0" bIns="0">
             <a:spAutoFit/>
           </a:bodyPr>
           <a:lstStyle/>
@@ -11290,15 +10669,6 @@
                 <a:spcPts val="0"/>
               </a:spcBef>
             </a:pPr>
-            <a:r>
-              <a:rPr sz="1000" b="0">
-                <a:solidFill>
-                  <a:srgbClr val="9AA7B4"/>
-                </a:solidFill>
-                <a:latin typeface="Microsoft YaHei"/>
-              </a:rPr>
-              <a:t/>
-            </a:r>
             <a:r>
               <a:rPr sz="1000" b="0">
                 <a:solidFill>
@@ -11320,7 +10690,7 @@
 </file>
 
 <file path=ppt/slides/slide9.xml><?xml version="1.0" encoding="utf-8"?>
-<p:sld xmlns:a="http://schemas.openxmlformats.org/drawingml/2006/main" xmlns:p="http://schemas.openxmlformats.org/presentationml/2006/main" xmlns:r="http://schemas.openxmlformats.org/officeDocument/2006/relationships">
+<p:sld xmlns:a="http://schemas.openxmlformats.org/drawingml/2006/main" xmlns:r="http://schemas.openxmlformats.org/officeDocument/2006/relationships" xmlns:p="http://schemas.openxmlformats.org/presentationml/2006/main">
   <p:cSld>
     <p:spTree>
       <p:nvGrpSpPr>
@@ -11328,7 +10698,14 @@
         <p:cNvGrpSpPr/>
         <p:nvPr/>
       </p:nvGrpSpPr>
-      <p:grpSpPr/>
+      <p:grpSpPr>
+        <a:xfrm>
+          <a:off x="0" y="0"/>
+          <a:ext cx="0" cy="0"/>
+          <a:chOff x="0" y="0"/>
+          <a:chExt cx="0" cy="0"/>
+        </a:xfrm>
+      </p:grpSpPr>
       <p:sp>
         <p:nvSpPr>
           <p:cNvPr id="2" name="Rectangle 1"/>
@@ -11370,6 +10747,7 @@
           <a:lstStyle/>
           <a:p>
             <a:pPr algn="ctr"/>
+            <a:endParaRPr/>
           </a:p>
         </p:txBody>
       </p:sp>
@@ -11390,7 +10768,7 @@
           <a:noFill/>
         </p:spPr>
         <p:txBody>
-          <a:bodyPr wrap="square" lIns="0" rIns="0" tIns="0" bIns="0">
+          <a:bodyPr wrap="square" lIns="0" tIns="0" rIns="0" bIns="0">
             <a:spAutoFit/>
           </a:bodyPr>
           <a:lstStyle/>
@@ -11407,15 +10785,6 @@
                 </a:solidFill>
                 <a:latin typeface="Microsoft YaHei"/>
               </a:rPr>
-              <a:t/>
-            </a:r>
-            <a:r>
-              <a:rPr sz="1300" b="1">
-                <a:solidFill>
-                  <a:srgbClr val="35C48F"/>
-                </a:solidFill>
-                <a:latin typeface="Microsoft YaHei"/>
-              </a:rPr>
               <a:t>结论</a:t>
             </a:r>
           </a:p>
@@ -11438,7 +10807,7 @@
           <a:noFill/>
         </p:spPr>
         <p:txBody>
-          <a:bodyPr wrap="square" lIns="0" rIns="0" tIns="0" bIns="0">
+          <a:bodyPr wrap="square" lIns="0" tIns="0" rIns="0" bIns="0">
             <a:spAutoFit/>
           </a:bodyPr>
           <a:lstStyle/>
@@ -11448,15 +10817,6 @@
                 <a:spcPts val="0"/>
               </a:spcBef>
             </a:pPr>
-            <a:r>
-              <a:rPr sz="3000" b="1">
-                <a:solidFill>
-                  <a:srgbClr val="EAF0F6"/>
-                </a:solidFill>
-                <a:latin typeface="Microsoft YaHei"/>
-              </a:rPr>
-              <a:t/>
-            </a:r>
             <a:r>
               <a:rPr sz="3000" b="1">
                 <a:solidFill>
@@ -11545,7 +10905,7 @@
           </a:fontRef>
         </p:style>
         <p:txBody>
-          <a:bodyPr rtlCol="0" anchor="t" wrap="square" lIns="182880" tIns="137160"/>
+          <a:bodyPr wrap="square" lIns="182880" tIns="137160" rtlCol="0" anchor="t"/>
           <a:lstStyle/>
           <a:p>
             <a:pPr algn="l">
@@ -11702,7 +11062,7 @@
           </a:fontRef>
         </p:style>
         <p:txBody>
-          <a:bodyPr rtlCol="0" anchor="t" wrap="square" lIns="182880" tIns="137160"/>
+          <a:bodyPr wrap="square" lIns="182880" tIns="137160" rtlCol="0" anchor="t"/>
           <a:lstStyle/>
           <a:p>
             <a:pPr algn="l">
@@ -11711,13 +11071,22 @@
               </a:spcBef>
             </a:pPr>
             <a:r>
-              <a:rPr sz="1600" b="1">
+              <a:rPr sz="1600" b="1" dirty="0" err="1">
                 <a:solidFill>
                   <a:srgbClr val="F2B544"/>
                 </a:solidFill>
                 <a:latin typeface="Microsoft YaHei"/>
               </a:rPr>
-              <a:t>还没做到（诚实）</a:t>
+              <a:t>还没做到（诚实</a:t>
+            </a:r>
+            <a:r>
+              <a:rPr sz="1600" b="1" dirty="0">
+                <a:solidFill>
+                  <a:srgbClr val="F2B544"/>
+                </a:solidFill>
+                <a:latin typeface="Microsoft YaHei"/>
+              </a:rPr>
+              <a:t>）</a:t>
             </a:r>
           </a:p>
           <a:p>
@@ -11727,7 +11096,7 @@
               </a:spcBef>
             </a:pPr>
             <a:r>
-              <a:rPr sz="1300" b="0">
+              <a:rPr sz="1300" b="0" dirty="0" err="1">
                 <a:solidFill>
                   <a:srgbClr val="EAF0F6"/>
                 </a:solidFill>
@@ -11735,6 +11104,12 @@
               </a:rPr>
               <a:t>成功率还不稳定</a:t>
             </a:r>
+            <a:endParaRPr sz="1300" b="0" dirty="0">
+              <a:solidFill>
+                <a:srgbClr val="EAF0F6"/>
+              </a:solidFill>
+              <a:latin typeface="Microsoft YaHei"/>
+            </a:endParaRPr>
           </a:p>
           <a:p>
             <a:pPr algn="l">
@@ -11743,78 +11118,64 @@
               </a:spcBef>
             </a:pPr>
             <a:r>
+              <a:rPr sz="1100" b="0" dirty="0" err="1">
+                <a:solidFill>
+                  <a:srgbClr val="9AA7B4"/>
+                </a:solidFill>
+                <a:latin typeface="Microsoft YaHei"/>
+              </a:rPr>
+              <a:t>四个平行任务里两个交付、一个仍在返工、一个卡在契约一致性</a:t>
+            </a:r>
+            <a:endParaRPr sz="1100" b="0" dirty="0">
+              <a:solidFill>
+                <a:srgbClr val="9AA7B4"/>
+              </a:solidFill>
+              <a:latin typeface="Microsoft YaHei"/>
+            </a:endParaRPr>
+          </a:p>
+          <a:p>
+            <a:pPr algn="l">
+              <a:spcBef>
+                <a:spcPts val="1000"/>
+              </a:spcBef>
+            </a:pPr>
+            <a:r>
+              <a:rPr sz="1300" b="0" dirty="0" err="1">
+                <a:solidFill>
+                  <a:srgbClr val="EAF0F6"/>
+                </a:solidFill>
+                <a:latin typeface="Microsoft YaHei"/>
+              </a:rPr>
+              <a:t>四轮并行只成一，方差还大</a:t>
+            </a:r>
+            <a:endParaRPr sz="1300" b="0" dirty="0">
+              <a:solidFill>
+                <a:srgbClr val="EAF0F6"/>
+              </a:solidFill>
+              <a:latin typeface="Microsoft YaHei"/>
+            </a:endParaRPr>
+          </a:p>
+          <a:p>
+            <a:pPr algn="l">
+              <a:spcBef>
+                <a:spcPts val="200"/>
+              </a:spcBef>
+            </a:pPr>
+            <a:r>
               <a:rPr sz="1100" b="0">
                 <a:solidFill>
                   <a:srgbClr val="9AA7B4"/>
                 </a:solidFill>
                 <a:latin typeface="Microsoft YaHei"/>
               </a:rPr>
-              <a:t>四个平行任务里两个交付、一个仍在返工、一个卡在契约一致性</a:t>
-            </a:r>
-          </a:p>
-          <a:p>
-            <a:pPr algn="l">
-              <a:spcBef>
-                <a:spcPts val="1000"/>
-              </a:spcBef>
-            </a:pPr>
-            <a:r>
-              <a:rPr sz="1300" b="0">
-                <a:solidFill>
-                  <a:srgbClr val="EAF0F6"/>
-                </a:solidFill>
-                <a:latin typeface="Microsoft YaHei"/>
-              </a:rPr>
-              <a:t>四轮并行只成一，方差还大</a:t>
-            </a:r>
-          </a:p>
-          <a:p>
-            <a:pPr algn="l">
-              <a:spcBef>
-                <a:spcPts val="200"/>
-              </a:spcBef>
-            </a:pPr>
-            <a:r>
-              <a:rPr sz="1100" b="0">
-                <a:solidFill>
-                  <a:srgbClr val="9AA7B4"/>
-                </a:solidFill>
-                <a:latin typeface="Microsoft YaHei"/>
-              </a:rPr>
               <a:t>卡点集中在契约生成质量</a:t>
             </a:r>
-          </a:p>
-          <a:p>
-            <a:pPr algn="l">
-              <a:spcBef>
-                <a:spcPts val="1000"/>
-              </a:spcBef>
-            </a:pPr>
-            <a:r>
-              <a:rPr sz="1300" b="0">
-                <a:solidFill>
-                  <a:srgbClr val="EAF0F6"/>
-                </a:solidFill>
-                <a:latin typeface="Microsoft YaHei"/>
-              </a:rPr>
-              <a:t>B1 / B3 在成功那轮是 SKIPPED</a:t>
-            </a:r>
-          </a:p>
-          <a:p>
-            <a:pPr algn="l">
-              <a:spcBef>
-                <a:spcPts val="200"/>
-              </a:spcBef>
-            </a:pPr>
-            <a:r>
-              <a:rPr sz="1100" b="0">
-                <a:solidFill>
-                  <a:srgbClr val="9AA7B4"/>
-                </a:solidFill>
-                <a:latin typeface="Microsoft YaHei"/>
-              </a:rPr>
-              <a:t>SKIPPED ≠ PASS，所以我们不算它通过</a:t>
-            </a:r>
+            <a:endParaRPr sz="1100" b="0" dirty="0">
+              <a:solidFill>
+                <a:srgbClr val="9AA7B4"/>
+              </a:solidFill>
+              <a:latin typeface="Microsoft YaHei"/>
+            </a:endParaRPr>
           </a:p>
         </p:txBody>
       </p:sp>
@@ -11859,7 +11220,7 @@
           </a:fontRef>
         </p:style>
         <p:txBody>
-          <a:bodyPr rtlCol="0" anchor="ctr" wrap="square" lIns="182880"/>
+          <a:bodyPr wrap="square" lIns="182880" rtlCol="0" anchor="ctr"/>
           <a:lstStyle/>
           <a:p>
             <a:pPr algn="l">
@@ -11896,7 +11257,7 @@
           <a:noFill/>
         </p:spPr>
         <p:txBody>
-          <a:bodyPr wrap="square" lIns="0" rIns="0" tIns="0" bIns="0">
+          <a:bodyPr wrap="square" lIns="0" tIns="0" rIns="0" bIns="0">
             <a:spAutoFit/>
           </a:bodyPr>
           <a:lstStyle/>
@@ -11913,15 +11274,6 @@
                 </a:solidFill>
                 <a:latin typeface="Microsoft YaHei"/>
               </a:rPr>
-              <a:t/>
-            </a:r>
-            <a:r>
-              <a:rPr sz="1000" b="0">
-                <a:solidFill>
-                  <a:srgbClr val="9AA7B4"/>
-                </a:solidFill>
-                <a:latin typeface="Microsoft YaHei"/>
-              </a:rPr>
               <a:t>AgentForge · 多角色 AI 研发引擎 · 赛道 B</a:t>
             </a:r>
           </a:p>
@@ -11944,7 +11296,7 @@
           <a:noFill/>
         </p:spPr>
         <p:txBody>
-          <a:bodyPr wrap="square" lIns="0" rIns="0" tIns="0" bIns="0">
+          <a:bodyPr wrap="square" lIns="0" tIns="0" rIns="0" bIns="0">
             <a:spAutoFit/>
           </a:bodyPr>
           <a:lstStyle/>
@@ -11954,15 +11306,6 @@
                 <a:spcPts val="0"/>
               </a:spcBef>
             </a:pPr>
-            <a:r>
-              <a:rPr sz="1000" b="0">
-                <a:solidFill>
-                  <a:srgbClr val="9AA7B4"/>
-                </a:solidFill>
-                <a:latin typeface="Microsoft YaHei"/>
-              </a:rPr>
-              <a:t/>
-            </a:r>
             <a:r>
               <a:rPr sz="1000" b="0">
                 <a:solidFill>
